--- a/docs/Atelier_Pratique_Pipeline_STM32Cube.pptx
+++ b/docs/Atelier_Pratique_Pipeline_STM32Cube.pptx
@@ -5,37 +5,39 @@
     <p:sldMasterId id="2147483648" r:id="rId1"/>
   </p:sldMasterIdLst>
   <p:sldIdLst>
-    <p:sldId id="256" r:id="rId7"/>
-    <p:sldId id="257" r:id="rId8"/>
-    <p:sldId id="258" r:id="rId9"/>
-    <p:sldId id="259" r:id="rId10"/>
-    <p:sldId id="260" r:id="rId11"/>
-    <p:sldId id="261" r:id="rId12"/>
-    <p:sldId id="262" r:id="rId13"/>
-    <p:sldId id="263" r:id="rId14"/>
-    <p:sldId id="264" r:id="rId15"/>
-    <p:sldId id="265" r:id="rId16"/>
-    <p:sldId id="266" r:id="rId17"/>
-    <p:sldId id="267" r:id="rId18"/>
-    <p:sldId id="268" r:id="rId19"/>
-    <p:sldId id="269" r:id="rId20"/>
-    <p:sldId id="270" r:id="rId21"/>
-    <p:sldId id="271" r:id="rId22"/>
-    <p:sldId id="272" r:id="rId23"/>
-    <p:sldId id="273" r:id="rId24"/>
-    <p:sldId id="274" r:id="rId25"/>
-    <p:sldId id="275" r:id="rId26"/>
-    <p:sldId id="276" r:id="rId27"/>
-    <p:sldId id="277" r:id="rId28"/>
-    <p:sldId id="278" r:id="rId29"/>
-    <p:sldId id="279" r:id="rId30"/>
-    <p:sldId id="280" r:id="rId31"/>
-    <p:sldId id="281" r:id="rId32"/>
-    <p:sldId id="282" r:id="rId33"/>
-    <p:sldId id="283" r:id="rId34"/>
-    <p:sldId id="284" r:id="rId35"/>
-    <p:sldId id="285" r:id="rId36"/>
-    <p:sldId id="286" r:id="rId37"/>
+    <p:sldId id="256" r:id="rId2"/>
+    <p:sldId id="257" r:id="rId3"/>
+    <p:sldId id="258" r:id="rId4"/>
+    <p:sldId id="259" r:id="rId5"/>
+    <p:sldId id="260" r:id="rId6"/>
+    <p:sldId id="261" r:id="rId7"/>
+    <p:sldId id="262" r:id="rId8"/>
+    <p:sldId id="263" r:id="rId9"/>
+    <p:sldId id="264" r:id="rId10"/>
+    <p:sldId id="265" r:id="rId11"/>
+    <p:sldId id="266" r:id="rId12"/>
+    <p:sldId id="267" r:id="rId13"/>
+    <p:sldId id="268" r:id="rId14"/>
+    <p:sldId id="269" r:id="rId15"/>
+    <p:sldId id="270" r:id="rId16"/>
+    <p:sldId id="271" r:id="rId17"/>
+    <p:sldId id="272" r:id="rId18"/>
+    <p:sldId id="273" r:id="rId19"/>
+    <p:sldId id="274" r:id="rId20"/>
+    <p:sldId id="275" r:id="rId21"/>
+    <p:sldId id="276" r:id="rId22"/>
+    <p:sldId id="277" r:id="rId23"/>
+    <p:sldId id="278" r:id="rId24"/>
+    <p:sldId id="279" r:id="rId25"/>
+    <p:sldId id="280" r:id="rId26"/>
+    <p:sldId id="281" r:id="rId27"/>
+    <p:sldId id="282" r:id="rId28"/>
+    <p:sldId id="283" r:id="rId29"/>
+    <p:sldId id="284" r:id="rId30"/>
+    <p:sldId id="285" r:id="rId31"/>
+    <p:sldId id="286" r:id="rId32"/>
+    <p:sldId id="287" r:id="rId33"/>
+    <p:sldId id="288" r:id="rId34"/>
   </p:sldIdLst>
   <p:sldSz cx="9144000" cy="6858000" type="screen4x3"/>
   <p:notesSz cx="6858000" cy="9144000"/>
@@ -134,7 +136,258 @@
       </a:defRPr>
     </a:lvl9pPr>
   </p:defaultTextStyle>
+  <p:extLst>
+    <p:ext uri="{EFAFB233-063F-42B5-8137-9DF3F51BA10A}">
+      <p15:sldGuideLst xmlns:p15="http://schemas.microsoft.com/office/powerpoint/2012/main">
+        <p15:guide id="1" orient="horz" pos="2160">
+          <p15:clr>
+            <a:srgbClr val="A4A3A4"/>
+          </p15:clr>
+        </p15:guide>
+        <p15:guide id="2" pos="2880">
+          <p15:clr>
+            <a:srgbClr val="A4A3A4"/>
+          </p15:clr>
+        </p15:guide>
+      </p15:sldGuideLst>
+    </p:ext>
+  </p:extLst>
 </p:presentation>
+</file>
+
+<file path=ppt/revisionInfo.xml><?xml version="1.0" encoding="utf-8"?>
+<p1510:revInfo xmlns:a="http://schemas.openxmlformats.org/drawingml/2006/main" xmlns:r="http://schemas.openxmlformats.org/officeDocument/2006/relationships" xmlns:p1510="http://schemas.microsoft.com/office/powerpoint/2015/10/main">
+  <p1510:revLst>
+    <p1510:client id="{AC1A9B47-969F-4FB4-9DC4-5D1C1621205B}" v="4" dt="2026-06-25T16:04:04.931"/>
+  </p1510:revLst>
+</p1510:revInfo>
+</file>
+
+<file path=ppt/changesInfos/changesInfo1.xml><?xml version="1.0" encoding="utf-8"?>
+<pc:chgInfo xmlns:a="http://schemas.openxmlformats.org/drawingml/2006/main" xmlns:r="http://schemas.openxmlformats.org/officeDocument/2006/relationships" xmlns:ac="http://schemas.microsoft.com/office/drawing/2013/main/command" xmlns:pc="http://schemas.microsoft.com/office/powerpoint/2013/main/command">
+  <pc:docChgLst>
+    <pc:chgData name="Abir GHARBI" userId="ef92528f-00ab-4d87-966c-386bca485bd0" providerId="ADAL" clId="{F3D16DED-CAA7-4BF5-81E4-89DEDE7057F7}"/>
+    <pc:docChg chg="undo custSel modSld">
+      <pc:chgData name="Abir GHARBI" userId="ef92528f-00ab-4d87-966c-386bca485bd0" providerId="ADAL" clId="{F3D16DED-CAA7-4BF5-81E4-89DEDE7057F7}" dt="2026-06-25T16:05:30.912" v="70" actId="404"/>
+      <pc:docMkLst>
+        <pc:docMk/>
+      </pc:docMkLst>
+      <pc:sldChg chg="addSp modSp mod">
+        <pc:chgData name="Abir GHARBI" userId="ef92528f-00ab-4d87-966c-386bca485bd0" providerId="ADAL" clId="{F3D16DED-CAA7-4BF5-81E4-89DEDE7057F7}" dt="2026-06-25T15:38:29.972" v="22" actId="1076"/>
+        <pc:sldMkLst>
+          <pc:docMk/>
+          <pc:sldMk cId="0" sldId="263"/>
+        </pc:sldMkLst>
+        <pc:spChg chg="mod">
+          <ac:chgData name="Abir GHARBI" userId="ef92528f-00ab-4d87-966c-386bca485bd0" providerId="ADAL" clId="{F3D16DED-CAA7-4BF5-81E4-89DEDE7057F7}" dt="2026-06-25T15:38:17.006" v="19" actId="14100"/>
+          <ac:spMkLst>
+            <pc:docMk/>
+            <pc:sldMk cId="0" sldId="263"/>
+            <ac:spMk id="3" creationId="{00000000-0000-0000-0000-000000000000}"/>
+          </ac:spMkLst>
+        </pc:spChg>
+        <pc:spChg chg="add mod">
+          <ac:chgData name="Abir GHARBI" userId="ef92528f-00ab-4d87-966c-386bca485bd0" providerId="ADAL" clId="{F3D16DED-CAA7-4BF5-81E4-89DEDE7057F7}" dt="2026-06-25T15:38:29.972" v="22" actId="1076"/>
+          <ac:spMkLst>
+            <pc:docMk/>
+            <pc:sldMk cId="0" sldId="263"/>
+            <ac:spMk id="5" creationId="{9027F449-B326-96F9-96AD-56DCA0DCBD41}"/>
+          </ac:spMkLst>
+        </pc:spChg>
+      </pc:sldChg>
+      <pc:sldChg chg="modSp mod">
+        <pc:chgData name="Abir GHARBI" userId="ef92528f-00ab-4d87-966c-386bca485bd0" providerId="ADAL" clId="{F3D16DED-CAA7-4BF5-81E4-89DEDE7057F7}" dt="2026-06-25T15:38:44.544" v="24" actId="20577"/>
+        <pc:sldMkLst>
+          <pc:docMk/>
+          <pc:sldMk cId="0" sldId="264"/>
+        </pc:sldMkLst>
+        <pc:spChg chg="mod">
+          <ac:chgData name="Abir GHARBI" userId="ef92528f-00ab-4d87-966c-386bca485bd0" providerId="ADAL" clId="{F3D16DED-CAA7-4BF5-81E4-89DEDE7057F7}" dt="2026-06-25T15:38:44.544" v="24" actId="20577"/>
+          <ac:spMkLst>
+            <pc:docMk/>
+            <pc:sldMk cId="0" sldId="264"/>
+            <ac:spMk id="3" creationId="{00000000-0000-0000-0000-000000000000}"/>
+          </ac:spMkLst>
+        </pc:spChg>
+      </pc:sldChg>
+      <pc:sldChg chg="modSp mod">
+        <pc:chgData name="Abir GHARBI" userId="ef92528f-00ab-4d87-966c-386bca485bd0" providerId="ADAL" clId="{F3D16DED-CAA7-4BF5-81E4-89DEDE7057F7}" dt="2026-06-25T15:39:25.889" v="28" actId="1076"/>
+        <pc:sldMkLst>
+          <pc:docMk/>
+          <pc:sldMk cId="0" sldId="265"/>
+        </pc:sldMkLst>
+        <pc:spChg chg="mod">
+          <ac:chgData name="Abir GHARBI" userId="ef92528f-00ab-4d87-966c-386bca485bd0" providerId="ADAL" clId="{F3D16DED-CAA7-4BF5-81E4-89DEDE7057F7}" dt="2026-06-25T15:39:20.887" v="27" actId="14100"/>
+          <ac:spMkLst>
+            <pc:docMk/>
+            <pc:sldMk cId="0" sldId="265"/>
+            <ac:spMk id="2" creationId="{00000000-0000-0000-0000-000000000000}"/>
+          </ac:spMkLst>
+        </pc:spChg>
+        <pc:spChg chg="mod">
+          <ac:chgData name="Abir GHARBI" userId="ef92528f-00ab-4d87-966c-386bca485bd0" providerId="ADAL" clId="{F3D16DED-CAA7-4BF5-81E4-89DEDE7057F7}" dt="2026-06-25T15:39:25.889" v="28" actId="1076"/>
+          <ac:spMkLst>
+            <pc:docMk/>
+            <pc:sldMk cId="0" sldId="265"/>
+            <ac:spMk id="3" creationId="{00000000-0000-0000-0000-000000000000}"/>
+          </ac:spMkLst>
+        </pc:spChg>
+      </pc:sldChg>
+      <pc:sldChg chg="modSp mod">
+        <pc:chgData name="Abir GHARBI" userId="ef92528f-00ab-4d87-966c-386bca485bd0" providerId="ADAL" clId="{F3D16DED-CAA7-4BF5-81E4-89DEDE7057F7}" dt="2026-06-25T15:59:34.123" v="30" actId="20577"/>
+        <pc:sldMkLst>
+          <pc:docMk/>
+          <pc:sldMk cId="0" sldId="269"/>
+        </pc:sldMkLst>
+        <pc:spChg chg="mod">
+          <ac:chgData name="Abir GHARBI" userId="ef92528f-00ab-4d87-966c-386bca485bd0" providerId="ADAL" clId="{F3D16DED-CAA7-4BF5-81E4-89DEDE7057F7}" dt="2026-06-25T15:59:34.123" v="30" actId="20577"/>
+          <ac:spMkLst>
+            <pc:docMk/>
+            <pc:sldMk cId="0" sldId="269"/>
+            <ac:spMk id="2" creationId="{00000000-0000-0000-0000-000000000000}"/>
+          </ac:spMkLst>
+        </pc:spChg>
+        <pc:spChg chg="mod">
+          <ac:chgData name="Abir GHARBI" userId="ef92528f-00ab-4d87-966c-386bca485bd0" providerId="ADAL" clId="{F3D16DED-CAA7-4BF5-81E4-89DEDE7057F7}" dt="2026-06-25T15:59:26.880" v="29" actId="1076"/>
+          <ac:spMkLst>
+            <pc:docMk/>
+            <pc:sldMk cId="0" sldId="269"/>
+            <ac:spMk id="3" creationId="{00000000-0000-0000-0000-000000000000}"/>
+          </ac:spMkLst>
+        </pc:spChg>
+      </pc:sldChg>
+      <pc:sldChg chg="modSp mod">
+        <pc:chgData name="Abir GHARBI" userId="ef92528f-00ab-4d87-966c-386bca485bd0" providerId="ADAL" clId="{F3D16DED-CAA7-4BF5-81E4-89DEDE7057F7}" dt="2026-06-25T15:59:43.568" v="31" actId="1076"/>
+        <pc:sldMkLst>
+          <pc:docMk/>
+          <pc:sldMk cId="0" sldId="270"/>
+        </pc:sldMkLst>
+        <pc:spChg chg="mod">
+          <ac:chgData name="Abir GHARBI" userId="ef92528f-00ab-4d87-966c-386bca485bd0" providerId="ADAL" clId="{F3D16DED-CAA7-4BF5-81E4-89DEDE7057F7}" dt="2026-06-25T15:59:43.568" v="31" actId="1076"/>
+          <ac:spMkLst>
+            <pc:docMk/>
+            <pc:sldMk cId="0" sldId="270"/>
+            <ac:spMk id="3" creationId="{00000000-0000-0000-0000-000000000000}"/>
+          </ac:spMkLst>
+        </pc:spChg>
+      </pc:sldChg>
+      <pc:sldChg chg="modSp mod">
+        <pc:chgData name="Abir GHARBI" userId="ef92528f-00ab-4d87-966c-386bca485bd0" providerId="ADAL" clId="{F3D16DED-CAA7-4BF5-81E4-89DEDE7057F7}" dt="2026-06-25T15:59:50.266" v="32" actId="1076"/>
+        <pc:sldMkLst>
+          <pc:docMk/>
+          <pc:sldMk cId="0" sldId="271"/>
+        </pc:sldMkLst>
+        <pc:spChg chg="mod">
+          <ac:chgData name="Abir GHARBI" userId="ef92528f-00ab-4d87-966c-386bca485bd0" providerId="ADAL" clId="{F3D16DED-CAA7-4BF5-81E4-89DEDE7057F7}" dt="2026-06-25T15:59:50.266" v="32" actId="1076"/>
+          <ac:spMkLst>
+            <pc:docMk/>
+            <pc:sldMk cId="0" sldId="271"/>
+            <ac:spMk id="3" creationId="{00000000-0000-0000-0000-000000000000}"/>
+          </ac:spMkLst>
+        </pc:spChg>
+      </pc:sldChg>
+      <pc:sldChg chg="modSp mod">
+        <pc:chgData name="Abir GHARBI" userId="ef92528f-00ab-4d87-966c-386bca485bd0" providerId="ADAL" clId="{F3D16DED-CAA7-4BF5-81E4-89DEDE7057F7}" dt="2026-06-25T16:00:42.670" v="39" actId="20577"/>
+        <pc:sldMkLst>
+          <pc:docMk/>
+          <pc:sldMk cId="0" sldId="274"/>
+        </pc:sldMkLst>
+        <pc:spChg chg="mod">
+          <ac:chgData name="Abir GHARBI" userId="ef92528f-00ab-4d87-966c-386bca485bd0" providerId="ADAL" clId="{F3D16DED-CAA7-4BF5-81E4-89DEDE7057F7}" dt="2026-06-25T16:00:20.650" v="33" actId="20577"/>
+          <ac:spMkLst>
+            <pc:docMk/>
+            <pc:sldMk cId="0" sldId="274"/>
+            <ac:spMk id="2" creationId="{00000000-0000-0000-0000-000000000000}"/>
+          </ac:spMkLst>
+        </pc:spChg>
+        <pc:spChg chg="mod">
+          <ac:chgData name="Abir GHARBI" userId="ef92528f-00ab-4d87-966c-386bca485bd0" providerId="ADAL" clId="{F3D16DED-CAA7-4BF5-81E4-89DEDE7057F7}" dt="2026-06-25T16:00:42.670" v="39" actId="20577"/>
+          <ac:spMkLst>
+            <pc:docMk/>
+            <pc:sldMk cId="0" sldId="274"/>
+            <ac:spMk id="3" creationId="{00000000-0000-0000-0000-000000000000}"/>
+          </ac:spMkLst>
+        </pc:spChg>
+      </pc:sldChg>
+      <pc:sldChg chg="modSp mod">
+        <pc:chgData name="Abir GHARBI" userId="ef92528f-00ab-4d87-966c-386bca485bd0" providerId="ADAL" clId="{F3D16DED-CAA7-4BF5-81E4-89DEDE7057F7}" dt="2026-06-25T16:03:15.273" v="59" actId="2710"/>
+        <pc:sldMkLst>
+          <pc:docMk/>
+          <pc:sldMk cId="0" sldId="279"/>
+        </pc:sldMkLst>
+        <pc:spChg chg="mod">
+          <ac:chgData name="Abir GHARBI" userId="ef92528f-00ab-4d87-966c-386bca485bd0" providerId="ADAL" clId="{F3D16DED-CAA7-4BF5-81E4-89DEDE7057F7}" dt="2026-06-25T16:03:15.273" v="59" actId="2710"/>
+          <ac:spMkLst>
+            <pc:docMk/>
+            <pc:sldMk cId="0" sldId="279"/>
+            <ac:spMk id="3" creationId="{00000000-0000-0000-0000-000000000000}"/>
+          </ac:spMkLst>
+        </pc:spChg>
+      </pc:sldChg>
+      <pc:sldChg chg="modSp mod">
+        <pc:chgData name="Abir GHARBI" userId="ef92528f-00ab-4d87-966c-386bca485bd0" providerId="ADAL" clId="{F3D16DED-CAA7-4BF5-81E4-89DEDE7057F7}" dt="2026-06-25T16:04:04.931" v="63"/>
+        <pc:sldMkLst>
+          <pc:docMk/>
+          <pc:sldMk cId="0" sldId="280"/>
+        </pc:sldMkLst>
+        <pc:spChg chg="mod">
+          <ac:chgData name="Abir GHARBI" userId="ef92528f-00ab-4d87-966c-386bca485bd0" providerId="ADAL" clId="{F3D16DED-CAA7-4BF5-81E4-89DEDE7057F7}" dt="2026-06-25T16:04:04.931" v="63"/>
+          <ac:spMkLst>
+            <pc:docMk/>
+            <pc:sldMk cId="0" sldId="280"/>
+            <ac:spMk id="3" creationId="{00000000-0000-0000-0000-000000000000}"/>
+          </ac:spMkLst>
+        </pc:spChg>
+      </pc:sldChg>
+      <pc:sldChg chg="modSp mod">
+        <pc:chgData name="Abir GHARBI" userId="ef92528f-00ab-4d87-966c-386bca485bd0" providerId="ADAL" clId="{F3D16DED-CAA7-4BF5-81E4-89DEDE7057F7}" dt="2026-06-25T16:05:14.708" v="67" actId="404"/>
+        <pc:sldMkLst>
+          <pc:docMk/>
+          <pc:sldMk cId="0" sldId="287"/>
+        </pc:sldMkLst>
+        <pc:spChg chg="mod">
+          <ac:chgData name="Abir GHARBI" userId="ef92528f-00ab-4d87-966c-386bca485bd0" providerId="ADAL" clId="{F3D16DED-CAA7-4BF5-81E4-89DEDE7057F7}" dt="2026-06-25T16:02:17.941" v="47" actId="27636"/>
+          <ac:spMkLst>
+            <pc:docMk/>
+            <pc:sldMk cId="0" sldId="287"/>
+            <ac:spMk id="2" creationId="{00000000-0000-0000-0000-000000000000}"/>
+          </ac:spMkLst>
+        </pc:spChg>
+        <pc:spChg chg="mod">
+          <ac:chgData name="Abir GHARBI" userId="ef92528f-00ab-4d87-966c-386bca485bd0" providerId="ADAL" clId="{F3D16DED-CAA7-4BF5-81E4-89DEDE7057F7}" dt="2026-06-25T16:05:14.708" v="67" actId="404"/>
+          <ac:spMkLst>
+            <pc:docMk/>
+            <pc:sldMk cId="0" sldId="287"/>
+            <ac:spMk id="3" creationId="{00000000-0000-0000-0000-000000000000}"/>
+          </ac:spMkLst>
+        </pc:spChg>
+      </pc:sldChg>
+      <pc:sldChg chg="modSp mod">
+        <pc:chgData name="Abir GHARBI" userId="ef92528f-00ab-4d87-966c-386bca485bd0" providerId="ADAL" clId="{F3D16DED-CAA7-4BF5-81E4-89DEDE7057F7}" dt="2026-06-25T16:05:30.912" v="70" actId="404"/>
+        <pc:sldMkLst>
+          <pc:docMk/>
+          <pc:sldMk cId="0" sldId="288"/>
+        </pc:sldMkLst>
+        <pc:spChg chg="mod">
+          <ac:chgData name="Abir GHARBI" userId="ef92528f-00ab-4d87-966c-386bca485bd0" providerId="ADAL" clId="{F3D16DED-CAA7-4BF5-81E4-89DEDE7057F7}" dt="2026-06-25T16:02:34.455" v="51" actId="27636"/>
+          <ac:spMkLst>
+            <pc:docMk/>
+            <pc:sldMk cId="0" sldId="288"/>
+            <ac:spMk id="2" creationId="{00000000-0000-0000-0000-000000000000}"/>
+          </ac:spMkLst>
+        </pc:spChg>
+        <pc:spChg chg="mod">
+          <ac:chgData name="Abir GHARBI" userId="ef92528f-00ab-4d87-966c-386bca485bd0" providerId="ADAL" clId="{F3D16DED-CAA7-4BF5-81E4-89DEDE7057F7}" dt="2026-06-25T16:05:30.912" v="70" actId="404"/>
+          <ac:spMkLst>
+            <pc:docMk/>
+            <pc:sldMk cId="0" sldId="288"/>
+            <ac:spMk id="3" creationId="{00000000-0000-0000-0000-000000000000}"/>
+          </ac:spMkLst>
+        </pc:spChg>
+      </pc:sldChg>
+    </pc:docChg>
+  </pc:docChgLst>
+</pc:chgInfo>
 </file>
 
 <file path=ppt/slideLayouts/slideLayout1.xml><?xml version="1.0" encoding="utf-8"?>
@@ -175,10 +428,9 @@
           <a:lstStyle/>
           <a:p>
             <a:r>
-              <a:rPr lang="en-US" smtClean="0"/>
+              <a:rPr lang="en-US"/>
               <a:t>Click to edit Master title style</a:t>
             </a:r>
-            <a:endParaRPr lang="en-US"/>
           </a:p>
         </p:txBody>
       </p:sp>
@@ -294,10 +546,9 @@
           </a:lstStyle>
           <a:p>
             <a:r>
-              <a:rPr lang="en-US" smtClean="0"/>
+              <a:rPr lang="en-US"/>
               <a:t>Click to edit Master subtitle style</a:t>
             </a:r>
-            <a:endParaRPr lang="en-US"/>
           </a:p>
         </p:txBody>
       </p:sp>
@@ -318,7 +569,7 @@
           <a:p>
             <a:fld id="{5BCAD085-E8A6-8845-BD4E-CB4CCA059FC4}" type="datetimeFigureOut">
               <a:rPr lang="en-US" smtClean="0"/>
-              <a:t>1/27/13</a:t>
+              <a:t>6/25/2026</a:t>
             </a:fld>
             <a:endParaRPr lang="en-US"/>
           </a:p>
@@ -412,10 +663,9 @@
           <a:lstStyle/>
           <a:p>
             <a:r>
-              <a:rPr lang="en-US" smtClean="0"/>
+              <a:rPr lang="en-US"/>
               <a:t>Click to edit Master title style</a:t>
             </a:r>
-            <a:endParaRPr lang="en-US"/>
           </a:p>
         </p:txBody>
       </p:sp>
@@ -436,38 +686,37 @@
           <a:p>
             <a:pPr lvl="0"/>
             <a:r>
-              <a:rPr lang="en-US" smtClean="0"/>
+              <a:rPr lang="en-US"/>
               <a:t>Click to edit Master text styles</a:t>
             </a:r>
           </a:p>
           <a:p>
             <a:pPr lvl="1"/>
             <a:r>
-              <a:rPr lang="en-US" smtClean="0"/>
+              <a:rPr lang="en-US"/>
               <a:t>Second level</a:t>
             </a:r>
           </a:p>
           <a:p>
             <a:pPr lvl="2"/>
             <a:r>
-              <a:rPr lang="en-US" smtClean="0"/>
+              <a:rPr lang="en-US"/>
               <a:t>Third level</a:t>
             </a:r>
           </a:p>
           <a:p>
             <a:pPr lvl="3"/>
             <a:r>
-              <a:rPr lang="en-US" smtClean="0"/>
+              <a:rPr lang="en-US"/>
               <a:t>Fourth level</a:t>
             </a:r>
           </a:p>
           <a:p>
             <a:pPr lvl="4"/>
             <a:r>
-              <a:rPr lang="en-US" smtClean="0"/>
+              <a:rPr lang="en-US"/>
               <a:t>Fifth level</a:t>
             </a:r>
-            <a:endParaRPr lang="en-US"/>
           </a:p>
         </p:txBody>
       </p:sp>
@@ -488,7 +737,7 @@
           <a:p>
             <a:fld id="{5BCAD085-E8A6-8845-BD4E-CB4CCA059FC4}" type="datetimeFigureOut">
               <a:rPr lang="en-US" smtClean="0"/>
-              <a:t>1/27/13</a:t>
+              <a:t>6/25/2026</a:t>
             </a:fld>
             <a:endParaRPr lang="en-US"/>
           </a:p>
@@ -587,10 +836,9 @@
           <a:lstStyle/>
           <a:p>
             <a:r>
-              <a:rPr lang="en-US" smtClean="0"/>
+              <a:rPr lang="en-US"/>
               <a:t>Click to edit Master title style</a:t>
             </a:r>
-            <a:endParaRPr lang="en-US"/>
           </a:p>
         </p:txBody>
       </p:sp>
@@ -616,38 +864,37 @@
           <a:p>
             <a:pPr lvl="0"/>
             <a:r>
-              <a:rPr lang="en-US" smtClean="0"/>
+              <a:rPr lang="en-US"/>
               <a:t>Click to edit Master text styles</a:t>
             </a:r>
           </a:p>
           <a:p>
             <a:pPr lvl="1"/>
             <a:r>
-              <a:rPr lang="en-US" smtClean="0"/>
+              <a:rPr lang="en-US"/>
               <a:t>Second level</a:t>
             </a:r>
           </a:p>
           <a:p>
             <a:pPr lvl="2"/>
             <a:r>
-              <a:rPr lang="en-US" smtClean="0"/>
+              <a:rPr lang="en-US"/>
               <a:t>Third level</a:t>
             </a:r>
           </a:p>
           <a:p>
             <a:pPr lvl="3"/>
             <a:r>
-              <a:rPr lang="en-US" smtClean="0"/>
+              <a:rPr lang="en-US"/>
               <a:t>Fourth level</a:t>
             </a:r>
           </a:p>
           <a:p>
             <a:pPr lvl="4"/>
             <a:r>
-              <a:rPr lang="en-US" smtClean="0"/>
+              <a:rPr lang="en-US"/>
               <a:t>Fifth level</a:t>
             </a:r>
-            <a:endParaRPr lang="en-US"/>
           </a:p>
         </p:txBody>
       </p:sp>
@@ -668,7 +915,7 @@
           <a:p>
             <a:fld id="{5BCAD085-E8A6-8845-BD4E-CB4CCA059FC4}" type="datetimeFigureOut">
               <a:rPr lang="en-US" smtClean="0"/>
-              <a:t>1/27/13</a:t>
+              <a:t>6/25/2026</a:t>
             </a:fld>
             <a:endParaRPr lang="en-US"/>
           </a:p>
@@ -762,10 +1009,9 @@
           <a:lstStyle/>
           <a:p>
             <a:r>
-              <a:rPr lang="en-US" smtClean="0"/>
+              <a:rPr lang="en-US"/>
               <a:t>Click to edit Master title style</a:t>
             </a:r>
-            <a:endParaRPr lang="en-US"/>
           </a:p>
         </p:txBody>
       </p:sp>
@@ -786,38 +1032,37 @@
           <a:p>
             <a:pPr lvl="0"/>
             <a:r>
-              <a:rPr lang="en-US" smtClean="0"/>
+              <a:rPr lang="en-US"/>
               <a:t>Click to edit Master text styles</a:t>
             </a:r>
           </a:p>
           <a:p>
             <a:pPr lvl="1"/>
             <a:r>
-              <a:rPr lang="en-US" smtClean="0"/>
+              <a:rPr lang="en-US"/>
               <a:t>Second level</a:t>
             </a:r>
           </a:p>
           <a:p>
             <a:pPr lvl="2"/>
             <a:r>
-              <a:rPr lang="en-US" smtClean="0"/>
+              <a:rPr lang="en-US"/>
               <a:t>Third level</a:t>
             </a:r>
           </a:p>
           <a:p>
             <a:pPr lvl="3"/>
             <a:r>
-              <a:rPr lang="en-US" smtClean="0"/>
+              <a:rPr lang="en-US"/>
               <a:t>Fourth level</a:t>
             </a:r>
           </a:p>
           <a:p>
             <a:pPr lvl="4"/>
             <a:r>
-              <a:rPr lang="en-US" smtClean="0"/>
+              <a:rPr lang="en-US"/>
               <a:t>Fifth level</a:t>
             </a:r>
-            <a:endParaRPr lang="en-US"/>
           </a:p>
         </p:txBody>
       </p:sp>
@@ -838,7 +1083,7 @@
           <a:p>
             <a:fld id="{5BCAD085-E8A6-8845-BD4E-CB4CCA059FC4}" type="datetimeFigureOut">
               <a:rPr lang="en-US" smtClean="0"/>
-              <a:t>1/27/13</a:t>
+              <a:t>6/25/2026</a:t>
             </a:fld>
             <a:endParaRPr lang="en-US"/>
           </a:p>
@@ -941,10 +1186,9 @@
           </a:lstStyle>
           <a:p>
             <a:r>
-              <a:rPr lang="en-US" smtClean="0"/>
+              <a:rPr lang="en-US"/>
               <a:t>Click to edit Master title style</a:t>
             </a:r>
-            <a:endParaRPr lang="en-US"/>
           </a:p>
         </p:txBody>
       </p:sp>
@@ -1061,7 +1305,7 @@
           <a:p>
             <a:pPr lvl="0"/>
             <a:r>
-              <a:rPr lang="en-US" smtClean="0"/>
+              <a:rPr lang="en-US"/>
               <a:t>Click to edit Master text styles</a:t>
             </a:r>
           </a:p>
@@ -1084,7 +1328,7 @@
           <a:p>
             <a:fld id="{5BCAD085-E8A6-8845-BD4E-CB4CCA059FC4}" type="datetimeFigureOut">
               <a:rPr lang="en-US" smtClean="0"/>
-              <a:t>1/27/13</a:t>
+              <a:t>6/25/2026</a:t>
             </a:fld>
             <a:endParaRPr lang="en-US"/>
           </a:p>
@@ -1178,10 +1422,9 @@
           <a:lstStyle/>
           <a:p>
             <a:r>
-              <a:rPr lang="en-US" smtClean="0"/>
+              <a:rPr lang="en-US"/>
               <a:t>Click to edit Master title style</a:t>
             </a:r>
-            <a:endParaRPr lang="en-US"/>
           </a:p>
         </p:txBody>
       </p:sp>
@@ -1235,38 +1478,37 @@
           <a:p>
             <a:pPr lvl="0"/>
             <a:r>
-              <a:rPr lang="en-US" smtClean="0"/>
+              <a:rPr lang="en-US"/>
               <a:t>Click to edit Master text styles</a:t>
             </a:r>
           </a:p>
           <a:p>
             <a:pPr lvl="1"/>
             <a:r>
-              <a:rPr lang="en-US" smtClean="0"/>
+              <a:rPr lang="en-US"/>
               <a:t>Second level</a:t>
             </a:r>
           </a:p>
           <a:p>
             <a:pPr lvl="2"/>
             <a:r>
-              <a:rPr lang="en-US" smtClean="0"/>
+              <a:rPr lang="en-US"/>
               <a:t>Third level</a:t>
             </a:r>
           </a:p>
           <a:p>
             <a:pPr lvl="3"/>
             <a:r>
-              <a:rPr lang="en-US" smtClean="0"/>
+              <a:rPr lang="en-US"/>
               <a:t>Fourth level</a:t>
             </a:r>
           </a:p>
           <a:p>
             <a:pPr lvl="4"/>
             <a:r>
-              <a:rPr lang="en-US" smtClean="0"/>
+              <a:rPr lang="en-US"/>
               <a:t>Fifth level</a:t>
             </a:r>
-            <a:endParaRPr lang="en-US"/>
           </a:p>
         </p:txBody>
       </p:sp>
@@ -1320,38 +1562,37 @@
           <a:p>
             <a:pPr lvl="0"/>
             <a:r>
-              <a:rPr lang="en-US" smtClean="0"/>
+              <a:rPr lang="en-US"/>
               <a:t>Click to edit Master text styles</a:t>
             </a:r>
           </a:p>
           <a:p>
             <a:pPr lvl="1"/>
             <a:r>
-              <a:rPr lang="en-US" smtClean="0"/>
+              <a:rPr lang="en-US"/>
               <a:t>Second level</a:t>
             </a:r>
           </a:p>
           <a:p>
             <a:pPr lvl="2"/>
             <a:r>
-              <a:rPr lang="en-US" smtClean="0"/>
+              <a:rPr lang="en-US"/>
               <a:t>Third level</a:t>
             </a:r>
           </a:p>
           <a:p>
             <a:pPr lvl="3"/>
             <a:r>
-              <a:rPr lang="en-US" smtClean="0"/>
+              <a:rPr lang="en-US"/>
               <a:t>Fourth level</a:t>
             </a:r>
           </a:p>
           <a:p>
             <a:pPr lvl="4"/>
             <a:r>
-              <a:rPr lang="en-US" smtClean="0"/>
+              <a:rPr lang="en-US"/>
               <a:t>Fifth level</a:t>
             </a:r>
-            <a:endParaRPr lang="en-US"/>
           </a:p>
         </p:txBody>
       </p:sp>
@@ -1372,7 +1613,7 @@
           <a:p>
             <a:fld id="{5BCAD085-E8A6-8845-BD4E-CB4CCA059FC4}" type="datetimeFigureOut">
               <a:rPr lang="en-US" smtClean="0"/>
-              <a:t>1/27/13</a:t>
+              <a:t>6/25/2026</a:t>
             </a:fld>
             <a:endParaRPr lang="en-US"/>
           </a:p>
@@ -1470,10 +1711,9 @@
           </a:lstStyle>
           <a:p>
             <a:r>
-              <a:rPr lang="en-US" smtClean="0"/>
+              <a:rPr lang="en-US"/>
               <a:t>Click to edit Master title style</a:t>
             </a:r>
-            <a:endParaRPr lang="en-US"/>
           </a:p>
         </p:txBody>
       </p:sp>
@@ -1536,7 +1776,7 @@
           <a:p>
             <a:pPr lvl="0"/>
             <a:r>
-              <a:rPr lang="en-US" smtClean="0"/>
+              <a:rPr lang="en-US"/>
               <a:t>Click to edit Master text styles</a:t>
             </a:r>
           </a:p>
@@ -1592,38 +1832,37 @@
           <a:p>
             <a:pPr lvl="0"/>
             <a:r>
-              <a:rPr lang="en-US" smtClean="0"/>
+              <a:rPr lang="en-US"/>
               <a:t>Click to edit Master text styles</a:t>
             </a:r>
           </a:p>
           <a:p>
             <a:pPr lvl="1"/>
             <a:r>
-              <a:rPr lang="en-US" smtClean="0"/>
+              <a:rPr lang="en-US"/>
               <a:t>Second level</a:t>
             </a:r>
           </a:p>
           <a:p>
             <a:pPr lvl="2"/>
             <a:r>
-              <a:rPr lang="en-US" smtClean="0"/>
+              <a:rPr lang="en-US"/>
               <a:t>Third level</a:t>
             </a:r>
           </a:p>
           <a:p>
             <a:pPr lvl="3"/>
             <a:r>
-              <a:rPr lang="en-US" smtClean="0"/>
+              <a:rPr lang="en-US"/>
               <a:t>Fourth level</a:t>
             </a:r>
           </a:p>
           <a:p>
             <a:pPr lvl="4"/>
             <a:r>
-              <a:rPr lang="en-US" smtClean="0"/>
+              <a:rPr lang="en-US"/>
               <a:t>Fifth level</a:t>
             </a:r>
-            <a:endParaRPr lang="en-US"/>
           </a:p>
         </p:txBody>
       </p:sp>
@@ -1686,7 +1925,7 @@
           <a:p>
             <a:pPr lvl="0"/>
             <a:r>
-              <a:rPr lang="en-US" smtClean="0"/>
+              <a:rPr lang="en-US"/>
               <a:t>Click to edit Master text styles</a:t>
             </a:r>
           </a:p>
@@ -1742,38 +1981,37 @@
           <a:p>
             <a:pPr lvl="0"/>
             <a:r>
-              <a:rPr lang="en-US" smtClean="0"/>
+              <a:rPr lang="en-US"/>
               <a:t>Click to edit Master text styles</a:t>
             </a:r>
           </a:p>
           <a:p>
             <a:pPr lvl="1"/>
             <a:r>
-              <a:rPr lang="en-US" smtClean="0"/>
+              <a:rPr lang="en-US"/>
               <a:t>Second level</a:t>
             </a:r>
           </a:p>
           <a:p>
             <a:pPr lvl="2"/>
             <a:r>
-              <a:rPr lang="en-US" smtClean="0"/>
+              <a:rPr lang="en-US"/>
               <a:t>Third level</a:t>
             </a:r>
           </a:p>
           <a:p>
             <a:pPr lvl="3"/>
             <a:r>
-              <a:rPr lang="en-US" smtClean="0"/>
+              <a:rPr lang="en-US"/>
               <a:t>Fourth level</a:t>
             </a:r>
           </a:p>
           <a:p>
             <a:pPr lvl="4"/>
             <a:r>
-              <a:rPr lang="en-US" smtClean="0"/>
+              <a:rPr lang="en-US"/>
               <a:t>Fifth level</a:t>
             </a:r>
-            <a:endParaRPr lang="en-US"/>
           </a:p>
         </p:txBody>
       </p:sp>
@@ -1794,7 +2032,7 @@
           <a:p>
             <a:fld id="{5BCAD085-E8A6-8845-BD4E-CB4CCA059FC4}" type="datetimeFigureOut">
               <a:rPr lang="en-US" smtClean="0"/>
-              <a:t>1/27/13</a:t>
+              <a:t>6/25/2026</a:t>
             </a:fld>
             <a:endParaRPr lang="en-US"/>
           </a:p>
@@ -1888,10 +2126,9 @@
           <a:lstStyle/>
           <a:p>
             <a:r>
-              <a:rPr lang="en-US" smtClean="0"/>
+              <a:rPr lang="en-US"/>
               <a:t>Click to edit Master title style</a:t>
             </a:r>
-            <a:endParaRPr lang="en-US"/>
           </a:p>
         </p:txBody>
       </p:sp>
@@ -1912,7 +2149,7 @@
           <a:p>
             <a:fld id="{5BCAD085-E8A6-8845-BD4E-CB4CCA059FC4}" type="datetimeFigureOut">
               <a:rPr lang="en-US" smtClean="0"/>
-              <a:t>1/27/13</a:t>
+              <a:t>6/25/2026</a:t>
             </a:fld>
             <a:endParaRPr lang="en-US"/>
           </a:p>
@@ -2007,7 +2244,7 @@
           <a:p>
             <a:fld id="{5BCAD085-E8A6-8845-BD4E-CB4CCA059FC4}" type="datetimeFigureOut">
               <a:rPr lang="en-US" smtClean="0"/>
-              <a:t>1/27/13</a:t>
+              <a:t>6/25/2026</a:t>
             </a:fld>
             <a:endParaRPr lang="en-US"/>
           </a:p>
@@ -2110,10 +2347,9 @@
           </a:lstStyle>
           <a:p>
             <a:r>
-              <a:rPr lang="en-US" smtClean="0"/>
+              <a:rPr lang="en-US"/>
               <a:t>Click to edit Master title style</a:t>
             </a:r>
-            <a:endParaRPr lang="en-US"/>
           </a:p>
         </p:txBody>
       </p:sp>
@@ -2167,38 +2403,37 @@
           <a:p>
             <a:pPr lvl="0"/>
             <a:r>
-              <a:rPr lang="en-US" smtClean="0"/>
+              <a:rPr lang="en-US"/>
               <a:t>Click to edit Master text styles</a:t>
             </a:r>
           </a:p>
           <a:p>
             <a:pPr lvl="1"/>
             <a:r>
-              <a:rPr lang="en-US" smtClean="0"/>
+              <a:rPr lang="en-US"/>
               <a:t>Second level</a:t>
             </a:r>
           </a:p>
           <a:p>
             <a:pPr lvl="2"/>
             <a:r>
-              <a:rPr lang="en-US" smtClean="0"/>
+              <a:rPr lang="en-US"/>
               <a:t>Third level</a:t>
             </a:r>
           </a:p>
           <a:p>
             <a:pPr lvl="3"/>
             <a:r>
-              <a:rPr lang="en-US" smtClean="0"/>
+              <a:rPr lang="en-US"/>
               <a:t>Fourth level</a:t>
             </a:r>
           </a:p>
           <a:p>
             <a:pPr lvl="4"/>
             <a:r>
-              <a:rPr lang="en-US" smtClean="0"/>
+              <a:rPr lang="en-US"/>
               <a:t>Fifth level</a:t>
             </a:r>
-            <a:endParaRPr lang="en-US"/>
           </a:p>
         </p:txBody>
       </p:sp>
@@ -2261,7 +2496,7 @@
           <a:p>
             <a:pPr lvl="0"/>
             <a:r>
-              <a:rPr lang="en-US" smtClean="0"/>
+              <a:rPr lang="en-US"/>
               <a:t>Click to edit Master text styles</a:t>
             </a:r>
           </a:p>
@@ -2284,7 +2519,7 @@
           <a:p>
             <a:fld id="{5BCAD085-E8A6-8845-BD4E-CB4CCA059FC4}" type="datetimeFigureOut">
               <a:rPr lang="en-US" smtClean="0"/>
-              <a:t>1/27/13</a:t>
+              <a:t>6/25/2026</a:t>
             </a:fld>
             <a:endParaRPr lang="en-US"/>
           </a:p>
@@ -2387,10 +2622,9 @@
           </a:lstStyle>
           <a:p>
             <a:r>
-              <a:rPr lang="en-US" smtClean="0"/>
+              <a:rPr lang="en-US"/>
               <a:t>Click to edit Master title style</a:t>
             </a:r>
-            <a:endParaRPr lang="en-US"/>
           </a:p>
         </p:txBody>
       </p:sp>
@@ -2514,7 +2748,7 @@
           <a:p>
             <a:pPr lvl="0"/>
             <a:r>
-              <a:rPr lang="en-US" smtClean="0"/>
+              <a:rPr lang="en-US"/>
               <a:t>Click to edit Master text styles</a:t>
             </a:r>
           </a:p>
@@ -2537,7 +2771,7 @@
           <a:p>
             <a:fld id="{5BCAD085-E8A6-8845-BD4E-CB4CCA059FC4}" type="datetimeFigureOut">
               <a:rPr lang="en-US" smtClean="0"/>
-              <a:t>1/27/13</a:t>
+              <a:t>6/25/2026</a:t>
             </a:fld>
             <a:endParaRPr lang="en-US"/>
           </a:p>
@@ -2646,10 +2880,9 @@
           <a:lstStyle/>
           <a:p>
             <a:r>
-              <a:rPr lang="en-US" smtClean="0"/>
+              <a:rPr lang="en-US"/>
               <a:t>Click to edit Master title style</a:t>
             </a:r>
-            <a:endParaRPr lang="en-US"/>
           </a:p>
         </p:txBody>
       </p:sp>
@@ -2680,38 +2913,37 @@
           <a:p>
             <a:pPr lvl="0"/>
             <a:r>
-              <a:rPr lang="en-US" smtClean="0"/>
+              <a:rPr lang="en-US"/>
               <a:t>Click to edit Master text styles</a:t>
             </a:r>
           </a:p>
           <a:p>
             <a:pPr lvl="1"/>
             <a:r>
-              <a:rPr lang="en-US" smtClean="0"/>
+              <a:rPr lang="en-US"/>
               <a:t>Second level</a:t>
             </a:r>
           </a:p>
           <a:p>
             <a:pPr lvl="2"/>
             <a:r>
-              <a:rPr lang="en-US" smtClean="0"/>
+              <a:rPr lang="en-US"/>
               <a:t>Third level</a:t>
             </a:r>
           </a:p>
           <a:p>
             <a:pPr lvl="3"/>
             <a:r>
-              <a:rPr lang="en-US" smtClean="0"/>
+              <a:rPr lang="en-US"/>
               <a:t>Fourth level</a:t>
             </a:r>
           </a:p>
           <a:p>
             <a:pPr lvl="4"/>
             <a:r>
-              <a:rPr lang="en-US" smtClean="0"/>
+              <a:rPr lang="en-US"/>
               <a:t>Fifth level</a:t>
             </a:r>
-            <a:endParaRPr lang="en-US"/>
           </a:p>
         </p:txBody>
       </p:sp>
@@ -2750,7 +2982,7 @@
           <a:p>
             <a:fld id="{5BCAD085-E8A6-8845-BD4E-CB4CCA059FC4}" type="datetimeFigureOut">
               <a:rPr lang="en-US" smtClean="0"/>
-              <a:t>1/27/13</a:t>
+              <a:t>6/25/2026</a:t>
             </a:fld>
             <a:endParaRPr lang="en-US"/>
           </a:p>
@@ -3109,7 +3341,7 @@
 </file>
 
 <file path=ppt/slides/slide1.xml><?xml version="1.0" encoding="utf-8"?>
-<p:sld xmlns:a="http://schemas.openxmlformats.org/drawingml/2006/main" xmlns:p="http://schemas.openxmlformats.org/presentationml/2006/main" xmlns:r="http://schemas.openxmlformats.org/officeDocument/2006/relationships">
+<p:sld xmlns:a="http://schemas.openxmlformats.org/drawingml/2006/main" xmlns:r="http://schemas.openxmlformats.org/officeDocument/2006/relationships" xmlns:p="http://schemas.openxmlformats.org/presentationml/2006/main">
   <p:cSld>
     <p:bg>
       <p:bgPr>
@@ -3125,7 +3357,14 @@
         <p:cNvGrpSpPr/>
         <p:nvPr/>
       </p:nvGrpSpPr>
-      <p:grpSpPr/>
+      <p:grpSpPr>
+        <a:xfrm>
+          <a:off x="0" y="0"/>
+          <a:ext cx="0" cy="0"/>
+          <a:chOff x="0" y="0"/>
+          <a:chExt cx="0" cy="0"/>
+        </a:xfrm>
+      </p:grpSpPr>
       <p:sp>
         <p:nvSpPr>
           <p:cNvPr id="2" name="TextBox 1"/>
@@ -3186,7 +3425,7 @@
 </file>
 
 <file path=ppt/slides/slide10.xml><?xml version="1.0" encoding="utf-8"?>
-<p:sld xmlns:a="http://schemas.openxmlformats.org/drawingml/2006/main" xmlns:p="http://schemas.openxmlformats.org/presentationml/2006/main" xmlns:r="http://schemas.openxmlformats.org/officeDocument/2006/relationships">
+<p:sld xmlns:a="http://schemas.openxmlformats.org/drawingml/2006/main" xmlns:r="http://schemas.openxmlformats.org/officeDocument/2006/relationships" xmlns:p="http://schemas.openxmlformats.org/presentationml/2006/main">
   <p:cSld>
     <p:bg>
       <p:bgPr>
@@ -3202,7 +3441,655 @@
         <p:cNvGrpSpPr/>
         <p:nvPr/>
       </p:nvGrpSpPr>
-      <p:grpSpPr/>
+      <p:grpSpPr>
+        <a:xfrm>
+          <a:off x="0" y="0"/>
+          <a:ext cx="0" cy="0"/>
+          <a:chOff x="0" y="0"/>
+          <a:chExt cx="0" cy="0"/>
+        </a:xfrm>
+      </p:grpSpPr>
+      <p:sp>
+        <p:nvSpPr>
+          <p:cNvPr id="2" name="Rectangle 1"/>
+          <p:cNvSpPr/>
+          <p:nvPr/>
+        </p:nvSpPr>
+        <p:spPr>
+          <a:xfrm>
+            <a:off x="0" y="0"/>
+            <a:ext cx="9144000" cy="786384"/>
+          </a:xfrm>
+          <a:prstGeom prst="rect">
+            <a:avLst/>
+          </a:prstGeom>
+          <a:solidFill>
+            <a:srgbClr val="03234B"/>
+          </a:solidFill>
+          <a:ln>
+            <a:noFill/>
+          </a:ln>
+        </p:spPr>
+        <p:style>
+          <a:lnRef idx="1">
+            <a:schemeClr val="accent1"/>
+          </a:lnRef>
+          <a:fillRef idx="3">
+            <a:schemeClr val="accent1"/>
+          </a:fillRef>
+          <a:effectRef idx="2">
+            <a:schemeClr val="accent1"/>
+          </a:effectRef>
+          <a:fontRef idx="minor">
+            <a:schemeClr val="lt1"/>
+          </a:fontRef>
+        </p:style>
+        <p:txBody>
+          <a:bodyPr rtlCol="0" anchor="ctr"/>
+          <a:lstStyle/>
+          <a:p>
+            <a:pPr algn="l">
+              <a:defRPr sz="2200" b="1">
+                <a:solidFill>
+                  <a:srgbClr val="FFFFFF"/>
+                </a:solidFill>
+              </a:defRPr>
+            </a:pPr>
+            <a:r>
+              <a:t>run_full_workflow.py — Fonctionnement interne</a:t>
+            </a:r>
+          </a:p>
+        </p:txBody>
+      </p:sp>
+      <p:sp>
+        <p:nvSpPr>
+          <p:cNvPr id="3" name="TextBox 2"/>
+          <p:cNvSpPr txBox="1"/>
+          <p:nvPr/>
+        </p:nvSpPr>
+        <p:spPr>
+          <a:xfrm>
+            <a:off x="338328" y="859536"/>
+            <a:ext cx="8046720" cy="6617196"/>
+          </a:xfrm>
+          <a:prstGeom prst="rect">
+            <a:avLst/>
+          </a:prstGeom>
+          <a:noFill/>
+        </p:spPr>
+        <p:txBody>
+          <a:bodyPr wrap="square">
+            <a:spAutoFit/>
+          </a:bodyPr>
+          <a:lstStyle/>
+          <a:p>
+            <a:pPr>
+              <a:spcBef>
+                <a:spcPts val="1200"/>
+              </a:spcBef>
+              <a:defRPr sz="1600" b="1">
+                <a:solidFill>
+                  <a:srgbClr val="03234B"/>
+                </a:solidFill>
+              </a:defRPr>
+            </a:pPr>
+            <a:r>
+              <a:rPr dirty="0" err="1"/>
+              <a:t>Chaque</a:t>
+            </a:r>
+            <a:r>
+              <a:rPr dirty="0"/>
+              <a:t> step = un tuple (label, </a:t>
+            </a:r>
+            <a:r>
+              <a:rPr dirty="0" err="1"/>
+              <a:t>fonction</a:t>
+            </a:r>
+            <a:r>
+              <a:rPr dirty="0"/>
+              <a:t> Python)</a:t>
+            </a:r>
+          </a:p>
+          <a:p>
+            <a:pPr>
+              <a:spcBef>
+                <a:spcPts val="600"/>
+              </a:spcBef>
+              <a:defRPr sz="1400">
+                <a:solidFill>
+                  <a:srgbClr val="333333"/>
+                </a:solidFill>
+              </a:defRPr>
+            </a:pPr>
+            <a:r>
+              <a:rPr dirty="0"/>
+              <a:t>• ("Cleaning issues", </a:t>
+            </a:r>
+            <a:r>
+              <a:rPr dirty="0" err="1"/>
+              <a:t>clean_issues_main</a:t>
+            </a:r>
+            <a:r>
+              <a:rPr dirty="0"/>
+              <a:t>) → </a:t>
+            </a:r>
+            <a:r>
+              <a:rPr dirty="0" err="1"/>
+              <a:t>appelle</a:t>
+            </a:r>
+            <a:r>
+              <a:rPr dirty="0"/>
+              <a:t> </a:t>
+            </a:r>
+            <a:r>
+              <a:rPr dirty="0" err="1"/>
+              <a:t>clean_issues_main</a:t>
+            </a:r>
+            <a:r>
+              <a:rPr dirty="0"/>
+              <a:t>()</a:t>
+            </a:r>
+          </a:p>
+          <a:p>
+            <a:pPr>
+              <a:spcBef>
+                <a:spcPts val="600"/>
+              </a:spcBef>
+              <a:defRPr sz="1400">
+                <a:solidFill>
+                  <a:srgbClr val="333333"/>
+                </a:solidFill>
+              </a:defRPr>
+            </a:pPr>
+            <a:r>
+              <a:rPr dirty="0"/>
+              <a:t>• Le label </a:t>
+            </a:r>
+            <a:r>
+              <a:rPr dirty="0" err="1"/>
+              <a:t>sert</a:t>
+            </a:r>
+            <a:r>
+              <a:rPr dirty="0"/>
+              <a:t> pour le print [1/17] et le </a:t>
+            </a:r>
+            <a:r>
+              <a:rPr dirty="0" err="1"/>
+              <a:t>filtrage</a:t>
+            </a:r>
+            <a:r>
+              <a:rPr dirty="0"/>
+              <a:t> par flag</a:t>
+            </a:r>
+          </a:p>
+          <a:p>
+            <a:pPr>
+              <a:spcBef>
+                <a:spcPts val="600"/>
+              </a:spcBef>
+              <a:defRPr sz="1400">
+                <a:solidFill>
+                  <a:srgbClr val="333333"/>
+                </a:solidFill>
+              </a:defRPr>
+            </a:pPr>
+            <a:endParaRPr dirty="0"/>
+          </a:p>
+          <a:p>
+            <a:pPr>
+              <a:spcBef>
+                <a:spcPts val="1200"/>
+              </a:spcBef>
+              <a:defRPr sz="1600" b="1">
+                <a:solidFill>
+                  <a:srgbClr val="03234B"/>
+                </a:solidFill>
+              </a:defRPr>
+            </a:pPr>
+            <a:r>
+              <a:rPr dirty="0"/>
+              <a:t>Les flags FILTRENT la </a:t>
+            </a:r>
+            <a:r>
+              <a:rPr dirty="0" err="1"/>
+              <a:t>liste</a:t>
+            </a:r>
+            <a:r>
+              <a:rPr dirty="0"/>
+              <a:t> avant </a:t>
+            </a:r>
+            <a:r>
+              <a:rPr dirty="0" err="1"/>
+              <a:t>exécution</a:t>
+            </a:r>
+            <a:r>
+              <a:rPr dirty="0"/>
+              <a:t> :</a:t>
+            </a:r>
+          </a:p>
+          <a:p>
+            <a:pPr>
+              <a:spcBef>
+                <a:spcPts val="600"/>
+              </a:spcBef>
+              <a:defRPr sz="1400">
+                <a:solidFill>
+                  <a:srgbClr val="333333"/>
+                </a:solidFill>
+              </a:defRPr>
+            </a:pPr>
+            <a:r>
+              <a:rPr dirty="0"/>
+              <a:t>• --skip-ingestion  → retire tout step </a:t>
+            </a:r>
+            <a:r>
+              <a:rPr dirty="0" err="1"/>
+              <a:t>dont</a:t>
+            </a:r>
+            <a:r>
+              <a:rPr dirty="0"/>
+              <a:t> </a:t>
+            </a:r>
+            <a:r>
+              <a:rPr dirty="0" err="1"/>
+              <a:t>label.startswith</a:t>
+            </a:r>
+            <a:r>
+              <a:rPr dirty="0"/>
+              <a:t>("Ingestion")</a:t>
+            </a:r>
+          </a:p>
+          <a:p>
+            <a:pPr>
+              <a:spcBef>
+                <a:spcPts val="600"/>
+              </a:spcBef>
+              <a:defRPr sz="1400">
+                <a:solidFill>
+                  <a:srgbClr val="333333"/>
+                </a:solidFill>
+              </a:defRPr>
+            </a:pPr>
+            <a:r>
+              <a:rPr dirty="0"/>
+              <a:t>• --skip-chunking   → retire tout step </a:t>
+            </a:r>
+            <a:r>
+              <a:rPr dirty="0" err="1"/>
+              <a:t>dont</a:t>
+            </a:r>
+            <a:r>
+              <a:rPr dirty="0"/>
+              <a:t> </a:t>
+            </a:r>
+            <a:r>
+              <a:rPr dirty="0" err="1"/>
+              <a:t>label.startswith</a:t>
+            </a:r>
+            <a:r>
+              <a:rPr dirty="0"/>
+              <a:t>("Chunking")</a:t>
+            </a:r>
+          </a:p>
+          <a:p>
+            <a:pPr>
+              <a:spcBef>
+                <a:spcPts val="600"/>
+              </a:spcBef>
+              <a:defRPr sz="1400">
+                <a:solidFill>
+                  <a:srgbClr val="333333"/>
+                </a:solidFill>
+              </a:defRPr>
+            </a:pPr>
+            <a:r>
+              <a:rPr dirty="0"/>
+              <a:t>• --no-enrich-pdf   → retire tout step </a:t>
+            </a:r>
+            <a:r>
+              <a:rPr dirty="0" err="1"/>
+              <a:t>dont</a:t>
+            </a:r>
+            <a:r>
+              <a:rPr dirty="0"/>
+              <a:t> </a:t>
+            </a:r>
+            <a:r>
+              <a:rPr dirty="0" err="1"/>
+              <a:t>label.startswith</a:t>
+            </a:r>
+            <a:r>
+              <a:rPr dirty="0"/>
+              <a:t>("Alfred")</a:t>
+            </a:r>
+          </a:p>
+          <a:p>
+            <a:pPr>
+              <a:spcBef>
+                <a:spcPts val="600"/>
+              </a:spcBef>
+              <a:defRPr sz="1400">
+                <a:solidFill>
+                  <a:srgbClr val="333333"/>
+                </a:solidFill>
+              </a:defRPr>
+            </a:pPr>
+            <a:endParaRPr dirty="0"/>
+          </a:p>
+          <a:p>
+            <a:pPr>
+              <a:spcBef>
+                <a:spcPts val="1200"/>
+              </a:spcBef>
+              <a:defRPr sz="1600" b="1">
+                <a:solidFill>
+                  <a:srgbClr val="03234B"/>
+                </a:solidFill>
+              </a:defRPr>
+            </a:pPr>
+            <a:r>
+              <a:rPr dirty="0"/>
+              <a:t>--export-st-ready AJOUTE 6 steps à la fin :</a:t>
+            </a:r>
+          </a:p>
+          <a:p>
+            <a:pPr>
+              <a:spcBef>
+                <a:spcPts val="600"/>
+              </a:spcBef>
+              <a:defRPr sz="1400">
+                <a:solidFill>
+                  <a:srgbClr val="333333"/>
+                </a:solidFill>
+              </a:defRPr>
+            </a:pPr>
+            <a:r>
+              <a:rPr dirty="0"/>
+              <a:t>• ("Delivery ST-ready issues",           </a:t>
+            </a:r>
+            <a:r>
+              <a:rPr dirty="0" err="1"/>
+              <a:t>export_issues_all</a:t>
+            </a:r>
+            <a:r>
+              <a:rPr dirty="0"/>
+              <a:t>)</a:t>
+            </a:r>
+          </a:p>
+          <a:p>
+            <a:pPr>
+              <a:spcBef>
+                <a:spcPts val="600"/>
+              </a:spcBef>
+              <a:defRPr sz="1400">
+                <a:solidFill>
+                  <a:srgbClr val="333333"/>
+                </a:solidFill>
+              </a:defRPr>
+            </a:pPr>
+            <a:r>
+              <a:rPr dirty="0"/>
+              <a:t>• ("Delivery ST-ready files",            </a:t>
+            </a:r>
+            <a:r>
+              <a:rPr dirty="0" err="1"/>
+              <a:t>export_files_all</a:t>
+            </a:r>
+            <a:r>
+              <a:rPr dirty="0"/>
+              <a:t>)</a:t>
+            </a:r>
+          </a:p>
+          <a:p>
+            <a:pPr>
+              <a:spcBef>
+                <a:spcPts val="600"/>
+              </a:spcBef>
+              <a:defRPr sz="1400">
+                <a:solidFill>
+                  <a:srgbClr val="333333"/>
+                </a:solidFill>
+              </a:defRPr>
+            </a:pPr>
+            <a:r>
+              <a:rPr dirty="0"/>
+              <a:t>• ("Delivery ST-ready resolver",         </a:t>
+            </a:r>
+            <a:r>
+              <a:rPr dirty="0" err="1"/>
+              <a:t>export_resolver_all</a:t>
+            </a:r>
+            <a:r>
+              <a:rPr dirty="0"/>
+              <a:t>)</a:t>
+            </a:r>
+          </a:p>
+          <a:p>
+            <a:pPr>
+              <a:spcBef>
+                <a:spcPts val="600"/>
+              </a:spcBef>
+              <a:defRPr sz="1400">
+                <a:solidFill>
+                  <a:srgbClr val="333333"/>
+                </a:solidFill>
+              </a:defRPr>
+            </a:pPr>
+            <a:r>
+              <a:rPr dirty="0"/>
+              <a:t>• ("Delivery ST-ready </a:t>
+            </a:r>
+            <a:r>
+              <a:rPr dirty="0" err="1"/>
+              <a:t>diag</a:t>
+            </a:r>
+            <a:r>
+              <a:rPr dirty="0"/>
+              <a:t> cards",       </a:t>
+            </a:r>
+            <a:r>
+              <a:rPr dirty="0" err="1"/>
+              <a:t>export_diag_all</a:t>
+            </a:r>
+            <a:r>
+              <a:rPr dirty="0"/>
+              <a:t>)</a:t>
+            </a:r>
+          </a:p>
+          <a:p>
+            <a:pPr>
+              <a:spcBef>
+                <a:spcPts val="600"/>
+              </a:spcBef>
+              <a:defRPr sz="1400">
+                <a:solidFill>
+                  <a:srgbClr val="333333"/>
+                </a:solidFill>
+              </a:defRPr>
+            </a:pPr>
+            <a:r>
+              <a:rPr dirty="0"/>
+              <a:t>• ("Delivery ST-ready issues with </a:t>
+            </a:r>
+            <a:r>
+              <a:rPr dirty="0" err="1"/>
+              <a:t>imgs</a:t>
+            </a:r>
+            <a:r>
+              <a:rPr dirty="0"/>
+              <a:t>", </a:t>
+            </a:r>
+            <a:r>
+              <a:rPr dirty="0" err="1"/>
+              <a:t>export_with_images_all</a:t>
+            </a:r>
+            <a:r>
+              <a:rPr dirty="0"/>
+              <a:t>)</a:t>
+            </a:r>
+          </a:p>
+          <a:p>
+            <a:pPr>
+              <a:spcBef>
+                <a:spcPts val="600"/>
+              </a:spcBef>
+              <a:defRPr sz="1400">
+                <a:solidFill>
+                  <a:srgbClr val="333333"/>
+                </a:solidFill>
+              </a:defRPr>
+            </a:pPr>
+            <a:r>
+              <a:rPr dirty="0"/>
+              <a:t>• ("Alfred image descriptions",          _</a:t>
+            </a:r>
+            <a:r>
+              <a:rPr dirty="0" err="1"/>
+              <a:t>enrich_alfred_images_main</a:t>
+            </a:r>
+            <a:r>
+              <a:rPr dirty="0"/>
+              <a:t>)</a:t>
+            </a:r>
+          </a:p>
+          <a:p>
+            <a:pPr>
+              <a:spcBef>
+                <a:spcPts val="1200"/>
+              </a:spcBef>
+              <a:defRPr sz="1600" b="1">
+                <a:solidFill>
+                  <a:srgbClr val="03234B"/>
+                </a:solidFill>
+              </a:defRPr>
+            </a:pPr>
+            <a:r>
+              <a:rPr dirty="0"/>
+              <a:t>Gestion </a:t>
+            </a:r>
+            <a:r>
+              <a:rPr dirty="0" err="1"/>
+              <a:t>d'erreurs</a:t>
+            </a:r>
+            <a:r>
+              <a:rPr dirty="0"/>
+              <a:t> :</a:t>
+            </a:r>
+          </a:p>
+          <a:p>
+            <a:pPr>
+              <a:spcBef>
+                <a:spcPts val="600"/>
+              </a:spcBef>
+              <a:defRPr sz="1400">
+                <a:solidFill>
+                  <a:srgbClr val="333333"/>
+                </a:solidFill>
+              </a:defRPr>
+            </a:pPr>
+            <a:r>
+              <a:rPr dirty="0"/>
+              <a:t>• Sans --continue-on-error → exception = STOP </a:t>
+            </a:r>
+            <a:r>
+              <a:rPr dirty="0" err="1"/>
+              <a:t>immédiat</a:t>
+            </a:r>
+            <a:endParaRPr dirty="0"/>
+          </a:p>
+          <a:p>
+            <a:pPr>
+              <a:spcBef>
+                <a:spcPts val="600"/>
+              </a:spcBef>
+              <a:defRPr sz="1400">
+                <a:solidFill>
+                  <a:srgbClr val="333333"/>
+                </a:solidFill>
+              </a:defRPr>
+            </a:pPr>
+            <a:r>
+              <a:rPr dirty="0"/>
+              <a:t>• Avec --continue-on-error → print [WARN] + passe au step </a:t>
+            </a:r>
+            <a:r>
+              <a:rPr dirty="0" err="1"/>
+              <a:t>suivant</a:t>
+            </a:r>
+            <a:endParaRPr dirty="0"/>
+          </a:p>
+          <a:p>
+            <a:pPr>
+              <a:spcBef>
+                <a:spcPts val="600"/>
+              </a:spcBef>
+              <a:defRPr sz="1400">
+                <a:solidFill>
+                  <a:srgbClr val="333333"/>
+                </a:solidFill>
+              </a:defRPr>
+            </a:pPr>
+            <a:endParaRPr dirty="0"/>
+          </a:p>
+          <a:p>
+            <a:pPr>
+              <a:spcBef>
+                <a:spcPts val="1200"/>
+              </a:spcBef>
+              <a:defRPr sz="1600" b="1">
+                <a:solidFill>
+                  <a:srgbClr val="03234B"/>
+                </a:solidFill>
+              </a:defRPr>
+            </a:pPr>
+            <a:r>
+              <a:rPr dirty="0"/>
+              <a:t>Config : $env:STM32CUBE_CONFIG → shared/utils/paths.py → </a:t>
+            </a:r>
+            <a:r>
+              <a:rPr dirty="0" err="1"/>
+              <a:t>get_config_path</a:t>
+            </a:r>
+            <a:r>
+              <a:rPr dirty="0"/>
+              <a:t>()</a:t>
+            </a:r>
+          </a:p>
+        </p:txBody>
+      </p:sp>
+    </p:spTree>
+  </p:cSld>
+  <p:clrMapOvr>
+    <a:masterClrMapping/>
+  </p:clrMapOvr>
+</p:sld>
+</file>
+
+<file path=ppt/slides/slide11.xml><?xml version="1.0" encoding="utf-8"?>
+<p:sld xmlns:a="http://schemas.openxmlformats.org/drawingml/2006/main" xmlns:r="http://schemas.openxmlformats.org/officeDocument/2006/relationships" xmlns:p="http://schemas.openxmlformats.org/presentationml/2006/main">
+  <p:cSld>
+    <p:bg>
+      <p:bgPr>
+        <a:solidFill>
+          <a:srgbClr val="FFFFFF"/>
+        </a:solidFill>
+        <a:effectLst/>
+      </p:bgPr>
+    </p:bg>
+    <p:spTree>
+      <p:nvGrpSpPr>
+        <p:cNvPr id="1" name=""/>
+        <p:cNvGrpSpPr/>
+        <p:nvPr/>
+      </p:nvGrpSpPr>
+      <p:grpSpPr>
+        <a:xfrm>
+          <a:off x="0" y="0"/>
+          <a:ext cx="0" cy="0"/>
+          <a:chOff x="0" y="0"/>
+          <a:chExt cx="0" cy="0"/>
+        </a:xfrm>
+      </p:grpSpPr>
       <p:sp>
         <p:nvSpPr>
           <p:cNvPr id="2" name="Rectangle 1"/>
@@ -3250,7 +4137,7 @@
               </a:defRPr>
             </a:pPr>
             <a:r>
-              <a:t>run_full_workflow.py — Fonctionnement interne</a:t>
+              <a:t>run_full_workflow vs Run_Issues_Pipeline_For_All_Repos</a:t>
             </a:r>
           </a:p>
         </p:txBody>
@@ -3288,50 +4175,66 @@
               </a:defRPr>
             </a:pPr>
             <a:r>
-              <a:t>Chaque step = un tuple (label, fonction Python)</a:t>
-            </a:r>
-          </a:p>
-          <a:p>
-            <a:pPr>
-              <a:spcBef>
-                <a:spcPts val="600"/>
-              </a:spcBef>
-              <a:defRPr sz="1400">
-                <a:solidFill>
-                  <a:srgbClr val="333333"/>
-                </a:solidFill>
-              </a:defRPr>
-            </a:pPr>
-            <a:r>
-              <a:t>• ("Cleaning issues", clean_issues_main) → appelle clean_issues_main()</a:t>
-            </a:r>
-          </a:p>
-          <a:p>
-            <a:pPr>
-              <a:spcBef>
-                <a:spcPts val="600"/>
-              </a:spcBef>
-              <a:defRPr sz="1400">
-                <a:solidFill>
-                  <a:srgbClr val="333333"/>
-                </a:solidFill>
-              </a:defRPr>
-            </a:pPr>
-            <a:r>
-              <a:t>• Le label sert pour le print [1/17] et le filtrage par flag</a:t>
-            </a:r>
-          </a:p>
-          <a:p>
-            <a:pPr>
-              <a:spcBef>
-                <a:spcPts val="600"/>
-              </a:spcBef>
-              <a:defRPr sz="1400">
-                <a:solidFill>
-                  <a:srgbClr val="333333"/>
-                </a:solidFill>
-              </a:defRPr>
-            </a:pPr>
+              <a:t>run_full_workflow.py (Python) :</a:t>
+            </a:r>
+          </a:p>
+          <a:p>
+            <a:pPr>
+              <a:spcBef>
+                <a:spcPts val="600"/>
+              </a:spcBef>
+              <a:defRPr sz="1400">
+                <a:solidFill>
+                  <a:srgbClr val="333333"/>
+                </a:solidFill>
+              </a:defRPr>
+            </a:pPr>
+            <a:r>
+              <a:t>• Fait TOUT : issues + files + similarity + chunking + eval + delivery</a:t>
+            </a:r>
+          </a:p>
+          <a:p>
+            <a:pPr>
+              <a:spcBef>
+                <a:spcPts val="600"/>
+              </a:spcBef>
+              <a:defRPr sz="1400">
+                <a:solidFill>
+                  <a:srgbClr val="333333"/>
+                </a:solidFill>
+              </a:defRPr>
+            </a:pPr>
+            <a:r>
+              <a:t>• 17-21 étapes complètes</a:t>
+            </a:r>
+          </a:p>
+          <a:p>
+            <a:pPr>
+              <a:spcBef>
+                <a:spcPts val="600"/>
+              </a:spcBef>
+              <a:defRPr sz="1400">
+                <a:solidFill>
+                  <a:srgbClr val="333333"/>
+                </a:solidFill>
+              </a:defRPr>
+            </a:pPr>
+            <a:r>
+              <a:t>• Utilisé pour un traitement complet d'une série</a:t>
+            </a:r>
+          </a:p>
+          <a:p>
+            <a:pPr>
+              <a:spcBef>
+                <a:spcPts val="600"/>
+              </a:spcBef>
+              <a:defRPr sz="1400">
+                <a:solidFill>
+                  <a:srgbClr val="333333"/>
+                </a:solidFill>
+              </a:defRPr>
+            </a:pPr>
+            <a:endParaRPr/>
           </a:p>
           <a:p>
             <a:pPr>
@@ -3345,65 +4248,81 @@
               </a:defRPr>
             </a:pPr>
             <a:r>
-              <a:t>Les flags FILTRENT la liste avant exécution :</a:t>
-            </a:r>
-          </a:p>
-          <a:p>
-            <a:pPr>
-              <a:spcBef>
-                <a:spcPts val="600"/>
-              </a:spcBef>
-              <a:defRPr sz="1400">
-                <a:solidFill>
-                  <a:srgbClr val="333333"/>
-                </a:solidFill>
-              </a:defRPr>
-            </a:pPr>
-            <a:r>
-              <a:t>• --skip-ingestion  → retire tout step dont label.startswith("Ingestion")</a:t>
-            </a:r>
-          </a:p>
-          <a:p>
-            <a:pPr>
-              <a:spcBef>
-                <a:spcPts val="600"/>
-              </a:spcBef>
-              <a:defRPr sz="1400">
-                <a:solidFill>
-                  <a:srgbClr val="333333"/>
-                </a:solidFill>
-              </a:defRPr>
-            </a:pPr>
-            <a:r>
-              <a:t>• --skip-chunking   → retire tout step dont label.startswith("Chunking")</a:t>
-            </a:r>
-          </a:p>
-          <a:p>
-            <a:pPr>
-              <a:spcBef>
-                <a:spcPts val="600"/>
-              </a:spcBef>
-              <a:defRPr sz="1400">
-                <a:solidFill>
-                  <a:srgbClr val="333333"/>
-                </a:solidFill>
-              </a:defRPr>
-            </a:pPr>
-            <a:r>
-              <a:t>• --no-enrich-pdf   → retire tout step dont label.startswith("Alfred")</a:t>
-            </a:r>
-          </a:p>
-          <a:p>
-            <a:pPr>
-              <a:spcBef>
-                <a:spcPts val="600"/>
-              </a:spcBef>
-              <a:defRPr sz="1400">
-                <a:solidFill>
-                  <a:srgbClr val="333333"/>
-                </a:solidFill>
-              </a:defRPr>
-            </a:pPr>
+              <a:t>Run_Issues_Pipeline_For_All_Repos.ps1 (PowerShell) :</a:t>
+            </a:r>
+          </a:p>
+          <a:p>
+            <a:pPr>
+              <a:spcBef>
+                <a:spcPts val="600"/>
+              </a:spcBef>
+              <a:defRPr sz="1400">
+                <a:solidFill>
+                  <a:srgbClr val="333333"/>
+                </a:solidFill>
+              </a:defRPr>
+            </a:pPr>
+            <a:r>
+              <a:t>• Raccourci ISSUES-ONLY : clean → enrich → [similarity] → [chunking] → delivery</a:t>
+            </a:r>
+          </a:p>
+          <a:p>
+            <a:pPr>
+              <a:spcBef>
+                <a:spcPts val="600"/>
+              </a:spcBef>
+              <a:defRPr sz="1400">
+                <a:solidFill>
+                  <a:srgbClr val="333333"/>
+                </a:solidFill>
+              </a:defRPr>
+            </a:pPr>
+            <a:r>
+              <a:t>• Seulement 3-5 étapes (pas de files, pas d'ingestion)</a:t>
+            </a:r>
+          </a:p>
+          <a:p>
+            <a:pPr>
+              <a:spcBef>
+                <a:spcPts val="600"/>
+              </a:spcBef>
+              <a:defRPr sz="1400">
+                <a:solidFill>
+                  <a:srgbClr val="333333"/>
+                </a:solidFill>
+              </a:defRPr>
+            </a:pPr>
+            <a:r>
+              <a:t>• Suppose que les raw_issues sont DÉJÀ téléchargés</a:t>
+            </a:r>
+          </a:p>
+          <a:p>
+            <a:pPr>
+              <a:spcBef>
+                <a:spcPts val="600"/>
+              </a:spcBef>
+              <a:defRPr sz="1400">
+                <a:solidFill>
+                  <a:srgbClr val="333333"/>
+                </a:solidFill>
+              </a:defRPr>
+            </a:pPr>
+            <a:r>
+              <a:t>• Utilisé pour re-processer rapidement les issues après un fix</a:t>
+            </a:r>
+          </a:p>
+          <a:p>
+            <a:pPr>
+              <a:spcBef>
+                <a:spcPts val="600"/>
+              </a:spcBef>
+              <a:defRPr sz="1400">
+                <a:solidFill>
+                  <a:srgbClr val="333333"/>
+                </a:solidFill>
+              </a:defRPr>
+            </a:pPr>
+            <a:endParaRPr/>
           </a:p>
           <a:p>
             <a:pPr>
@@ -3417,181 +4336,52 @@
               </a:defRPr>
             </a:pPr>
             <a:r>
-              <a:t>--export-st-ready AJOUTE 6 steps à la fin :</a:t>
-            </a:r>
-          </a:p>
-          <a:p>
-            <a:pPr>
-              <a:spcBef>
-                <a:spcPts val="600"/>
-              </a:spcBef>
-              <a:defRPr sz="1400">
-                <a:solidFill>
-                  <a:srgbClr val="333333"/>
-                </a:solidFill>
-              </a:defRPr>
-            </a:pPr>
-            <a:r>
-              <a:t>• ("Delivery ST-ready issues",           export_issues_all)</a:t>
-            </a:r>
-          </a:p>
-          <a:p>
-            <a:pPr>
-              <a:spcBef>
-                <a:spcPts val="600"/>
-              </a:spcBef>
-              <a:defRPr sz="1400">
-                <a:solidFill>
-                  <a:srgbClr val="333333"/>
-                </a:solidFill>
-              </a:defRPr>
-            </a:pPr>
-            <a:r>
-              <a:t>• ("Delivery ST-ready files",            export_files_all)</a:t>
-            </a:r>
-          </a:p>
-          <a:p>
-            <a:pPr>
-              <a:spcBef>
-                <a:spcPts val="600"/>
-              </a:spcBef>
-              <a:defRPr sz="1400">
-                <a:solidFill>
-                  <a:srgbClr val="333333"/>
-                </a:solidFill>
-              </a:defRPr>
-            </a:pPr>
-            <a:r>
-              <a:t>• ("Delivery ST-ready resolver",         export_resolver_all)</a:t>
-            </a:r>
-          </a:p>
-          <a:p>
-            <a:pPr>
-              <a:spcBef>
-                <a:spcPts val="600"/>
-              </a:spcBef>
-              <a:defRPr sz="1400">
-                <a:solidFill>
-                  <a:srgbClr val="333333"/>
-                </a:solidFill>
-              </a:defRPr>
-            </a:pPr>
-            <a:r>
-              <a:t>• ("Delivery ST-ready diag cards",       export_diag_all)</a:t>
-            </a:r>
-          </a:p>
-          <a:p>
-            <a:pPr>
-              <a:spcBef>
-                <a:spcPts val="600"/>
-              </a:spcBef>
-              <a:defRPr sz="1400">
-                <a:solidFill>
-                  <a:srgbClr val="333333"/>
-                </a:solidFill>
-              </a:defRPr>
-            </a:pPr>
-            <a:r>
-              <a:t>• ("Delivery ST-ready issues with imgs", export_with_images_all)</a:t>
-            </a:r>
-          </a:p>
-          <a:p>
-            <a:pPr>
-              <a:spcBef>
-                <a:spcPts val="600"/>
-              </a:spcBef>
-              <a:defRPr sz="1400">
-                <a:solidFill>
-                  <a:srgbClr val="333333"/>
-                </a:solidFill>
-              </a:defRPr>
-            </a:pPr>
-            <a:r>
-              <a:t>• ("Alfred image descriptions",          _enrich_alfred_images_main)</a:t>
-            </a:r>
-          </a:p>
-          <a:p>
-            <a:pPr>
-              <a:spcBef>
-                <a:spcPts val="600"/>
-              </a:spcBef>
-              <a:defRPr sz="1400">
-                <a:solidFill>
-                  <a:srgbClr val="333333"/>
-                </a:solidFill>
-              </a:defRPr>
-            </a:pPr>
-          </a:p>
-          <a:p>
-            <a:pPr>
-              <a:spcBef>
-                <a:spcPts val="1200"/>
-              </a:spcBef>
-              <a:defRPr sz="1600" b="1">
-                <a:solidFill>
-                  <a:srgbClr val="03234B"/>
-                </a:solidFill>
-              </a:defRPr>
-            </a:pPr>
-            <a:r>
-              <a:t>Gestion d'erreurs :</a:t>
-            </a:r>
-          </a:p>
-          <a:p>
-            <a:pPr>
-              <a:spcBef>
-                <a:spcPts val="600"/>
-              </a:spcBef>
-              <a:defRPr sz="1400">
-                <a:solidFill>
-                  <a:srgbClr val="333333"/>
-                </a:solidFill>
-              </a:defRPr>
-            </a:pPr>
-            <a:r>
-              <a:t>• Sans --continue-on-error → exception = STOP immédiat</a:t>
-            </a:r>
-          </a:p>
-          <a:p>
-            <a:pPr>
-              <a:spcBef>
-                <a:spcPts val="600"/>
-              </a:spcBef>
-              <a:defRPr sz="1400">
-                <a:solidFill>
-                  <a:srgbClr val="333333"/>
-                </a:solidFill>
-              </a:defRPr>
-            </a:pPr>
-            <a:r>
-              <a:t>• Avec --continue-on-error → print [WARN] + passe au step suivant</a:t>
-            </a:r>
-          </a:p>
-          <a:p>
-            <a:pPr>
-              <a:spcBef>
-                <a:spcPts val="600"/>
-              </a:spcBef>
-              <a:defRPr sz="1400">
-                <a:solidFill>
-                  <a:srgbClr val="333333"/>
-                </a:solidFill>
-              </a:defRPr>
-            </a:pPr>
-          </a:p>
-          <a:p>
-            <a:pPr>
-              <a:spcBef>
-                <a:spcPts val="1200"/>
-              </a:spcBef>
-              <a:defRPr sz="1600" b="1">
-                <a:solidFill>
-                  <a:srgbClr val="03234B"/>
-                </a:solidFill>
-              </a:defRPr>
-            </a:pPr>
-            <a:r>
-              <a:t>Config : $env:STM32CUBE_CONFIG → shared/utils/paths.py → get_config_path()</a:t>
+              <a:t>Quand utiliser lequel ?</a:t>
+            </a:r>
+          </a:p>
+          <a:p>
+            <a:pPr>
+              <a:spcBef>
+                <a:spcPts val="600"/>
+              </a:spcBef>
+              <a:defRPr sz="1400">
+                <a:solidFill>
+                  <a:srgbClr val="333333"/>
+                </a:solidFill>
+              </a:defRPr>
+            </a:pPr>
+            <a:r>
+              <a:t>• Nouvelle série de zéro → run_full_workflow (complet)</a:t>
+            </a:r>
+          </a:p>
+          <a:p>
+            <a:pPr>
+              <a:spcBef>
+                <a:spcPts val="600"/>
+              </a:spcBef>
+              <a:defRPr sz="1400">
+                <a:solidFill>
+                  <a:srgbClr val="333333"/>
+                </a:solidFill>
+              </a:defRPr>
+            </a:pPr>
+            <a:r>
+              <a:t>• Fix dans l'enrichissement issues → Run_Issues_Pipeline (rapide)</a:t>
+            </a:r>
+          </a:p>
+          <a:p>
+            <a:pPr>
+              <a:spcBef>
+                <a:spcPts val="600"/>
+              </a:spcBef>
+              <a:defRPr sz="1400">
+                <a:solidFill>
+                  <a:srgbClr val="333333"/>
+                </a:solidFill>
+              </a:defRPr>
+            </a:pPr>
+            <a:r>
+              <a:t>• Mise à jour des files seulement → lancer les étapes files individuellement</a:t>
             </a:r>
           </a:p>
         </p:txBody>
@@ -3604,8 +4394,8 @@
 </p:sld>
 </file>
 
-<file path=ppt/slides/slide11.xml><?xml version="1.0" encoding="utf-8"?>
-<p:sld xmlns:a="http://schemas.openxmlformats.org/drawingml/2006/main" xmlns:p="http://schemas.openxmlformats.org/presentationml/2006/main" xmlns:r="http://schemas.openxmlformats.org/officeDocument/2006/relationships">
+<file path=ppt/slides/slide12.xml><?xml version="1.0" encoding="utf-8"?>
+<p:sld xmlns:a="http://schemas.openxmlformats.org/drawingml/2006/main" xmlns:r="http://schemas.openxmlformats.org/officeDocument/2006/relationships" xmlns:p="http://schemas.openxmlformats.org/presentationml/2006/main">
   <p:cSld>
     <p:bg>
       <p:bgPr>
@@ -3621,7 +4411,14 @@
         <p:cNvGrpSpPr/>
         <p:nvPr/>
       </p:nvGrpSpPr>
-      <p:grpSpPr/>
+      <p:grpSpPr>
+        <a:xfrm>
+          <a:off x="0" y="0"/>
+          <a:ext cx="0" cy="0"/>
+          <a:chOff x="0" y="0"/>
+          <a:chExt cx="0" cy="0"/>
+        </a:xfrm>
+      </p:grpSpPr>
       <p:sp>
         <p:nvSpPr>
           <p:cNvPr id="2" name="Rectangle 1"/>
@@ -3669,7 +4466,7 @@
               </a:defRPr>
             </a:pPr>
             <a:r>
-              <a:t>run_full_workflow vs Run_Issues_Pipeline_For_All_Repos</a:t>
+              <a:t>Batch — Lancer toutes les séries</a:t>
             </a:r>
           </a:p>
         </p:txBody>
@@ -3707,65 +4504,160 @@
               </a:defRPr>
             </a:pPr>
             <a:r>
-              <a:t>run_full_workflow.py (Python) :</a:t>
-            </a:r>
-          </a:p>
-          <a:p>
-            <a:pPr>
-              <a:spcBef>
-                <a:spcPts val="600"/>
-              </a:spcBef>
-              <a:defRPr sz="1400">
-                <a:solidFill>
-                  <a:srgbClr val="333333"/>
-                </a:solidFill>
-              </a:defRPr>
-            </a:pPr>
-            <a:r>
-              <a:t>• Fait TOUT : issues + files + similarity + chunking + eval + delivery</a:t>
-            </a:r>
-          </a:p>
-          <a:p>
-            <a:pPr>
-              <a:spcBef>
-                <a:spcPts val="600"/>
-              </a:spcBef>
-              <a:defRPr sz="1400">
-                <a:solidFill>
-                  <a:srgbClr val="333333"/>
-                </a:solidFill>
-              </a:defRPr>
-            </a:pPr>
-            <a:r>
-              <a:t>• 17-21 étapes complètes</a:t>
-            </a:r>
-          </a:p>
-          <a:p>
-            <a:pPr>
-              <a:spcBef>
-                <a:spcPts val="600"/>
-              </a:spcBef>
-              <a:defRPr sz="1400">
-                <a:solidFill>
-                  <a:srgbClr val="333333"/>
-                </a:solidFill>
-              </a:defRPr>
-            </a:pPr>
-            <a:r>
-              <a:t>• Utilisé pour un traitement complet d'une série</a:t>
-            </a:r>
-          </a:p>
-          <a:p>
-            <a:pPr>
-              <a:spcBef>
-                <a:spcPts val="600"/>
-              </a:spcBef>
-              <a:defRPr sz="1400">
-                <a:solidFill>
-                  <a:srgbClr val="333333"/>
-                </a:solidFill>
-              </a:defRPr>
-            </a:pPr>
+              <a:t>Script PowerShell batch :</a:t>
+            </a:r>
+          </a:p>
+          <a:p>
+            <a:pPr>
+              <a:spcBef>
+                <a:spcPts val="600"/>
+              </a:spcBef>
+              <a:defRPr sz="1400">
+                <a:solidFill>
+                  <a:srgbClr val="333333"/>
+                </a:solidFill>
+              </a:defRPr>
+            </a:pPr>
+            <a:endParaRPr/>
+          </a:p>
+          <a:p>
+            <a:pPr>
+              <a:spcBef>
+                <a:spcPts val="400"/>
+              </a:spcBef>
+              <a:defRPr sz="1200">
+                <a:solidFill>
+                  <a:srgbClr val="333333"/>
+                </a:solidFill>
+                <a:latin typeface="Consolas"/>
+              </a:defRPr>
+            </a:pPr>
+            <a:r>
+              <a:t>$series = @("config_c0", "config_f0", "config_f1", "config_f2",</a:t>
+            </a:r>
+          </a:p>
+          <a:p>
+            <a:pPr>
+              <a:spcBef>
+                <a:spcPts val="400"/>
+              </a:spcBef>
+              <a:defRPr sz="1200">
+                <a:solidFill>
+                  <a:srgbClr val="333333"/>
+                </a:solidFill>
+                <a:latin typeface="Consolas"/>
+              </a:defRPr>
+            </a:pPr>
+            <a:r>
+              <a:t>"config_f3", "config_f7", "config_g0", "config_h7rs")</a:t>
+            </a:r>
+          </a:p>
+          <a:p>
+            <a:pPr>
+              <a:spcBef>
+                <a:spcPts val="400"/>
+              </a:spcBef>
+              <a:defRPr sz="1200">
+                <a:solidFill>
+                  <a:srgbClr val="333333"/>
+                </a:solidFill>
+                <a:latin typeface="Consolas"/>
+              </a:defRPr>
+            </a:pPr>
+            <a:endParaRPr/>
+          </a:p>
+          <a:p>
+            <a:pPr>
+              <a:spcBef>
+                <a:spcPts val="400"/>
+              </a:spcBef>
+              <a:defRPr sz="1200">
+                <a:solidFill>
+                  <a:srgbClr val="333333"/>
+                </a:solidFill>
+                <a:latin typeface="Consolas"/>
+              </a:defRPr>
+            </a:pPr>
+            <a:r>
+              <a:t>foreach ($s in $series) {</a:t>
+            </a:r>
+          </a:p>
+          <a:p>
+            <a:pPr>
+              <a:spcBef>
+                <a:spcPts val="400"/>
+              </a:spcBef>
+              <a:defRPr sz="1200">
+                <a:solidFill>
+                  <a:srgbClr val="333333"/>
+                </a:solidFill>
+                <a:latin typeface="Consolas"/>
+              </a:defRPr>
+            </a:pPr>
+            <a:r>
+              <a:t>Write-Host "=== Processing $s ===" -ForegroundColor Cyan</a:t>
+            </a:r>
+          </a:p>
+          <a:p>
+            <a:pPr>
+              <a:spcBef>
+                <a:spcPts val="400"/>
+              </a:spcBef>
+              <a:defRPr sz="1200">
+                <a:solidFill>
+                  <a:srgbClr val="333333"/>
+                </a:solidFill>
+                <a:latin typeface="Consolas"/>
+              </a:defRPr>
+            </a:pPr>
+            <a:r>
+              <a:t>$env:STM32CUBE_CONFIG = "shared/config/$s.json"</a:t>
+            </a:r>
+          </a:p>
+          <a:p>
+            <a:pPr>
+              <a:spcBef>
+                <a:spcPts val="400"/>
+              </a:spcBef>
+              <a:defRPr sz="1200">
+                <a:solidFill>
+                  <a:srgbClr val="333333"/>
+                </a:solidFill>
+                <a:latin typeface="Consolas"/>
+              </a:defRPr>
+            </a:pPr>
+            <a:r>
+              <a:t>python -m pipeline.run_full_workflow --export-st-ready --continue-on-error</a:t>
+            </a:r>
+          </a:p>
+          <a:p>
+            <a:pPr>
+              <a:spcBef>
+                <a:spcPts val="400"/>
+              </a:spcBef>
+              <a:defRPr sz="1200">
+                <a:solidFill>
+                  <a:srgbClr val="333333"/>
+                </a:solidFill>
+                <a:latin typeface="Consolas"/>
+              </a:defRPr>
+            </a:pPr>
+            <a:r>
+              <a:t>}</a:t>
+            </a:r>
+          </a:p>
+          <a:p>
+            <a:pPr>
+              <a:spcBef>
+                <a:spcPts val="600"/>
+              </a:spcBef>
+              <a:defRPr sz="1400">
+                <a:solidFill>
+                  <a:srgbClr val="333333"/>
+                </a:solidFill>
+              </a:defRPr>
+            </a:pPr>
+            <a:endParaRPr/>
           </a:p>
           <a:p>
             <a:pPr>
@@ -3779,80 +4671,81 @@
               </a:defRPr>
             </a:pPr>
             <a:r>
-              <a:t>Run_Issues_Pipeline_For_All_Repos.ps1 (PowerShell) :</a:t>
-            </a:r>
-          </a:p>
-          <a:p>
-            <a:pPr>
-              <a:spcBef>
-                <a:spcPts val="600"/>
-              </a:spcBef>
-              <a:defRPr sz="1400">
-                <a:solidFill>
-                  <a:srgbClr val="333333"/>
-                </a:solidFill>
-              </a:defRPr>
-            </a:pPr>
-            <a:r>
-              <a:t>• Raccourci ISSUES-ONLY : clean → enrich → [similarity] → [chunking] → delivery</a:t>
-            </a:r>
-          </a:p>
-          <a:p>
-            <a:pPr>
-              <a:spcBef>
-                <a:spcPts val="600"/>
-              </a:spcBef>
-              <a:defRPr sz="1400">
-                <a:solidFill>
-                  <a:srgbClr val="333333"/>
-                </a:solidFill>
-              </a:defRPr>
-            </a:pPr>
-            <a:r>
-              <a:t>• Seulement 3-5 étapes (pas de files, pas d'ingestion)</a:t>
-            </a:r>
-          </a:p>
-          <a:p>
-            <a:pPr>
-              <a:spcBef>
-                <a:spcPts val="600"/>
-              </a:spcBef>
-              <a:defRPr sz="1400">
-                <a:solidFill>
-                  <a:srgbClr val="333333"/>
-                </a:solidFill>
-              </a:defRPr>
-            </a:pPr>
-            <a:r>
-              <a:t>• Suppose que les raw_issues sont DÉJÀ téléchargés</a:t>
-            </a:r>
-          </a:p>
-          <a:p>
-            <a:pPr>
-              <a:spcBef>
-                <a:spcPts val="600"/>
-              </a:spcBef>
-              <a:defRPr sz="1400">
-                <a:solidFill>
-                  <a:srgbClr val="333333"/>
-                </a:solidFill>
-              </a:defRPr>
-            </a:pPr>
-            <a:r>
-              <a:t>• Utilisé pour re-processer rapidement les issues après un fix</a:t>
-            </a:r>
-          </a:p>
-          <a:p>
-            <a:pPr>
-              <a:spcBef>
-                <a:spcPts val="600"/>
-              </a:spcBef>
-              <a:defRPr sz="1400">
-                <a:solidFill>
-                  <a:srgbClr val="333333"/>
-                </a:solidFill>
-              </a:defRPr>
-            </a:pPr>
+              <a:t>Points importants :</a:t>
+            </a:r>
+          </a:p>
+          <a:p>
+            <a:pPr>
+              <a:spcBef>
+                <a:spcPts val="600"/>
+              </a:spcBef>
+              <a:defRPr sz="1400">
+                <a:solidFill>
+                  <a:srgbClr val="333333"/>
+                </a:solidFill>
+              </a:defRPr>
+            </a:pPr>
+            <a:r>
+              <a:t>• Chaque itération est INDÉPENDANTE (son propre config, ses propres data/)</a:t>
+            </a:r>
+          </a:p>
+          <a:p>
+            <a:pPr>
+              <a:spcBef>
+                <a:spcPts val="600"/>
+              </a:spcBef>
+              <a:defRPr sz="1400">
+                <a:solidFill>
+                  <a:srgbClr val="333333"/>
+                </a:solidFill>
+              </a:defRPr>
+            </a:pPr>
+            <a:r>
+              <a:t>• Si une série échoue, les autres continuent grâce à --continue-on-error</a:t>
+            </a:r>
+          </a:p>
+          <a:p>
+            <a:pPr>
+              <a:spcBef>
+                <a:spcPts val="600"/>
+              </a:spcBef>
+              <a:defRPr sz="1400">
+                <a:solidFill>
+                  <a:srgbClr val="333333"/>
+                </a:solidFill>
+              </a:defRPr>
+            </a:pPr>
+            <a:r>
+              <a:t>• Les fichiers data/ sont nommés par repo → pas de collision</a:t>
+            </a:r>
+          </a:p>
+          <a:p>
+            <a:pPr>
+              <a:spcBef>
+                <a:spcPts val="600"/>
+              </a:spcBef>
+              <a:defRPr sz="1400">
+                <a:solidFill>
+                  <a:srgbClr val="333333"/>
+                </a:solidFill>
+              </a:defRPr>
+            </a:pPr>
+            <a:r>
+              <a:t>• Durée totale : ~10-30 min/série (dépend du nombre d'issues)</a:t>
+            </a:r>
+          </a:p>
+          <a:p>
+            <a:pPr>
+              <a:spcBef>
+                <a:spcPts val="600"/>
+              </a:spcBef>
+              <a:defRPr sz="1400">
+                <a:solidFill>
+                  <a:srgbClr val="333333"/>
+                </a:solidFill>
+              </a:defRPr>
+            </a:pPr>
+            <a:endParaRPr/>
           </a:p>
           <a:p>
             <a:pPr>
@@ -3866,52 +4759,7 @@
               </a:defRPr>
             </a:pPr>
             <a:r>
-              <a:t>Quand utiliser lequel ?</a:t>
-            </a:r>
-          </a:p>
-          <a:p>
-            <a:pPr>
-              <a:spcBef>
-                <a:spcPts val="600"/>
-              </a:spcBef>
-              <a:defRPr sz="1400">
-                <a:solidFill>
-                  <a:srgbClr val="333333"/>
-                </a:solidFill>
-              </a:defRPr>
-            </a:pPr>
-            <a:r>
-              <a:t>• Nouvelle série de zéro → run_full_workflow (complet)</a:t>
-            </a:r>
-          </a:p>
-          <a:p>
-            <a:pPr>
-              <a:spcBef>
-                <a:spcPts val="600"/>
-              </a:spcBef>
-              <a:defRPr sz="1400">
-                <a:solidFill>
-                  <a:srgbClr val="333333"/>
-                </a:solidFill>
-              </a:defRPr>
-            </a:pPr>
-            <a:r>
-              <a:t>• Fix dans l'enrichissement issues → Run_Issues_Pipeline (rapide)</a:t>
-            </a:r>
-          </a:p>
-          <a:p>
-            <a:pPr>
-              <a:spcBef>
-                <a:spcPts val="600"/>
-              </a:spcBef>
-              <a:defRPr sz="1400">
-                <a:solidFill>
-                  <a:srgbClr val="333333"/>
-                </a:solidFill>
-              </a:defRPr>
-            </a:pPr>
-            <a:r>
-              <a:t>• Mise à jour des files seulement → lancer les étapes files individuellement</a:t>
+              <a:t>Voir aussi : pipeline_Automation/workflow/Run_Issues_Pipeline_For_All_Repos.ps1</a:t>
             </a:r>
           </a:p>
         </p:txBody>
@@ -3924,8 +4772,8 @@
 </p:sld>
 </file>
 
-<file path=ppt/slides/slide12.xml><?xml version="1.0" encoding="utf-8"?>
-<p:sld xmlns:a="http://schemas.openxmlformats.org/drawingml/2006/main" xmlns:p="http://schemas.openxmlformats.org/presentationml/2006/main" xmlns:r="http://schemas.openxmlformats.org/officeDocument/2006/relationships">
+<file path=ppt/slides/slide13.xml><?xml version="1.0" encoding="utf-8"?>
+<p:sld xmlns:a="http://schemas.openxmlformats.org/drawingml/2006/main" xmlns:r="http://schemas.openxmlformats.org/officeDocument/2006/relationships" xmlns:p="http://schemas.openxmlformats.org/presentationml/2006/main">
   <p:cSld>
     <p:bg>
       <p:bgPr>
@@ -3941,374 +4789,14 @@
         <p:cNvGrpSpPr/>
         <p:nvPr/>
       </p:nvGrpSpPr>
-      <p:grpSpPr/>
-      <p:sp>
-        <p:nvSpPr>
-          <p:cNvPr id="2" name="Rectangle 1"/>
-          <p:cNvSpPr/>
-          <p:nvPr/>
-        </p:nvSpPr>
-        <p:spPr>
-          <a:xfrm>
-            <a:off x="0" y="0"/>
-            <a:ext cx="9144000" cy="914400"/>
-          </a:xfrm>
-          <a:prstGeom prst="rect">
-            <a:avLst/>
-          </a:prstGeom>
-          <a:solidFill>
-            <a:srgbClr val="03234B"/>
-          </a:solidFill>
-          <a:ln>
-            <a:noFill/>
-          </a:ln>
-        </p:spPr>
-        <p:style>
-          <a:lnRef idx="1">
-            <a:schemeClr val="accent1"/>
-          </a:lnRef>
-          <a:fillRef idx="3">
-            <a:schemeClr val="accent1"/>
-          </a:fillRef>
-          <a:effectRef idx="2">
-            <a:schemeClr val="accent1"/>
-          </a:effectRef>
-          <a:fontRef idx="minor">
-            <a:schemeClr val="lt1"/>
-          </a:fontRef>
-        </p:style>
-        <p:txBody>
-          <a:bodyPr rtlCol="0" anchor="ctr"/>
-          <a:lstStyle/>
-          <a:p>
-            <a:pPr algn="l">
-              <a:defRPr sz="2200" b="1">
-                <a:solidFill>
-                  <a:srgbClr val="FFFFFF"/>
-                </a:solidFill>
-              </a:defRPr>
-            </a:pPr>
-            <a:r>
-              <a:t>Batch — Lancer toutes les séries</a:t>
-            </a:r>
-          </a:p>
-        </p:txBody>
-      </p:sp>
-      <p:sp>
-        <p:nvSpPr>
-          <p:cNvPr id="3" name="TextBox 2"/>
-          <p:cNvSpPr txBox="1"/>
-          <p:nvPr/>
-        </p:nvSpPr>
-        <p:spPr>
-          <a:xfrm>
-            <a:off x="548640" y="1188720"/>
-            <a:ext cx="8046720" cy="5029200"/>
-          </a:xfrm>
-          <a:prstGeom prst="rect">
-            <a:avLst/>
-          </a:prstGeom>
-          <a:noFill/>
-        </p:spPr>
-        <p:txBody>
-          <a:bodyPr wrap="square">
-            <a:spAutoFit/>
-          </a:bodyPr>
-          <a:lstStyle/>
-          <a:p>
-            <a:pPr>
-              <a:spcBef>
-                <a:spcPts val="1200"/>
-              </a:spcBef>
-              <a:defRPr sz="1600" b="1">
-                <a:solidFill>
-                  <a:srgbClr val="03234B"/>
-                </a:solidFill>
-              </a:defRPr>
-            </a:pPr>
-            <a:r>
-              <a:t>Script PowerShell batch :</a:t>
-            </a:r>
-          </a:p>
-          <a:p>
-            <a:pPr>
-              <a:spcBef>
-                <a:spcPts val="600"/>
-              </a:spcBef>
-              <a:defRPr sz="1400">
-                <a:solidFill>
-                  <a:srgbClr val="333333"/>
-                </a:solidFill>
-              </a:defRPr>
-            </a:pPr>
-          </a:p>
-          <a:p>
-            <a:pPr>
-              <a:spcBef>
-                <a:spcPts val="400"/>
-              </a:spcBef>
-              <a:defRPr sz="1200">
-                <a:solidFill>
-                  <a:srgbClr val="333333"/>
-                </a:solidFill>
-                <a:latin typeface="Consolas"/>
-              </a:defRPr>
-            </a:pPr>
-            <a:r>
-              <a:t>$series = @("config_c0", "config_f0", "config_f1", "config_f2",</a:t>
-            </a:r>
-          </a:p>
-          <a:p>
-            <a:pPr>
-              <a:spcBef>
-                <a:spcPts val="400"/>
-              </a:spcBef>
-              <a:defRPr sz="1200">
-                <a:solidFill>
-                  <a:srgbClr val="333333"/>
-                </a:solidFill>
-                <a:latin typeface="Consolas"/>
-              </a:defRPr>
-            </a:pPr>
-            <a:r>
-              <a:t>"config_f3", "config_f7", "config_g0", "config_h7rs")</a:t>
-            </a:r>
-          </a:p>
-          <a:p>
-            <a:pPr>
-              <a:spcBef>
-                <a:spcPts val="400"/>
-              </a:spcBef>
-              <a:defRPr sz="1200">
-                <a:solidFill>
-                  <a:srgbClr val="333333"/>
-                </a:solidFill>
-                <a:latin typeface="Consolas"/>
-              </a:defRPr>
-            </a:pPr>
-          </a:p>
-          <a:p>
-            <a:pPr>
-              <a:spcBef>
-                <a:spcPts val="400"/>
-              </a:spcBef>
-              <a:defRPr sz="1200">
-                <a:solidFill>
-                  <a:srgbClr val="333333"/>
-                </a:solidFill>
-                <a:latin typeface="Consolas"/>
-              </a:defRPr>
-            </a:pPr>
-            <a:r>
-              <a:t>foreach ($s in $series) {</a:t>
-            </a:r>
-          </a:p>
-          <a:p>
-            <a:pPr>
-              <a:spcBef>
-                <a:spcPts val="400"/>
-              </a:spcBef>
-              <a:defRPr sz="1200">
-                <a:solidFill>
-                  <a:srgbClr val="333333"/>
-                </a:solidFill>
-                <a:latin typeface="Consolas"/>
-              </a:defRPr>
-            </a:pPr>
-            <a:r>
-              <a:t>Write-Host "=== Processing $s ===" -ForegroundColor Cyan</a:t>
-            </a:r>
-          </a:p>
-          <a:p>
-            <a:pPr>
-              <a:spcBef>
-                <a:spcPts val="400"/>
-              </a:spcBef>
-              <a:defRPr sz="1200">
-                <a:solidFill>
-                  <a:srgbClr val="333333"/>
-                </a:solidFill>
-                <a:latin typeface="Consolas"/>
-              </a:defRPr>
-            </a:pPr>
-            <a:r>
-              <a:t>$env:STM32CUBE_CONFIG = "shared/config/$s.json"</a:t>
-            </a:r>
-          </a:p>
-          <a:p>
-            <a:pPr>
-              <a:spcBef>
-                <a:spcPts val="400"/>
-              </a:spcBef>
-              <a:defRPr sz="1200">
-                <a:solidFill>
-                  <a:srgbClr val="333333"/>
-                </a:solidFill>
-                <a:latin typeface="Consolas"/>
-              </a:defRPr>
-            </a:pPr>
-            <a:r>
-              <a:t>python -m pipeline.run_full_workflow --export-st-ready --continue-on-error</a:t>
-            </a:r>
-          </a:p>
-          <a:p>
-            <a:pPr>
-              <a:spcBef>
-                <a:spcPts val="400"/>
-              </a:spcBef>
-              <a:defRPr sz="1200">
-                <a:solidFill>
-                  <a:srgbClr val="333333"/>
-                </a:solidFill>
-                <a:latin typeface="Consolas"/>
-              </a:defRPr>
-            </a:pPr>
-            <a:r>
-              <a:t>}</a:t>
-            </a:r>
-          </a:p>
-          <a:p>
-            <a:pPr>
-              <a:spcBef>
-                <a:spcPts val="600"/>
-              </a:spcBef>
-              <a:defRPr sz="1400">
-                <a:solidFill>
-                  <a:srgbClr val="333333"/>
-                </a:solidFill>
-              </a:defRPr>
-            </a:pPr>
-          </a:p>
-          <a:p>
-            <a:pPr>
-              <a:spcBef>
-                <a:spcPts val="1200"/>
-              </a:spcBef>
-              <a:defRPr sz="1600" b="1">
-                <a:solidFill>
-                  <a:srgbClr val="03234B"/>
-                </a:solidFill>
-              </a:defRPr>
-            </a:pPr>
-            <a:r>
-              <a:t>Points importants :</a:t>
-            </a:r>
-          </a:p>
-          <a:p>
-            <a:pPr>
-              <a:spcBef>
-                <a:spcPts val="600"/>
-              </a:spcBef>
-              <a:defRPr sz="1400">
-                <a:solidFill>
-                  <a:srgbClr val="333333"/>
-                </a:solidFill>
-              </a:defRPr>
-            </a:pPr>
-            <a:r>
-              <a:t>• Chaque itération est INDÉPENDANTE (son propre config, ses propres data/)</a:t>
-            </a:r>
-          </a:p>
-          <a:p>
-            <a:pPr>
-              <a:spcBef>
-                <a:spcPts val="600"/>
-              </a:spcBef>
-              <a:defRPr sz="1400">
-                <a:solidFill>
-                  <a:srgbClr val="333333"/>
-                </a:solidFill>
-              </a:defRPr>
-            </a:pPr>
-            <a:r>
-              <a:t>• Si une série échoue, les autres continuent grâce à --continue-on-error</a:t>
-            </a:r>
-          </a:p>
-          <a:p>
-            <a:pPr>
-              <a:spcBef>
-                <a:spcPts val="600"/>
-              </a:spcBef>
-              <a:defRPr sz="1400">
-                <a:solidFill>
-                  <a:srgbClr val="333333"/>
-                </a:solidFill>
-              </a:defRPr>
-            </a:pPr>
-            <a:r>
-              <a:t>• Les fichiers data/ sont nommés par repo → pas de collision</a:t>
-            </a:r>
-          </a:p>
-          <a:p>
-            <a:pPr>
-              <a:spcBef>
-                <a:spcPts val="600"/>
-              </a:spcBef>
-              <a:defRPr sz="1400">
-                <a:solidFill>
-                  <a:srgbClr val="333333"/>
-                </a:solidFill>
-              </a:defRPr>
-            </a:pPr>
-            <a:r>
-              <a:t>• Durée totale : ~10-30 min/série (dépend du nombre d'issues)</a:t>
-            </a:r>
-          </a:p>
-          <a:p>
-            <a:pPr>
-              <a:spcBef>
-                <a:spcPts val="600"/>
-              </a:spcBef>
-              <a:defRPr sz="1400">
-                <a:solidFill>
-                  <a:srgbClr val="333333"/>
-                </a:solidFill>
-              </a:defRPr>
-            </a:pPr>
-          </a:p>
-          <a:p>
-            <a:pPr>
-              <a:spcBef>
-                <a:spcPts val="1200"/>
-              </a:spcBef>
-              <a:defRPr sz="1600" b="1">
-                <a:solidFill>
-                  <a:srgbClr val="03234B"/>
-                </a:solidFill>
-              </a:defRPr>
-            </a:pPr>
-            <a:r>
-              <a:t>Voir aussi : pipeline_Automation/workflow/Run_Issues_Pipeline_For_All_Repos.ps1</a:t>
-            </a:r>
-          </a:p>
-        </p:txBody>
-      </p:sp>
-    </p:spTree>
-  </p:cSld>
-  <p:clrMapOvr>
-    <a:masterClrMapping/>
-  </p:clrMapOvr>
-</p:sld>
-</file>
-
-<file path=ppt/slides/slide13.xml><?xml version="1.0" encoding="utf-8"?>
-<p:sld xmlns:a="http://schemas.openxmlformats.org/drawingml/2006/main" xmlns:p="http://schemas.openxmlformats.org/presentationml/2006/main" xmlns:r="http://schemas.openxmlformats.org/officeDocument/2006/relationships">
-  <p:cSld>
-    <p:bg>
-      <p:bgPr>
-        <a:solidFill>
-          <a:srgbClr val="FFFFFF"/>
-        </a:solidFill>
-        <a:effectLst/>
-      </p:bgPr>
-    </p:bg>
-    <p:spTree>
-      <p:nvGrpSpPr>
-        <p:cNvPr id="1" name=""/>
-        <p:cNvGrpSpPr/>
-        <p:nvPr/>
-      </p:nvGrpSpPr>
-      <p:grpSpPr/>
+      <p:grpSpPr>
+        <a:xfrm>
+          <a:off x="0" y="0"/>
+          <a:ext cx="0" cy="0"/>
+          <a:chOff x="0" y="0"/>
+          <a:chExt cx="0" cy="0"/>
+        </a:xfrm>
+      </p:grpSpPr>
       <p:sp>
         <p:nvSpPr>
           <p:cNvPr id="2" name="Rectangle 1"/>
@@ -4371,7 +4859,7 @@
         </p:nvGraphicFramePr>
         <p:xfrm>
           <a:off x="274320" y="1005840"/>
-          <a:ext cx="8595360" cy="4754880"/>
+          <a:ext cx="8595360" cy="4815840"/>
         </p:xfrm>
         <a:graphic>
           <a:graphicData uri="http://schemas.openxmlformats.org/drawingml/2006/table">
@@ -4380,10 +4868,34 @@
                 <a:tableStyleId>{5C22544A-7EE6-4342-B048-85BDC9FD1C3A}</a:tableStyleId>
               </a:tblPr>
               <a:tblGrid>
-                <a:gridCol w="2148840"/>
-                <a:gridCol w="2148840"/>
-                <a:gridCol w="2148840"/>
-                <a:gridCol w="2148840"/>
+                <a:gridCol w="2148840">
+                  <a:extLst>
+                    <a:ext uri="{9D8B030D-6E8A-4147-A177-3AD203B41FA5}">
+                      <a16:colId xmlns:a16="http://schemas.microsoft.com/office/drawing/2014/main" val="20000"/>
+                    </a:ext>
+                  </a:extLst>
+                </a:gridCol>
+                <a:gridCol w="2148840">
+                  <a:extLst>
+                    <a:ext uri="{9D8B030D-6E8A-4147-A177-3AD203B41FA5}">
+                      <a16:colId xmlns:a16="http://schemas.microsoft.com/office/drawing/2014/main" val="20001"/>
+                    </a:ext>
+                  </a:extLst>
+                </a:gridCol>
+                <a:gridCol w="2148840">
+                  <a:extLst>
+                    <a:ext uri="{9D8B030D-6E8A-4147-A177-3AD203B41FA5}">
+                      <a16:colId xmlns:a16="http://schemas.microsoft.com/office/drawing/2014/main" val="20002"/>
+                    </a:ext>
+                  </a:extLst>
+                </a:gridCol>
+                <a:gridCol w="2148840">
+                  <a:extLst>
+                    <a:ext uri="{9D8B030D-6E8A-4147-A177-3AD203B41FA5}">
+                      <a16:colId xmlns:a16="http://schemas.microsoft.com/office/drawing/2014/main" val="20003"/>
+                    </a:ext>
+                  </a:extLst>
+                </a:gridCol>
               </a:tblGrid>
               <a:tr h="365760">
                 <a:tc>
@@ -4478,6 +4990,11 @@
                     </a:solidFill>
                   </a:tcPr>
                 </a:tc>
+                <a:extLst>
+                  <a:ext uri="{0D108BD9-81ED-4DB2-BD59-A6C34878D82A}">
+                    <a16:rowId xmlns:a16="http://schemas.microsoft.com/office/drawing/2014/main" val="10000"/>
+                  </a:ext>
+                </a:extLst>
               </a:tr>
               <a:tr h="365760">
                 <a:tc>
@@ -4556,6 +5073,11 @@
                   </a:txBody>
                   <a:tcPr/>
                 </a:tc>
+                <a:extLst>
+                  <a:ext uri="{0D108BD9-81ED-4DB2-BD59-A6C34878D82A}">
+                    <a16:rowId xmlns:a16="http://schemas.microsoft.com/office/drawing/2014/main" val="10001"/>
+                  </a:ext>
+                </a:extLst>
               </a:tr>
               <a:tr h="365760">
                 <a:tc>
@@ -4634,6 +5156,11 @@
                   </a:txBody>
                   <a:tcPr/>
                 </a:tc>
+                <a:extLst>
+                  <a:ext uri="{0D108BD9-81ED-4DB2-BD59-A6C34878D82A}">
+                    <a16:rowId xmlns:a16="http://schemas.microsoft.com/office/drawing/2014/main" val="10002"/>
+                  </a:ext>
+                </a:extLst>
               </a:tr>
               <a:tr h="365760">
                 <a:tc>
@@ -4712,6 +5239,11 @@
                   </a:txBody>
                   <a:tcPr/>
                 </a:tc>
+                <a:extLst>
+                  <a:ext uri="{0D108BD9-81ED-4DB2-BD59-A6C34878D82A}">
+                    <a16:rowId xmlns:a16="http://schemas.microsoft.com/office/drawing/2014/main" val="10003"/>
+                  </a:ext>
+                </a:extLst>
               </a:tr>
               <a:tr h="365760">
                 <a:tc>
@@ -4790,6 +5322,11 @@
                   </a:txBody>
                   <a:tcPr/>
                 </a:tc>
+                <a:extLst>
+                  <a:ext uri="{0D108BD9-81ED-4DB2-BD59-A6C34878D82A}">
+                    <a16:rowId xmlns:a16="http://schemas.microsoft.com/office/drawing/2014/main" val="10004"/>
+                  </a:ext>
+                </a:extLst>
               </a:tr>
               <a:tr h="365760">
                 <a:tc>
@@ -4868,6 +5405,11 @@
                   </a:txBody>
                   <a:tcPr/>
                 </a:tc>
+                <a:extLst>
+                  <a:ext uri="{0D108BD9-81ED-4DB2-BD59-A6C34878D82A}">
+                    <a16:rowId xmlns:a16="http://schemas.microsoft.com/office/drawing/2014/main" val="10005"/>
+                  </a:ext>
+                </a:extLst>
               </a:tr>
               <a:tr h="365760">
                 <a:tc>
@@ -4946,6 +5488,11 @@
                   </a:txBody>
                   <a:tcPr/>
                 </a:tc>
+                <a:extLst>
+                  <a:ext uri="{0D108BD9-81ED-4DB2-BD59-A6C34878D82A}">
+                    <a16:rowId xmlns:a16="http://schemas.microsoft.com/office/drawing/2014/main" val="10006"/>
+                  </a:ext>
+                </a:extLst>
               </a:tr>
               <a:tr h="365760">
                 <a:tc>
@@ -5024,6 +5571,11 @@
                   </a:txBody>
                   <a:tcPr/>
                 </a:tc>
+                <a:extLst>
+                  <a:ext uri="{0D108BD9-81ED-4DB2-BD59-A6C34878D82A}">
+                    <a16:rowId xmlns:a16="http://schemas.microsoft.com/office/drawing/2014/main" val="10007"/>
+                  </a:ext>
+                </a:extLst>
               </a:tr>
               <a:tr h="365760">
                 <a:tc>
@@ -5102,6 +5654,11 @@
                   </a:txBody>
                   <a:tcPr/>
                 </a:tc>
+                <a:extLst>
+                  <a:ext uri="{0D108BD9-81ED-4DB2-BD59-A6C34878D82A}">
+                    <a16:rowId xmlns:a16="http://schemas.microsoft.com/office/drawing/2014/main" val="10008"/>
+                  </a:ext>
+                </a:extLst>
               </a:tr>
               <a:tr h="365760">
                 <a:tc>
@@ -5180,6 +5737,11 @@
                   </a:txBody>
                   <a:tcPr/>
                 </a:tc>
+                <a:extLst>
+                  <a:ext uri="{0D108BD9-81ED-4DB2-BD59-A6C34878D82A}">
+                    <a16:rowId xmlns:a16="http://schemas.microsoft.com/office/drawing/2014/main" val="10009"/>
+                  </a:ext>
+                </a:extLst>
               </a:tr>
               <a:tr h="365760">
                 <a:tc>
@@ -5258,6 +5820,11 @@
                   </a:txBody>
                   <a:tcPr/>
                 </a:tc>
+                <a:extLst>
+                  <a:ext uri="{0D108BD9-81ED-4DB2-BD59-A6C34878D82A}">
+                    <a16:rowId xmlns:a16="http://schemas.microsoft.com/office/drawing/2014/main" val="10010"/>
+                  </a:ext>
+                </a:extLst>
               </a:tr>
               <a:tr h="365760">
                 <a:tc>
@@ -5336,6 +5903,11 @@
                   </a:txBody>
                   <a:tcPr/>
                 </a:tc>
+                <a:extLst>
+                  <a:ext uri="{0D108BD9-81ED-4DB2-BD59-A6C34878D82A}">
+                    <a16:rowId xmlns:a16="http://schemas.microsoft.com/office/drawing/2014/main" val="10011"/>
+                  </a:ext>
+                </a:extLst>
               </a:tr>
               <a:tr h="365760">
                 <a:tc>
@@ -5414,6 +5986,11 @@
                   </a:txBody>
                   <a:tcPr/>
                 </a:tc>
+                <a:extLst>
+                  <a:ext uri="{0D108BD9-81ED-4DB2-BD59-A6C34878D82A}">
+                    <a16:rowId xmlns:a16="http://schemas.microsoft.com/office/drawing/2014/main" val="10012"/>
+                  </a:ext>
+                </a:extLst>
               </a:tr>
             </a:tbl>
           </a:graphicData>
@@ -5428,7 +6005,7 @@
 </file>
 
 <file path=ppt/slides/slide14.xml><?xml version="1.0" encoding="utf-8"?>
-<p:sld xmlns:a="http://schemas.openxmlformats.org/drawingml/2006/main" xmlns:p="http://schemas.openxmlformats.org/presentationml/2006/main" xmlns:r="http://schemas.openxmlformats.org/officeDocument/2006/relationships">
+<p:sld xmlns:a="http://schemas.openxmlformats.org/drawingml/2006/main" xmlns:r="http://schemas.openxmlformats.org/officeDocument/2006/relationships" xmlns:p="http://schemas.openxmlformats.org/presentationml/2006/main">
   <p:cSld>
     <p:bg>
       <p:bgPr>
@@ -5444,7 +6021,14 @@
         <p:cNvGrpSpPr/>
         <p:nvPr/>
       </p:nvGrpSpPr>
-      <p:grpSpPr/>
+      <p:grpSpPr>
+        <a:xfrm>
+          <a:off x="0" y="0"/>
+          <a:ext cx="0" cy="0"/>
+          <a:chOff x="0" y="0"/>
+          <a:chExt cx="0" cy="0"/>
+        </a:xfrm>
+      </p:grpSpPr>
       <p:sp>
         <p:nvSpPr>
           <p:cNvPr id="2" name="Rectangle 1"/>
@@ -5492,7 +6076,40 @@
               </a:defRPr>
             </a:pPr>
             <a:r>
-              <a:t>Chaque étape peut être lancée SEULE</a:t>
+              <a:rPr lang="fr-FR" dirty="0"/>
+              <a:t> </a:t>
+            </a:r>
+            <a:r>
+              <a:rPr dirty="0" err="1"/>
+              <a:t>Chaque</a:t>
+            </a:r>
+            <a:r>
+              <a:rPr dirty="0"/>
+              <a:t> étape </a:t>
+            </a:r>
+            <a:r>
+              <a:rPr dirty="0" err="1"/>
+              <a:t>peut</a:t>
+            </a:r>
+            <a:r>
+              <a:rPr dirty="0"/>
+              <a:t> </a:t>
+            </a:r>
+            <a:r>
+              <a:rPr dirty="0" err="1"/>
+              <a:t>être</a:t>
+            </a:r>
+            <a:r>
+              <a:rPr dirty="0"/>
+              <a:t> </a:t>
+            </a:r>
+            <a:r>
+              <a:rPr dirty="0" err="1"/>
+              <a:t>lancée</a:t>
+            </a:r>
+            <a:r>
+              <a:rPr dirty="0"/>
+              <a:t> SEULE</a:t>
             </a:r>
           </a:p>
         </p:txBody>
@@ -5505,7 +6122,7 @@
         </p:nvSpPr>
         <p:spPr>
           <a:xfrm>
-            <a:off x="548640" y="1188720"/>
+            <a:off x="292608" y="978408"/>
             <a:ext cx="8046720" cy="5029200"/>
           </a:xfrm>
           <a:prstGeom prst="rect">
@@ -5530,7 +6147,24 @@
               </a:defRPr>
             </a:pPr>
             <a:r>
-              <a:t>Ingestion seule (une étape) :</a:t>
+              <a:rPr dirty="0"/>
+              <a:t>Ingestion </a:t>
+            </a:r>
+            <a:r>
+              <a:rPr dirty="0" err="1"/>
+              <a:t>seule</a:t>
+            </a:r>
+            <a:r>
+              <a:rPr dirty="0"/>
+              <a:t> (</a:t>
+            </a:r>
+            <a:r>
+              <a:rPr dirty="0" err="1"/>
+              <a:t>une</a:t>
+            </a:r>
+            <a:r>
+              <a:rPr dirty="0"/>
+              <a:t> étape) :</a:t>
             </a:r>
           </a:p>
           <a:p>
@@ -5546,8 +6180,14 @@
               </a:defRPr>
             </a:pPr>
             <a:r>
-              <a:t>python -m pipeline.ingestion.fetch_issues</a:t>
-            </a:r>
+              <a:rPr dirty="0"/>
+              <a:t>python -m </a:t>
+            </a:r>
+            <a:r>
+              <a:rPr dirty="0" err="1"/>
+              <a:t>pipeline.ingestion.fetch_issues</a:t>
+            </a:r>
+            <a:endParaRPr dirty="0"/>
           </a:p>
           <a:p>
             <a:pPr>
@@ -5562,20 +6202,27 @@
               </a:defRPr>
             </a:pPr>
             <a:r>
-              <a:t>python -m pipeline.ingestion.fetch_files</a:t>
-            </a:r>
-          </a:p>
-          <a:p>
-            <a:pPr>
-              <a:spcBef>
-                <a:spcPts val="600"/>
-              </a:spcBef>
-              <a:defRPr sz="1400">
-                <a:solidFill>
-                  <a:srgbClr val="333333"/>
-                </a:solidFill>
-              </a:defRPr>
-            </a:pPr>
+              <a:rPr dirty="0"/>
+              <a:t>python -m </a:t>
+            </a:r>
+            <a:r>
+              <a:rPr dirty="0" err="1"/>
+              <a:t>pipeline.ingestion.fetch_files</a:t>
+            </a:r>
+            <a:endParaRPr dirty="0"/>
+          </a:p>
+          <a:p>
+            <a:pPr>
+              <a:spcBef>
+                <a:spcPts val="600"/>
+              </a:spcBef>
+              <a:defRPr sz="1400">
+                <a:solidFill>
+                  <a:srgbClr val="333333"/>
+                </a:solidFill>
+              </a:defRPr>
+            </a:pPr>
+            <a:endParaRPr dirty="0"/>
           </a:p>
           <a:p>
             <a:pPr>
@@ -5589,6 +6236,7 @@
               </a:defRPr>
             </a:pPr>
             <a:r>
+              <a:rPr dirty="0"/>
               <a:t>Cleaning seul :</a:t>
             </a:r>
           </a:p>
@@ -5605,8 +6253,14 @@
               </a:defRPr>
             </a:pPr>
             <a:r>
-              <a:t>python -m pipeline.cleaning.clean_issues</a:t>
-            </a:r>
+              <a:rPr dirty="0"/>
+              <a:t>python -m </a:t>
+            </a:r>
+            <a:r>
+              <a:rPr dirty="0" err="1"/>
+              <a:t>pipeline.cleaning.clean_issues</a:t>
+            </a:r>
+            <a:endParaRPr dirty="0"/>
           </a:p>
           <a:p>
             <a:pPr>
@@ -5621,20 +6275,27 @@
               </a:defRPr>
             </a:pPr>
             <a:r>
-              <a:t>python -m pipeline.cleaning.clean_files</a:t>
-            </a:r>
-          </a:p>
-          <a:p>
-            <a:pPr>
-              <a:spcBef>
-                <a:spcPts val="600"/>
-              </a:spcBef>
-              <a:defRPr sz="1400">
-                <a:solidFill>
-                  <a:srgbClr val="333333"/>
-                </a:solidFill>
-              </a:defRPr>
-            </a:pPr>
+              <a:rPr dirty="0"/>
+              <a:t>python -m </a:t>
+            </a:r>
+            <a:r>
+              <a:rPr dirty="0" err="1"/>
+              <a:t>pipeline.cleaning.clean_files</a:t>
+            </a:r>
+            <a:endParaRPr dirty="0"/>
+          </a:p>
+          <a:p>
+            <a:pPr>
+              <a:spcBef>
+                <a:spcPts val="600"/>
+              </a:spcBef>
+              <a:defRPr sz="1400">
+                <a:solidFill>
+                  <a:srgbClr val="333333"/>
+                </a:solidFill>
+              </a:defRPr>
+            </a:pPr>
+            <a:endParaRPr dirty="0"/>
           </a:p>
           <a:p>
             <a:pPr>
@@ -5648,7 +6309,12 @@
               </a:defRPr>
             </a:pPr>
             <a:r>
-              <a:t>Enrichissement seul :</a:t>
+              <a:rPr dirty="0" err="1"/>
+              <a:t>Enrichissement</a:t>
+            </a:r>
+            <a:r>
+              <a:rPr dirty="0"/>
+              <a:t> seul :</a:t>
             </a:r>
           </a:p>
           <a:p>
@@ -5664,6 +6330,7 @@
               </a:defRPr>
             </a:pPr>
             <a:r>
+              <a:rPr dirty="0"/>
               <a:t>python -m pipeline.enrichment.issues_to_docs_v2</a:t>
             </a:r>
           </a:p>
@@ -5680,6 +6347,7 @@
               </a:defRPr>
             </a:pPr>
             <a:r>
+              <a:rPr dirty="0"/>
               <a:t>python -m pipeline.enrichment.files_to_docs_v2</a:t>
             </a:r>
           </a:p>
@@ -5694,6 +6362,7 @@
                 </a:solidFill>
               </a:defRPr>
             </a:pPr>
+            <a:endParaRPr dirty="0"/>
           </a:p>
           <a:p>
             <a:pPr>
@@ -5707,7 +6376,16 @@
               </a:defRPr>
             </a:pPr>
             <a:r>
-              <a:t>Similarity seule :</a:t>
+              <a:rPr dirty="0"/>
+              <a:t>Similarity </a:t>
+            </a:r>
+            <a:r>
+              <a:rPr dirty="0" err="1"/>
+              <a:t>seule</a:t>
+            </a:r>
+            <a:r>
+              <a:rPr dirty="0"/>
+              <a:t> :</a:t>
             </a:r>
           </a:p>
           <a:p>
@@ -5723,6 +6401,7 @@
               </a:defRPr>
             </a:pPr>
             <a:r>
+              <a:rPr dirty="0"/>
               <a:t>python -m pipeline.similarity.compute_issue_similarity_v2</a:t>
             </a:r>
           </a:p>
@@ -5737,6 +6416,7 @@
                 </a:solidFill>
               </a:defRPr>
             </a:pPr>
+            <a:endParaRPr dirty="0"/>
           </a:p>
           <a:p>
             <a:pPr>
@@ -5750,6 +6430,7 @@
               </a:defRPr>
             </a:pPr>
             <a:r>
+              <a:rPr dirty="0"/>
               <a:t>Delivery seul (par type) :</a:t>
             </a:r>
           </a:p>
@@ -5766,7 +6447,16 @@
               </a:defRPr>
             </a:pPr>
             <a:r>
-              <a:t>python -m pipeline.delivery.export_st_ready_issues --repo STM32CubeH7</a:t>
+              <a:rPr dirty="0"/>
+              <a:t>python -m </a:t>
+            </a:r>
+            <a:r>
+              <a:rPr dirty="0" err="1"/>
+              <a:t>pipeline.delivery.export_st_ready_issues</a:t>
+            </a:r>
+            <a:r>
+              <a:rPr dirty="0"/>
+              <a:t> --repo STM32CubeH7</a:t>
             </a:r>
           </a:p>
           <a:p>
@@ -5782,7 +6472,16 @@
               </a:defRPr>
             </a:pPr>
             <a:r>
-              <a:t>python -m pipeline.delivery.export_st_ready_files --repo STM32CubeH7</a:t>
+              <a:rPr dirty="0"/>
+              <a:t>python -m </a:t>
+            </a:r>
+            <a:r>
+              <a:rPr dirty="0" err="1"/>
+              <a:t>pipeline.delivery.export_st_ready_files</a:t>
+            </a:r>
+            <a:r>
+              <a:rPr dirty="0"/>
+              <a:t> --repo STM32CubeH7</a:t>
             </a:r>
           </a:p>
           <a:p>
@@ -5798,7 +6497,16 @@
               </a:defRPr>
             </a:pPr>
             <a:r>
-              <a:t>python -m pipeline.delivery.export_st_ready_diagnostic_cards --repo STM32CubeH7</a:t>
+              <a:rPr dirty="0"/>
+              <a:t>python -m </a:t>
+            </a:r>
+            <a:r>
+              <a:rPr dirty="0" err="1"/>
+              <a:t>pipeline.delivery.export_st_ready_diagnostic_cards</a:t>
+            </a:r>
+            <a:r>
+              <a:rPr dirty="0"/>
+              <a:t> --repo STM32CubeH7</a:t>
             </a:r>
           </a:p>
           <a:p>
@@ -5814,7 +6522,16 @@
               </a:defRPr>
             </a:pPr>
             <a:r>
-              <a:t>python -m pipeline.delivery.export_st_ready_resolver_cases --repo STM32CubeH7</a:t>
+              <a:rPr dirty="0"/>
+              <a:t>python -m </a:t>
+            </a:r>
+            <a:r>
+              <a:rPr dirty="0" err="1"/>
+              <a:t>pipeline.delivery.export_st_ready_resolver_cases</a:t>
+            </a:r>
+            <a:r>
+              <a:rPr dirty="0"/>
+              <a:t> --repo STM32CubeH7</a:t>
             </a:r>
           </a:p>
         </p:txBody>
@@ -5828,7 +6545,7 @@
 </file>
 
 <file path=ppt/slides/slide15.xml><?xml version="1.0" encoding="utf-8"?>
-<p:sld xmlns:a="http://schemas.openxmlformats.org/drawingml/2006/main" xmlns:p="http://schemas.openxmlformats.org/presentationml/2006/main" xmlns:r="http://schemas.openxmlformats.org/officeDocument/2006/relationships">
+<p:sld xmlns:a="http://schemas.openxmlformats.org/drawingml/2006/main" xmlns:r="http://schemas.openxmlformats.org/officeDocument/2006/relationships" xmlns:p="http://schemas.openxmlformats.org/presentationml/2006/main">
   <p:cSld>
     <p:bg>
       <p:bgPr>
@@ -5844,7 +6561,14 @@
         <p:cNvGrpSpPr/>
         <p:nvPr/>
       </p:nvGrpSpPr>
-      <p:grpSpPr/>
+      <p:grpSpPr>
+        <a:xfrm>
+          <a:off x="0" y="0"/>
+          <a:ext cx="0" cy="0"/>
+          <a:chOff x="0" y="0"/>
+          <a:chExt cx="0" cy="0"/>
+        </a:xfrm>
+      </p:grpSpPr>
       <p:sp>
         <p:nvSpPr>
           <p:cNvPr id="2" name="Rectangle 1"/>
@@ -5905,7 +6629,7 @@
         </p:nvSpPr>
         <p:spPr>
           <a:xfrm>
-            <a:off x="548640" y="1188720"/>
+            <a:off x="256032" y="1033272"/>
             <a:ext cx="8046720" cy="5029200"/>
           </a:xfrm>
           <a:prstGeom prst="rect">
@@ -5930,6 +6654,7 @@
               </a:defRPr>
             </a:pPr>
             <a:r>
+              <a:rPr dirty="0"/>
               <a:t>Stats issues :</a:t>
             </a:r>
           </a:p>
@@ -5946,6 +6671,7 @@
               </a:defRPr>
             </a:pPr>
             <a:r>
+              <a:rPr dirty="0"/>
               <a:t>python -m pipeline.evaluation.test_stats_issues_v2</a:t>
             </a:r>
           </a:p>
@@ -5961,20 +6687,30 @@
               </a:defRPr>
             </a:pPr>
             <a:r>
-              <a:t>  → Affiche : nb issues, couverture layer/board/component, distribution</a:t>
-            </a:r>
-          </a:p>
-          <a:p>
-            <a:pPr>
-              <a:spcBef>
-                <a:spcPts val="600"/>
-              </a:spcBef>
-              <a:defRPr sz="1400">
-                <a:solidFill>
-                  <a:srgbClr val="333333"/>
-                </a:solidFill>
-              </a:defRPr>
-            </a:pPr>
+              <a:rPr dirty="0"/>
+              <a:t>  → Affiche : </a:t>
+            </a:r>
+            <a:r>
+              <a:rPr dirty="0" err="1"/>
+              <a:t>nb</a:t>
+            </a:r>
+            <a:r>
+              <a:rPr dirty="0"/>
+              <a:t> issues, couverture layer/board/component, distribution</a:t>
+            </a:r>
+          </a:p>
+          <a:p>
+            <a:pPr>
+              <a:spcBef>
+                <a:spcPts val="600"/>
+              </a:spcBef>
+              <a:defRPr sz="1400">
+                <a:solidFill>
+                  <a:srgbClr val="333333"/>
+                </a:solidFill>
+              </a:defRPr>
+            </a:pPr>
+            <a:endParaRPr dirty="0"/>
           </a:p>
           <a:p>
             <a:pPr>
@@ -5988,6 +6724,7 @@
               </a:defRPr>
             </a:pPr>
             <a:r>
+              <a:rPr dirty="0"/>
               <a:t>Stats files :</a:t>
             </a:r>
           </a:p>
@@ -6004,6 +6741,7 @@
               </a:defRPr>
             </a:pPr>
             <a:r>
+              <a:rPr dirty="0"/>
               <a:t>python -m pipeline.evaluation.test_stats_files_v2</a:t>
             </a:r>
           </a:p>
@@ -6019,20 +6757,46 @@
               </a:defRPr>
             </a:pPr>
             <a:r>
-              <a:t>  → Affiche : nb fichiers, types, tailles, couverture</a:t>
-            </a:r>
-          </a:p>
-          <a:p>
-            <a:pPr>
-              <a:spcBef>
-                <a:spcPts val="600"/>
-              </a:spcBef>
-              <a:defRPr sz="1400">
-                <a:solidFill>
-                  <a:srgbClr val="333333"/>
-                </a:solidFill>
-              </a:defRPr>
-            </a:pPr>
+              <a:rPr dirty="0"/>
+              <a:t>  → Affiche : </a:t>
+            </a:r>
+            <a:r>
+              <a:rPr dirty="0" err="1"/>
+              <a:t>nb</a:t>
+            </a:r>
+            <a:r>
+              <a:rPr dirty="0"/>
+              <a:t> </a:t>
+            </a:r>
+            <a:r>
+              <a:rPr dirty="0" err="1"/>
+              <a:t>fichiers</a:t>
+            </a:r>
+            <a:r>
+              <a:rPr dirty="0"/>
+              <a:t>, types, </a:t>
+            </a:r>
+            <a:r>
+              <a:rPr dirty="0" err="1"/>
+              <a:t>tailles</a:t>
+            </a:r>
+            <a:r>
+              <a:rPr dirty="0"/>
+              <a:t>, couverture</a:t>
+            </a:r>
+          </a:p>
+          <a:p>
+            <a:pPr>
+              <a:spcBef>
+                <a:spcPts val="600"/>
+              </a:spcBef>
+              <a:defRPr sz="1400">
+                <a:solidFill>
+                  <a:srgbClr val="333333"/>
+                </a:solidFill>
+              </a:defRPr>
+            </a:pPr>
+            <a:endParaRPr dirty="0"/>
           </a:p>
           <a:p>
             <a:pPr>
@@ -6046,7 +6810,16 @@
               </a:defRPr>
             </a:pPr>
             <a:r>
-              <a:t>Validation schémas :</a:t>
+              <a:rPr dirty="0"/>
+              <a:t>Validation </a:t>
+            </a:r>
+            <a:r>
+              <a:rPr dirty="0" err="1"/>
+              <a:t>schémas</a:t>
+            </a:r>
+            <a:r>
+              <a:rPr dirty="0"/>
+              <a:t> :</a:t>
             </a:r>
           </a:p>
           <a:p>
@@ -6062,35 +6835,75 @@
               </a:defRPr>
             </a:pPr>
             <a:r>
-              <a:t>python -m pipeline.evaluation.validate_schemas</a:t>
-            </a:r>
-          </a:p>
-          <a:p>
-            <a:pPr>
-              <a:spcBef>
-                <a:spcPts val="600"/>
-              </a:spcBef>
-              <a:defRPr sz="1400">
-                <a:solidFill>
-                  <a:srgbClr val="333333"/>
-                </a:solidFill>
-              </a:defRPr>
-            </a:pPr>
-            <a:r>
-              <a:t>  → Vérifie que les JSON respectent les schémas shared/schemas/</a:t>
-            </a:r>
-          </a:p>
-          <a:p>
-            <a:pPr>
-              <a:spcBef>
-                <a:spcPts val="600"/>
-              </a:spcBef>
-              <a:defRPr sz="1400">
-                <a:solidFill>
-                  <a:srgbClr val="333333"/>
-                </a:solidFill>
-              </a:defRPr>
-            </a:pPr>
+              <a:rPr dirty="0"/>
+              <a:t>python -m </a:t>
+            </a:r>
+            <a:r>
+              <a:rPr dirty="0" err="1"/>
+              <a:t>pipeline.evaluation.validate_schemas</a:t>
+            </a:r>
+            <a:endParaRPr dirty="0"/>
+          </a:p>
+          <a:p>
+            <a:pPr>
+              <a:spcBef>
+                <a:spcPts val="600"/>
+              </a:spcBef>
+              <a:defRPr sz="1400">
+                <a:solidFill>
+                  <a:srgbClr val="333333"/>
+                </a:solidFill>
+              </a:defRPr>
+            </a:pPr>
+            <a:r>
+              <a:rPr dirty="0"/>
+              <a:t>  → </a:t>
+            </a:r>
+            <a:r>
+              <a:rPr dirty="0" err="1"/>
+              <a:t>Vérifie</a:t>
+            </a:r>
+            <a:r>
+              <a:rPr dirty="0"/>
+              <a:t> </a:t>
+            </a:r>
+            <a:r>
+              <a:rPr dirty="0" err="1"/>
+              <a:t>que</a:t>
+            </a:r>
+            <a:r>
+              <a:rPr dirty="0"/>
+              <a:t> les JSON </a:t>
+            </a:r>
+            <a:r>
+              <a:rPr dirty="0" err="1"/>
+              <a:t>respectent</a:t>
+            </a:r>
+            <a:r>
+              <a:rPr dirty="0"/>
+              <a:t> les </a:t>
+            </a:r>
+            <a:r>
+              <a:rPr dirty="0" err="1"/>
+              <a:t>schémas</a:t>
+            </a:r>
+            <a:r>
+              <a:rPr dirty="0"/>
+              <a:t> shared/schemas/</a:t>
+            </a:r>
+          </a:p>
+          <a:p>
+            <a:pPr>
+              <a:spcBef>
+                <a:spcPts val="600"/>
+              </a:spcBef>
+              <a:defRPr sz="1400">
+                <a:solidFill>
+                  <a:srgbClr val="333333"/>
+                </a:solidFill>
+              </a:defRPr>
+            </a:pPr>
+            <a:endParaRPr dirty="0"/>
           </a:p>
           <a:p>
             <a:pPr>
@@ -6104,7 +6917,32 @@
               </a:defRPr>
             </a:pPr>
             <a:r>
-              <a:t>Rapport d'évaluation complet (graphiques + Excel) :</a:t>
+              <a:rPr dirty="0"/>
+              <a:t>Rapport </a:t>
+            </a:r>
+            <a:r>
+              <a:rPr dirty="0" err="1"/>
+              <a:t>d'évaluation</a:t>
+            </a:r>
+            <a:r>
+              <a:rPr dirty="0"/>
+              <a:t> </a:t>
+            </a:r>
+            <a:r>
+              <a:rPr dirty="0" err="1"/>
+              <a:t>complet</a:t>
+            </a:r>
+            <a:r>
+              <a:rPr dirty="0"/>
+              <a:t> (</a:t>
+            </a:r>
+            <a:r>
+              <a:rPr dirty="0" err="1"/>
+              <a:t>graphiques</a:t>
+            </a:r>
+            <a:r>
+              <a:rPr dirty="0"/>
+              <a:t> + Excel) :</a:t>
             </a:r>
           </a:p>
           <a:p>
@@ -6120,35 +6958,70 @@
               </a:defRPr>
             </a:pPr>
             <a:r>
-              <a:t>python -m pipeline.evaluation.generate_evaluation_report --all</a:t>
-            </a:r>
-          </a:p>
-          <a:p>
-            <a:pPr>
-              <a:spcBef>
-                <a:spcPts val="600"/>
-              </a:spcBef>
-              <a:defRPr sz="1400">
-                <a:solidFill>
-                  <a:srgbClr val="333333"/>
-                </a:solidFill>
-              </a:defRPr>
-            </a:pPr>
-            <a:r>
-              <a:t>  → Génère PNG + XLSX dans datasets/07_delivery/st_ready/evaluation_report/</a:t>
-            </a:r>
-          </a:p>
-          <a:p>
-            <a:pPr>
-              <a:spcBef>
-                <a:spcPts val="600"/>
-              </a:spcBef>
-              <a:defRPr sz="1400">
-                <a:solidFill>
-                  <a:srgbClr val="333333"/>
-                </a:solidFill>
-              </a:defRPr>
-            </a:pPr>
+              <a:rPr dirty="0"/>
+              <a:t>python -m </a:t>
+            </a:r>
+            <a:r>
+              <a:rPr dirty="0" err="1"/>
+              <a:t>pipeline.evaluation.generate_evaluation_report</a:t>
+            </a:r>
+            <a:r>
+              <a:rPr dirty="0"/>
+              <a:t> --all</a:t>
+            </a:r>
+          </a:p>
+          <a:p>
+            <a:pPr>
+              <a:spcBef>
+                <a:spcPts val="600"/>
+              </a:spcBef>
+              <a:defRPr sz="1400">
+                <a:solidFill>
+                  <a:srgbClr val="333333"/>
+                </a:solidFill>
+              </a:defRPr>
+            </a:pPr>
+            <a:r>
+              <a:rPr dirty="0"/>
+              <a:t>  → </a:t>
+            </a:r>
+            <a:r>
+              <a:rPr dirty="0" err="1"/>
+              <a:t>Génère</a:t>
+            </a:r>
+            <a:r>
+              <a:rPr dirty="0"/>
+              <a:t> PNG + XLSX dans datasets/07_delivery/</a:t>
+            </a:r>
+            <a:r>
+              <a:rPr dirty="0" err="1"/>
+              <a:t>st_ready</a:t>
+            </a:r>
+            <a:r>
+              <a:rPr dirty="0"/>
+              <a:t>/</a:t>
+            </a:r>
+            <a:r>
+              <a:rPr dirty="0" err="1"/>
+              <a:t>evaluation_report</a:t>
+            </a:r>
+            <a:r>
+              <a:rPr dirty="0"/>
+              <a:t>/</a:t>
+            </a:r>
+          </a:p>
+          <a:p>
+            <a:pPr>
+              <a:spcBef>
+                <a:spcPts val="600"/>
+              </a:spcBef>
+              <a:defRPr sz="1400">
+                <a:solidFill>
+                  <a:srgbClr val="333333"/>
+                </a:solidFill>
+              </a:defRPr>
+            </a:pPr>
+            <a:endParaRPr dirty="0"/>
           </a:p>
           <a:p>
             <a:pPr>
@@ -6162,6 +7035,7 @@
               </a:defRPr>
             </a:pPr>
             <a:r>
+              <a:rPr dirty="0"/>
               <a:t>Test TF-IDF (recherche) :</a:t>
             </a:r>
           </a:p>
@@ -6178,6 +7052,7 @@
               </a:defRPr>
             </a:pPr>
             <a:r>
+              <a:rPr dirty="0"/>
               <a:t>python -m pipeline.evaluation.test_tfidf_search_issues_v2</a:t>
             </a:r>
           </a:p>
@@ -6193,8 +7068,22 @@
               </a:defRPr>
             </a:pPr>
             <a:r>
-              <a:t>  → Teste la qualité de retrieval sur des queries prédéfinies</a:t>
-            </a:r>
+              <a:rPr dirty="0"/>
+              <a:t>  → Teste la </a:t>
+            </a:r>
+            <a:r>
+              <a:rPr dirty="0" err="1"/>
+              <a:t>qualité</a:t>
+            </a:r>
+            <a:r>
+              <a:rPr dirty="0"/>
+              <a:t> de retrieval sur des queries </a:t>
+            </a:r>
+            <a:r>
+              <a:rPr dirty="0" err="1"/>
+              <a:t>prédéfinies</a:t>
+            </a:r>
+            <a:endParaRPr dirty="0"/>
           </a:p>
         </p:txBody>
       </p:sp>
@@ -6207,7 +7096,7 @@
 </file>
 
 <file path=ppt/slides/slide16.xml><?xml version="1.0" encoding="utf-8"?>
-<p:sld xmlns:a="http://schemas.openxmlformats.org/drawingml/2006/main" xmlns:p="http://schemas.openxmlformats.org/presentationml/2006/main" xmlns:r="http://schemas.openxmlformats.org/officeDocument/2006/relationships">
+<p:sld xmlns:a="http://schemas.openxmlformats.org/drawingml/2006/main" xmlns:r="http://schemas.openxmlformats.org/officeDocument/2006/relationships" xmlns:p="http://schemas.openxmlformats.org/presentationml/2006/main">
   <p:cSld>
     <p:bg>
       <p:bgPr>
@@ -6223,7 +7112,14 @@
         <p:cNvGrpSpPr/>
         <p:nvPr/>
       </p:nvGrpSpPr>
-      <p:grpSpPr/>
+      <p:grpSpPr>
+        <a:xfrm>
+          <a:off x="0" y="0"/>
+          <a:ext cx="0" cy="0"/>
+          <a:chOff x="0" y="0"/>
+          <a:chExt cx="0" cy="0"/>
+        </a:xfrm>
+      </p:grpSpPr>
       <p:sp>
         <p:nvSpPr>
           <p:cNvPr id="2" name="Rectangle 1"/>
@@ -6284,7 +7180,7 @@
         </p:nvSpPr>
         <p:spPr>
           <a:xfrm>
-            <a:off x="548640" y="1188720"/>
+            <a:off x="265176" y="1188720"/>
             <a:ext cx="8046720" cy="5029200"/>
           </a:xfrm>
           <a:prstGeom prst="rect">
@@ -6309,80 +7205,139 @@
               </a:defRPr>
             </a:pPr>
             <a:r>
-              <a:t>Ce que fait le cleaning :</a:t>
-            </a:r>
-          </a:p>
-          <a:p>
-            <a:pPr>
-              <a:spcBef>
-                <a:spcPts val="600"/>
-              </a:spcBef>
-              <a:defRPr sz="1400">
-                <a:solidFill>
-                  <a:srgbClr val="333333"/>
-                </a:solidFill>
-              </a:defRPr>
-            </a:pPr>
-            <a:r>
-              <a:t>• Normalise le texte (retours chariot, backticks, espaces)</a:t>
-            </a:r>
-          </a:p>
-          <a:p>
-            <a:pPr>
-              <a:spcBef>
-                <a:spcPts val="600"/>
-              </a:spcBef>
-              <a:defRPr sz="1400">
-                <a:solidFill>
-                  <a:srgbClr val="333333"/>
-                </a:solidFill>
-              </a:defRPr>
-            </a:pPr>
-            <a:r>
-              <a:t>• Extrait les images → markers [IMAGE ATTACHED] + collecte URLs</a:t>
-            </a:r>
-          </a:p>
-          <a:p>
-            <a:pPr>
-              <a:spcBef>
-                <a:spcPts val="600"/>
-              </a:spcBef>
-              <a:defRPr sz="1400">
-                <a:solidFill>
-                  <a:srgbClr val="333333"/>
-                </a:solidFill>
-              </a:defRPr>
-            </a:pPr>
-            <a:r>
-              <a:t>• Structure: Title + Body + Comments → champ clean_text</a:t>
-            </a:r>
-          </a:p>
-          <a:p>
-            <a:pPr>
-              <a:spcBef>
-                <a:spcPts val="600"/>
-              </a:spcBef>
-              <a:defRPr sz="1400">
-                <a:solidFill>
-                  <a:srgbClr val="333333"/>
-                </a:solidFill>
-              </a:defRPr>
-            </a:pPr>
-            <a:r>
-              <a:t>• Conserve les métadonnées brutes (labels, dates, état)</a:t>
-            </a:r>
-          </a:p>
-          <a:p>
-            <a:pPr>
-              <a:spcBef>
-                <a:spcPts val="600"/>
-              </a:spcBef>
-              <a:defRPr sz="1400">
-                <a:solidFill>
-                  <a:srgbClr val="333333"/>
-                </a:solidFill>
-              </a:defRPr>
-            </a:pPr>
+              <a:rPr dirty="0"/>
+              <a:t>Ce </a:t>
+            </a:r>
+            <a:r>
+              <a:rPr dirty="0" err="1"/>
+              <a:t>que</a:t>
+            </a:r>
+            <a:r>
+              <a:rPr dirty="0"/>
+              <a:t> fait le cleaning :</a:t>
+            </a:r>
+          </a:p>
+          <a:p>
+            <a:pPr>
+              <a:spcBef>
+                <a:spcPts val="600"/>
+              </a:spcBef>
+              <a:defRPr sz="1400">
+                <a:solidFill>
+                  <a:srgbClr val="333333"/>
+                </a:solidFill>
+              </a:defRPr>
+            </a:pPr>
+            <a:r>
+              <a:rPr dirty="0"/>
+              <a:t>• </a:t>
+            </a:r>
+            <a:r>
+              <a:rPr dirty="0" err="1"/>
+              <a:t>Normalise</a:t>
+            </a:r>
+            <a:r>
+              <a:rPr dirty="0"/>
+              <a:t> le </a:t>
+            </a:r>
+            <a:r>
+              <a:rPr dirty="0" err="1"/>
+              <a:t>texte</a:t>
+            </a:r>
+            <a:r>
+              <a:rPr dirty="0"/>
+              <a:t> (retours chariot, backticks, </a:t>
+            </a:r>
+            <a:r>
+              <a:rPr dirty="0" err="1"/>
+              <a:t>espaces</a:t>
+            </a:r>
+            <a:r>
+              <a:rPr dirty="0"/>
+              <a:t>)</a:t>
+            </a:r>
+          </a:p>
+          <a:p>
+            <a:pPr>
+              <a:spcBef>
+                <a:spcPts val="600"/>
+              </a:spcBef>
+              <a:defRPr sz="1400">
+                <a:solidFill>
+                  <a:srgbClr val="333333"/>
+                </a:solidFill>
+              </a:defRPr>
+            </a:pPr>
+            <a:r>
+              <a:rPr dirty="0"/>
+              <a:t>• Extrait les images → markers [IMAGE ATTACHED] + </a:t>
+            </a:r>
+            <a:r>
+              <a:rPr dirty="0" err="1"/>
+              <a:t>collecte</a:t>
+            </a:r>
+            <a:r>
+              <a:rPr dirty="0"/>
+              <a:t> URLs</a:t>
+            </a:r>
+          </a:p>
+          <a:p>
+            <a:pPr>
+              <a:spcBef>
+                <a:spcPts val="600"/>
+              </a:spcBef>
+              <a:defRPr sz="1400">
+                <a:solidFill>
+                  <a:srgbClr val="333333"/>
+                </a:solidFill>
+              </a:defRPr>
+            </a:pPr>
+            <a:r>
+              <a:rPr dirty="0"/>
+              <a:t>• Structure: Title + Body + Comments → champ </a:t>
+            </a:r>
+            <a:r>
+              <a:rPr dirty="0" err="1"/>
+              <a:t>clean_text</a:t>
+            </a:r>
+            <a:endParaRPr dirty="0"/>
+          </a:p>
+          <a:p>
+            <a:pPr>
+              <a:spcBef>
+                <a:spcPts val="600"/>
+              </a:spcBef>
+              <a:defRPr sz="1400">
+                <a:solidFill>
+                  <a:srgbClr val="333333"/>
+                </a:solidFill>
+              </a:defRPr>
+            </a:pPr>
+            <a:r>
+              <a:rPr dirty="0"/>
+              <a:t>• Conserve les </a:t>
+            </a:r>
+            <a:r>
+              <a:rPr dirty="0" err="1"/>
+              <a:t>métadonnées</a:t>
+            </a:r>
+            <a:r>
+              <a:rPr dirty="0"/>
+              <a:t> brutes (labels, dates, état)</a:t>
+            </a:r>
+          </a:p>
+          <a:p>
+            <a:pPr>
+              <a:spcBef>
+                <a:spcPts val="600"/>
+              </a:spcBef>
+              <a:defRPr sz="1400">
+                <a:solidFill>
+                  <a:srgbClr val="333333"/>
+                </a:solidFill>
+              </a:defRPr>
+            </a:pPr>
+            <a:endParaRPr dirty="0"/>
           </a:p>
           <a:p>
             <a:pPr>
@@ -6396,21 +7351,31 @@
               </a:defRPr>
             </a:pPr>
             <a:r>
-              <a:t>Ce que le cleaning NE fait PAS :</a:t>
-            </a:r>
-          </a:p>
-          <a:p>
-            <a:pPr>
-              <a:spcBef>
-                <a:spcPts val="600"/>
-              </a:spcBef>
-              <a:defRPr sz="1400">
-                <a:solidFill>
-                  <a:srgbClr val="333333"/>
-                </a:solidFill>
-              </a:defRPr>
-            </a:pPr>
-            <a:r>
+              <a:rPr dirty="0"/>
+              <a:t>Ce </a:t>
+            </a:r>
+            <a:r>
+              <a:rPr dirty="0" err="1"/>
+              <a:t>que</a:t>
+            </a:r>
+            <a:r>
+              <a:rPr dirty="0"/>
+              <a:t> le cleaning NE fait PAS :</a:t>
+            </a:r>
+          </a:p>
+          <a:p>
+            <a:pPr>
+              <a:spcBef>
+                <a:spcPts val="600"/>
+              </a:spcBef>
+              <a:defRPr sz="1400">
+                <a:solidFill>
+                  <a:srgbClr val="333333"/>
+                </a:solidFill>
+              </a:defRPr>
+            </a:pPr>
+            <a:r>
+              <a:rPr dirty="0"/>
               <a:t>• ❌ Pas de classification (layer, board, component)</a:t>
             </a:r>
           </a:p>
@@ -6426,35 +7391,91 @@
               </a:defRPr>
             </a:pPr>
             <a:r>
-              <a:t>• ❌ Pas de détection de validité (is_valid)</a:t>
-            </a:r>
-          </a:p>
-          <a:p>
-            <a:pPr>
-              <a:spcBef>
-                <a:spcPts val="600"/>
-              </a:spcBef>
-              <a:defRPr sz="1400">
-                <a:solidFill>
-                  <a:srgbClr val="333333"/>
-                </a:solidFill>
-              </a:defRPr>
-            </a:pPr>
-            <a:r>
-              <a:t>• → Ces tâches sont faites par l'ENRICHISSEMENT</a:t>
-            </a:r>
-          </a:p>
-          <a:p>
-            <a:pPr>
-              <a:spcBef>
-                <a:spcPts val="600"/>
-              </a:spcBef>
-              <a:defRPr sz="1400">
-                <a:solidFill>
-                  <a:srgbClr val="333333"/>
-                </a:solidFill>
-              </a:defRPr>
-            </a:pPr>
+              <a:rPr dirty="0"/>
+              <a:t>• ❌ Pas de </a:t>
+            </a:r>
+            <a:r>
+              <a:rPr dirty="0" err="1"/>
+              <a:t>détection</a:t>
+            </a:r>
+            <a:r>
+              <a:rPr dirty="0"/>
+              <a:t> de </a:t>
+            </a:r>
+            <a:r>
+              <a:rPr dirty="0" err="1"/>
+              <a:t>validité</a:t>
+            </a:r>
+            <a:r>
+              <a:rPr dirty="0"/>
+              <a:t> (</a:t>
+            </a:r>
+            <a:r>
+              <a:rPr dirty="0" err="1"/>
+              <a:t>is_valid</a:t>
+            </a:r>
+            <a:r>
+              <a:rPr dirty="0"/>
+              <a:t>)</a:t>
+            </a:r>
+          </a:p>
+          <a:p>
+            <a:pPr>
+              <a:spcBef>
+                <a:spcPts val="600"/>
+              </a:spcBef>
+              <a:defRPr sz="1400">
+                <a:solidFill>
+                  <a:srgbClr val="333333"/>
+                </a:solidFill>
+              </a:defRPr>
+            </a:pPr>
+            <a:r>
+              <a:rPr dirty="0"/>
+              <a:t>• → </a:t>
+            </a:r>
+            <a:r>
+              <a:rPr dirty="0" err="1"/>
+              <a:t>Ces</a:t>
+            </a:r>
+            <a:r>
+              <a:rPr dirty="0"/>
+              <a:t> </a:t>
+            </a:r>
+            <a:r>
+              <a:rPr dirty="0" err="1"/>
+              <a:t>tâches</a:t>
+            </a:r>
+            <a:r>
+              <a:rPr dirty="0"/>
+              <a:t> </a:t>
+            </a:r>
+            <a:r>
+              <a:rPr dirty="0" err="1"/>
+              <a:t>sont</a:t>
+            </a:r>
+            <a:r>
+              <a:rPr dirty="0"/>
+              <a:t> faites par </a:t>
+            </a:r>
+            <a:r>
+              <a:rPr dirty="0" err="1"/>
+              <a:t>l'ENRICHISSEMENT</a:t>
+            </a:r>
+            <a:endParaRPr dirty="0"/>
+          </a:p>
+          <a:p>
+            <a:pPr>
+              <a:spcBef>
+                <a:spcPts val="600"/>
+              </a:spcBef>
+              <a:defRPr sz="1400">
+                <a:solidFill>
+                  <a:srgbClr val="333333"/>
+                </a:solidFill>
+              </a:defRPr>
+            </a:pPr>
+            <a:endParaRPr dirty="0"/>
           </a:p>
           <a:p>
             <a:pPr>
@@ -6468,8 +7489,22 @@
               </a:defRPr>
             </a:pPr>
             <a:r>
-              <a:t>Output: data/clean_issues_&lt;repo&gt;.json</a:t>
-            </a:r>
+              <a:rPr dirty="0"/>
+              <a:t>Output: data/</a:t>
+            </a:r>
+            <a:r>
+              <a:rPr dirty="0" err="1"/>
+              <a:t>clean_issues</a:t>
+            </a:r>
+            <a:r>
+              <a:rPr dirty="0"/>
+              <a:t>_&lt;repo&gt;.</a:t>
+            </a:r>
+            <a:r>
+              <a:rPr dirty="0" err="1"/>
+              <a:t>json</a:t>
+            </a:r>
+            <a:endParaRPr dirty="0"/>
           </a:p>
           <a:p>
             <a:pPr>
@@ -6484,7 +7519,40 @@
               </a:defRPr>
             </a:pPr>
             <a:r>
-              <a:t>{ repo, issue_number, title, state, labels, clean_text, image_urls, images_count }</a:t>
+              <a:rPr dirty="0"/>
+              <a:t>{ repo, </a:t>
+            </a:r>
+            <a:r>
+              <a:rPr dirty="0" err="1"/>
+              <a:t>issue_number</a:t>
+            </a:r>
+            <a:r>
+              <a:rPr dirty="0"/>
+              <a:t>, title, state, labels, </a:t>
+            </a:r>
+            <a:r>
+              <a:rPr dirty="0" err="1"/>
+              <a:t>clean_text</a:t>
+            </a:r>
+            <a:r>
+              <a:rPr dirty="0"/>
+              <a:t>, </a:t>
+            </a:r>
+            <a:r>
+              <a:rPr dirty="0" err="1"/>
+              <a:t>image_urls</a:t>
+            </a:r>
+            <a:r>
+              <a:rPr dirty="0"/>
+              <a:t>, </a:t>
+            </a:r>
+            <a:r>
+              <a:rPr dirty="0" err="1"/>
+              <a:t>images_count</a:t>
+            </a:r>
+            <a:r>
+              <a:rPr dirty="0"/>
+              <a:t> }</a:t>
             </a:r>
           </a:p>
         </p:txBody>
@@ -6498,7 +7566,7 @@
 </file>
 
 <file path=ppt/slides/slide17.xml><?xml version="1.0" encoding="utf-8"?>
-<p:sld xmlns:a="http://schemas.openxmlformats.org/drawingml/2006/main" xmlns:p="http://schemas.openxmlformats.org/presentationml/2006/main" xmlns:r="http://schemas.openxmlformats.org/officeDocument/2006/relationships">
+<p:sld xmlns:a="http://schemas.openxmlformats.org/drawingml/2006/main" xmlns:r="http://schemas.openxmlformats.org/officeDocument/2006/relationships" xmlns:p="http://schemas.openxmlformats.org/presentationml/2006/main">
   <p:cSld>
     <p:bg>
       <p:bgPr>
@@ -6514,7 +7582,14 @@
         <p:cNvGrpSpPr/>
         <p:nvPr/>
       </p:nvGrpSpPr>
-      <p:grpSpPr/>
+      <p:grpSpPr>
+        <a:xfrm>
+          <a:off x="0" y="0"/>
+          <a:ext cx="0" cy="0"/>
+          <a:chOff x="0" y="0"/>
+          <a:chExt cx="0" cy="0"/>
+        </a:xfrm>
+      </p:grpSpPr>
       <p:sp>
         <p:nvSpPr>
           <p:cNvPr id="2" name="Rectangle 1"/>
@@ -6614,6 +7689,7 @@
                 </a:solidFill>
               </a:defRPr>
             </a:pPr>
+            <a:endParaRPr/>
           </a:p>
           <a:p>
             <a:pPr>
@@ -6716,6 +7792,7 @@
                 </a:solidFill>
               </a:defRPr>
             </a:pPr>
+            <a:endParaRPr/>
           </a:p>
           <a:p>
             <a:pPr>
@@ -6803,7 +7880,7 @@
 </file>
 
 <file path=ppt/slides/slide18.xml><?xml version="1.0" encoding="utf-8"?>
-<p:sld xmlns:a="http://schemas.openxmlformats.org/drawingml/2006/main" xmlns:p="http://schemas.openxmlformats.org/presentationml/2006/main" xmlns:r="http://schemas.openxmlformats.org/officeDocument/2006/relationships">
+<p:sld xmlns:a="http://schemas.openxmlformats.org/drawingml/2006/main" xmlns:r="http://schemas.openxmlformats.org/officeDocument/2006/relationships" xmlns:p="http://schemas.openxmlformats.org/presentationml/2006/main">
   <p:cSld>
     <p:bg>
       <p:bgPr>
@@ -6819,7 +7896,14 @@
         <p:cNvGrpSpPr/>
         <p:nvPr/>
       </p:nvGrpSpPr>
-      <p:grpSpPr/>
+      <p:grpSpPr>
+        <a:xfrm>
+          <a:off x="0" y="0"/>
+          <a:ext cx="0" cy="0"/>
+          <a:chOff x="0" y="0"/>
+          <a:chExt cx="0" cy="0"/>
+        </a:xfrm>
+      </p:grpSpPr>
       <p:sp>
         <p:nvSpPr>
           <p:cNvPr id="2" name="Rectangle 1"/>
@@ -6919,6 +8003,7 @@
                 </a:solidFill>
               </a:defRPr>
             </a:pPr>
+            <a:endParaRPr/>
           </a:p>
           <a:p>
             <a:pPr>
@@ -7171,7 +8256,7 @@
 </file>
 
 <file path=ppt/slides/slide19.xml><?xml version="1.0" encoding="utf-8"?>
-<p:sld xmlns:a="http://schemas.openxmlformats.org/drawingml/2006/main" xmlns:p="http://schemas.openxmlformats.org/presentationml/2006/main" xmlns:r="http://schemas.openxmlformats.org/officeDocument/2006/relationships">
+<p:sld xmlns:a="http://schemas.openxmlformats.org/drawingml/2006/main" xmlns:r="http://schemas.openxmlformats.org/officeDocument/2006/relationships" xmlns:p="http://schemas.openxmlformats.org/presentationml/2006/main">
   <p:cSld>
     <p:bg>
       <p:bgPr>
@@ -7187,7 +8272,14 @@
         <p:cNvGrpSpPr/>
         <p:nvPr/>
       </p:nvGrpSpPr>
-      <p:grpSpPr/>
+      <p:grpSpPr>
+        <a:xfrm>
+          <a:off x="0" y="0"/>
+          <a:ext cx="0" cy="0"/>
+          <a:chOff x="0" y="0"/>
+          <a:chExt cx="0" cy="0"/>
+        </a:xfrm>
+      </p:grpSpPr>
       <p:sp>
         <p:nvSpPr>
           <p:cNvPr id="2" name="Rectangle 1"/>
@@ -7235,7 +8327,20 @@
               </a:defRPr>
             </a:pPr>
             <a:r>
-              <a:t>Alfred Vision — Enrichissement Images</a:t>
+              <a:rPr lang="fr-FR" dirty="0"/>
+              <a:t> </a:t>
+            </a:r>
+            <a:r>
+              <a:rPr dirty="0"/>
+              <a:t>Alfred Vision — </a:t>
+            </a:r>
+            <a:r>
+              <a:rPr dirty="0" err="1"/>
+              <a:t>Enrichissement</a:t>
+            </a:r>
+            <a:r>
+              <a:rPr dirty="0"/>
+              <a:t> Images</a:t>
             </a:r>
           </a:p>
         </p:txBody>
@@ -7249,7 +8354,7 @@
         <p:spPr>
           <a:xfrm>
             <a:off x="548640" y="1188720"/>
-            <a:ext cx="8046720" cy="5029200"/>
+            <a:ext cx="8046720" cy="3970318"/>
           </a:xfrm>
           <a:prstGeom prst="rect">
             <a:avLst/>
@@ -7262,266 +8367,189 @@
           </a:bodyPr>
           <a:lstStyle/>
           <a:p>
-            <a:pPr>
-              <a:spcBef>
-                <a:spcPts val="1200"/>
-              </a:spcBef>
-              <a:defRPr sz="1600" b="1">
-                <a:solidFill>
-                  <a:srgbClr val="03234B"/>
-                </a:solidFill>
-              </a:defRPr>
-            </a:pPr>
-            <a:r>
-              <a:t>1. Images issues (AUTOMATIQUE via --export-st-ready)</a:t>
-            </a:r>
-          </a:p>
-          <a:p>
-            <a:pPr>
-              <a:spcBef>
-                <a:spcPts val="600"/>
-              </a:spcBef>
-              <a:defRPr sz="1400">
-                <a:solidFill>
-                  <a:srgbClr val="333333"/>
-                </a:solidFill>
-              </a:defRPr>
-            </a:pPr>
-            <a:r>
-              <a:t>• run_full_workflow parcourt tous les with_images et appelle Alfred</a:t>
-            </a:r>
-          </a:p>
-          <a:p>
-            <a:pPr>
-              <a:spcBef>
-                <a:spcPts val="600"/>
-              </a:spcBef>
-              <a:defRPr sz="1400">
-                <a:solidFill>
-                  <a:srgbClr val="333333"/>
-                </a:solidFill>
-              </a:defRPr>
-            </a:pPr>
-            <a:r>
-              <a:t>• Modifie le JSON in-place: [IMAGE ATTACHED] → [IMAGE DESCRIPTION]</a:t>
-            </a:r>
-          </a:p>
-          <a:p>
-            <a:pPr>
-              <a:spcBef>
-                <a:spcPts val="600"/>
-              </a:spcBef>
-              <a:defRPr sz="1400">
-                <a:solidFill>
-                  <a:srgbClr val="333333"/>
-                </a:solidFill>
-              </a:defRPr>
-            </a:pPr>
-            <a:r>
-              <a:t>• C'est le fichier with_images enrichi qu'on uploade vers la KB</a:t>
-            </a:r>
-          </a:p>
-          <a:p>
-            <a:pPr>
-              <a:spcBef>
-                <a:spcPts val="600"/>
-              </a:spcBef>
-              <a:defRPr sz="1400">
-                <a:solidFill>
-                  <a:srgbClr val="333333"/>
-                </a:solidFill>
-              </a:defRPr>
-            </a:pPr>
-          </a:p>
-          <a:p>
-            <a:pPr>
-              <a:spcBef>
-                <a:spcPts val="1200"/>
-              </a:spcBef>
-              <a:defRPr sz="1600" b="1">
-                <a:solidFill>
-                  <a:srgbClr val="03234B"/>
-                </a:solidFill>
-              </a:defRPr>
-            </a:pPr>
-            <a:r>
-              <a:t>Lancement manuel (si besoin) :</a:t>
-            </a:r>
-          </a:p>
-          <a:p>
-            <a:pPr>
-              <a:spcBef>
-                <a:spcPts val="400"/>
-              </a:spcBef>
-              <a:defRPr sz="1200">
-                <a:solidFill>
-                  <a:srgbClr val="333333"/>
-                </a:solidFill>
-                <a:latin typeface="Consolas"/>
-              </a:defRPr>
-            </a:pPr>
-            <a:r>
-              <a:t>python pipeline_Automation/alfred/enrich_json_images_with_alfred.py \</a:t>
-            </a:r>
-          </a:p>
-          <a:p>
-            <a:pPr>
-              <a:spcBef>
-                <a:spcPts val="400"/>
-              </a:spcBef>
-              <a:defRPr sz="1200">
-                <a:solidFill>
-                  <a:srgbClr val="333333"/>
-                </a:solidFill>
-                <a:latin typeface="Consolas"/>
-              </a:defRPr>
-            </a:pPr>
-            <a:r>
-              <a:t>--input &lt;st_ready_issues_with_images_*.json&gt; --inplace</a:t>
-            </a:r>
-          </a:p>
-          <a:p>
-            <a:pPr>
-              <a:spcBef>
-                <a:spcPts val="600"/>
-              </a:spcBef>
-              <a:defRPr sz="1400">
-                <a:solidFill>
-                  <a:srgbClr val="333333"/>
-                </a:solidFill>
-              </a:defRPr>
-            </a:pPr>
-          </a:p>
-          <a:p>
-            <a:pPr>
-              <a:spcBef>
-                <a:spcPts val="1200"/>
-              </a:spcBef>
-              <a:defRPr sz="1600" b="1">
-                <a:solidFill>
-                  <a:srgbClr val="03234B"/>
-                </a:solidFill>
-              </a:defRPr>
-            </a:pPr>
-            <a:r>
-              <a:t>2. Figures des PDFs techniques</a:t>
-            </a:r>
-          </a:p>
-          <a:p>
-            <a:pPr>
-              <a:spcBef>
-                <a:spcPts val="400"/>
-              </a:spcBef>
-              <a:defRPr sz="1200">
-                <a:solidFill>
-                  <a:srgbClr val="333333"/>
-                </a:solidFill>
-                <a:latin typeface="Consolas"/>
-              </a:defRPr>
-            </a:pPr>
-            <a:r>
-              <a:t>python pipeline_Automation/alfred/enrich_pdf_figures_with_alfred.py \</a:t>
-            </a:r>
-          </a:p>
-          <a:p>
-            <a:pPr>
-              <a:spcBef>
-                <a:spcPts val="400"/>
-              </a:spcBef>
-              <a:defRPr sz="1200">
-                <a:solidFill>
-                  <a:srgbClr val="333333"/>
-                </a:solidFill>
-                <a:latin typeface="Consolas"/>
-              </a:defRPr>
-            </a:pPr>
-            <a:r>
-              <a:t>--repo STM32CubeH7</a:t>
-            </a:r>
-          </a:p>
-          <a:p>
-            <a:pPr>
-              <a:spcBef>
-                <a:spcPts val="600"/>
-              </a:spcBef>
-              <a:defRPr sz="1400">
-                <a:solidFill>
-                  <a:srgbClr val="333333"/>
-                </a:solidFill>
-              </a:defRPr>
-            </a:pPr>
-          </a:p>
-          <a:p>
-            <a:pPr>
-              <a:spcBef>
-                <a:spcPts val="600"/>
-              </a:spcBef>
-              <a:defRPr sz="1400">
-                <a:solidFill>
-                  <a:srgbClr val="333333"/>
-                </a:solidFill>
-              </a:defRPr>
-            </a:pPr>
-            <a:r>
-              <a:t>• Stocke dans data/pdf_image_descriptions.json (126 descriptions)</a:t>
-            </a:r>
-          </a:p>
-          <a:p>
-            <a:pPr>
-              <a:spcBef>
-                <a:spcPts val="600"/>
-              </a:spcBef>
-              <a:defRPr sz="1400">
-                <a:solidFill>
-                  <a:srgbClr val="333333"/>
-                </a:solidFill>
-              </a:defRPr>
-            </a:pPr>
-            <a:r>
-              <a:t>• Re-run files_to_docs_v2 pour injecter les descriptions dans les docs</a:t>
-            </a:r>
-          </a:p>
-          <a:p>
-            <a:pPr>
-              <a:spcBef>
-                <a:spcPts val="600"/>
-              </a:spcBef>
-              <a:defRPr sz="1400">
-                <a:solidFill>
-                  <a:srgbClr val="333333"/>
-                </a:solidFill>
-              </a:defRPr>
-            </a:pPr>
-            <a:r>
-              <a:t>• Re-run export_st_ready_files pour régénérer le JSON livrable</a:t>
-            </a:r>
-          </a:p>
-          <a:p>
-            <a:pPr>
-              <a:spcBef>
-                <a:spcPts val="600"/>
-              </a:spcBef>
-              <a:defRPr sz="1400">
-                <a:solidFill>
-                  <a:srgbClr val="333333"/>
-                </a:solidFill>
-              </a:defRPr>
-            </a:pPr>
-          </a:p>
-          <a:p>
-            <a:pPr>
-              <a:spcBef>
-                <a:spcPts val="1200"/>
-              </a:spcBef>
-              <a:defRPr sz="1600" b="1">
-                <a:solidFill>
-                  <a:srgbClr val="03234B"/>
-                </a:solidFill>
-              </a:defRPr>
-            </a:pPr>
-            <a:r>
-              <a:t>⚠️ Pas besoin de --use-proxy (accès direct depuis réseau ST)</a:t>
-            </a:r>
+            <a:r>
+              <a:rPr dirty="0">
+                <a:solidFill>
+                  <a:srgbClr val="0070C0"/>
+                </a:solidFill>
+              </a:rPr>
+              <a:t>1. Images issues (</a:t>
+            </a:r>
+            <a:r>
+              <a:rPr dirty="0" err="1">
+                <a:solidFill>
+                  <a:srgbClr val="0070C0"/>
+                </a:solidFill>
+              </a:rPr>
+              <a:t>automatique</a:t>
+            </a:r>
+            <a:r>
+              <a:rPr dirty="0">
+                <a:solidFill>
+                  <a:srgbClr val="0070C0"/>
+                </a:solidFill>
+              </a:rPr>
+              <a:t> via workflow)</a:t>
+            </a:r>
+            <a:endParaRPr lang="fr-FR" dirty="0">
+              <a:solidFill>
+                <a:srgbClr val="0070C0"/>
+              </a:solidFill>
+            </a:endParaRPr>
+          </a:p>
+          <a:p>
+            <a:endParaRPr dirty="0"/>
+          </a:p>
+          <a:p>
+            <a:r>
+              <a:rPr dirty="0"/>
+              <a:t>- Le workflow </a:t>
+            </a:r>
+            <a:r>
+              <a:rPr dirty="0" err="1"/>
+              <a:t>enrichit</a:t>
+            </a:r>
+            <a:r>
+              <a:rPr dirty="0"/>
+              <a:t> les </a:t>
+            </a:r>
+            <a:r>
+              <a:rPr dirty="0" err="1"/>
+              <a:t>fichiers</a:t>
+            </a:r>
+            <a:r>
+              <a:rPr dirty="0"/>
+              <a:t> </a:t>
+            </a:r>
+            <a:r>
+              <a:rPr dirty="0" err="1"/>
+              <a:t>st_ready_issues_with_images</a:t>
+            </a:r>
+            <a:r>
+              <a:rPr dirty="0"/>
+              <a:t>_*.</a:t>
+            </a:r>
+            <a:r>
+              <a:rPr dirty="0" err="1"/>
+              <a:t>json</a:t>
+            </a:r>
+            <a:endParaRPr dirty="0"/>
+          </a:p>
+          <a:p>
+            <a:r>
+              <a:rPr dirty="0"/>
+              <a:t>- Integration in-place: [IMAGE ATTACHED] -&gt; [IMAGE DESCRIPTION]</a:t>
+            </a:r>
+          </a:p>
+          <a:p>
+            <a:r>
+              <a:rPr dirty="0"/>
+              <a:t>- </a:t>
+            </a:r>
+            <a:r>
+              <a:rPr dirty="0" err="1"/>
+              <a:t>Fichier</a:t>
+            </a:r>
+            <a:r>
+              <a:rPr dirty="0"/>
+              <a:t> final H7: datasets/07_delivery/</a:t>
+            </a:r>
+            <a:r>
+              <a:rPr dirty="0" err="1"/>
+              <a:t>st_ready</a:t>
+            </a:r>
+            <a:r>
+              <a:rPr dirty="0"/>
+              <a:t>/</a:t>
+            </a:r>
+            <a:r>
+              <a:rPr dirty="0" err="1"/>
+              <a:t>by_series</a:t>
+            </a:r>
+            <a:r>
+              <a:rPr dirty="0"/>
+              <a:t>/stm32cubeh7/</a:t>
+            </a:r>
+            <a:r>
+              <a:rPr dirty="0" err="1"/>
+              <a:t>issues_json</a:t>
+            </a:r>
+            <a:r>
+              <a:rPr dirty="0"/>
+              <a:t>/st_ready_issues_with_images_stm32cubeh7.json</a:t>
+            </a:r>
+          </a:p>
+          <a:p>
+            <a:r>
+              <a:rPr dirty="0"/>
+              <a:t>- Resume Alfred: .../st_ready_issues_with_images_stm32cubeh7__alfred_summary.json</a:t>
+            </a:r>
+          </a:p>
+          <a:p>
+            <a:endParaRPr dirty="0"/>
+          </a:p>
+          <a:p>
+            <a:r>
+              <a:rPr dirty="0">
+                <a:solidFill>
+                  <a:srgbClr val="0070C0"/>
+                </a:solidFill>
+              </a:rPr>
+              <a:t>2. Figures PDF</a:t>
+            </a:r>
+            <a:endParaRPr lang="fr-FR" dirty="0">
+              <a:solidFill>
+                <a:srgbClr val="0070C0"/>
+              </a:solidFill>
+            </a:endParaRPr>
+          </a:p>
+          <a:p>
+            <a:endParaRPr dirty="0">
+              <a:solidFill>
+                <a:srgbClr val="0070C0"/>
+              </a:solidFill>
+            </a:endParaRPr>
+          </a:p>
+          <a:p>
+            <a:r>
+              <a:rPr dirty="0"/>
+              <a:t>- enrich_pdf_figures_with_alfred.py </a:t>
+            </a:r>
+            <a:r>
+              <a:rPr dirty="0" err="1"/>
+              <a:t>decrit</a:t>
+            </a:r>
+            <a:r>
+              <a:rPr dirty="0"/>
+              <a:t> les figures</a:t>
+            </a:r>
+          </a:p>
+          <a:p>
+            <a:r>
+              <a:rPr dirty="0"/>
+              <a:t>- les descriptions </a:t>
+            </a:r>
+            <a:r>
+              <a:rPr dirty="0" err="1"/>
+              <a:t>sont</a:t>
+            </a:r>
+            <a:r>
+              <a:rPr dirty="0"/>
+              <a:t> </a:t>
+            </a:r>
+            <a:r>
+              <a:rPr dirty="0" err="1"/>
+              <a:t>patchees</a:t>
+            </a:r>
+            <a:r>
+              <a:rPr dirty="0"/>
+              <a:t> dans </a:t>
+            </a:r>
+            <a:r>
+              <a:rPr dirty="0" err="1"/>
+              <a:t>files_json</a:t>
+            </a:r>
+            <a:endParaRPr dirty="0"/>
           </a:p>
         </p:txBody>
       </p:sp>
@@ -7534,7 +8562,7 @@
 </file>
 
 <file path=ppt/slides/slide2.xml><?xml version="1.0" encoding="utf-8"?>
-<p:sld xmlns:a="http://schemas.openxmlformats.org/drawingml/2006/main" xmlns:p="http://schemas.openxmlformats.org/presentationml/2006/main" xmlns:r="http://schemas.openxmlformats.org/officeDocument/2006/relationships">
+<p:sld xmlns:a="http://schemas.openxmlformats.org/drawingml/2006/main" xmlns:r="http://schemas.openxmlformats.org/officeDocument/2006/relationships" xmlns:p="http://schemas.openxmlformats.org/presentationml/2006/main">
   <p:cSld>
     <p:bg>
       <p:bgPr>
@@ -7550,7 +8578,14 @@
         <p:cNvGrpSpPr/>
         <p:nvPr/>
       </p:nvGrpSpPr>
-      <p:grpSpPr/>
+      <p:grpSpPr>
+        <a:xfrm>
+          <a:off x="0" y="0"/>
+          <a:ext cx="0" cy="0"/>
+          <a:chOff x="0" y="0"/>
+          <a:chExt cx="0" cy="0"/>
+        </a:xfrm>
+      </p:grpSpPr>
       <p:sp>
         <p:nvSpPr>
           <p:cNvPr id="2" name="Rectangle 1"/>
@@ -7755,7 +8790,7 @@
 </file>
 
 <file path=ppt/slides/slide20.xml><?xml version="1.0" encoding="utf-8"?>
-<p:sld xmlns:a="http://schemas.openxmlformats.org/drawingml/2006/main" xmlns:p="http://schemas.openxmlformats.org/presentationml/2006/main" xmlns:r="http://schemas.openxmlformats.org/officeDocument/2006/relationships">
+<p:sld xmlns:a="http://schemas.openxmlformats.org/drawingml/2006/main" xmlns:r="http://schemas.openxmlformats.org/officeDocument/2006/relationships" xmlns:p="http://schemas.openxmlformats.org/presentationml/2006/main">
   <p:cSld>
     <p:bg>
       <p:bgPr>
@@ -7771,7 +8806,14 @@
         <p:cNvGrpSpPr/>
         <p:nvPr/>
       </p:nvGrpSpPr>
-      <p:grpSpPr/>
+      <p:grpSpPr>
+        <a:xfrm>
+          <a:off x="0" y="0"/>
+          <a:ext cx="0" cy="0"/>
+          <a:chOff x="0" y="0"/>
+          <a:chExt cx="0" cy="0"/>
+        </a:xfrm>
+      </p:grpSpPr>
       <p:sp>
         <p:nvSpPr>
           <p:cNvPr id="2" name="Rectangle 1"/>
@@ -7843,10 +8885,34 @@
                 <a:tableStyleId>{5C22544A-7EE6-4342-B048-85BDC9FD1C3A}</a:tableStyleId>
               </a:tblPr>
               <a:tblGrid>
-                <a:gridCol w="2148840"/>
-                <a:gridCol w="2148840"/>
-                <a:gridCol w="2148840"/>
-                <a:gridCol w="2148840"/>
+                <a:gridCol w="2148840">
+                  <a:extLst>
+                    <a:ext uri="{9D8B030D-6E8A-4147-A177-3AD203B41FA5}">
+                      <a16:colId xmlns:a16="http://schemas.microsoft.com/office/drawing/2014/main" val="20000"/>
+                    </a:ext>
+                  </a:extLst>
+                </a:gridCol>
+                <a:gridCol w="2148840">
+                  <a:extLst>
+                    <a:ext uri="{9D8B030D-6E8A-4147-A177-3AD203B41FA5}">
+                      <a16:colId xmlns:a16="http://schemas.microsoft.com/office/drawing/2014/main" val="20001"/>
+                    </a:ext>
+                  </a:extLst>
+                </a:gridCol>
+                <a:gridCol w="2148840">
+                  <a:extLst>
+                    <a:ext uri="{9D8B030D-6E8A-4147-A177-3AD203B41FA5}">
+                      <a16:colId xmlns:a16="http://schemas.microsoft.com/office/drawing/2014/main" val="20002"/>
+                    </a:ext>
+                  </a:extLst>
+                </a:gridCol>
+                <a:gridCol w="2148840">
+                  <a:extLst>
+                    <a:ext uri="{9D8B030D-6E8A-4147-A177-3AD203B41FA5}">
+                      <a16:colId xmlns:a16="http://schemas.microsoft.com/office/drawing/2014/main" val="20003"/>
+                    </a:ext>
+                  </a:extLst>
+                </a:gridCol>
               </a:tblGrid>
               <a:tr h="365760">
                 <a:tc>
@@ -7941,6 +9007,11 @@
                     </a:solidFill>
                   </a:tcPr>
                 </a:tc>
+                <a:extLst>
+                  <a:ext uri="{0D108BD9-81ED-4DB2-BD59-A6C34878D82A}">
+                    <a16:rowId xmlns:a16="http://schemas.microsoft.com/office/drawing/2014/main" val="10000"/>
+                  </a:ext>
+                </a:extLst>
               </a:tr>
               <a:tr h="365760">
                 <a:tc>
@@ -8019,6 +9090,11 @@
                   </a:txBody>
                   <a:tcPr/>
                 </a:tc>
+                <a:extLst>
+                  <a:ext uri="{0D108BD9-81ED-4DB2-BD59-A6C34878D82A}">
+                    <a16:rowId xmlns:a16="http://schemas.microsoft.com/office/drawing/2014/main" val="10001"/>
+                  </a:ext>
+                </a:extLst>
               </a:tr>
               <a:tr h="365760">
                 <a:tc>
@@ -8097,6 +9173,11 @@
                   </a:txBody>
                   <a:tcPr/>
                 </a:tc>
+                <a:extLst>
+                  <a:ext uri="{0D108BD9-81ED-4DB2-BD59-A6C34878D82A}">
+                    <a16:rowId xmlns:a16="http://schemas.microsoft.com/office/drawing/2014/main" val="10002"/>
+                  </a:ext>
+                </a:extLst>
               </a:tr>
               <a:tr h="365760">
                 <a:tc>
@@ -8175,6 +9256,11 @@
                   </a:txBody>
                   <a:tcPr/>
                 </a:tc>
+                <a:extLst>
+                  <a:ext uri="{0D108BD9-81ED-4DB2-BD59-A6C34878D82A}">
+                    <a16:rowId xmlns:a16="http://schemas.microsoft.com/office/drawing/2014/main" val="10003"/>
+                  </a:ext>
+                </a:extLst>
               </a:tr>
               <a:tr h="365760">
                 <a:tc>
@@ -8253,6 +9339,11 @@
                   </a:txBody>
                   <a:tcPr/>
                 </a:tc>
+                <a:extLst>
+                  <a:ext uri="{0D108BD9-81ED-4DB2-BD59-A6C34878D82A}">
+                    <a16:rowId xmlns:a16="http://schemas.microsoft.com/office/drawing/2014/main" val="10004"/>
+                  </a:ext>
+                </a:extLst>
               </a:tr>
               <a:tr h="365760">
                 <a:tc>
@@ -8287,6 +9378,7 @@
                         </a:defRPr>
                       </a:pPr>
                       <a:r>
+                        <a:rPr dirty="0"/>
                         <a:t>images</a:t>
                       </a:r>
                     </a:p>
@@ -8331,6 +9423,11 @@
                   </a:txBody>
                   <a:tcPr/>
                 </a:tc>
+                <a:extLst>
+                  <a:ext uri="{0D108BD9-81ED-4DB2-BD59-A6C34878D82A}">
+                    <a16:rowId xmlns:a16="http://schemas.microsoft.com/office/drawing/2014/main" val="10005"/>
+                  </a:ext>
+                </a:extLst>
               </a:tr>
               <a:tr h="365760">
                 <a:tc>
@@ -8409,6 +9506,11 @@
                   </a:txBody>
                   <a:tcPr/>
                 </a:tc>
+                <a:extLst>
+                  <a:ext uri="{0D108BD9-81ED-4DB2-BD59-A6C34878D82A}">
+                    <a16:rowId xmlns:a16="http://schemas.microsoft.com/office/drawing/2014/main" val="10006"/>
+                  </a:ext>
+                </a:extLst>
               </a:tr>
               <a:tr h="365760">
                 <a:tc>
@@ -8487,6 +9589,11 @@
                   </a:txBody>
                   <a:tcPr/>
                 </a:tc>
+                <a:extLst>
+                  <a:ext uri="{0D108BD9-81ED-4DB2-BD59-A6C34878D82A}">
+                    <a16:rowId xmlns:a16="http://schemas.microsoft.com/office/drawing/2014/main" val="10007"/>
+                  </a:ext>
+                </a:extLst>
               </a:tr>
               <a:tr h="365760">
                 <a:tc>
@@ -8565,6 +9672,11 @@
                   </a:txBody>
                   <a:tcPr/>
                 </a:tc>
+                <a:extLst>
+                  <a:ext uri="{0D108BD9-81ED-4DB2-BD59-A6C34878D82A}">
+                    <a16:rowId xmlns:a16="http://schemas.microsoft.com/office/drawing/2014/main" val="10008"/>
+                  </a:ext>
+                </a:extLst>
               </a:tr>
               <a:tr h="365760">
                 <a:tc>
@@ -8637,12 +9749,18 @@
                         </a:defRPr>
                       </a:pPr>
                       <a:r>
+                        <a:rPr dirty="0"/>
                         <a:t>OK</a:t>
                       </a:r>
                     </a:p>
                   </a:txBody>
                   <a:tcPr/>
                 </a:tc>
+                <a:extLst>
+                  <a:ext uri="{0D108BD9-81ED-4DB2-BD59-A6C34878D82A}">
+                    <a16:rowId xmlns:a16="http://schemas.microsoft.com/office/drawing/2014/main" val="10009"/>
+                  </a:ext>
+                </a:extLst>
               </a:tr>
             </a:tbl>
           </a:graphicData>
@@ -8657,7 +9775,7 @@
 </file>
 
 <file path=ppt/slides/slide21.xml><?xml version="1.0" encoding="utf-8"?>
-<p:sld xmlns:a="http://schemas.openxmlformats.org/drawingml/2006/main" xmlns:p="http://schemas.openxmlformats.org/presentationml/2006/main" xmlns:r="http://schemas.openxmlformats.org/officeDocument/2006/relationships">
+<p:sld xmlns:a="http://schemas.openxmlformats.org/drawingml/2006/main" xmlns:r="http://schemas.openxmlformats.org/officeDocument/2006/relationships" xmlns:p="http://schemas.openxmlformats.org/presentationml/2006/main">
   <p:cSld>
     <p:bg>
       <p:bgPr>
@@ -8673,7 +9791,14 @@
         <p:cNvGrpSpPr/>
         <p:nvPr/>
       </p:nvGrpSpPr>
-      <p:grpSpPr/>
+      <p:grpSpPr>
+        <a:xfrm>
+          <a:off x="0" y="0"/>
+          <a:ext cx="0" cy="0"/>
+          <a:chOff x="0" y="0"/>
+          <a:chExt cx="0" cy="0"/>
+        </a:xfrm>
+      </p:grpSpPr>
       <p:sp>
         <p:nvSpPr>
           <p:cNvPr id="2" name="Rectangle 1"/>
@@ -8773,6 +9898,7 @@
                 </a:solidFill>
               </a:defRPr>
             </a:pPr>
+            <a:endParaRPr/>
           </a:p>
           <a:p>
             <a:pPr>
@@ -8864,6 +9990,7 @@
                 </a:solidFill>
               </a:defRPr>
             </a:pPr>
+            <a:endParaRPr/>
           </a:p>
           <a:p>
             <a:pPr>
@@ -8923,6 +10050,7 @@
                 </a:solidFill>
               </a:defRPr>
             </a:pPr>
+            <a:endParaRPr/>
           </a:p>
           <a:p>
             <a:pPr>
@@ -8966,6 +10094,7 @@
                 </a:solidFill>
               </a:defRPr>
             </a:pPr>
+            <a:endParaRPr/>
           </a:p>
           <a:p>
             <a:pPr>
@@ -9009,7 +10138,7 @@
 </file>
 
 <file path=ppt/slides/slide22.xml><?xml version="1.0" encoding="utf-8"?>
-<p:sld xmlns:a="http://schemas.openxmlformats.org/drawingml/2006/main" xmlns:p="http://schemas.openxmlformats.org/presentationml/2006/main" xmlns:r="http://schemas.openxmlformats.org/officeDocument/2006/relationships">
+<p:sld xmlns:a="http://schemas.openxmlformats.org/drawingml/2006/main" xmlns:r="http://schemas.openxmlformats.org/officeDocument/2006/relationships" xmlns:p="http://schemas.openxmlformats.org/presentationml/2006/main">
   <p:cSld>
     <p:bg>
       <p:bgPr>
@@ -9025,7 +10154,14 @@
         <p:cNvGrpSpPr/>
         <p:nvPr/>
       </p:nvGrpSpPr>
-      <p:grpSpPr/>
+      <p:grpSpPr>
+        <a:xfrm>
+          <a:off x="0" y="0"/>
+          <a:ext cx="0" cy="0"/>
+          <a:chOff x="0" y="0"/>
+          <a:chExt cx="0" cy="0"/>
+        </a:xfrm>
+      </p:grpSpPr>
       <p:sp>
         <p:nvSpPr>
           <p:cNvPr id="2" name="Rectangle 1"/>
@@ -9088,7 +10224,7 @@
         </p:nvGraphicFramePr>
         <p:xfrm>
           <a:off x="274320" y="1005840"/>
-          <a:ext cx="8595360" cy="1828800"/>
+          <a:ext cx="8595360" cy="1950720"/>
         </p:xfrm>
         <a:graphic>
           <a:graphicData uri="http://schemas.openxmlformats.org/drawingml/2006/table">
@@ -9097,10 +10233,34 @@
                 <a:tableStyleId>{5C22544A-7EE6-4342-B048-85BDC9FD1C3A}</a:tableStyleId>
               </a:tblPr>
               <a:tblGrid>
-                <a:gridCol w="2148840"/>
-                <a:gridCol w="2148840"/>
-                <a:gridCol w="2148840"/>
-                <a:gridCol w="2148840"/>
+                <a:gridCol w="2148840">
+                  <a:extLst>
+                    <a:ext uri="{9D8B030D-6E8A-4147-A177-3AD203B41FA5}">
+                      <a16:colId xmlns:a16="http://schemas.microsoft.com/office/drawing/2014/main" val="20000"/>
+                    </a:ext>
+                  </a:extLst>
+                </a:gridCol>
+                <a:gridCol w="2148840">
+                  <a:extLst>
+                    <a:ext uri="{9D8B030D-6E8A-4147-A177-3AD203B41FA5}">
+                      <a16:colId xmlns:a16="http://schemas.microsoft.com/office/drawing/2014/main" val="20001"/>
+                    </a:ext>
+                  </a:extLst>
+                </a:gridCol>
+                <a:gridCol w="2148840">
+                  <a:extLst>
+                    <a:ext uri="{9D8B030D-6E8A-4147-A177-3AD203B41FA5}">
+                      <a16:colId xmlns:a16="http://schemas.microsoft.com/office/drawing/2014/main" val="20002"/>
+                    </a:ext>
+                  </a:extLst>
+                </a:gridCol>
+                <a:gridCol w="2148840">
+                  <a:extLst>
+                    <a:ext uri="{9D8B030D-6E8A-4147-A177-3AD203B41FA5}">
+                      <a16:colId xmlns:a16="http://schemas.microsoft.com/office/drawing/2014/main" val="20003"/>
+                    </a:ext>
+                  </a:extLst>
+                </a:gridCol>
               </a:tblGrid>
               <a:tr h="365760">
                 <a:tc>
@@ -9195,6 +10355,11 @@
                     </a:solidFill>
                   </a:tcPr>
                 </a:tc>
+                <a:extLst>
+                  <a:ext uri="{0D108BD9-81ED-4DB2-BD59-A6C34878D82A}">
+                    <a16:rowId xmlns:a16="http://schemas.microsoft.com/office/drawing/2014/main" val="10000"/>
+                  </a:ext>
+                </a:extLst>
               </a:tr>
               <a:tr h="365760">
                 <a:tc>
@@ -9273,6 +10438,11 @@
                   </a:txBody>
                   <a:tcPr/>
                 </a:tc>
+                <a:extLst>
+                  <a:ext uri="{0D108BD9-81ED-4DB2-BD59-A6C34878D82A}">
+                    <a16:rowId xmlns:a16="http://schemas.microsoft.com/office/drawing/2014/main" val="10001"/>
+                  </a:ext>
+                </a:extLst>
               </a:tr>
               <a:tr h="365760">
                 <a:tc>
@@ -9351,6 +10521,11 @@
                   </a:txBody>
                   <a:tcPr/>
                 </a:tc>
+                <a:extLst>
+                  <a:ext uri="{0D108BD9-81ED-4DB2-BD59-A6C34878D82A}">
+                    <a16:rowId xmlns:a16="http://schemas.microsoft.com/office/drawing/2014/main" val="10002"/>
+                  </a:ext>
+                </a:extLst>
               </a:tr>
               <a:tr h="365760">
                 <a:tc>
@@ -9429,6 +10604,11 @@
                   </a:txBody>
                   <a:tcPr/>
                 </a:tc>
+                <a:extLst>
+                  <a:ext uri="{0D108BD9-81ED-4DB2-BD59-A6C34878D82A}">
+                    <a16:rowId xmlns:a16="http://schemas.microsoft.com/office/drawing/2014/main" val="10003"/>
+                  </a:ext>
+                </a:extLst>
               </a:tr>
               <a:tr h="365760">
                 <a:tc>
@@ -9507,6 +10687,11 @@
                   </a:txBody>
                   <a:tcPr/>
                 </a:tc>
+                <a:extLst>
+                  <a:ext uri="{0D108BD9-81ED-4DB2-BD59-A6C34878D82A}">
+                    <a16:rowId xmlns:a16="http://schemas.microsoft.com/office/drawing/2014/main" val="10004"/>
+                  </a:ext>
+                </a:extLst>
               </a:tr>
             </a:tbl>
           </a:graphicData>
@@ -9521,7 +10706,7 @@
 </file>
 
 <file path=ppt/slides/slide23.xml><?xml version="1.0" encoding="utf-8"?>
-<p:sld xmlns:a="http://schemas.openxmlformats.org/drawingml/2006/main" xmlns:p="http://schemas.openxmlformats.org/presentationml/2006/main" xmlns:r="http://schemas.openxmlformats.org/officeDocument/2006/relationships">
+<p:sld xmlns:a="http://schemas.openxmlformats.org/drawingml/2006/main" xmlns:r="http://schemas.openxmlformats.org/officeDocument/2006/relationships" xmlns:p="http://schemas.openxmlformats.org/presentationml/2006/main">
   <p:cSld>
     <p:bg>
       <p:bgPr>
@@ -9537,7 +10722,14 @@
         <p:cNvGrpSpPr/>
         <p:nvPr/>
       </p:nvGrpSpPr>
-      <p:grpSpPr/>
+      <p:grpSpPr>
+        <a:xfrm>
+          <a:off x="0" y="0"/>
+          <a:ext cx="0" cy="0"/>
+          <a:chOff x="0" y="0"/>
+          <a:chExt cx="0" cy="0"/>
+        </a:xfrm>
+      </p:grpSpPr>
       <p:sp>
         <p:nvSpPr>
           <p:cNvPr id="2" name="Rectangle 1"/>
@@ -9637,6 +10829,7 @@
                 </a:solidFill>
               </a:defRPr>
             </a:pPr>
+            <a:endParaRPr/>
           </a:p>
           <a:p>
             <a:pPr>
@@ -9754,6 +10947,7 @@
                 </a:solidFill>
               </a:defRPr>
             </a:pPr>
+            <a:endParaRPr/>
           </a:p>
           <a:p>
             <a:pPr>
@@ -9811,7 +11005,7 @@
 </file>
 
 <file path=ppt/slides/slide24.xml><?xml version="1.0" encoding="utf-8"?>
-<p:sld xmlns:a="http://schemas.openxmlformats.org/drawingml/2006/main" xmlns:p="http://schemas.openxmlformats.org/presentationml/2006/main" xmlns:r="http://schemas.openxmlformats.org/officeDocument/2006/relationships">
+<p:sld xmlns:a="http://schemas.openxmlformats.org/drawingml/2006/main" xmlns:r="http://schemas.openxmlformats.org/officeDocument/2006/relationships" xmlns:p="http://schemas.openxmlformats.org/presentationml/2006/main">
   <p:cSld>
     <p:bg>
       <p:bgPr>
@@ -9827,7 +11021,14 @@
         <p:cNvGrpSpPr/>
         <p:nvPr/>
       </p:nvGrpSpPr>
-      <p:grpSpPr/>
+      <p:grpSpPr>
+        <a:xfrm>
+          <a:off x="0" y="0"/>
+          <a:ext cx="0" cy="0"/>
+          <a:chOff x="0" y="0"/>
+          <a:chExt cx="0" cy="0"/>
+        </a:xfrm>
+      </p:grpSpPr>
       <p:sp>
         <p:nvSpPr>
           <p:cNvPr id="2" name="Rectangle 1"/>
@@ -9889,7 +11090,7 @@
         <p:spPr>
           <a:xfrm>
             <a:off x="548640" y="1188720"/>
-            <a:ext cx="8046720" cy="5029200"/>
+            <a:ext cx="8046720" cy="4524315"/>
           </a:xfrm>
           <a:prstGeom prst="rect">
             <a:avLst/>
@@ -9913,37 +11114,88 @@
               </a:defRPr>
             </a:pPr>
             <a:r>
-              <a:t>□ 1. Créer shared/config/config_&lt;serie&gt;.json (repos + clone_urls)</a:t>
-            </a:r>
-          </a:p>
-          <a:p>
-            <a:pPr>
-              <a:spcBef>
-                <a:spcPts val="600"/>
-              </a:spcBef>
-              <a:defRPr sz="1400">
-                <a:solidFill>
-                  <a:srgbClr val="333333"/>
-                </a:solidFill>
-              </a:defRPr>
-            </a:pPr>
-            <a:r>
-              <a:t>□ 2. Ajouter mapping dans pipeline/delivery/delivery_paths.py</a:t>
-            </a:r>
-          </a:p>
-          <a:p>
-            <a:pPr>
-              <a:spcBef>
-                <a:spcPts val="600"/>
-              </a:spcBef>
-              <a:defRPr sz="1400">
-                <a:solidFill>
-                  <a:srgbClr val="333333"/>
-                </a:solidFill>
-              </a:defRPr>
-            </a:pPr>
-            <a:r>
-              <a:t>□ 3. Lancer le pipeline complet :</a:t>
+              <a:rPr dirty="0"/>
+              <a:t> 1. </a:t>
+            </a:r>
+            <a:r>
+              <a:rPr dirty="0" err="1"/>
+              <a:t>Créer</a:t>
+            </a:r>
+            <a:r>
+              <a:rPr dirty="0"/>
+              <a:t> shared/config/config_&lt;</a:t>
+            </a:r>
+            <a:r>
+              <a:rPr dirty="0" err="1"/>
+              <a:t>serie</a:t>
+            </a:r>
+            <a:r>
+              <a:rPr dirty="0"/>
+              <a:t>&gt;.</a:t>
+            </a:r>
+            <a:r>
+              <a:rPr dirty="0" err="1"/>
+              <a:t>json</a:t>
+            </a:r>
+            <a:r>
+              <a:rPr dirty="0"/>
+              <a:t> (repos + </a:t>
+            </a:r>
+            <a:r>
+              <a:rPr dirty="0" err="1"/>
+              <a:t>clone_urls</a:t>
+            </a:r>
+            <a:r>
+              <a:rPr dirty="0"/>
+              <a:t>)</a:t>
+            </a:r>
+          </a:p>
+          <a:p>
+            <a:pPr>
+              <a:spcBef>
+                <a:spcPts val="600"/>
+              </a:spcBef>
+              <a:defRPr sz="1400">
+                <a:solidFill>
+                  <a:srgbClr val="333333"/>
+                </a:solidFill>
+              </a:defRPr>
+            </a:pPr>
+            <a:r>
+              <a:rPr dirty="0"/>
+              <a:t> 2. </a:t>
+            </a:r>
+            <a:r>
+              <a:rPr dirty="0" err="1"/>
+              <a:t>Ajouter</a:t>
+            </a:r>
+            <a:r>
+              <a:rPr dirty="0"/>
+              <a:t> mapping dans pipeline/delivery/delivery_paths.py</a:t>
+            </a:r>
+          </a:p>
+          <a:p>
+            <a:pPr>
+              <a:spcBef>
+                <a:spcPts val="600"/>
+              </a:spcBef>
+              <a:defRPr sz="1400">
+                <a:solidFill>
+                  <a:srgbClr val="333333"/>
+                </a:solidFill>
+              </a:defRPr>
+            </a:pPr>
+            <a:r>
+              <a:rPr dirty="0"/>
+              <a:t> 3. Lancer le pipeline </a:t>
+            </a:r>
+            <a:r>
+              <a:rPr dirty="0" err="1"/>
+              <a:t>complet</a:t>
+            </a:r>
+            <a:r>
+              <a:rPr dirty="0"/>
+              <a:t> :</a:t>
             </a:r>
           </a:p>
           <a:p>
@@ -9959,7 +11211,16 @@
               </a:defRPr>
             </a:pPr>
             <a:r>
-              <a:t>$env:STM32CUBE_CONFIG = "shared/config/config_xx.json"</a:t>
+              <a:rPr dirty="0"/>
+              <a:t>$env:STM32CUBE_CONFIG = "shared/config/</a:t>
+            </a:r>
+            <a:r>
+              <a:rPr dirty="0" err="1"/>
+              <a:t>config_xx.json</a:t>
+            </a:r>
+            <a:r>
+              <a:rPr dirty="0"/>
+              <a:t>"</a:t>
             </a:r>
           </a:p>
           <a:p>
@@ -9975,52 +11236,136 @@
               </a:defRPr>
             </a:pPr>
             <a:r>
-              <a:t>python -m pipeline.run_full_workflow --export-st-ready --continue-on-error</a:t>
-            </a:r>
-          </a:p>
-          <a:p>
-            <a:pPr>
-              <a:spcBef>
-                <a:spcPts val="600"/>
-              </a:spcBef>
-              <a:defRPr sz="1400">
-                <a:solidFill>
-                  <a:srgbClr val="333333"/>
-                </a:solidFill>
-              </a:defRPr>
-            </a:pPr>
-            <a:r>
-              <a:t>  → Inclut automatiquement: delivery + export with_images + Alfred images</a:t>
-            </a:r>
-          </a:p>
-          <a:p>
-            <a:pPr>
-              <a:spcBef>
-                <a:spcPts val="600"/>
-              </a:spcBef>
-              <a:defRPr sz="1400">
-                <a:solidFill>
-                  <a:srgbClr val="333333"/>
-                </a:solidFill>
-              </a:defRPr>
-            </a:pPr>
-            <a:r>
-              <a:t>□ 4. Vérifier by_series/&lt;serie&gt;/ : issues, files, diag, resolver, drivers/</a:t>
-            </a:r>
-          </a:p>
-          <a:p>
-            <a:pPr>
-              <a:spcBef>
-                <a:spcPts val="600"/>
-              </a:spcBef>
-              <a:defRPr sz="1400">
-                <a:solidFill>
-                  <a:srgbClr val="333333"/>
-                </a:solidFill>
-              </a:defRPr>
-            </a:pPr>
-            <a:r>
-              <a:t>□ 5. Alfred PDF figures (si pdf_image_tasks non vide) :</a:t>
+              <a:rPr dirty="0"/>
+              <a:t>python -m </a:t>
+            </a:r>
+            <a:r>
+              <a:rPr dirty="0" err="1"/>
+              <a:t>pipeline.run_full_workflow</a:t>
+            </a:r>
+            <a:r>
+              <a:rPr dirty="0"/>
+              <a:t> --export-st-ready --continue-on-error</a:t>
+            </a:r>
+          </a:p>
+          <a:p>
+            <a:pPr>
+              <a:spcBef>
+                <a:spcPts val="600"/>
+              </a:spcBef>
+              <a:defRPr sz="1400">
+                <a:solidFill>
+                  <a:srgbClr val="333333"/>
+                </a:solidFill>
+              </a:defRPr>
+            </a:pPr>
+            <a:r>
+              <a:rPr dirty="0"/>
+              <a:t>  → </a:t>
+            </a:r>
+            <a:r>
+              <a:rPr dirty="0" err="1"/>
+              <a:t>Inclut</a:t>
+            </a:r>
+            <a:r>
+              <a:rPr dirty="0"/>
+              <a:t> </a:t>
+            </a:r>
+            <a:r>
+              <a:rPr dirty="0" err="1"/>
+              <a:t>automatiquement</a:t>
+            </a:r>
+            <a:r>
+              <a:rPr dirty="0"/>
+              <a:t>: delivery + export </a:t>
+            </a:r>
+            <a:r>
+              <a:rPr dirty="0" err="1"/>
+              <a:t>with_images</a:t>
+            </a:r>
+            <a:r>
+              <a:rPr dirty="0"/>
+              <a:t> + Alfred images</a:t>
+            </a:r>
+          </a:p>
+          <a:p>
+            <a:pPr>
+              <a:spcBef>
+                <a:spcPts val="600"/>
+              </a:spcBef>
+              <a:defRPr sz="1400">
+                <a:solidFill>
+                  <a:srgbClr val="333333"/>
+                </a:solidFill>
+              </a:defRPr>
+            </a:pPr>
+            <a:r>
+              <a:rPr dirty="0"/>
+              <a:t> 4. </a:t>
+            </a:r>
+            <a:r>
+              <a:rPr dirty="0" err="1"/>
+              <a:t>Vérifier</a:t>
+            </a:r>
+            <a:r>
+              <a:rPr dirty="0"/>
+              <a:t> </a:t>
+            </a:r>
+            <a:r>
+              <a:rPr dirty="0" err="1"/>
+              <a:t>by_series</a:t>
+            </a:r>
+            <a:r>
+              <a:rPr dirty="0"/>
+              <a:t>/&lt;</a:t>
+            </a:r>
+            <a:r>
+              <a:rPr dirty="0" err="1"/>
+              <a:t>serie</a:t>
+            </a:r>
+            <a:r>
+              <a:rPr dirty="0"/>
+              <a:t>&gt;/ : issues, files, </a:t>
+            </a:r>
+            <a:r>
+              <a:rPr dirty="0" err="1"/>
+              <a:t>diag</a:t>
+            </a:r>
+            <a:r>
+              <a:rPr dirty="0"/>
+              <a:t>, resolver, drivers/</a:t>
+            </a:r>
+          </a:p>
+          <a:p>
+            <a:pPr>
+              <a:spcBef>
+                <a:spcPts val="600"/>
+              </a:spcBef>
+              <a:defRPr sz="1400">
+                <a:solidFill>
+                  <a:srgbClr val="333333"/>
+                </a:solidFill>
+              </a:defRPr>
+            </a:pPr>
+            <a:r>
+              <a:rPr dirty="0"/>
+              <a:t> 5. Alfred PDF figures (</a:t>
+            </a:r>
+            <a:r>
+              <a:rPr dirty="0" err="1"/>
+              <a:t>si</a:t>
+            </a:r>
+            <a:r>
+              <a:rPr dirty="0"/>
+              <a:t> </a:t>
+            </a:r>
+            <a:r>
+              <a:rPr dirty="0" err="1"/>
+              <a:t>pdf_image_tasks</a:t>
+            </a:r>
+            <a:r>
+              <a:rPr dirty="0"/>
+              <a:t> non vide) :</a:t>
             </a:r>
           </a:p>
           <a:p>
@@ -10036,6 +11381,7 @@
               </a:defRPr>
             </a:pPr>
             <a:r>
+              <a:rPr dirty="0"/>
               <a:t>python pipeline_Automation/alfred/enrich_pdf_figures_with_alfred.py --repo &lt;Repo&gt;</a:t>
             </a:r>
           </a:p>
@@ -10051,97 +11397,197 @@
               </a:defRPr>
             </a:pPr>
             <a:r>
-              <a:t>  → Puis re-run: files_to_docs_v2 + export_st_ready_files</a:t>
-            </a:r>
-          </a:p>
-          <a:p>
-            <a:pPr>
-              <a:spcBef>
-                <a:spcPts val="600"/>
-              </a:spcBef>
-              <a:defRPr sz="1400">
-                <a:solidFill>
-                  <a:srgbClr val="333333"/>
-                </a:solidFill>
-              </a:defRPr>
-            </a:pPr>
-            <a:r>
-              <a:t>□ 6. Upload repo principal (new datasource × 4 types)</a:t>
-            </a:r>
-          </a:p>
-          <a:p>
-            <a:pPr>
-              <a:spcBef>
-                <a:spcPts val="600"/>
-              </a:spcBef>
-              <a:defRPr sz="1400">
-                <a:solidFill>
-                  <a:srgbClr val="333333"/>
-                </a:solidFill>
-              </a:defRPr>
-            </a:pPr>
-            <a:r>
-              <a:t>□ 7. Upload issues with_images enrichies Alfred</a:t>
-            </a:r>
-          </a:p>
-          <a:p>
-            <a:pPr>
-              <a:spcBef>
-                <a:spcPts val="600"/>
-              </a:spcBef>
-              <a:defRPr sz="1400">
-                <a:solidFill>
-                  <a:srgbClr val="333333"/>
-                </a:solidFill>
-              </a:defRPr>
-            </a:pPr>
-            <a:r>
-              <a:t>□ 8. Upload files PDF-enrichies (suffixe _pdf_enriched si déjà uploadé)</a:t>
-            </a:r>
-          </a:p>
-          <a:p>
-            <a:pPr>
-              <a:spcBef>
-                <a:spcPts val="600"/>
-              </a:spcBef>
-              <a:defRPr sz="1400">
-                <a:solidFill>
-                  <a:srgbClr val="333333"/>
-                </a:solidFill>
-              </a:defRPr>
-            </a:pPr>
-            <a:r>
-              <a:t>□ 9. Mettre à jour Upload_All_Drivers.ps1 + upload_alfred_issues_all_series.py</a:t>
-            </a:r>
-          </a:p>
-          <a:p>
-            <a:pPr>
-              <a:spcBef>
-                <a:spcPts val="600"/>
-              </a:spcBef>
-              <a:defRPr sz="1400">
-                <a:solidFill>
-                  <a:srgbClr val="333333"/>
-                </a:solidFill>
-              </a:defRPr>
-            </a:pPr>
-            <a:r>
-              <a:t>□ 10. Lancer Upload_All_Drivers.ps1</a:t>
-            </a:r>
-          </a:p>
-          <a:p>
-            <a:pPr>
-              <a:spcBef>
-                <a:spcPts val="600"/>
-              </a:spcBef>
-              <a:defRPr sz="1400">
-                <a:solidFill>
-                  <a:srgbClr val="333333"/>
-                </a:solidFill>
-              </a:defRPr>
-            </a:pPr>
-            <a:r>
-              <a:t>□ 11. Vérifier: Get_Persona_KBs.py</a:t>
+              <a:rPr dirty="0"/>
+              <a:t>  → </a:t>
+            </a:r>
+            <a:r>
+              <a:rPr dirty="0" err="1"/>
+              <a:t>Puis</a:t>
+            </a:r>
+            <a:r>
+              <a:rPr dirty="0"/>
+              <a:t> re-run: files_to_docs_v2 + </a:t>
+            </a:r>
+            <a:r>
+              <a:rPr dirty="0" err="1"/>
+              <a:t>export_st_ready_files</a:t>
+            </a:r>
+            <a:endParaRPr dirty="0"/>
+          </a:p>
+          <a:p>
+            <a:pPr>
+              <a:spcBef>
+                <a:spcPts val="600"/>
+              </a:spcBef>
+              <a:defRPr sz="1400">
+                <a:solidFill>
+                  <a:srgbClr val="333333"/>
+                </a:solidFill>
+              </a:defRPr>
+            </a:pPr>
+            <a:r>
+              <a:rPr dirty="0"/>
+              <a:t> 6. Upload repo principal (new </a:t>
+            </a:r>
+            <a:r>
+              <a:rPr dirty="0" err="1"/>
+              <a:t>datasource</a:t>
+            </a:r>
+            <a:r>
+              <a:rPr dirty="0"/>
+              <a:t> × 4 types)</a:t>
+            </a:r>
+          </a:p>
+          <a:p>
+            <a:pPr>
+              <a:spcBef>
+                <a:spcPts val="600"/>
+              </a:spcBef>
+              <a:defRPr sz="1400">
+                <a:solidFill>
+                  <a:srgbClr val="333333"/>
+                </a:solidFill>
+              </a:defRPr>
+            </a:pPr>
+            <a:r>
+              <a:rPr dirty="0"/>
+              <a:t> 7. Upload issues </a:t>
+            </a:r>
+            <a:r>
+              <a:rPr dirty="0" err="1"/>
+              <a:t>with_images</a:t>
+            </a:r>
+            <a:r>
+              <a:rPr dirty="0"/>
+              <a:t> </a:t>
+            </a:r>
+            <a:r>
+              <a:rPr dirty="0" err="1"/>
+              <a:t>enrichies</a:t>
+            </a:r>
+            <a:r>
+              <a:rPr dirty="0"/>
+              <a:t> Alfred</a:t>
+            </a:r>
+          </a:p>
+          <a:p>
+            <a:pPr>
+              <a:spcBef>
+                <a:spcPts val="600"/>
+              </a:spcBef>
+              <a:defRPr sz="1400">
+                <a:solidFill>
+                  <a:srgbClr val="333333"/>
+                </a:solidFill>
+              </a:defRPr>
+            </a:pPr>
+            <a:r>
+              <a:rPr dirty="0"/>
+              <a:t> 8. Upload files PDF-</a:t>
+            </a:r>
+            <a:r>
+              <a:rPr dirty="0" err="1"/>
+              <a:t>enrichies</a:t>
+            </a:r>
+            <a:r>
+              <a:rPr dirty="0"/>
+              <a:t> (</a:t>
+            </a:r>
+            <a:r>
+              <a:rPr dirty="0" err="1"/>
+              <a:t>suffixe</a:t>
+            </a:r>
+            <a:r>
+              <a:rPr dirty="0"/>
+              <a:t> _</a:t>
+            </a:r>
+            <a:r>
+              <a:rPr dirty="0" err="1"/>
+              <a:t>pdf_enriched</a:t>
+            </a:r>
+            <a:r>
+              <a:rPr dirty="0"/>
+              <a:t> </a:t>
+            </a:r>
+            <a:r>
+              <a:rPr dirty="0" err="1"/>
+              <a:t>si</a:t>
+            </a:r>
+            <a:r>
+              <a:rPr dirty="0"/>
+              <a:t> déjà </a:t>
+            </a:r>
+            <a:r>
+              <a:rPr dirty="0" err="1"/>
+              <a:t>uploadé</a:t>
+            </a:r>
+            <a:r>
+              <a:rPr dirty="0"/>
+              <a:t>)</a:t>
+            </a:r>
+          </a:p>
+          <a:p>
+            <a:pPr>
+              <a:spcBef>
+                <a:spcPts val="600"/>
+              </a:spcBef>
+              <a:defRPr sz="1400">
+                <a:solidFill>
+                  <a:srgbClr val="333333"/>
+                </a:solidFill>
+              </a:defRPr>
+            </a:pPr>
+            <a:r>
+              <a:rPr dirty="0"/>
+              <a:t> 9. </a:t>
+            </a:r>
+            <a:r>
+              <a:rPr dirty="0" err="1"/>
+              <a:t>Mettre</a:t>
+            </a:r>
+            <a:r>
+              <a:rPr dirty="0"/>
+              <a:t> à jour Upload_All_Drivers.ps1 + upload_alfred_issues_all_series.py</a:t>
+            </a:r>
+          </a:p>
+          <a:p>
+            <a:pPr>
+              <a:spcBef>
+                <a:spcPts val="600"/>
+              </a:spcBef>
+              <a:defRPr sz="1400">
+                <a:solidFill>
+                  <a:srgbClr val="333333"/>
+                </a:solidFill>
+              </a:defRPr>
+            </a:pPr>
+            <a:r>
+              <a:rPr dirty="0"/>
+              <a:t> 10. Lancer Upload_All_Drivers.ps1</a:t>
+            </a:r>
+          </a:p>
+          <a:p>
+            <a:pPr>
+              <a:spcBef>
+                <a:spcPts val="600"/>
+              </a:spcBef>
+              <a:defRPr sz="1400">
+                <a:solidFill>
+                  <a:srgbClr val="333333"/>
+                </a:solidFill>
+              </a:defRPr>
+            </a:pPr>
+            <a:r>
+              <a:rPr dirty="0"/>
+              <a:t> 11. </a:t>
+            </a:r>
+            <a:r>
+              <a:rPr dirty="0" err="1"/>
+              <a:t>Vérifier</a:t>
+            </a:r>
+            <a:r>
+              <a:rPr dirty="0"/>
+              <a:t>: Get_Persona_KBs.py</a:t>
             </a:r>
           </a:p>
         </p:txBody>
@@ -10155,7 +11601,7 @@
 </file>
 
 <file path=ppt/slides/slide25.xml><?xml version="1.0" encoding="utf-8"?>
-<p:sld xmlns:a="http://schemas.openxmlformats.org/drawingml/2006/main" xmlns:p="http://schemas.openxmlformats.org/presentationml/2006/main" xmlns:r="http://schemas.openxmlformats.org/officeDocument/2006/relationships">
+<p:sld xmlns:a="http://schemas.openxmlformats.org/drawingml/2006/main" xmlns:r="http://schemas.openxmlformats.org/officeDocument/2006/relationships" xmlns:p="http://schemas.openxmlformats.org/presentationml/2006/main">
   <p:cSld>
     <p:bg>
       <p:bgPr>
@@ -10171,7 +11617,14 @@
         <p:cNvGrpSpPr/>
         <p:nvPr/>
       </p:nvGrpSpPr>
-      <p:grpSpPr/>
+      <p:grpSpPr>
+        <a:xfrm>
+          <a:off x="0" y="0"/>
+          <a:ext cx="0" cy="0"/>
+          <a:chOff x="0" y="0"/>
+          <a:chExt cx="0" cy="0"/>
+        </a:xfrm>
+      </p:grpSpPr>
       <p:sp>
         <p:nvSpPr>
           <p:cNvPr id="2" name="Rectangle 1"/>
@@ -10232,8 +11685,8 @@
         </p:nvSpPr>
         <p:spPr>
           <a:xfrm>
-            <a:off x="548640" y="1188720"/>
-            <a:ext cx="8046720" cy="5029200"/>
+            <a:off x="292608" y="914400"/>
+            <a:ext cx="8046720" cy="6217087"/>
           </a:xfrm>
           <a:prstGeom prst="rect">
             <a:avLst/>
@@ -10257,65 +11710,116 @@
               </a:defRPr>
             </a:pPr>
             <a:r>
+              <a:rPr dirty="0" err="1"/>
               <a:t>Exécution</a:t>
             </a:r>
-          </a:p>
-          <a:p>
-            <a:pPr>
-              <a:spcBef>
-                <a:spcPts val="600"/>
-              </a:spcBef>
-              <a:defRPr sz="1400">
-                <a:solidFill>
-                  <a:srgbClr val="333333"/>
-                </a:solidFill>
-              </a:defRPr>
-            </a:pPr>
-            <a:r>
-              <a:t>• Toujours --continue-on-error (un sous-repo vide ne bloque pas)</a:t>
-            </a:r>
-          </a:p>
-          <a:p>
-            <a:pPr>
-              <a:spcBef>
-                <a:spcPts val="600"/>
-              </a:spcBef>
-              <a:defRPr sz="1400">
-                <a:solidFill>
-                  <a:srgbClr val="333333"/>
-                </a:solidFill>
-              </a:defRPr>
-            </a:pPr>
-            <a:r>
-              <a:t>• --skip-ingestion pour re-processer sans re-télécharger</a:t>
-            </a:r>
-          </a:p>
-          <a:p>
-            <a:pPr>
-              <a:spcBef>
-                <a:spcPts val="600"/>
-              </a:spcBef>
-              <a:defRPr sz="1400">
-                <a:solidFill>
-                  <a:srgbClr val="333333"/>
-                </a:solidFill>
-              </a:defRPr>
-            </a:pPr>
-            <a:r>
-              <a:t>• Vérifier summary_*.json avant upload (cohérence counts)</a:t>
-            </a:r>
-          </a:p>
-          <a:p>
-            <a:pPr>
-              <a:spcBef>
-                <a:spcPts val="600"/>
-              </a:spcBef>
-              <a:defRPr sz="1400">
-                <a:solidFill>
-                  <a:srgbClr val="333333"/>
-                </a:solidFill>
-              </a:defRPr>
-            </a:pPr>
+            <a:endParaRPr dirty="0"/>
+          </a:p>
+          <a:p>
+            <a:pPr>
+              <a:spcBef>
+                <a:spcPts val="600"/>
+              </a:spcBef>
+              <a:defRPr sz="1400">
+                <a:solidFill>
+                  <a:srgbClr val="333333"/>
+                </a:solidFill>
+              </a:defRPr>
+            </a:pPr>
+            <a:r>
+              <a:rPr dirty="0"/>
+              <a:t>• </a:t>
+            </a:r>
+            <a:r>
+              <a:rPr dirty="0" err="1"/>
+              <a:t>Toujours</a:t>
+            </a:r>
+            <a:r>
+              <a:rPr dirty="0"/>
+              <a:t> --continue-on-error (un sous-repo vide ne </a:t>
+            </a:r>
+            <a:r>
+              <a:rPr dirty="0" err="1"/>
+              <a:t>bloque</a:t>
+            </a:r>
+            <a:r>
+              <a:rPr dirty="0"/>
+              <a:t> pas)</a:t>
+            </a:r>
+          </a:p>
+          <a:p>
+            <a:pPr>
+              <a:spcBef>
+                <a:spcPts val="600"/>
+              </a:spcBef>
+              <a:defRPr sz="1400">
+                <a:solidFill>
+                  <a:srgbClr val="333333"/>
+                </a:solidFill>
+              </a:defRPr>
+            </a:pPr>
+            <a:r>
+              <a:rPr dirty="0"/>
+              <a:t>• --skip-ingestion pour re-processer sans re-</a:t>
+            </a:r>
+            <a:r>
+              <a:rPr dirty="0" err="1"/>
+              <a:t>télécharger</a:t>
+            </a:r>
+            <a:endParaRPr dirty="0"/>
+          </a:p>
+          <a:p>
+            <a:pPr>
+              <a:spcBef>
+                <a:spcPts val="600"/>
+              </a:spcBef>
+              <a:defRPr sz="1400">
+                <a:solidFill>
+                  <a:srgbClr val="333333"/>
+                </a:solidFill>
+              </a:defRPr>
+            </a:pPr>
+            <a:r>
+              <a:rPr dirty="0"/>
+              <a:t>• </a:t>
+            </a:r>
+            <a:r>
+              <a:rPr dirty="0" err="1"/>
+              <a:t>Vérifier</a:t>
+            </a:r>
+            <a:r>
+              <a:rPr dirty="0"/>
+              <a:t> summary_*.</a:t>
+            </a:r>
+            <a:r>
+              <a:rPr dirty="0" err="1"/>
+              <a:t>json</a:t>
+            </a:r>
+            <a:r>
+              <a:rPr dirty="0"/>
+              <a:t> avant upload (</a:t>
+            </a:r>
+            <a:r>
+              <a:rPr dirty="0" err="1"/>
+              <a:t>cohérence</a:t>
+            </a:r>
+            <a:r>
+              <a:rPr dirty="0"/>
+              <a:t> counts)</a:t>
+            </a:r>
+          </a:p>
+          <a:p>
+            <a:pPr>
+              <a:spcBef>
+                <a:spcPts val="600"/>
+              </a:spcBef>
+              <a:defRPr sz="1400">
+                <a:solidFill>
+                  <a:srgbClr val="333333"/>
+                </a:solidFill>
+              </a:defRPr>
+            </a:pPr>
+            <a:endParaRPr dirty="0"/>
           </a:p>
           <a:p>
             <a:pPr>
@@ -10329,6 +11833,7 @@
               </a:defRPr>
             </a:pPr>
             <a:r>
+              <a:rPr dirty="0"/>
               <a:t>Upload</a:t>
             </a:r>
           </a:p>
@@ -10344,50 +11849,123 @@
               </a:defRPr>
             </a:pPr>
             <a:r>
-              <a:t>• Ne pas uploader les fichiers vides (resolver_cases = [])</a:t>
-            </a:r>
-          </a:p>
-          <a:p>
-            <a:pPr>
-              <a:spcBef>
-                <a:spcPts val="600"/>
-              </a:spcBef>
-              <a:defRPr sz="1400">
-                <a:solidFill>
-                  <a:srgbClr val="333333"/>
-                </a:solidFill>
-              </a:defRPr>
-            </a:pPr>
-            <a:r>
-              <a:t>• 1 datasource = 1 série + 1 type d'artifact</a:t>
-            </a:r>
-          </a:p>
-          <a:p>
-            <a:pPr>
-              <a:spcBef>
-                <a:spcPts val="600"/>
-              </a:spcBef>
-              <a:defRPr sz="1400">
-                <a:solidFill>
-                  <a:srgbClr val="333333"/>
-                </a:solidFill>
-              </a:defRPr>
-            </a:pPr>
-            <a:r>
-              <a:t>• Les drivers vont dans la même datasource que le repo principal</a:t>
-            </a:r>
-          </a:p>
-          <a:p>
-            <a:pPr>
-              <a:spcBef>
-                <a:spcPts val="600"/>
-              </a:spcBef>
-              <a:defRPr sz="1400">
-                <a:solidFill>
-                  <a:srgbClr val="333333"/>
-                </a:solidFill>
-              </a:defRPr>
-            </a:pPr>
+              <a:rPr dirty="0"/>
+              <a:t>• Ne pas uploader les </a:t>
+            </a:r>
+            <a:r>
+              <a:rPr dirty="0" err="1"/>
+              <a:t>fichiers</a:t>
+            </a:r>
+            <a:r>
+              <a:rPr dirty="0"/>
+              <a:t> vides (</a:t>
+            </a:r>
+            <a:r>
+              <a:rPr dirty="0" err="1"/>
+              <a:t>resolver_cases</a:t>
+            </a:r>
+            <a:r>
+              <a:rPr dirty="0"/>
+              <a:t> = [])</a:t>
+            </a:r>
+          </a:p>
+          <a:p>
+            <a:pPr>
+              <a:spcBef>
+                <a:spcPts val="600"/>
+              </a:spcBef>
+              <a:defRPr sz="1400">
+                <a:solidFill>
+                  <a:srgbClr val="333333"/>
+                </a:solidFill>
+              </a:defRPr>
+            </a:pPr>
+            <a:r>
+              <a:rPr dirty="0"/>
+              <a:t>• 1 </a:t>
+            </a:r>
+            <a:r>
+              <a:rPr dirty="0" err="1"/>
+              <a:t>datasource</a:t>
+            </a:r>
+            <a:r>
+              <a:rPr dirty="0"/>
+              <a:t> = 1 </a:t>
+            </a:r>
+            <a:r>
+              <a:rPr dirty="0" err="1"/>
+              <a:t>série</a:t>
+            </a:r>
+            <a:r>
+              <a:rPr dirty="0"/>
+              <a:t> + 1 type </a:t>
+            </a:r>
+            <a:r>
+              <a:rPr dirty="0" err="1"/>
+              <a:t>d'artifact</a:t>
+            </a:r>
+            <a:endParaRPr dirty="0"/>
+          </a:p>
+          <a:p>
+            <a:pPr>
+              <a:spcBef>
+                <a:spcPts val="600"/>
+              </a:spcBef>
+              <a:defRPr sz="1400">
+                <a:solidFill>
+                  <a:srgbClr val="333333"/>
+                </a:solidFill>
+              </a:defRPr>
+            </a:pPr>
+            <a:r>
+              <a:rPr dirty="0"/>
+              <a:t>• Les drivers </a:t>
+            </a:r>
+            <a:r>
+              <a:rPr dirty="0" err="1"/>
+              <a:t>vont</a:t>
+            </a:r>
+            <a:r>
+              <a:rPr dirty="0"/>
+              <a:t> dans la </a:t>
+            </a:r>
+            <a:r>
+              <a:rPr dirty="0" err="1"/>
+              <a:t>même</a:t>
+            </a:r>
+            <a:r>
+              <a:rPr dirty="0"/>
+              <a:t> </a:t>
+            </a:r>
+            <a:r>
+              <a:rPr dirty="0" err="1"/>
+              <a:t>datasource</a:t>
+            </a:r>
+            <a:r>
+              <a:rPr dirty="0"/>
+              <a:t> </a:t>
+            </a:r>
+            <a:r>
+              <a:rPr dirty="0" err="1"/>
+              <a:t>que</a:t>
+            </a:r>
+            <a:r>
+              <a:rPr dirty="0"/>
+              <a:t> le repo principal</a:t>
+            </a:r>
+          </a:p>
+          <a:p>
+            <a:pPr>
+              <a:spcBef>
+                <a:spcPts val="600"/>
+              </a:spcBef>
+              <a:defRPr sz="1400">
+                <a:solidFill>
+                  <a:srgbClr val="333333"/>
+                </a:solidFill>
+              </a:defRPr>
+            </a:pPr>
+            <a:endParaRPr lang="fr-FR" dirty="0"/>
           </a:p>
           <a:p>
             <a:pPr>
@@ -10401,6 +11979,121 @@
               </a:defRPr>
             </a:pPr>
             <a:r>
+              <a:rPr lang="en-US" dirty="0"/>
+              <a:t>Alfred</a:t>
+            </a:r>
+          </a:p>
+          <a:p>
+            <a:pPr>
+              <a:spcBef>
+                <a:spcPts val="600"/>
+              </a:spcBef>
+              <a:defRPr sz="1400">
+                <a:solidFill>
+                  <a:srgbClr val="333333"/>
+                </a:solidFill>
+              </a:defRPr>
+            </a:pPr>
+            <a:r>
+              <a:rPr lang="en-US" dirty="0"/>
+              <a:t>• PAS </a:t>
+            </a:r>
+            <a:r>
+              <a:rPr lang="en-US" dirty="0" err="1"/>
+              <a:t>besoin</a:t>
+            </a:r>
+            <a:r>
+              <a:rPr lang="en-US" dirty="0"/>
+              <a:t> de --use-proxy (</a:t>
+            </a:r>
+            <a:r>
+              <a:rPr lang="en-US" dirty="0" err="1"/>
+              <a:t>accès</a:t>
+            </a:r>
+            <a:r>
+              <a:rPr lang="en-US" dirty="0"/>
+              <a:t> direct </a:t>
+            </a:r>
+            <a:r>
+              <a:rPr lang="en-US" dirty="0" err="1"/>
+              <a:t>depuis</a:t>
+            </a:r>
+            <a:r>
+              <a:rPr lang="en-US" dirty="0"/>
+              <a:t> réseau ST)</a:t>
+            </a:r>
+          </a:p>
+          <a:p>
+            <a:pPr>
+              <a:spcBef>
+                <a:spcPts val="600"/>
+              </a:spcBef>
+              <a:defRPr sz="1400">
+                <a:solidFill>
+                  <a:srgbClr val="333333"/>
+                </a:solidFill>
+              </a:defRPr>
+            </a:pPr>
+            <a:r>
+              <a:rPr lang="en-US" dirty="0"/>
+              <a:t>• </a:t>
+            </a:r>
+            <a:r>
+              <a:rPr lang="en-US" dirty="0" err="1"/>
+              <a:t>Vérifier</a:t>
+            </a:r>
+            <a:r>
+              <a:rPr lang="en-US" dirty="0"/>
+              <a:t> 0 [IMAGE DESCRIPTION UNAVAILABLE] après </a:t>
+            </a:r>
+            <a:r>
+              <a:rPr lang="en-US" dirty="0" err="1"/>
+              <a:t>enrichissement</a:t>
+            </a:r>
+            <a:endParaRPr lang="en-US" dirty="0"/>
+          </a:p>
+          <a:p>
+            <a:pPr>
+              <a:spcBef>
+                <a:spcPts val="600"/>
+              </a:spcBef>
+              <a:defRPr sz="1400">
+                <a:solidFill>
+                  <a:srgbClr val="333333"/>
+                </a:solidFill>
+              </a:defRPr>
+            </a:pPr>
+            <a:r>
+              <a:rPr lang="en-US" dirty="0"/>
+              <a:t>• Upload_All_Drivers.ps1 a un throttle de 5s + retry auto (rate limit API)</a:t>
+            </a:r>
+          </a:p>
+          <a:p>
+            <a:pPr>
+              <a:spcBef>
+                <a:spcPts val="600"/>
+              </a:spcBef>
+              <a:defRPr sz="1400">
+                <a:solidFill>
+                  <a:srgbClr val="333333"/>
+                </a:solidFill>
+              </a:defRPr>
+            </a:pPr>
+            <a:endParaRPr dirty="0"/>
+          </a:p>
+          <a:p>
+            <a:pPr>
+              <a:spcBef>
+                <a:spcPts val="1200"/>
+              </a:spcBef>
+              <a:defRPr sz="1600" b="1">
+                <a:solidFill>
+                  <a:srgbClr val="03234B"/>
+                </a:solidFill>
+              </a:defRPr>
+            </a:pPr>
+            <a:r>
+              <a:rPr dirty="0"/>
               <a:t>Git</a:t>
             </a:r>
           </a:p>
@@ -10416,110 +12109,110 @@
               </a:defRPr>
             </a:pPr>
             <a:r>
-              <a:t>• JAMAIS commit data/*.json (&gt; 100 MB → push rejeté)</a:t>
-            </a:r>
-          </a:p>
-          <a:p>
-            <a:pPr>
-              <a:spcBef>
-                <a:spcPts val="600"/>
-              </a:spcBef>
-              <a:defRPr sz="1400">
-                <a:solidFill>
-                  <a:srgbClr val="333333"/>
-                </a:solidFill>
-              </a:defRPr>
-            </a:pPr>
-            <a:r>
-              <a:t>• .gitignore exclut data/raw_*, data/clean_*, data/docs_*, data/chunks_*</a:t>
-            </a:r>
-          </a:p>
-          <a:p>
-            <a:pPr>
-              <a:spcBef>
-                <a:spcPts val="600"/>
-              </a:spcBef>
-              <a:defRPr sz="1400">
-                <a:solidFill>
-                  <a:srgbClr val="333333"/>
-                </a:solidFill>
-              </a:defRPr>
-            </a:pPr>
-            <a:r>
-              <a:t>• datasets/07_delivery/ EST commité (&lt; 50 MB, c'est le livrable)</a:t>
-            </a:r>
-          </a:p>
-          <a:p>
-            <a:pPr>
-              <a:spcBef>
-                <a:spcPts val="600"/>
-              </a:spcBef>
-              <a:defRPr sz="1400">
-                <a:solidFill>
-                  <a:srgbClr val="333333"/>
-                </a:solidFill>
-              </a:defRPr>
-            </a:pPr>
-          </a:p>
-          <a:p>
-            <a:pPr>
-              <a:spcBef>
-                <a:spcPts val="1200"/>
-              </a:spcBef>
-              <a:defRPr sz="1600" b="1">
-                <a:solidFill>
-                  <a:srgbClr val="03234B"/>
-                </a:solidFill>
-              </a:defRPr>
-            </a:pPr>
-            <a:r>
-              <a:t>Alfred</a:t>
-            </a:r>
-          </a:p>
-          <a:p>
-            <a:pPr>
-              <a:spcBef>
-                <a:spcPts val="600"/>
-              </a:spcBef>
-              <a:defRPr sz="1400">
-                <a:solidFill>
-                  <a:srgbClr val="333333"/>
-                </a:solidFill>
-              </a:defRPr>
-            </a:pPr>
-            <a:r>
-              <a:t>• PAS besoin de --use-proxy (accès direct depuis réseau ST)</a:t>
-            </a:r>
-          </a:p>
-          <a:p>
-            <a:pPr>
-              <a:spcBef>
-                <a:spcPts val="600"/>
-              </a:spcBef>
-              <a:defRPr sz="1400">
-                <a:solidFill>
-                  <a:srgbClr val="333333"/>
-                </a:solidFill>
-              </a:defRPr>
-            </a:pPr>
-            <a:r>
-              <a:t>• Vérifier 0 [IMAGE DESCRIPTION UNAVAILABLE] après enrichissement</a:t>
-            </a:r>
-          </a:p>
-          <a:p>
-            <a:pPr>
-              <a:spcBef>
-                <a:spcPts val="600"/>
-              </a:spcBef>
-              <a:defRPr sz="1400">
-                <a:solidFill>
-                  <a:srgbClr val="333333"/>
-                </a:solidFill>
-              </a:defRPr>
-            </a:pPr>
-            <a:r>
-              <a:t>• Upload_All_Drivers.ps1 a un throttle de 5s + retry auto (rate limit API)</a:t>
-            </a:r>
+              <a:rPr dirty="0"/>
+              <a:t>• JAMAIS commit data/*.</a:t>
+            </a:r>
+            <a:r>
+              <a:rPr dirty="0" err="1"/>
+              <a:t>json</a:t>
+            </a:r>
+            <a:r>
+              <a:rPr dirty="0"/>
+              <a:t> (&gt; 100 MB → push </a:t>
+            </a:r>
+            <a:r>
+              <a:rPr dirty="0" err="1"/>
+              <a:t>rejeté</a:t>
+            </a:r>
+            <a:r>
+              <a:rPr dirty="0"/>
+              <a:t>)</a:t>
+            </a:r>
+          </a:p>
+          <a:p>
+            <a:pPr>
+              <a:spcBef>
+                <a:spcPts val="600"/>
+              </a:spcBef>
+              <a:defRPr sz="1400">
+                <a:solidFill>
+                  <a:srgbClr val="333333"/>
+                </a:solidFill>
+              </a:defRPr>
+            </a:pPr>
+            <a:r>
+              <a:rPr dirty="0"/>
+              <a:t>• .</a:t>
+            </a:r>
+            <a:r>
+              <a:rPr dirty="0" err="1"/>
+              <a:t>gitignore</a:t>
+            </a:r>
+            <a:r>
+              <a:rPr dirty="0"/>
+              <a:t> </a:t>
+            </a:r>
+            <a:r>
+              <a:rPr dirty="0" err="1"/>
+              <a:t>exclut</a:t>
+            </a:r>
+            <a:r>
+              <a:rPr dirty="0"/>
+              <a:t> data/raw_*, data/clean_*, data/docs_*, data/chunks_*</a:t>
+            </a:r>
+          </a:p>
+          <a:p>
+            <a:pPr>
+              <a:spcBef>
+                <a:spcPts val="600"/>
+              </a:spcBef>
+              <a:defRPr sz="1400">
+                <a:solidFill>
+                  <a:srgbClr val="333333"/>
+                </a:solidFill>
+              </a:defRPr>
+            </a:pPr>
+            <a:r>
+              <a:rPr dirty="0"/>
+              <a:t>• datasets/07_delivery/ EST </a:t>
+            </a:r>
+            <a:r>
+              <a:rPr dirty="0" err="1"/>
+              <a:t>commité</a:t>
+            </a:r>
+            <a:r>
+              <a:rPr dirty="0"/>
+              <a:t> (&lt; 50 MB, </a:t>
+            </a:r>
+            <a:r>
+              <a:rPr dirty="0" err="1"/>
+              <a:t>c'est</a:t>
+            </a:r>
+            <a:r>
+              <a:rPr dirty="0"/>
+              <a:t> le </a:t>
+            </a:r>
+            <a:r>
+              <a:rPr dirty="0" err="1"/>
+              <a:t>livrable</a:t>
+            </a:r>
+            <a:r>
+              <a:rPr dirty="0"/>
+              <a:t>)</a:t>
+            </a:r>
+          </a:p>
+          <a:p>
+            <a:pPr>
+              <a:spcBef>
+                <a:spcPts val="600"/>
+              </a:spcBef>
+              <a:defRPr sz="1400">
+                <a:solidFill>
+                  <a:srgbClr val="333333"/>
+                </a:solidFill>
+              </a:defRPr>
+            </a:pPr>
+            <a:endParaRPr dirty="0"/>
           </a:p>
         </p:txBody>
       </p:sp>
@@ -10532,7 +12225,7 @@
 </file>
 
 <file path=ppt/slides/slide26.xml><?xml version="1.0" encoding="utf-8"?>
-<p:sld xmlns:a="http://schemas.openxmlformats.org/drawingml/2006/main" xmlns:p="http://schemas.openxmlformats.org/presentationml/2006/main" xmlns:r="http://schemas.openxmlformats.org/officeDocument/2006/relationships">
+<p:sld xmlns:a="http://schemas.openxmlformats.org/drawingml/2006/main" xmlns:r="http://schemas.openxmlformats.org/officeDocument/2006/relationships" xmlns:p="http://schemas.openxmlformats.org/presentationml/2006/main">
   <p:cSld>
     <p:bg>
       <p:bgPr>
@@ -10548,7 +12241,14 @@
         <p:cNvGrpSpPr/>
         <p:nvPr/>
       </p:nvGrpSpPr>
-      <p:grpSpPr/>
+      <p:grpSpPr>
+        <a:xfrm>
+          <a:off x="0" y="0"/>
+          <a:ext cx="0" cy="0"/>
+          <a:chOff x="0" y="0"/>
+          <a:chExt cx="0" cy="0"/>
+        </a:xfrm>
+      </p:grpSpPr>
       <p:sp>
         <p:nvSpPr>
           <p:cNvPr id="2" name="Rectangle 1"/>
@@ -10620,9 +12320,27 @@
                 <a:tableStyleId>{5C22544A-7EE6-4342-B048-85BDC9FD1C3A}</a:tableStyleId>
               </a:tblPr>
               <a:tblGrid>
-                <a:gridCol w="2865120"/>
-                <a:gridCol w="2865120"/>
-                <a:gridCol w="2865120"/>
+                <a:gridCol w="2865120">
+                  <a:extLst>
+                    <a:ext uri="{9D8B030D-6E8A-4147-A177-3AD203B41FA5}">
+                      <a16:colId xmlns:a16="http://schemas.microsoft.com/office/drawing/2014/main" val="20000"/>
+                    </a:ext>
+                  </a:extLst>
+                </a:gridCol>
+                <a:gridCol w="2865120">
+                  <a:extLst>
+                    <a:ext uri="{9D8B030D-6E8A-4147-A177-3AD203B41FA5}">
+                      <a16:colId xmlns:a16="http://schemas.microsoft.com/office/drawing/2014/main" val="20001"/>
+                    </a:ext>
+                  </a:extLst>
+                </a:gridCol>
+                <a:gridCol w="2865120">
+                  <a:extLst>
+                    <a:ext uri="{9D8B030D-6E8A-4147-A177-3AD203B41FA5}">
+                      <a16:colId xmlns:a16="http://schemas.microsoft.com/office/drawing/2014/main" val="20002"/>
+                    </a:ext>
+                  </a:extLst>
+                </a:gridCol>
               </a:tblGrid>
               <a:tr h="365760">
                 <a:tc>
@@ -10694,6 +12412,11 @@
                     </a:solidFill>
                   </a:tcPr>
                 </a:tc>
+                <a:extLst>
+                  <a:ext uri="{0D108BD9-81ED-4DB2-BD59-A6C34878D82A}">
+                    <a16:rowId xmlns:a16="http://schemas.microsoft.com/office/drawing/2014/main" val="10000"/>
+                  </a:ext>
+                </a:extLst>
               </a:tr>
               <a:tr h="365760">
                 <a:tc>
@@ -10753,6 +12476,11 @@
                   </a:txBody>
                   <a:tcPr/>
                 </a:tc>
+                <a:extLst>
+                  <a:ext uri="{0D108BD9-81ED-4DB2-BD59-A6C34878D82A}">
+                    <a16:rowId xmlns:a16="http://schemas.microsoft.com/office/drawing/2014/main" val="10001"/>
+                  </a:ext>
+                </a:extLst>
               </a:tr>
               <a:tr h="365760">
                 <a:tc>
@@ -10812,6 +12540,11 @@
                   </a:txBody>
                   <a:tcPr/>
                 </a:tc>
+                <a:extLst>
+                  <a:ext uri="{0D108BD9-81ED-4DB2-BD59-A6C34878D82A}">
+                    <a16:rowId xmlns:a16="http://schemas.microsoft.com/office/drawing/2014/main" val="10002"/>
+                  </a:ext>
+                </a:extLst>
               </a:tr>
               <a:tr h="365760">
                 <a:tc>
@@ -10871,6 +12604,11 @@
                   </a:txBody>
                   <a:tcPr/>
                 </a:tc>
+                <a:extLst>
+                  <a:ext uri="{0D108BD9-81ED-4DB2-BD59-A6C34878D82A}">
+                    <a16:rowId xmlns:a16="http://schemas.microsoft.com/office/drawing/2014/main" val="10003"/>
+                  </a:ext>
+                </a:extLst>
               </a:tr>
               <a:tr h="365760">
                 <a:tc>
@@ -10930,6 +12668,11 @@
                   </a:txBody>
                   <a:tcPr/>
                 </a:tc>
+                <a:extLst>
+                  <a:ext uri="{0D108BD9-81ED-4DB2-BD59-A6C34878D82A}">
+                    <a16:rowId xmlns:a16="http://schemas.microsoft.com/office/drawing/2014/main" val="10004"/>
+                  </a:ext>
+                </a:extLst>
               </a:tr>
               <a:tr h="365760">
                 <a:tc>
@@ -10989,6 +12732,11 @@
                   </a:txBody>
                   <a:tcPr/>
                 </a:tc>
+                <a:extLst>
+                  <a:ext uri="{0D108BD9-81ED-4DB2-BD59-A6C34878D82A}">
+                    <a16:rowId xmlns:a16="http://schemas.microsoft.com/office/drawing/2014/main" val="10005"/>
+                  </a:ext>
+                </a:extLst>
               </a:tr>
               <a:tr h="365760">
                 <a:tc>
@@ -11048,6 +12796,11 @@
                   </a:txBody>
                   <a:tcPr/>
                 </a:tc>
+                <a:extLst>
+                  <a:ext uri="{0D108BD9-81ED-4DB2-BD59-A6C34878D82A}">
+                    <a16:rowId xmlns:a16="http://schemas.microsoft.com/office/drawing/2014/main" val="10006"/>
+                  </a:ext>
+                </a:extLst>
               </a:tr>
               <a:tr h="365760">
                 <a:tc>
@@ -11107,6 +12860,11 @@
                   </a:txBody>
                   <a:tcPr/>
                 </a:tc>
+                <a:extLst>
+                  <a:ext uri="{0D108BD9-81ED-4DB2-BD59-A6C34878D82A}">
+                    <a16:rowId xmlns:a16="http://schemas.microsoft.com/office/drawing/2014/main" val="10007"/>
+                  </a:ext>
+                </a:extLst>
               </a:tr>
             </a:tbl>
           </a:graphicData>
@@ -11121,7 +12879,7 @@
 </file>
 
 <file path=ppt/slides/slide27.xml><?xml version="1.0" encoding="utf-8"?>
-<p:sld xmlns:a="http://schemas.openxmlformats.org/drawingml/2006/main" xmlns:p="http://schemas.openxmlformats.org/presentationml/2006/main" xmlns:r="http://schemas.openxmlformats.org/officeDocument/2006/relationships">
+<p:sld xmlns:a="http://schemas.openxmlformats.org/drawingml/2006/main" xmlns:r="http://schemas.openxmlformats.org/officeDocument/2006/relationships" xmlns:p="http://schemas.openxmlformats.org/presentationml/2006/main">
   <p:cSld>
     <p:bg>
       <p:bgPr>
@@ -11137,7 +12895,14 @@
         <p:cNvGrpSpPr/>
         <p:nvPr/>
       </p:nvGrpSpPr>
-      <p:grpSpPr/>
+      <p:grpSpPr>
+        <a:xfrm>
+          <a:off x="0" y="0"/>
+          <a:ext cx="0" cy="0"/>
+          <a:chOff x="0" y="0"/>
+          <a:chExt cx="0" cy="0"/>
+        </a:xfrm>
+      </p:grpSpPr>
       <p:sp>
         <p:nvSpPr>
           <p:cNvPr id="2" name="Rectangle 1"/>
@@ -11282,6 +13047,7 @@
                 </a:solidFill>
               </a:defRPr>
             </a:pPr>
+            <a:endParaRPr/>
           </a:p>
           <a:p>
             <a:pPr>
@@ -11354,6 +13120,7 @@
                 </a:solidFill>
               </a:defRPr>
             </a:pPr>
+            <a:endParaRPr/>
           </a:p>
           <a:p>
             <a:pPr>
@@ -11441,7 +13208,7 @@
 </file>
 
 <file path=ppt/slides/slide28.xml><?xml version="1.0" encoding="utf-8"?>
-<p:sld xmlns:a="http://schemas.openxmlformats.org/drawingml/2006/main" xmlns:p="http://schemas.openxmlformats.org/presentationml/2006/main" xmlns:r="http://schemas.openxmlformats.org/officeDocument/2006/relationships">
+<p:sld xmlns:a="http://schemas.openxmlformats.org/drawingml/2006/main" xmlns:r="http://schemas.openxmlformats.org/officeDocument/2006/relationships" xmlns:p="http://schemas.openxmlformats.org/presentationml/2006/main">
   <p:cSld>
     <p:bg>
       <p:bgPr>
@@ -11457,7 +13224,14 @@
         <p:cNvGrpSpPr/>
         <p:nvPr/>
       </p:nvGrpSpPr>
-      <p:grpSpPr/>
+      <p:grpSpPr>
+        <a:xfrm>
+          <a:off x="0" y="0"/>
+          <a:ext cx="0" cy="0"/>
+          <a:chOff x="0" y="0"/>
+          <a:chExt cx="0" cy="0"/>
+        </a:xfrm>
+      </p:grpSpPr>
       <p:sp>
         <p:nvSpPr>
           <p:cNvPr id="2" name="Rectangle 1"/>
@@ -11617,6 +13391,7 @@
                 </a:solidFill>
               </a:defRPr>
             </a:pPr>
+            <a:endParaRPr/>
           </a:p>
           <a:p>
             <a:pPr>
@@ -11719,6 +13494,7 @@
                 </a:solidFill>
               </a:defRPr>
             </a:pPr>
+            <a:endParaRPr/>
           </a:p>
           <a:p>
             <a:pPr>
@@ -11791,7 +13567,7 @@
 </file>
 
 <file path=ppt/slides/slide29.xml><?xml version="1.0" encoding="utf-8"?>
-<p:sld xmlns:a="http://schemas.openxmlformats.org/drawingml/2006/main" xmlns:p="http://schemas.openxmlformats.org/presentationml/2006/main" xmlns:r="http://schemas.openxmlformats.org/officeDocument/2006/relationships">
+<p:sld xmlns:a="http://schemas.openxmlformats.org/drawingml/2006/main" xmlns:r="http://schemas.openxmlformats.org/officeDocument/2006/relationships" xmlns:p="http://schemas.openxmlformats.org/presentationml/2006/main">
   <p:cSld>
     <p:bg>
       <p:bgPr>
@@ -11807,7 +13583,14 @@
         <p:cNvGrpSpPr/>
         <p:nvPr/>
       </p:nvGrpSpPr>
-      <p:grpSpPr/>
+      <p:grpSpPr>
+        <a:xfrm>
+          <a:off x="0" y="0"/>
+          <a:ext cx="0" cy="0"/>
+          <a:chOff x="0" y="0"/>
+          <a:chExt cx="0" cy="0"/>
+        </a:xfrm>
+      </p:grpSpPr>
       <p:sp>
         <p:nvSpPr>
           <p:cNvPr id="2" name="Rectangle 1"/>
@@ -11937,6 +13720,7 @@
                 </a:solidFill>
               </a:defRPr>
             </a:pPr>
+            <a:endParaRPr/>
           </a:p>
           <a:p>
             <a:pPr>
@@ -12009,6 +13793,7 @@
                 </a:solidFill>
               </a:defRPr>
             </a:pPr>
+            <a:endParaRPr/>
           </a:p>
           <a:p>
             <a:pPr>
@@ -12097,6 +13882,7 @@
                 </a:solidFill>
               </a:defRPr>
             </a:pPr>
+            <a:endParaRPr/>
           </a:p>
           <a:p>
             <a:pPr>
@@ -12154,7 +13940,7 @@
 </file>
 
 <file path=ppt/slides/slide3.xml><?xml version="1.0" encoding="utf-8"?>
-<p:sld xmlns:a="http://schemas.openxmlformats.org/drawingml/2006/main" xmlns:p="http://schemas.openxmlformats.org/presentationml/2006/main" xmlns:r="http://schemas.openxmlformats.org/officeDocument/2006/relationships">
+<p:sld xmlns:a="http://schemas.openxmlformats.org/drawingml/2006/main" xmlns:r="http://schemas.openxmlformats.org/officeDocument/2006/relationships" xmlns:p="http://schemas.openxmlformats.org/presentationml/2006/main">
   <p:cSld>
     <p:bg>
       <p:bgPr>
@@ -12170,7 +13956,14 @@
         <p:cNvGrpSpPr/>
         <p:nvPr/>
       </p:nvGrpSpPr>
-      <p:grpSpPr/>
+      <p:grpSpPr>
+        <a:xfrm>
+          <a:off x="0" y="0"/>
+          <a:ext cx="0" cy="0"/>
+          <a:chOff x="0" y="0"/>
+          <a:chExt cx="0" cy="0"/>
+        </a:xfrm>
+      </p:grpSpPr>
       <p:sp>
         <p:nvSpPr>
           <p:cNvPr id="2" name="Rectangle 1"/>
@@ -12350,6 +14143,7 @@
           <a:lstStyle/>
           <a:p>
             <a:pPr algn="ctr"/>
+            <a:endParaRPr/>
           </a:p>
         </p:txBody>
       </p:sp>
@@ -12480,6 +14274,7 @@
           <a:lstStyle/>
           <a:p>
             <a:pPr algn="ctr"/>
+            <a:endParaRPr/>
           </a:p>
         </p:txBody>
       </p:sp>
@@ -12610,6 +14405,7 @@
           <a:lstStyle/>
           <a:p>
             <a:pPr algn="ctr"/>
+            <a:endParaRPr/>
           </a:p>
         </p:txBody>
       </p:sp>
@@ -12740,6 +14536,7 @@
           <a:lstStyle/>
           <a:p>
             <a:pPr algn="ctr"/>
+            <a:endParaRPr/>
           </a:p>
         </p:txBody>
       </p:sp>
@@ -12870,6 +14667,7 @@
           <a:lstStyle/>
           <a:p>
             <a:pPr algn="ctr"/>
+            <a:endParaRPr/>
           </a:p>
         </p:txBody>
       </p:sp>
@@ -13000,6 +14798,7 @@
           <a:lstStyle/>
           <a:p>
             <a:pPr algn="ctr"/>
+            <a:endParaRPr/>
           </a:p>
         </p:txBody>
       </p:sp>
@@ -13099,7 +14898,7 @@
 </file>
 
 <file path=ppt/slides/slide30.xml><?xml version="1.0" encoding="utf-8"?>
-<p:sld xmlns:a="http://schemas.openxmlformats.org/drawingml/2006/main" xmlns:p="http://schemas.openxmlformats.org/presentationml/2006/main" xmlns:r="http://schemas.openxmlformats.org/officeDocument/2006/relationships">
+<p:sld xmlns:a="http://schemas.openxmlformats.org/drawingml/2006/main" xmlns:r="http://schemas.openxmlformats.org/officeDocument/2006/relationships" xmlns:p="http://schemas.openxmlformats.org/presentationml/2006/main">
   <p:cSld>
     <p:bg>
       <p:bgPr>
@@ -13115,7 +14914,14 @@
         <p:cNvGrpSpPr/>
         <p:nvPr/>
       </p:nvGrpSpPr>
-      <p:grpSpPr/>
+      <p:grpSpPr>
+        <a:xfrm>
+          <a:off x="0" y="0"/>
+          <a:ext cx="0" cy="0"/>
+          <a:chOff x="0" y="0"/>
+          <a:chExt cx="0" cy="0"/>
+        </a:xfrm>
+      </p:grpSpPr>
       <p:sp>
         <p:nvSpPr>
           <p:cNvPr id="2" name="Rectangle 1"/>
@@ -13190,236 +14996,52 @@
           </a:bodyPr>
           <a:lstStyle/>
           <a:p>
-            <a:pPr>
-              <a:spcBef>
-                <a:spcPts val="1200"/>
-              </a:spcBef>
-              <a:defRPr sz="1600" b="1">
-                <a:solidFill>
-                  <a:srgbClr val="03234B"/>
-                </a:solidFill>
-              </a:defRPr>
-            </a:pPr>
-            <a:r>
-              <a:t>Pipeline complet :</a:t>
-            </a:r>
-          </a:p>
-          <a:p>
-            <a:pPr>
-              <a:spcBef>
-                <a:spcPts val="400"/>
-              </a:spcBef>
-              <a:defRPr sz="1200">
-                <a:solidFill>
-                  <a:srgbClr val="333333"/>
-                </a:solidFill>
-                <a:latin typeface="Consolas"/>
-              </a:defRPr>
-            </a:pPr>
-            <a:r>
-              <a:t>python -m pipeline.run_full_workflow --export-st-ready --continue-on-error</a:t>
-            </a:r>
-          </a:p>
-          <a:p>
-            <a:pPr>
-              <a:spcBef>
-                <a:spcPts val="600"/>
-              </a:spcBef>
-              <a:defRPr sz="1400">
-                <a:solidFill>
-                  <a:srgbClr val="333333"/>
-                </a:solidFill>
-              </a:defRPr>
-            </a:pPr>
-          </a:p>
-          <a:p>
-            <a:pPr>
-              <a:spcBef>
-                <a:spcPts val="1200"/>
-              </a:spcBef>
-              <a:defRPr sz="1600" b="1">
-                <a:solidFill>
-                  <a:srgbClr val="03234B"/>
-                </a:solidFill>
-              </a:defRPr>
-            </a:pPr>
-            <a:r>
-              <a:t>Upload drivers (toutes séries) :</a:t>
-            </a:r>
-          </a:p>
-          <a:p>
-            <a:pPr>
-              <a:spcBef>
-                <a:spcPts val="400"/>
-              </a:spcBef>
-              <a:defRPr sz="1200">
-                <a:solidFill>
-                  <a:srgbClr val="333333"/>
-                </a:solidFill>
-                <a:latin typeface="Consolas"/>
-              </a:defRPr>
-            </a:pPr>
+            <a:r>
+              <a:t>Workflow serie complet (prepare + upload KB):</a:t>
+            </a:r>
+          </a:p>
+          <a:p>
+            <a:r>
+              <a:t>.\pipeline_Automation\workflow\Run_Single_Series_Full_Pipeline_And_Upload.ps1 -Series H7</a:t>
+            </a:r>
+          </a:p>
+          <a:p>
+            <a:endParaRPr/>
+          </a:p>
+          <a:p>
+            <a:r>
+              <a:t>Prepare seulement:</a:t>
+            </a:r>
+          </a:p>
+          <a:p>
+            <a:r>
+              <a:t>.\pipeline_Automation\workflow\Run_Single_Series_Full_Pipeline_And_Upload.ps1 -Series H7 -Mode Prepare</a:t>
+            </a:r>
+          </a:p>
+          <a:p>
+            <a:endParaRPr/>
+          </a:p>
+          <a:p>
+            <a:r>
+              <a:t>Upload seulement:</a:t>
+            </a:r>
+          </a:p>
+          <a:p>
+            <a:r>
+              <a:t>.\pipeline_Automation\workflow\Run_Single_Series_Full_Pipeline_And_Upload.ps1 -Series H7 -Mode Upload</a:t>
+            </a:r>
+          </a:p>
+          <a:p>
+            <a:endParaRPr/>
+          </a:p>
+          <a:p>
+            <a:r>
+              <a:t>Upload drivers toutes series:</a:t>
+            </a:r>
+          </a:p>
+          <a:p>
             <a:r>
               <a:t>.\pipeline_Automation\upload\Upload_All_Drivers.ps1</a:t>
-            </a:r>
-          </a:p>
-          <a:p>
-            <a:pPr>
-              <a:spcBef>
-                <a:spcPts val="600"/>
-              </a:spcBef>
-              <a:defRPr sz="1400">
-                <a:solidFill>
-                  <a:srgbClr val="333333"/>
-                </a:solidFill>
-              </a:defRPr>
-            </a:pPr>
-            <a:r>
-              <a:t>  → Parcourt by_series/*/drivers/, uploade chaque artifact, throttle 5s</a:t>
-            </a:r>
-          </a:p>
-          <a:p>
-            <a:pPr>
-              <a:spcBef>
-                <a:spcPts val="600"/>
-              </a:spcBef>
-              <a:defRPr sz="1400">
-                <a:solidFill>
-                  <a:srgbClr val="333333"/>
-                </a:solidFill>
-              </a:defRPr>
-            </a:pPr>
-          </a:p>
-          <a:p>
-            <a:pPr>
-              <a:spcBef>
-                <a:spcPts val="1200"/>
-              </a:spcBef>
-              <a:defRPr sz="1600" b="1">
-                <a:solidFill>
-                  <a:srgbClr val="03234B"/>
-                </a:solidFill>
-              </a:defRPr>
-            </a:pPr>
-            <a:r>
-              <a:t>Upload issues Alfred (toutes séries) :</a:t>
-            </a:r>
-          </a:p>
-          <a:p>
-            <a:pPr>
-              <a:spcBef>
-                <a:spcPts val="400"/>
-              </a:spcBef>
-              <a:defRPr sz="1200">
-                <a:solidFill>
-                  <a:srgbClr val="333333"/>
-                </a:solidFill>
-                <a:latin typeface="Consolas"/>
-              </a:defRPr>
-            </a:pPr>
-            <a:r>
-              <a:t>python pipeline_Automation/upload/upload_alfred_issues_all_series.py</a:t>
-            </a:r>
-          </a:p>
-          <a:p>
-            <a:pPr>
-              <a:spcBef>
-                <a:spcPts val="600"/>
-              </a:spcBef>
-              <a:defRPr sz="1400">
-                <a:solidFill>
-                  <a:srgbClr val="333333"/>
-                </a:solidFill>
-              </a:defRPr>
-            </a:pPr>
-            <a:r>
-              <a:t>  → Upload les with_images enrichis vers les datasources Issues</a:t>
-            </a:r>
-          </a:p>
-          <a:p>
-            <a:pPr>
-              <a:spcBef>
-                <a:spcPts val="600"/>
-              </a:spcBef>
-              <a:defRPr sz="1400">
-                <a:solidFill>
-                  <a:srgbClr val="333333"/>
-                </a:solidFill>
-              </a:defRPr>
-            </a:pPr>
-          </a:p>
-          <a:p>
-            <a:pPr>
-              <a:spcBef>
-                <a:spcPts val="1200"/>
-              </a:spcBef>
-              <a:defRPr sz="1600" b="1">
-                <a:solidFill>
-                  <a:srgbClr val="03234B"/>
-                </a:solidFill>
-              </a:defRPr>
-            </a:pPr>
-            <a:r>
-              <a:t>Batch toutes séries :</a:t>
-            </a:r>
-          </a:p>
-          <a:p>
-            <a:pPr>
-              <a:spcBef>
-                <a:spcPts val="400"/>
-              </a:spcBef>
-              <a:defRPr sz="1200">
-                <a:solidFill>
-                  <a:srgbClr val="333333"/>
-                </a:solidFill>
-                <a:latin typeface="Consolas"/>
-              </a:defRPr>
-            </a:pPr>
-            <a:r>
-              <a:t>.\pipeline_Automation\workflow\Run_Full_Auto_Update_KB.ps1</a:t>
-            </a:r>
-          </a:p>
-          <a:p>
-            <a:pPr>
-              <a:spcBef>
-                <a:spcPts val="600"/>
-              </a:spcBef>
-              <a:defRPr sz="1400">
-                <a:solidFill>
-                  <a:srgbClr val="333333"/>
-                </a:solidFill>
-              </a:defRPr>
-            </a:pPr>
-          </a:p>
-          <a:p>
-            <a:pPr>
-              <a:spcBef>
-                <a:spcPts val="1200"/>
-              </a:spcBef>
-              <a:defRPr sz="1600" b="1">
-                <a:solidFill>
-                  <a:srgbClr val="03234B"/>
-                </a:solidFill>
-              </a:defRPr>
-            </a:pPr>
-            <a:r>
-              <a:t>Vérification KB :</a:t>
-            </a:r>
-          </a:p>
-          <a:p>
-            <a:pPr>
-              <a:spcBef>
-                <a:spcPts val="400"/>
-              </a:spcBef>
-              <a:defRPr sz="1200">
-                <a:solidFill>
-                  <a:srgbClr val="333333"/>
-                </a:solidFill>
-                <a:latin typeface="Consolas"/>
-              </a:defRPr>
-            </a:pPr>
-            <a:r>
-              <a:t>python pipeline_Automation/upload/Get_Persona_KBs.py</a:t>
             </a:r>
           </a:p>
         </p:txBody>
@@ -13433,7 +15055,7 @@
 </file>
 
 <file path=ppt/slides/slide31.xml><?xml version="1.0" encoding="utf-8"?>
-<p:sld xmlns:a="http://schemas.openxmlformats.org/drawingml/2006/main" xmlns:p="http://schemas.openxmlformats.org/presentationml/2006/main" xmlns:r="http://schemas.openxmlformats.org/officeDocument/2006/relationships">
+<p:sld xmlns:a="http://schemas.openxmlformats.org/drawingml/2006/main" xmlns:r="http://schemas.openxmlformats.org/officeDocument/2006/relationships" xmlns:p="http://schemas.openxmlformats.org/presentationml/2006/main">
   <p:cSld>
     <p:bg>
       <p:bgPr>
@@ -13449,7 +15071,14 @@
         <p:cNvGrpSpPr/>
         <p:nvPr/>
       </p:nvGrpSpPr>
-      <p:grpSpPr/>
+      <p:grpSpPr>
+        <a:xfrm>
+          <a:off x="0" y="0"/>
+          <a:ext cx="0" cy="0"/>
+          <a:chOff x="0" y="0"/>
+          <a:chExt cx="0" cy="0"/>
+        </a:xfrm>
+      </p:grpSpPr>
       <p:sp>
         <p:nvSpPr>
           <p:cNvPr id="2" name="TextBox 1"/>
@@ -13505,8 +15134,273 @@
 </p:sld>
 </file>
 
+<file path=ppt/slides/slide32.xml><?xml version="1.0" encoding="utf-8"?>
+<p:sld xmlns:a="http://schemas.openxmlformats.org/drawingml/2006/main" xmlns:r="http://schemas.openxmlformats.org/officeDocument/2006/relationships" xmlns:p="http://schemas.openxmlformats.org/presentationml/2006/main">
+  <p:cSld>
+    <p:spTree>
+      <p:nvGrpSpPr>
+        <p:cNvPr id="1" name=""/>
+        <p:cNvGrpSpPr/>
+        <p:nvPr/>
+      </p:nvGrpSpPr>
+      <p:grpSpPr>
+        <a:xfrm>
+          <a:off x="0" y="0"/>
+          <a:ext cx="0" cy="0"/>
+          <a:chOff x="0" y="0"/>
+          <a:chExt cx="0" cy="0"/>
+        </a:xfrm>
+      </p:grpSpPr>
+      <p:sp>
+        <p:nvSpPr>
+          <p:cNvPr id="2" name="Title 1"/>
+          <p:cNvSpPr>
+            <a:spLocks noGrp="1"/>
+          </p:cNvSpPr>
+          <p:nvPr>
+            <p:ph type="title"/>
+          </p:nvPr>
+        </p:nvSpPr>
+        <p:spPr/>
+        <p:txBody>
+          <a:bodyPr>
+            <a:normAutofit fontScale="90000"/>
+          </a:bodyPr>
+          <a:lstStyle/>
+          <a:p>
+            <a:r>
+              <a:t>Demo Alfred - Exemple 1 (Issue #335)</a:t>
+            </a:r>
+          </a:p>
+        </p:txBody>
+      </p:sp>
+      <p:sp>
+        <p:nvSpPr>
+          <p:cNvPr id="3" name="Content Placeholder 2"/>
+          <p:cNvSpPr>
+            <a:spLocks noGrp="1"/>
+          </p:cNvSpPr>
+          <p:nvPr>
+            <p:ph idx="1"/>
+          </p:nvPr>
+        </p:nvSpPr>
+        <p:spPr/>
+        <p:txBody>
+          <a:bodyPr>
+            <a:normAutofit/>
+          </a:bodyPr>
+          <a:lstStyle/>
+          <a:p>
+            <a:r>
+              <a:rPr sz="2000" dirty="0"/>
+              <a:t>Issue: warning -</a:t>
+            </a:r>
+            <a:r>
+              <a:rPr sz="2000" dirty="0" err="1"/>
+              <a:t>Wcast</a:t>
+            </a:r>
+            <a:r>
+              <a:rPr sz="2000" dirty="0"/>
+              <a:t>-align sur STM32CubeH7</a:t>
+            </a:r>
+          </a:p>
+          <a:p>
+            <a:r>
+              <a:rPr sz="2000" dirty="0"/>
+              <a:t>Integration dans </a:t>
+            </a:r>
+            <a:r>
+              <a:rPr sz="2000" dirty="0" err="1"/>
+              <a:t>st_ready_text</a:t>
+            </a:r>
+            <a:r>
+              <a:rPr sz="2000" dirty="0"/>
+              <a:t>: [IMAGE DESCRIPTION] Screenshot of an Eclipse/STM32CubeIDE project properties...</a:t>
+            </a:r>
+          </a:p>
+          <a:p>
+            <a:r>
+              <a:rPr sz="2000" dirty="0"/>
+              <a:t>Description Alfred (</a:t>
+            </a:r>
+            <a:r>
+              <a:rPr sz="2000" dirty="0" err="1"/>
+              <a:t>image_analyses</a:t>
+            </a:r>
+            <a:r>
+              <a:rPr sz="2000" dirty="0"/>
+              <a:t>): MCU/MPU GCC Linker &gt; Miscellaneous, flags linker </a:t>
+            </a:r>
+            <a:r>
+              <a:rPr sz="2000" dirty="0" err="1"/>
+              <a:t>detectes</a:t>
+            </a:r>
+            <a:endParaRPr sz="2000" dirty="0"/>
+          </a:p>
+          <a:p>
+            <a:r>
+              <a:rPr sz="2000" dirty="0"/>
+              <a:t>Impact retrieval: les captures IDE </a:t>
+            </a:r>
+            <a:r>
+              <a:rPr sz="2000" dirty="0" err="1"/>
+              <a:t>deviennent</a:t>
+            </a:r>
+            <a:r>
+              <a:rPr sz="2000" dirty="0"/>
+              <a:t> </a:t>
+            </a:r>
+            <a:r>
+              <a:rPr sz="2000" dirty="0" err="1"/>
+              <a:t>recherchables</a:t>
+            </a:r>
+            <a:r>
+              <a:rPr sz="2000" dirty="0"/>
+              <a:t> dans la KB</a:t>
+            </a:r>
+          </a:p>
+        </p:txBody>
+      </p:sp>
+    </p:spTree>
+  </p:cSld>
+  <p:clrMapOvr>
+    <a:masterClrMapping/>
+  </p:clrMapOvr>
+</p:sld>
+</file>
+
+<file path=ppt/slides/slide33.xml><?xml version="1.0" encoding="utf-8"?>
+<p:sld xmlns:a="http://schemas.openxmlformats.org/drawingml/2006/main" xmlns:r="http://schemas.openxmlformats.org/officeDocument/2006/relationships" xmlns:p="http://schemas.openxmlformats.org/presentationml/2006/main">
+  <p:cSld>
+    <p:spTree>
+      <p:nvGrpSpPr>
+        <p:cNvPr id="1" name=""/>
+        <p:cNvGrpSpPr/>
+        <p:nvPr/>
+      </p:nvGrpSpPr>
+      <p:grpSpPr>
+        <a:xfrm>
+          <a:off x="0" y="0"/>
+          <a:ext cx="0" cy="0"/>
+          <a:chOff x="0" y="0"/>
+          <a:chExt cx="0" cy="0"/>
+        </a:xfrm>
+      </p:grpSpPr>
+      <p:sp>
+        <p:nvSpPr>
+          <p:cNvPr id="2" name="Title 1"/>
+          <p:cNvSpPr>
+            <a:spLocks noGrp="1"/>
+          </p:cNvSpPr>
+          <p:nvPr>
+            <p:ph type="title"/>
+          </p:nvPr>
+        </p:nvSpPr>
+        <p:spPr/>
+        <p:txBody>
+          <a:bodyPr>
+            <a:normAutofit fontScale="90000"/>
+          </a:bodyPr>
+          <a:lstStyle/>
+          <a:p>
+            <a:r>
+              <a:t>Demo Alfred - Exemple 2 (Issue #333)</a:t>
+            </a:r>
+          </a:p>
+        </p:txBody>
+      </p:sp>
+      <p:sp>
+        <p:nvSpPr>
+          <p:cNvPr id="3" name="Content Placeholder 2"/>
+          <p:cNvSpPr>
+            <a:spLocks noGrp="1"/>
+          </p:cNvSpPr>
+          <p:nvPr>
+            <p:ph idx="1"/>
+          </p:nvPr>
+        </p:nvSpPr>
+        <p:spPr/>
+        <p:txBody>
+          <a:bodyPr>
+            <a:normAutofit/>
+          </a:bodyPr>
+          <a:lstStyle/>
+          <a:p>
+            <a:r>
+              <a:rPr sz="2000" dirty="0"/>
+              <a:t>Issue: compile warnings avec flags GCC</a:t>
+            </a:r>
+          </a:p>
+          <a:p>
+            <a:r>
+              <a:rPr sz="2000" dirty="0"/>
+              <a:t>Integration dans </a:t>
+            </a:r>
+            <a:r>
+              <a:rPr sz="2000" dirty="0" err="1"/>
+              <a:t>st_ready_text</a:t>
+            </a:r>
+            <a:r>
+              <a:rPr sz="2000" dirty="0"/>
+              <a:t>: [IMAGE DESCRIPTION] Screenshot of the STM32CubeIDE 'About' dialog...</a:t>
+            </a:r>
+          </a:p>
+          <a:p>
+            <a:r>
+              <a:rPr sz="2000" dirty="0"/>
+              <a:t>Description Alfred (</a:t>
+            </a:r>
+            <a:r>
+              <a:rPr sz="2000" dirty="0" err="1"/>
+              <a:t>image_analyses</a:t>
+            </a:r>
+            <a:r>
+              <a:rPr sz="2000" dirty="0"/>
+              <a:t>): Version STM32CubeIDE 2.0.0 + Build 26820...</a:t>
+            </a:r>
+          </a:p>
+          <a:p>
+            <a:r>
+              <a:rPr sz="2000" dirty="0"/>
+              <a:t>Impact retrieval: le </a:t>
+            </a:r>
+            <a:r>
+              <a:rPr sz="2000" dirty="0" err="1"/>
+              <a:t>contexte</a:t>
+            </a:r>
+            <a:r>
+              <a:rPr sz="2000" dirty="0"/>
+              <a:t> de version </a:t>
+            </a:r>
+            <a:r>
+              <a:rPr sz="2000" dirty="0" err="1"/>
+              <a:t>outil</a:t>
+            </a:r>
+            <a:r>
+              <a:rPr sz="2000" dirty="0"/>
+              <a:t> est </a:t>
+            </a:r>
+            <a:r>
+              <a:rPr sz="2000" dirty="0" err="1"/>
+              <a:t>indexe</a:t>
+            </a:r>
+            <a:r>
+              <a:rPr sz="2000" dirty="0"/>
+              <a:t> et exploitable</a:t>
+            </a:r>
+          </a:p>
+        </p:txBody>
+      </p:sp>
+    </p:spTree>
+  </p:cSld>
+  <p:clrMapOvr>
+    <a:masterClrMapping/>
+  </p:clrMapOvr>
+</p:sld>
+</file>
+
 <file path=ppt/slides/slide4.xml><?xml version="1.0" encoding="utf-8"?>
-<p:sld xmlns:a="http://schemas.openxmlformats.org/drawingml/2006/main" xmlns:p="http://schemas.openxmlformats.org/presentationml/2006/main" xmlns:r="http://schemas.openxmlformats.org/officeDocument/2006/relationships">
+<p:sld xmlns:a="http://schemas.openxmlformats.org/drawingml/2006/main" xmlns:r="http://schemas.openxmlformats.org/officeDocument/2006/relationships" xmlns:p="http://schemas.openxmlformats.org/presentationml/2006/main">
   <p:cSld>
     <p:bg>
       <p:bgPr>
@@ -13522,7 +15416,14 @@
         <p:cNvGrpSpPr/>
         <p:nvPr/>
       </p:nvGrpSpPr>
-      <p:grpSpPr/>
+      <p:grpSpPr>
+        <a:xfrm>
+          <a:off x="0" y="0"/>
+          <a:ext cx="0" cy="0"/>
+          <a:chOff x="0" y="0"/>
+          <a:chExt cx="0" cy="0"/>
+        </a:xfrm>
+      </p:grpSpPr>
       <p:sp>
         <p:nvSpPr>
           <p:cNvPr id="2" name="Rectangle 1"/>
@@ -13667,6 +15568,7 @@
                 </a:solidFill>
               </a:defRPr>
             </a:pPr>
+            <a:endParaRPr/>
           </a:p>
           <a:p>
             <a:pPr>
@@ -13710,6 +15612,7 @@
                 </a:solidFill>
               </a:defRPr>
             </a:pPr>
+            <a:endParaRPr/>
           </a:p>
           <a:p>
             <a:pPr>
@@ -13797,6 +15700,7 @@
                 </a:solidFill>
               </a:defRPr>
             </a:pPr>
+            <a:endParaRPr/>
           </a:p>
           <a:p>
             <a:pPr>
@@ -13869,7 +15773,7 @@
 </file>
 
 <file path=ppt/slides/slide5.xml><?xml version="1.0" encoding="utf-8"?>
-<p:sld xmlns:a="http://schemas.openxmlformats.org/drawingml/2006/main" xmlns:p="http://schemas.openxmlformats.org/presentationml/2006/main" xmlns:r="http://schemas.openxmlformats.org/officeDocument/2006/relationships">
+<p:sld xmlns:a="http://schemas.openxmlformats.org/drawingml/2006/main" xmlns:r="http://schemas.openxmlformats.org/officeDocument/2006/relationships" xmlns:p="http://schemas.openxmlformats.org/presentationml/2006/main">
   <p:cSld>
     <p:bg>
       <p:bgPr>
@@ -13885,7 +15789,14 @@
         <p:cNvGrpSpPr/>
         <p:nvPr/>
       </p:nvGrpSpPr>
-      <p:grpSpPr/>
+      <p:grpSpPr>
+        <a:xfrm>
+          <a:off x="0" y="0"/>
+          <a:ext cx="0" cy="0"/>
+          <a:chOff x="0" y="0"/>
+          <a:chExt cx="0" cy="0"/>
+        </a:xfrm>
+      </p:grpSpPr>
       <p:sp>
         <p:nvSpPr>
           <p:cNvPr id="2" name="Rectangle 1"/>
@@ -14242,7 +16153,7 @@
 </file>
 
 <file path=ppt/slides/slide6.xml><?xml version="1.0" encoding="utf-8"?>
-<p:sld xmlns:a="http://schemas.openxmlformats.org/drawingml/2006/main" xmlns:p="http://schemas.openxmlformats.org/presentationml/2006/main" xmlns:r="http://schemas.openxmlformats.org/officeDocument/2006/relationships">
+<p:sld xmlns:a="http://schemas.openxmlformats.org/drawingml/2006/main" xmlns:r="http://schemas.openxmlformats.org/officeDocument/2006/relationships" xmlns:p="http://schemas.openxmlformats.org/presentationml/2006/main">
   <p:cSld>
     <p:bg>
       <p:bgPr>
@@ -14258,7 +16169,14 @@
         <p:cNvGrpSpPr/>
         <p:nvPr/>
       </p:nvGrpSpPr>
-      <p:grpSpPr/>
+      <p:grpSpPr>
+        <a:xfrm>
+          <a:off x="0" y="0"/>
+          <a:ext cx="0" cy="0"/>
+          <a:chOff x="0" y="0"/>
+          <a:chExt cx="0" cy="0"/>
+        </a:xfrm>
+      </p:grpSpPr>
       <p:sp>
         <p:nvSpPr>
           <p:cNvPr id="2" name="Rectangle 1"/>
@@ -14358,6 +16276,7 @@
                 </a:solidFill>
               </a:defRPr>
             </a:pPr>
+            <a:endParaRPr/>
           </a:p>
           <a:p>
             <a:pPr>
@@ -14482,6 +16401,7 @@
                 </a:solidFill>
               </a:defRPr>
             </a:pPr>
+            <a:endParaRPr/>
           </a:p>
           <a:p>
             <a:pPr>
@@ -14525,6 +16445,7 @@
                 </a:solidFill>
               </a:defRPr>
             </a:pPr>
+            <a:endParaRPr/>
           </a:p>
           <a:p>
             <a:pPr>
@@ -14567,7 +16488,7 @@
 </file>
 
 <file path=ppt/slides/slide7.xml><?xml version="1.0" encoding="utf-8"?>
-<p:sld xmlns:a="http://schemas.openxmlformats.org/drawingml/2006/main" xmlns:p="http://schemas.openxmlformats.org/presentationml/2006/main" xmlns:r="http://schemas.openxmlformats.org/officeDocument/2006/relationships">
+<p:sld xmlns:a="http://schemas.openxmlformats.org/drawingml/2006/main" xmlns:r="http://schemas.openxmlformats.org/officeDocument/2006/relationships" xmlns:p="http://schemas.openxmlformats.org/presentationml/2006/main">
   <p:cSld>
     <p:bg>
       <p:bgPr>
@@ -14583,7 +16504,14 @@
         <p:cNvGrpSpPr/>
         <p:nvPr/>
       </p:nvGrpSpPr>
-      <p:grpSpPr/>
+      <p:grpSpPr>
+        <a:xfrm>
+          <a:off x="0" y="0"/>
+          <a:ext cx="0" cy="0"/>
+          <a:chOff x="0" y="0"/>
+          <a:chExt cx="0" cy="0"/>
+        </a:xfrm>
+      </p:grpSpPr>
       <p:sp>
         <p:nvSpPr>
           <p:cNvPr id="2" name="Rectangle 1"/>
@@ -14658,239 +16586,120 @@
           </a:bodyPr>
           <a:lstStyle/>
           <a:p>
-            <a:pPr>
-              <a:spcBef>
-                <a:spcPts val="1200"/>
-              </a:spcBef>
-              <a:defRPr sz="1600" b="1">
-                <a:solidFill>
-                  <a:srgbClr val="03234B"/>
-                </a:solidFill>
-              </a:defRPr>
-            </a:pPr>
-            <a:r>
-              <a:t>Lancer le pipeline complet pour une série:</a:t>
-            </a:r>
-          </a:p>
-          <a:p>
-            <a:pPr>
-              <a:spcBef>
-                <a:spcPts val="600"/>
-              </a:spcBef>
-              <a:defRPr sz="1400">
-                <a:solidFill>
-                  <a:srgbClr val="333333"/>
-                </a:solidFill>
-              </a:defRPr>
-            </a:pPr>
-          </a:p>
-          <a:p>
-            <a:pPr>
-              <a:spcBef>
-                <a:spcPts val="400"/>
-              </a:spcBef>
-              <a:defRPr sz="1200">
-                <a:solidFill>
-                  <a:srgbClr val="333333"/>
-                </a:solidFill>
-                <a:latin typeface="Consolas"/>
-              </a:defRPr>
-            </a:pPr>
-            <a:r>
-              <a:t>$env:STM32CUBE_CONFIG = "shared/config/config_f7.json"</a:t>
-            </a:r>
-          </a:p>
-          <a:p>
-            <a:pPr>
-              <a:spcBef>
-                <a:spcPts val="400"/>
-              </a:spcBef>
-              <a:defRPr sz="1200">
-                <a:solidFill>
-                  <a:srgbClr val="333333"/>
-                </a:solidFill>
-                <a:latin typeface="Consolas"/>
-              </a:defRPr>
-            </a:pPr>
-            <a:r>
-              <a:t>python -m pipeline.run_full_workflow --export-st-ready --continue-on-error</a:t>
-            </a:r>
-          </a:p>
-          <a:p>
-            <a:pPr>
-              <a:spcBef>
-                <a:spcPts val="600"/>
-              </a:spcBef>
-              <a:defRPr sz="1400">
-                <a:solidFill>
-                  <a:srgbClr val="333333"/>
-                </a:solidFill>
-              </a:defRPr>
-            </a:pPr>
-          </a:p>
-          <a:p>
-            <a:pPr>
-              <a:spcBef>
-                <a:spcPts val="1200"/>
-              </a:spcBef>
-              <a:defRPr sz="1600" b="1">
-                <a:solidFill>
-                  <a:srgbClr val="03234B"/>
-                </a:solidFill>
-              </a:defRPr>
-            </a:pPr>
-            <a:r>
-              <a:t>Ce que ça exécute (dans l'ordre) :</a:t>
-            </a:r>
-          </a:p>
-          <a:p>
-            <a:pPr>
-              <a:spcBef>
-                <a:spcPts val="600"/>
-              </a:spcBef>
-              <a:defRPr sz="1400">
-                <a:solidFill>
-                  <a:srgbClr val="333333"/>
-                </a:solidFill>
-              </a:defRPr>
-            </a:pPr>
-            <a:r>
-              <a:t>• [1-6] Ingestion (issues, PRs, commits, links, sync repos, files)</a:t>
-            </a:r>
-          </a:p>
-          <a:p>
-            <a:pPr>
-              <a:spcBef>
-                <a:spcPts val="600"/>
-              </a:spcBef>
-              <a:defRPr sz="1400">
-                <a:solidFill>
-                  <a:srgbClr val="333333"/>
-                </a:solidFill>
-              </a:defRPr>
-            </a:pPr>
-            <a:r>
-              <a:t>• [7] Alfred PDF figure descriptions</a:t>
-            </a:r>
-          </a:p>
-          <a:p>
-            <a:pPr>
-              <a:spcBef>
-                <a:spcPts val="600"/>
-              </a:spcBef>
-              <a:defRPr sz="1400">
-                <a:solidFill>
-                  <a:srgbClr val="333333"/>
-                </a:solidFill>
-              </a:defRPr>
-            </a:pPr>
-            <a:r>
-              <a:t>• [8-9] Cleaning (issues + files)</a:t>
-            </a:r>
-          </a:p>
-          <a:p>
-            <a:pPr>
-              <a:spcBef>
-                <a:spcPts val="600"/>
-              </a:spcBef>
-              <a:defRPr sz="1400">
-                <a:solidFill>
-                  <a:srgbClr val="333333"/>
-                </a:solidFill>
-              </a:defRPr>
-            </a:pPr>
-            <a:r>
-              <a:t>• [10-11] Enrichment (issues + files → layer, board, component...)</a:t>
-            </a:r>
-          </a:p>
-          <a:p>
-            <a:pPr>
-              <a:spcBef>
-                <a:spcPts val="600"/>
-              </a:spcBef>
-              <a:defRPr sz="1400">
-                <a:solidFill>
-                  <a:srgbClr val="333333"/>
-                </a:solidFill>
-              </a:defRPr>
-            </a:pPr>
-            <a:r>
-              <a:t>• [12] Similarity (TF-IDF cosine entre issues)</a:t>
-            </a:r>
-          </a:p>
-          <a:p>
-            <a:pPr>
-              <a:spcBef>
-                <a:spcPts val="600"/>
-              </a:spcBef>
-              <a:defRPr sz="1400">
-                <a:solidFill>
-                  <a:srgbClr val="333333"/>
-                </a:solidFill>
-              </a:defRPr>
-            </a:pPr>
-            <a:r>
-              <a:t>• [13-14] Chunking (découpage en chunks pour recherche)</a:t>
-            </a:r>
-          </a:p>
-          <a:p>
-            <a:pPr>
-              <a:spcBef>
-                <a:spcPts val="600"/>
-              </a:spcBef>
-              <a:defRPr sz="1400">
-                <a:solidFill>
-                  <a:srgbClr val="333333"/>
-                </a:solidFill>
-              </a:defRPr>
-            </a:pPr>
-            <a:r>
-              <a:t>• [15-17] Évaluation (stats + validation schémas)</a:t>
-            </a:r>
-          </a:p>
-          <a:p>
-            <a:pPr>
-              <a:spcBef>
-                <a:spcPts val="600"/>
-              </a:spcBef>
-              <a:defRPr sz="1400">
-                <a:solidFill>
-                  <a:srgbClr val="333333"/>
-                </a:solidFill>
-              </a:defRPr>
-            </a:pPr>
-            <a:r>
-              <a:t>• [18-21] Delivery (export JSON ST-ready: issues, files, resolver, diag)</a:t>
-            </a:r>
-          </a:p>
-          <a:p>
-            <a:pPr>
-              <a:spcBef>
-                <a:spcPts val="600"/>
-              </a:spcBef>
-              <a:defRPr sz="1400">
-                <a:solidFill>
-                  <a:srgbClr val="333333"/>
-                </a:solidFill>
-              </a:defRPr>
-            </a:pPr>
-            <a:r>
-              <a:t>• [22] Export issues_with_images (variante avec image_urls)</a:t>
-            </a:r>
-          </a:p>
-          <a:p>
-            <a:pPr>
-              <a:spcBef>
-                <a:spcPts val="600"/>
-              </a:spcBef>
-              <a:defRPr sz="1400">
-                <a:solidFill>
-                  <a:srgbClr val="333333"/>
-                </a:solidFill>
-              </a:defRPr>
-            </a:pPr>
-            <a:r>
-              <a:t>• [23] Alfred Vision — descriptions automatiques des images</a:t>
+            <a:r>
+              <a:rPr dirty="0" err="1"/>
+              <a:t>Commande</a:t>
+            </a:r>
+            <a:r>
+              <a:rPr dirty="0"/>
+              <a:t> atelier </a:t>
+            </a:r>
+            <a:r>
+              <a:rPr dirty="0" err="1"/>
+              <a:t>recommandee</a:t>
+            </a:r>
+            <a:r>
+              <a:rPr dirty="0"/>
+              <a:t> (workflow </a:t>
+            </a:r>
+            <a:r>
+              <a:rPr dirty="0" err="1"/>
+              <a:t>complet</a:t>
+            </a:r>
+            <a:r>
+              <a:rPr dirty="0"/>
+              <a:t>):</a:t>
+            </a:r>
+          </a:p>
+          <a:p>
+            <a:endParaRPr dirty="0"/>
+          </a:p>
+          <a:p>
+            <a:r>
+              <a:rPr dirty="0"/>
+              <a:t>.\</a:t>
+            </a:r>
+            <a:r>
+              <a:rPr dirty="0" err="1"/>
+              <a:t>pipeline_Automation</a:t>
+            </a:r>
+            <a:r>
+              <a:rPr dirty="0"/>
+              <a:t>\workflow\Run_Single_Series_Full_Pipeline_And_Upload.ps1 -Series H7</a:t>
+            </a:r>
+          </a:p>
+          <a:p>
+            <a:endParaRPr dirty="0"/>
+          </a:p>
+          <a:p>
+            <a:r>
+              <a:rPr dirty="0"/>
+              <a:t>Mode debug (2 </a:t>
+            </a:r>
+            <a:r>
+              <a:rPr dirty="0" err="1"/>
+              <a:t>etapes</a:t>
+            </a:r>
+            <a:r>
+              <a:rPr dirty="0"/>
+              <a:t>):</a:t>
+            </a:r>
+          </a:p>
+          <a:p>
+            <a:r>
+              <a:rPr dirty="0"/>
+              <a:t>1) .\</a:t>
+            </a:r>
+            <a:r>
+              <a:rPr dirty="0" err="1"/>
+              <a:t>pipeline_Automation</a:t>
+            </a:r>
+            <a:r>
+              <a:rPr dirty="0"/>
+              <a:t>\workflow\Run_Single_Series_Full_Pipeline_And_Upload.ps1 -Series H7 -Mode Prepare</a:t>
+            </a:r>
+          </a:p>
+          <a:p>
+            <a:r>
+              <a:rPr dirty="0"/>
+              <a:t>2) .\</a:t>
+            </a:r>
+            <a:r>
+              <a:rPr dirty="0" err="1"/>
+              <a:t>pipeline_Automation</a:t>
+            </a:r>
+            <a:r>
+              <a:rPr dirty="0"/>
+              <a:t>\workflow\Run_Single_Series_Full_Pipeline_And_Upload.ps1 -Series H7 -Mode Upload</a:t>
+            </a:r>
+          </a:p>
+          <a:p>
+            <a:endParaRPr dirty="0"/>
+          </a:p>
+          <a:p>
+            <a:r>
+              <a:rPr dirty="0"/>
+              <a:t>Option fallback (pipeline Python direct):</a:t>
+            </a:r>
+          </a:p>
+          <a:p>
+            <a:r>
+              <a:rPr dirty="0"/>
+              <a:t>$env:STM32CUBE_CONFIG = "shared/config/config_h7.json"</a:t>
+            </a:r>
+          </a:p>
+          <a:p>
+            <a:r>
+              <a:rPr dirty="0"/>
+              <a:t>python -m </a:t>
+            </a:r>
+            <a:r>
+              <a:rPr dirty="0" err="1"/>
+              <a:t>pipeline.run_full_workflow</a:t>
+            </a:r>
+            <a:r>
+              <a:rPr dirty="0"/>
+              <a:t> --export-st-ready --continue-on-error</a:t>
             </a:r>
           </a:p>
         </p:txBody>
@@ -14904,7 +16713,7 @@
 </file>
 
 <file path=ppt/slides/slide8.xml><?xml version="1.0" encoding="utf-8"?>
-<p:sld xmlns:a="http://schemas.openxmlformats.org/drawingml/2006/main" xmlns:p="http://schemas.openxmlformats.org/presentationml/2006/main" xmlns:r="http://schemas.openxmlformats.org/officeDocument/2006/relationships">
+<p:sld xmlns:a="http://schemas.openxmlformats.org/drawingml/2006/main" xmlns:r="http://schemas.openxmlformats.org/officeDocument/2006/relationships" xmlns:p="http://schemas.openxmlformats.org/presentationml/2006/main">
   <p:cSld>
     <p:bg>
       <p:bgPr>
@@ -14920,7 +16729,14 @@
         <p:cNvGrpSpPr/>
         <p:nvPr/>
       </p:nvGrpSpPr>
-      <p:grpSpPr/>
+      <p:grpSpPr>
+        <a:xfrm>
+          <a:off x="0" y="0"/>
+          <a:ext cx="0" cy="0"/>
+          <a:chOff x="0" y="0"/>
+          <a:chExt cx="0" cy="0"/>
+        </a:xfrm>
+      </p:grpSpPr>
       <p:sp>
         <p:nvSpPr>
           <p:cNvPr id="2" name="Rectangle 1"/>
@@ -14981,8 +16797,8 @@
         </p:nvSpPr>
         <p:spPr>
           <a:xfrm>
-            <a:off x="548640" y="1188720"/>
-            <a:ext cx="8046720" cy="5029200"/>
+            <a:off x="77724" y="968145"/>
+            <a:ext cx="4704588" cy="6206827"/>
           </a:xfrm>
           <a:prstGeom prst="rect">
             <a:avLst/>
@@ -15006,20 +16822,31 @@
               </a:defRPr>
             </a:pPr>
             <a:r>
-              <a:t>Tous les flags disponibles :</a:t>
-            </a:r>
-          </a:p>
-          <a:p>
-            <a:pPr>
-              <a:spcBef>
-                <a:spcPts val="600"/>
-              </a:spcBef>
-              <a:defRPr sz="1400">
-                <a:solidFill>
-                  <a:srgbClr val="333333"/>
-                </a:solidFill>
-              </a:defRPr>
-            </a:pPr>
+              <a:rPr dirty="0"/>
+              <a:t>Tous les flags </a:t>
+            </a:r>
+            <a:r>
+              <a:rPr dirty="0" err="1"/>
+              <a:t>disponibles</a:t>
+            </a:r>
+            <a:r>
+              <a:rPr dirty="0"/>
+              <a:t> :</a:t>
+            </a:r>
+            <a:endParaRPr lang="fr-FR" dirty="0"/>
+          </a:p>
+          <a:p>
+            <a:pPr>
+              <a:spcBef>
+                <a:spcPts val="1200"/>
+              </a:spcBef>
+              <a:defRPr sz="1600" b="1">
+                <a:solidFill>
+                  <a:srgbClr val="03234B"/>
+                </a:solidFill>
+              </a:defRPr>
+            </a:pPr>
+            <a:endParaRPr lang="en-US" dirty="0"/>
           </a:p>
           <a:p>
             <a:pPr>
@@ -15034,6 +16861,7 @@
               </a:defRPr>
             </a:pPr>
             <a:r>
+              <a:rPr dirty="0"/>
               <a:t>--export-st-ready</a:t>
             </a:r>
           </a:p>
@@ -15049,6 +16877,7 @@
               </a:defRPr>
             </a:pPr>
             <a:r>
+              <a:rPr dirty="0"/>
               <a:t>  → Active les 6 steps de delivery + Alfred images</a:t>
             </a:r>
           </a:p>
@@ -15064,35 +16893,70 @@
               </a:defRPr>
             </a:pPr>
             <a:r>
-              <a:t>  → issues, files, resolver, diag, with_images, Alfred Vision</a:t>
-            </a:r>
-          </a:p>
-          <a:p>
-            <a:pPr>
-              <a:spcBef>
-                <a:spcPts val="600"/>
-              </a:spcBef>
-              <a:defRPr sz="1400">
-                <a:solidFill>
-                  <a:srgbClr val="333333"/>
-                </a:solidFill>
-              </a:defRPr>
-            </a:pPr>
-            <a:r>
-              <a:t>  → Sans ce flag, le pipeline s'arrête après la validation</a:t>
-            </a:r>
-          </a:p>
-          <a:p>
-            <a:pPr>
-              <a:spcBef>
-                <a:spcPts val="600"/>
-              </a:spcBef>
-              <a:defRPr sz="1400">
-                <a:solidFill>
-                  <a:srgbClr val="333333"/>
-                </a:solidFill>
-              </a:defRPr>
-            </a:pPr>
+              <a:rPr dirty="0"/>
+              <a:t>  → issues, files, resolver, </a:t>
+            </a:r>
+            <a:r>
+              <a:rPr dirty="0" err="1"/>
+              <a:t>diag</a:t>
+            </a:r>
+            <a:r>
+              <a:rPr dirty="0"/>
+              <a:t>, </a:t>
+            </a:r>
+            <a:r>
+              <a:rPr dirty="0" err="1"/>
+              <a:t>with_images</a:t>
+            </a:r>
+            <a:r>
+              <a:rPr dirty="0"/>
+              <a:t>, Alfred Vision</a:t>
+            </a:r>
+          </a:p>
+          <a:p>
+            <a:pPr>
+              <a:spcBef>
+                <a:spcPts val="600"/>
+              </a:spcBef>
+              <a:defRPr sz="1400">
+                <a:solidFill>
+                  <a:srgbClr val="333333"/>
+                </a:solidFill>
+              </a:defRPr>
+            </a:pPr>
+            <a:r>
+              <a:rPr dirty="0"/>
+              <a:t>  → Sans </a:t>
+            </a:r>
+            <a:r>
+              <a:rPr dirty="0" err="1"/>
+              <a:t>ce</a:t>
+            </a:r>
+            <a:r>
+              <a:rPr dirty="0"/>
+              <a:t> flag, le pipeline </a:t>
+            </a:r>
+            <a:r>
+              <a:rPr dirty="0" err="1"/>
+              <a:t>s'arrête</a:t>
+            </a:r>
+            <a:r>
+              <a:rPr dirty="0"/>
+              <a:t> après la validation</a:t>
+            </a:r>
+          </a:p>
+          <a:p>
+            <a:pPr>
+              <a:spcBef>
+                <a:spcPts val="600"/>
+              </a:spcBef>
+              <a:defRPr sz="1400">
+                <a:solidFill>
+                  <a:srgbClr val="333333"/>
+                </a:solidFill>
+              </a:defRPr>
+            </a:pPr>
+            <a:endParaRPr dirty="0"/>
           </a:p>
           <a:p>
             <a:pPr>
@@ -15107,6 +16971,7 @@
               </a:defRPr>
             </a:pPr>
             <a:r>
+              <a:rPr dirty="0"/>
               <a:t>--continue-on-error</a:t>
             </a:r>
           </a:p>
@@ -15122,35 +16987,80 @@
               </a:defRPr>
             </a:pPr>
             <a:r>
-              <a:t>  → Si un step échoue, passe au suivant au lieu de tout arrêter</a:t>
-            </a:r>
-          </a:p>
-          <a:p>
-            <a:pPr>
-              <a:spcBef>
-                <a:spcPts val="600"/>
-              </a:spcBef>
-              <a:defRPr sz="1400">
-                <a:solidFill>
-                  <a:srgbClr val="333333"/>
-                </a:solidFill>
-              </a:defRPr>
-            </a:pPr>
-            <a:r>
-              <a:t>  → Indispensable quand un sous-repo n'a pas d'issues</a:t>
-            </a:r>
-          </a:p>
-          <a:p>
-            <a:pPr>
-              <a:spcBef>
-                <a:spcPts val="600"/>
-              </a:spcBef>
-              <a:defRPr sz="1400">
-                <a:solidFill>
-                  <a:srgbClr val="333333"/>
-                </a:solidFill>
-              </a:defRPr>
-            </a:pPr>
+              <a:rPr dirty="0"/>
+              <a:t>  → Si un step </a:t>
+            </a:r>
+            <a:r>
+              <a:rPr dirty="0" err="1"/>
+              <a:t>échoue</a:t>
+            </a:r>
+            <a:r>
+              <a:rPr dirty="0"/>
+              <a:t>, passe au </a:t>
+            </a:r>
+            <a:r>
+              <a:rPr dirty="0" err="1"/>
+              <a:t>suivant</a:t>
+            </a:r>
+            <a:r>
+              <a:rPr dirty="0"/>
+              <a:t> au lieu de tout </a:t>
+            </a:r>
+            <a:r>
+              <a:rPr dirty="0" err="1"/>
+              <a:t>arrêter</a:t>
+            </a:r>
+            <a:endParaRPr dirty="0"/>
+          </a:p>
+          <a:p>
+            <a:pPr>
+              <a:spcBef>
+                <a:spcPts val="600"/>
+              </a:spcBef>
+              <a:defRPr sz="1400">
+                <a:solidFill>
+                  <a:srgbClr val="333333"/>
+                </a:solidFill>
+              </a:defRPr>
+            </a:pPr>
+            <a:r>
+              <a:rPr dirty="0"/>
+              <a:t>  → Indispensable </a:t>
+            </a:r>
+            <a:r>
+              <a:rPr dirty="0" err="1"/>
+              <a:t>quand</a:t>
+            </a:r>
+            <a:r>
+              <a:rPr dirty="0"/>
+              <a:t> un sous-repo </a:t>
+            </a:r>
+            <a:r>
+              <a:rPr dirty="0" err="1"/>
+              <a:t>n'a</a:t>
+            </a:r>
+            <a:r>
+              <a:rPr dirty="0"/>
+              <a:t> pas </a:t>
+            </a:r>
+            <a:r>
+              <a:rPr dirty="0" err="1"/>
+              <a:t>d'issues</a:t>
+            </a:r>
+            <a:endParaRPr dirty="0"/>
+          </a:p>
+          <a:p>
+            <a:pPr>
+              <a:spcBef>
+                <a:spcPts val="600"/>
+              </a:spcBef>
+              <a:defRPr sz="1400">
+                <a:solidFill>
+                  <a:srgbClr val="333333"/>
+                </a:solidFill>
+              </a:defRPr>
+            </a:pPr>
+            <a:endParaRPr dirty="0"/>
           </a:p>
           <a:p>
             <a:pPr>
@@ -15165,6 +17075,7 @@
               </a:defRPr>
             </a:pPr>
             <a:r>
+              <a:rPr dirty="0"/>
               <a:t>--skip-ingestion</a:t>
             </a:r>
           </a:p>
@@ -15180,50 +17091,110 @@
               </a:defRPr>
             </a:pPr>
             <a:r>
-              <a:t>  → Saute les 6 étapes d'ingestion GitHub</a:t>
-            </a:r>
-          </a:p>
-          <a:p>
-            <a:pPr>
-              <a:spcBef>
-                <a:spcPts val="600"/>
-              </a:spcBef>
-              <a:defRPr sz="1400">
-                <a:solidFill>
-                  <a:srgbClr val="333333"/>
-                </a:solidFill>
-              </a:defRPr>
-            </a:pPr>
-            <a:r>
-              <a:t>  → Utilise les fichiers raw_* déjà présents dans data/</a:t>
-            </a:r>
-          </a:p>
-          <a:p>
-            <a:pPr>
-              <a:spcBef>
-                <a:spcPts val="600"/>
-              </a:spcBef>
-              <a:defRPr sz="1400">
-                <a:solidFill>
-                  <a:srgbClr val="333333"/>
-                </a:solidFill>
-              </a:defRPr>
-            </a:pPr>
-            <a:r>
-              <a:t>  → Utile pour re-processer sans re-télécharger (économise le rate limit)</a:t>
-            </a:r>
-          </a:p>
-          <a:p>
-            <a:pPr>
-              <a:spcBef>
-                <a:spcPts val="600"/>
-              </a:spcBef>
-              <a:defRPr sz="1400">
-                <a:solidFill>
-                  <a:srgbClr val="333333"/>
-                </a:solidFill>
-              </a:defRPr>
-            </a:pPr>
+              <a:rPr dirty="0"/>
+              <a:t>  → </a:t>
+            </a:r>
+            <a:r>
+              <a:rPr dirty="0" err="1"/>
+              <a:t>Saute</a:t>
+            </a:r>
+            <a:r>
+              <a:rPr dirty="0"/>
+              <a:t> les 6 étapes </a:t>
+            </a:r>
+            <a:r>
+              <a:rPr dirty="0" err="1"/>
+              <a:t>d'ingestion</a:t>
+            </a:r>
+            <a:r>
+              <a:rPr dirty="0"/>
+              <a:t> GitHub</a:t>
+            </a:r>
+          </a:p>
+          <a:p>
+            <a:pPr>
+              <a:spcBef>
+                <a:spcPts val="600"/>
+              </a:spcBef>
+              <a:defRPr sz="1400">
+                <a:solidFill>
+                  <a:srgbClr val="333333"/>
+                </a:solidFill>
+              </a:defRPr>
+            </a:pPr>
+            <a:r>
+              <a:rPr dirty="0"/>
+              <a:t>  → </a:t>
+            </a:r>
+            <a:r>
+              <a:rPr dirty="0" err="1"/>
+              <a:t>Utilise</a:t>
+            </a:r>
+            <a:r>
+              <a:rPr dirty="0"/>
+              <a:t> les </a:t>
+            </a:r>
+            <a:r>
+              <a:rPr dirty="0" err="1"/>
+              <a:t>fichiers</a:t>
+            </a:r>
+            <a:r>
+              <a:rPr dirty="0"/>
+              <a:t> raw_* déjà </a:t>
+            </a:r>
+            <a:r>
+              <a:rPr dirty="0" err="1"/>
+              <a:t>présents</a:t>
+            </a:r>
+            <a:r>
+              <a:rPr dirty="0"/>
+              <a:t> dans data/</a:t>
+            </a:r>
+          </a:p>
+          <a:p>
+            <a:pPr>
+              <a:spcBef>
+                <a:spcPts val="600"/>
+              </a:spcBef>
+              <a:defRPr sz="1400">
+                <a:solidFill>
+                  <a:srgbClr val="333333"/>
+                </a:solidFill>
+              </a:defRPr>
+            </a:pPr>
+            <a:r>
+              <a:rPr dirty="0"/>
+              <a:t>  → Utile pour re-processer sans re-</a:t>
+            </a:r>
+            <a:r>
+              <a:rPr dirty="0" err="1"/>
+              <a:t>télécharger</a:t>
+            </a:r>
+            <a:r>
+              <a:rPr dirty="0"/>
+              <a:t> (</a:t>
+            </a:r>
+            <a:r>
+              <a:rPr dirty="0" err="1"/>
+              <a:t>économise</a:t>
+            </a:r>
+            <a:r>
+              <a:rPr dirty="0"/>
+              <a:t> le rate limit)</a:t>
+            </a:r>
+          </a:p>
+          <a:p>
+            <a:pPr>
+              <a:spcBef>
+                <a:spcPts val="600"/>
+              </a:spcBef>
+              <a:defRPr sz="1400">
+                <a:solidFill>
+                  <a:srgbClr val="333333"/>
+                </a:solidFill>
+              </a:defRPr>
+            </a:pPr>
+            <a:endParaRPr dirty="0"/>
           </a:p>
           <a:p>
             <a:pPr>
@@ -15238,6 +17209,7 @@
               </a:defRPr>
             </a:pPr>
             <a:r>
+              <a:rPr dirty="0"/>
               <a:t>--skip-chunking</a:t>
             </a:r>
           </a:p>
@@ -15253,36 +17225,89 @@
               </a:defRPr>
             </a:pPr>
             <a:r>
-              <a:t>  → Saute le chunking local (étapes 13-14)</a:t>
-            </a:r>
-          </a:p>
-          <a:p>
-            <a:pPr>
-              <a:spcBef>
-                <a:spcPts val="600"/>
-              </a:spcBef>
-              <a:defRPr sz="1400">
-                <a:solidFill>
-                  <a:srgbClr val="333333"/>
-                </a:solidFill>
-              </a:defRPr>
-            </a:pPr>
-            <a:r>
-              <a:t>  → La plateforme ST fait son propre chunking à l'upload</a:t>
-            </a:r>
-          </a:p>
-          <a:p>
-            <a:pPr>
-              <a:spcBef>
-                <a:spcPts val="600"/>
-              </a:spcBef>
-              <a:defRPr sz="1400">
-                <a:solidFill>
-                  <a:srgbClr val="333333"/>
-                </a:solidFill>
-              </a:defRPr>
-            </a:pPr>
-          </a:p>
+              <a:rPr dirty="0"/>
+              <a:t>  → </a:t>
+            </a:r>
+            <a:r>
+              <a:rPr dirty="0" err="1"/>
+              <a:t>Saute</a:t>
+            </a:r>
+            <a:r>
+              <a:rPr dirty="0"/>
+              <a:t> le chunking local (étapes 13-14)</a:t>
+            </a:r>
+          </a:p>
+          <a:p>
+            <a:pPr>
+              <a:spcBef>
+                <a:spcPts val="600"/>
+              </a:spcBef>
+              <a:defRPr sz="1400">
+                <a:solidFill>
+                  <a:srgbClr val="333333"/>
+                </a:solidFill>
+              </a:defRPr>
+            </a:pPr>
+            <a:r>
+              <a:rPr dirty="0"/>
+              <a:t>  → La </a:t>
+            </a:r>
+            <a:r>
+              <a:rPr dirty="0" err="1"/>
+              <a:t>plateforme</a:t>
+            </a:r>
+            <a:r>
+              <a:rPr dirty="0"/>
+              <a:t> ST fait son propre chunking à </a:t>
+            </a:r>
+            <a:r>
+              <a:rPr dirty="0" err="1"/>
+              <a:t>l'upload</a:t>
+            </a:r>
+            <a:endParaRPr dirty="0"/>
+          </a:p>
+          <a:p>
+            <a:pPr>
+              <a:spcBef>
+                <a:spcPts val="600"/>
+              </a:spcBef>
+              <a:defRPr sz="1400">
+                <a:solidFill>
+                  <a:srgbClr val="333333"/>
+                </a:solidFill>
+              </a:defRPr>
+            </a:pPr>
+            <a:endParaRPr lang="en-US" dirty="0"/>
+          </a:p>
+        </p:txBody>
+      </p:sp>
+      <p:sp>
+        <p:nvSpPr>
+          <p:cNvPr id="5" name="TextBox 4">
+            <a:extLst>
+              <a:ext uri="{FF2B5EF4-FFF2-40B4-BE49-F238E27FC236}">
+                <a16:creationId xmlns:a16="http://schemas.microsoft.com/office/drawing/2014/main" id="{9027F449-B326-96F9-96AD-56DCA0DCBD41}"/>
+              </a:ext>
+            </a:extLst>
+          </p:cNvPr>
+          <p:cNvSpPr txBox="1"/>
+          <p:nvPr/>
+        </p:nvSpPr>
+        <p:spPr>
+          <a:xfrm>
+            <a:off x="4686300" y="1716834"/>
+            <a:ext cx="4457700" cy="861774"/>
+          </a:xfrm>
+          <a:prstGeom prst="rect">
+            <a:avLst/>
+          </a:prstGeom>
+          <a:noFill/>
+        </p:spPr>
+        <p:txBody>
+          <a:bodyPr wrap="square">
+            <a:spAutoFit/>
+          </a:bodyPr>
+          <a:lstStyle/>
           <a:p>
             <a:pPr>
               <a:spcBef>
@@ -15296,21 +17321,36 @@
               </a:defRPr>
             </a:pPr>
             <a:r>
-              <a:t>--no-enrich-pdf</a:t>
-            </a:r>
-          </a:p>
-          <a:p>
-            <a:pPr>
-              <a:spcBef>
-                <a:spcPts val="600"/>
-              </a:spcBef>
-              <a:defRPr sz="1400">
-                <a:solidFill>
-                  <a:srgbClr val="333333"/>
-                </a:solidFill>
-              </a:defRPr>
-            </a:pPr>
-            <a:r>
+              <a:rPr lang="fr-FR" dirty="0"/>
+              <a:t>--no-</a:t>
+            </a:r>
+            <a:r>
+              <a:rPr lang="fr-FR" dirty="0" err="1"/>
+              <a:t>enrich</a:t>
+            </a:r>
+            <a:r>
+              <a:rPr lang="fr-FR" dirty="0"/>
+              <a:t>-</a:t>
+            </a:r>
+            <a:r>
+              <a:rPr lang="fr-FR" dirty="0" err="1"/>
+              <a:t>pdf</a:t>
+            </a:r>
+            <a:endParaRPr lang="fr-FR" dirty="0"/>
+          </a:p>
+          <a:p>
+            <a:pPr>
+              <a:spcBef>
+                <a:spcPts val="600"/>
+              </a:spcBef>
+              <a:defRPr sz="1400">
+                <a:solidFill>
+                  <a:srgbClr val="333333"/>
+                </a:solidFill>
+              </a:defRPr>
+            </a:pPr>
+            <a:r>
+              <a:rPr lang="fr-FR" dirty="0"/>
               <a:t>  → Saute l'appel Alfred Vision sur les figures PDF (étape 7)</a:t>
             </a:r>
           </a:p>
@@ -15326,7 +17366,16 @@
               </a:defRPr>
             </a:pPr>
             <a:r>
-              <a:t>  → Utile si pas de proxy ou si les PDFs sont déjà enrichis</a:t>
+              <a:rPr lang="fr-FR" dirty="0"/>
+              <a:t>  → Utile si pas de proxy ou si les </a:t>
+            </a:r>
+            <a:r>
+              <a:rPr lang="fr-FR" dirty="0" err="1"/>
+              <a:t>PDFs</a:t>
+            </a:r>
+            <a:r>
+              <a:rPr lang="fr-FR" dirty="0"/>
+              <a:t> sont déjà enrichis</a:t>
             </a:r>
           </a:p>
         </p:txBody>
@@ -15340,7 +17389,7 @@
 </file>
 
 <file path=ppt/slides/slide9.xml><?xml version="1.0" encoding="utf-8"?>
-<p:sld xmlns:a="http://schemas.openxmlformats.org/drawingml/2006/main" xmlns:p="http://schemas.openxmlformats.org/presentationml/2006/main" xmlns:r="http://schemas.openxmlformats.org/officeDocument/2006/relationships">
+<p:sld xmlns:a="http://schemas.openxmlformats.org/drawingml/2006/main" xmlns:r="http://schemas.openxmlformats.org/officeDocument/2006/relationships" xmlns:p="http://schemas.openxmlformats.org/presentationml/2006/main">
   <p:cSld>
     <p:bg>
       <p:bgPr>
@@ -15356,7 +17405,14 @@
         <p:cNvGrpSpPr/>
         <p:nvPr/>
       </p:nvGrpSpPr>
-      <p:grpSpPr/>
+      <p:grpSpPr>
+        <a:xfrm>
+          <a:off x="0" y="0"/>
+          <a:ext cx="0" cy="0"/>
+          <a:chOff x="0" y="0"/>
+          <a:chExt cx="0" cy="0"/>
+        </a:xfrm>
+      </p:grpSpPr>
       <p:sp>
         <p:nvSpPr>
           <p:cNvPr id="2" name="Rectangle 1"/>
@@ -15417,8 +17473,8 @@
         </p:nvSpPr>
         <p:spPr>
           <a:xfrm>
-            <a:off x="548640" y="1188720"/>
-            <a:ext cx="8046720" cy="5029200"/>
+            <a:off x="448056" y="1024128"/>
+            <a:ext cx="8046720" cy="5806718"/>
           </a:xfrm>
           <a:prstGeom prst="rect">
             <a:avLst/>
@@ -15442,50 +17498,65 @@
               </a:defRPr>
             </a:pPr>
             <a:r>
-              <a:t>⚠️ Ce n'est PAS un pipeline 'issues only'</a:t>
-            </a:r>
-          </a:p>
-          <a:p>
-            <a:pPr>
-              <a:spcBef>
-                <a:spcPts val="600"/>
-              </a:spcBef>
-              <a:defRPr sz="1400">
-                <a:solidFill>
-                  <a:srgbClr val="333333"/>
-                </a:solidFill>
-              </a:defRPr>
-            </a:pPr>
-            <a:r>
-              <a:t>• Il traite issues ET files (cleaning, enrichment, delivery des deux)</a:t>
-            </a:r>
-          </a:p>
-          <a:p>
-            <a:pPr>
-              <a:spcBef>
-                <a:spcPts val="600"/>
-              </a:spcBef>
-              <a:defRPr sz="1400">
-                <a:solidFill>
-                  <a:srgbClr val="333333"/>
-                </a:solidFill>
-              </a:defRPr>
-            </a:pPr>
-            <a:r>
-              <a:t>• 17 étapes de base + 4 optionnelles (delivery)</a:t>
-            </a:r>
-          </a:p>
-          <a:p>
-            <a:pPr>
-              <a:spcBef>
-                <a:spcPts val="600"/>
-              </a:spcBef>
-              <a:defRPr sz="1400">
-                <a:solidFill>
-                  <a:srgbClr val="333333"/>
-                </a:solidFill>
-              </a:defRPr>
-            </a:pPr>
+              <a:rPr dirty="0"/>
+              <a:t>⚠️ Ce </a:t>
+            </a:r>
+            <a:r>
+              <a:rPr dirty="0" err="1"/>
+              <a:t>n'est</a:t>
+            </a:r>
+            <a:r>
+              <a:rPr dirty="0"/>
+              <a:t> PAS un pipeline 'issues only'</a:t>
+            </a:r>
+          </a:p>
+          <a:p>
+            <a:pPr>
+              <a:spcBef>
+                <a:spcPts val="600"/>
+              </a:spcBef>
+              <a:defRPr sz="1400">
+                <a:solidFill>
+                  <a:srgbClr val="333333"/>
+                </a:solidFill>
+              </a:defRPr>
+            </a:pPr>
+            <a:r>
+              <a:rPr dirty="0"/>
+              <a:t>• Il </a:t>
+            </a:r>
+            <a:r>
+              <a:rPr dirty="0" err="1"/>
+              <a:t>traite</a:t>
+            </a:r>
+            <a:r>
+              <a:rPr dirty="0"/>
+              <a:t> issues ET files (cleaning, enrichment, delivery des deux)</a:t>
+            </a:r>
+          </a:p>
+          <a:p>
+            <a:pPr>
+              <a:spcBef>
+                <a:spcPts val="600"/>
+              </a:spcBef>
+              <a:defRPr sz="1400">
+                <a:solidFill>
+                  <a:srgbClr val="333333"/>
+                </a:solidFill>
+              </a:defRPr>
+            </a:pPr>
+            <a:r>
+              <a:rPr dirty="0"/>
+              <a:t>• 17 étapes de base + 4 </a:t>
+            </a:r>
+            <a:r>
+              <a:rPr dirty="0" err="1"/>
+              <a:t>optionnelles</a:t>
+            </a:r>
+            <a:r>
+              <a:rPr dirty="0"/>
+              <a:t> (delivery)</a:t>
+            </a:r>
           </a:p>
           <a:p>
             <a:pPr>
@@ -15499,7 +17570,20 @@
               </a:defRPr>
             </a:pPr>
             <a:r>
-              <a:t>Liste STEPS (code réel) :</a:t>
+              <a:rPr dirty="0" err="1"/>
+              <a:t>Liste</a:t>
+            </a:r>
+            <a:r>
+              <a:rPr dirty="0"/>
+              <a:t> STEPS (code </a:t>
+            </a:r>
+            <a:r>
+              <a:rPr dirty="0" err="1"/>
+              <a:t>réel</a:t>
+            </a:r>
+            <a:r>
+              <a:rPr dirty="0"/>
+              <a:t>) :</a:t>
             </a:r>
           </a:p>
           <a:p>
@@ -15515,6 +17599,7 @@
               </a:defRPr>
             </a:pPr>
             <a:r>
+              <a:rPr dirty="0"/>
               <a:t>STEPS = [</a:t>
             </a:r>
           </a:p>
@@ -15531,7 +17616,16 @@
               </a:defRPr>
             </a:pPr>
             <a:r>
-              <a:t>("Ingestion issues",     fetch_issues_main),      # 1</a:t>
+              <a:rPr dirty="0"/>
+              <a:t>("Ingestion issues",     </a:t>
+            </a:r>
+            <a:r>
+              <a:rPr dirty="0" err="1"/>
+              <a:t>fetch_issues_main</a:t>
+            </a:r>
+            <a:r>
+              <a:rPr dirty="0"/>
+              <a:t>),      # 1</a:t>
             </a:r>
           </a:p>
           <a:p>
@@ -15547,7 +17641,16 @@
               </a:defRPr>
             </a:pPr>
             <a:r>
-              <a:t>("Ingestion PRs",        fetch_prs_main),         # 2</a:t>
+              <a:rPr dirty="0"/>
+              <a:t>("Ingestion PRs",        </a:t>
+            </a:r>
+            <a:r>
+              <a:rPr dirty="0" err="1"/>
+              <a:t>fetch_prs_main</a:t>
+            </a:r>
+            <a:r>
+              <a:rPr dirty="0"/>
+              <a:t>),         # 2</a:t>
             </a:r>
           </a:p>
           <a:p>
@@ -15563,7 +17666,16 @@
               </a:defRPr>
             </a:pPr>
             <a:r>
-              <a:t>("Ingestion commits",    fetch_commits_main),     # 3</a:t>
+              <a:rPr dirty="0"/>
+              <a:t>("Ingestion commits",    </a:t>
+            </a:r>
+            <a:r>
+              <a:rPr dirty="0" err="1"/>
+              <a:t>fetch_commits_main</a:t>
+            </a:r>
+            <a:r>
+              <a:rPr dirty="0"/>
+              <a:t>),     # 3</a:t>
             </a:r>
           </a:p>
           <a:p>
@@ -15579,7 +17691,16 @@
               </a:defRPr>
             </a:pPr>
             <a:r>
-              <a:t>("Ingestion links",      fetch_links_main),       # 4</a:t>
+              <a:rPr dirty="0"/>
+              <a:t>("Ingestion links",      </a:t>
+            </a:r>
+            <a:r>
+              <a:rPr dirty="0" err="1"/>
+              <a:t>fetch_links_main</a:t>
+            </a:r>
+            <a:r>
+              <a:rPr dirty="0"/>
+              <a:t>),       # 4</a:t>
             </a:r>
           </a:p>
           <a:p>
@@ -15595,7 +17716,16 @@
               </a:defRPr>
             </a:pPr>
             <a:r>
-              <a:t>("Ingestion sync repos", sync_local_repos_main),  # 5</a:t>
+              <a:rPr dirty="0"/>
+              <a:t>("Ingestion sync repos", </a:t>
+            </a:r>
+            <a:r>
+              <a:rPr dirty="0" err="1"/>
+              <a:t>sync_local_repos_main</a:t>
+            </a:r>
+            <a:r>
+              <a:rPr dirty="0"/>
+              <a:t>),  # 5</a:t>
             </a:r>
           </a:p>
           <a:p>
@@ -15611,7 +17741,16 @@
               </a:defRPr>
             </a:pPr>
             <a:r>
-              <a:t>("Ingestion files",      fetch_files_main),       # 6</a:t>
+              <a:rPr dirty="0"/>
+              <a:t>("Ingestion files",      </a:t>
+            </a:r>
+            <a:r>
+              <a:rPr dirty="0" err="1"/>
+              <a:t>fetch_files_main</a:t>
+            </a:r>
+            <a:r>
+              <a:rPr dirty="0"/>
+              <a:t>),       # 6</a:t>
             </a:r>
           </a:p>
           <a:p>
@@ -15627,7 +17766,16 @@
               </a:defRPr>
             </a:pPr>
             <a:r>
-              <a:t>("Alfred PDF figures",   _enrich_pdf_main),       # 7</a:t>
+              <a:rPr dirty="0"/>
+              <a:t>("Alfred PDF figures",   _</a:t>
+            </a:r>
+            <a:r>
+              <a:rPr dirty="0" err="1"/>
+              <a:t>enrich_pdf_main</a:t>
+            </a:r>
+            <a:r>
+              <a:rPr dirty="0"/>
+              <a:t>),       # 7</a:t>
             </a:r>
           </a:p>
           <a:p>
@@ -15643,7 +17791,16 @@
               </a:defRPr>
             </a:pPr>
             <a:r>
-              <a:t>("Cleaning issues",      clean_issues_main),      # 8</a:t>
+              <a:rPr dirty="0"/>
+              <a:t>("Cleaning issues",      </a:t>
+            </a:r>
+            <a:r>
+              <a:rPr dirty="0" err="1"/>
+              <a:t>clean_issues_main</a:t>
+            </a:r>
+            <a:r>
+              <a:rPr dirty="0"/>
+              <a:t>),      # 8</a:t>
             </a:r>
           </a:p>
           <a:p>
@@ -15659,7 +17816,16 @@
               </a:defRPr>
             </a:pPr>
             <a:r>
-              <a:t>("Cleaning files",       clean_files_main),       # 9</a:t>
+              <a:rPr dirty="0"/>
+              <a:t>("Cleaning files",       </a:t>
+            </a:r>
+            <a:r>
+              <a:rPr dirty="0" err="1"/>
+              <a:t>clean_files_main</a:t>
+            </a:r>
+            <a:r>
+              <a:rPr dirty="0"/>
+              <a:t>),       # 9</a:t>
             </a:r>
           </a:p>
           <a:p>
@@ -15675,6 +17841,7 @@
               </a:defRPr>
             </a:pPr>
             <a:r>
+              <a:rPr dirty="0"/>
               <a:t>("Enrichment issues V2", issues_to_docs_v2_main), # 10</a:t>
             </a:r>
           </a:p>
@@ -15691,6 +17858,7 @@
               </a:defRPr>
             </a:pPr>
             <a:r>
+              <a:rPr dirty="0"/>
               <a:t>("Enrichment files V2",  files_to_docs_v2_main),  # 11</a:t>
             </a:r>
           </a:p>
@@ -15707,7 +17875,16 @@
               </a:defRPr>
             </a:pPr>
             <a:r>
-              <a:t>("Similarity issues V2", similarity_main),        # 12</a:t>
+              <a:rPr dirty="0"/>
+              <a:t>("Similarity issues V2", </a:t>
+            </a:r>
+            <a:r>
+              <a:rPr dirty="0" err="1"/>
+              <a:t>similarity_main</a:t>
+            </a:r>
+            <a:r>
+              <a:rPr dirty="0"/>
+              <a:t>),        # 12</a:t>
             </a:r>
           </a:p>
           <a:p>
@@ -15723,7 +17900,16 @@
               </a:defRPr>
             </a:pPr>
             <a:r>
-              <a:t>("Chunking issues V2",   chunks_issues_main),     # 13</a:t>
+              <a:rPr dirty="0"/>
+              <a:t>("Chunking issues V2",   </a:t>
+            </a:r>
+            <a:r>
+              <a:rPr dirty="0" err="1"/>
+              <a:t>chunks_issues_main</a:t>
+            </a:r>
+            <a:r>
+              <a:rPr dirty="0"/>
+              <a:t>),     # 13</a:t>
             </a:r>
           </a:p>
           <a:p>
@@ -15739,7 +17925,16 @@
               </a:defRPr>
             </a:pPr>
             <a:r>
-              <a:t>("Chunking files V2",    chunks_files_main),      # 14</a:t>
+              <a:rPr dirty="0"/>
+              <a:t>("Chunking files V2",    </a:t>
+            </a:r>
+            <a:r>
+              <a:rPr dirty="0" err="1"/>
+              <a:t>chunks_files_main</a:t>
+            </a:r>
+            <a:r>
+              <a:rPr dirty="0"/>
+              <a:t>),      # 14</a:t>
             </a:r>
           </a:p>
           <a:p>
@@ -15755,7 +17950,16 @@
               </a:defRPr>
             </a:pPr>
             <a:r>
-              <a:t>("Stats issues V2",      stats_issues_main),      # 15</a:t>
+              <a:rPr dirty="0"/>
+              <a:t>("Stats issues V2",      </a:t>
+            </a:r>
+            <a:r>
+              <a:rPr dirty="0" err="1"/>
+              <a:t>stats_issues_main</a:t>
+            </a:r>
+            <a:r>
+              <a:rPr dirty="0"/>
+              <a:t>),      # 15</a:t>
             </a:r>
           </a:p>
           <a:p>
@@ -15771,7 +17975,16 @@
               </a:defRPr>
             </a:pPr>
             <a:r>
-              <a:t>("Stats files V2",       stats_files_main),       # 16</a:t>
+              <a:rPr dirty="0"/>
+              <a:t>("Stats files V2",       </a:t>
+            </a:r>
+            <a:r>
+              <a:rPr dirty="0" err="1"/>
+              <a:t>stats_files_main</a:t>
+            </a:r>
+            <a:r>
+              <a:rPr dirty="0"/>
+              <a:t>),       # 16</a:t>
             </a:r>
           </a:p>
           <a:p>
@@ -15787,7 +18000,16 @@
               </a:defRPr>
             </a:pPr>
             <a:r>
-              <a:t>("Schema validation",    validate_schemas_main),  # 17</a:t>
+              <a:rPr dirty="0"/>
+              <a:t>("Schema validation",    </a:t>
+            </a:r>
+            <a:r>
+              <a:rPr dirty="0" err="1"/>
+              <a:t>validate_schemas_main</a:t>
+            </a:r>
+            <a:r>
+              <a:rPr dirty="0"/>
+              <a:t>),  # 17</a:t>
             </a:r>
           </a:p>
           <a:p>
@@ -15803,6 +18025,7 @@
               </a:defRPr>
             </a:pPr>
             <a:r>
+              <a:rPr dirty="0"/>
               <a:t>]</a:t>
             </a:r>
           </a:p>
@@ -16134,4 +18357,10 @@
   </a:objectDefaults>
   <a:extraClrSchemeLst/>
 </a:theme>
+</file>
+
+<file path=docMetadata/LabelInfo.xml><?xml version="1.0" encoding="utf-8"?>
+<clbl:labelList xmlns:clbl="http://schemas.microsoft.com/office/2020/mipLabelMetadata">
+  <clbl:label id="{cf8c7287-838c-46dd-b281-b1140229e67a}" enabled="1" method="Privileged" siteId="{75e027c9-20d5-47d5-b82f-77d7cd041e8f}" removed="0"/>
+</clbl:labelList>
 </file>
--- a/docs/Atelier_Pratique_Pipeline_STM32Cube.pptx
+++ b/docs/Atelier_Pratique_Pipeline_STM32Cube.pptx
@@ -4,6 +4,9 @@
   <p:sldMasterIdLst>
     <p:sldMasterId id="2147483648" r:id="rId1"/>
   </p:sldMasterIdLst>
+  <p:notesMasterIdLst>
+    <p:notesMasterId r:id="rId33"/>
+  </p:notesMasterIdLst>
   <p:sldIdLst>
     <p:sldId id="256" r:id="rId2"/>
     <p:sldId id="257" r:id="rId3"/>
@@ -36,8 +39,9 @@
     <p:sldId id="284" r:id="rId30"/>
     <p:sldId id="285" r:id="rId31"/>
     <p:sldId id="286" r:id="rId32"/>
-    <p:sldId id="287" r:id="rId33"/>
-    <p:sldId id="288" r:id="rId34"/>
+    <p:sldId id="287" r:id="rId40"/>
+    <p:sldId id="288" r:id="rId41"/>
+    <p:sldId id="289" r:id="rId42"/>
   </p:sldIdLst>
   <p:sldSz cx="9144000" cy="6858000" type="screen4x3"/>
   <p:notesSz cx="6858000" cy="9144000"/>
@@ -158,7 +162,7 @@
 <file path=ppt/revisionInfo.xml><?xml version="1.0" encoding="utf-8"?>
 <p1510:revInfo xmlns:a="http://schemas.openxmlformats.org/drawingml/2006/main" xmlns:r="http://schemas.openxmlformats.org/officeDocument/2006/relationships" xmlns:p1510="http://schemas.microsoft.com/office/powerpoint/2015/10/main">
   <p1510:revLst>
-    <p1510:client id="{AC1A9B47-969F-4FB4-9DC4-5D1C1621205B}" v="4" dt="2026-06-25T16:04:04.931"/>
+    <p1510:client id="{AC1A9B47-969F-4FB4-9DC4-5D1C1621205B}" v="5" dt="2026-06-26T08:26:09.134"/>
   </p1510:revLst>
 </p1510:revInfo>
 </file>
@@ -167,8 +171,8 @@
 <pc:chgInfo xmlns:a="http://schemas.openxmlformats.org/drawingml/2006/main" xmlns:r="http://schemas.openxmlformats.org/officeDocument/2006/relationships" xmlns:ac="http://schemas.microsoft.com/office/drawing/2013/main/command" xmlns:pc="http://schemas.microsoft.com/office/powerpoint/2013/main/command">
   <pc:docChgLst>
     <pc:chgData name="Abir GHARBI" userId="ef92528f-00ab-4d87-966c-386bca485bd0" providerId="ADAL" clId="{F3D16DED-CAA7-4BF5-81E4-89DEDE7057F7}"/>
-    <pc:docChg chg="undo custSel modSld">
-      <pc:chgData name="Abir GHARBI" userId="ef92528f-00ab-4d87-966c-386bca485bd0" providerId="ADAL" clId="{F3D16DED-CAA7-4BF5-81E4-89DEDE7057F7}" dt="2026-06-25T16:05:30.912" v="70" actId="404"/>
+    <pc:docChg chg="undo custSel delSld modSld">
+      <pc:chgData name="Abir GHARBI" userId="ef92528f-00ab-4d87-966c-386bca485bd0" providerId="ADAL" clId="{F3D16DED-CAA7-4BF5-81E4-89DEDE7057F7}" dt="2026-06-26T08:31:16.831" v="93" actId="47"/>
       <pc:docMkLst>
         <pc:docMk/>
       </pc:docMkLst>
@@ -339,8 +343,8 @@
           </ac:spMkLst>
         </pc:spChg>
       </pc:sldChg>
-      <pc:sldChg chg="modSp mod">
-        <pc:chgData name="Abir GHARBI" userId="ef92528f-00ab-4d87-966c-386bca485bd0" providerId="ADAL" clId="{F3D16DED-CAA7-4BF5-81E4-89DEDE7057F7}" dt="2026-06-25T16:05:14.708" v="67" actId="404"/>
+      <pc:sldChg chg="modSp del mod">
+        <pc:chgData name="Abir GHARBI" userId="ef92528f-00ab-4d87-966c-386bca485bd0" providerId="ADAL" clId="{F3D16DED-CAA7-4BF5-81E4-89DEDE7057F7}" dt="2026-06-26T08:31:16.831" v="93" actId="47"/>
         <pc:sldMkLst>
           <pc:docMk/>
           <pc:sldMk cId="0" sldId="287"/>
@@ -362,8 +366,8 @@
           </ac:spMkLst>
         </pc:spChg>
       </pc:sldChg>
-      <pc:sldChg chg="modSp mod">
-        <pc:chgData name="Abir GHARBI" userId="ef92528f-00ab-4d87-966c-386bca485bd0" providerId="ADAL" clId="{F3D16DED-CAA7-4BF5-81E4-89DEDE7057F7}" dt="2026-06-25T16:05:30.912" v="70" actId="404"/>
+      <pc:sldChg chg="modSp del mod">
+        <pc:chgData name="Abir GHARBI" userId="ef92528f-00ab-4d87-966c-386bca485bd0" providerId="ADAL" clId="{F3D16DED-CAA7-4BF5-81E4-89DEDE7057F7}" dt="2026-06-26T08:31:16.831" v="93" actId="47"/>
         <pc:sldMkLst>
           <pc:docMk/>
           <pc:sldMk cId="0" sldId="288"/>
@@ -385,9 +389,480 @@
           </ac:spMkLst>
         </pc:spChg>
       </pc:sldChg>
+      <pc:sldChg chg="modSp del mod">
+        <pc:chgData name="Abir GHARBI" userId="ef92528f-00ab-4d87-966c-386bca485bd0" providerId="ADAL" clId="{F3D16DED-CAA7-4BF5-81E4-89DEDE7057F7}" dt="2026-06-26T08:31:16.831" v="93" actId="47"/>
+        <pc:sldMkLst>
+          <pc:docMk/>
+          <pc:sldMk cId="0" sldId="289"/>
+        </pc:sldMkLst>
+        <pc:spChg chg="mod">
+          <ac:chgData name="Abir GHARBI" userId="ef92528f-00ab-4d87-966c-386bca485bd0" providerId="ADAL" clId="{F3D16DED-CAA7-4BF5-81E4-89DEDE7057F7}" dt="2026-06-26T08:26:44.751" v="87" actId="20577"/>
+          <ac:spMkLst>
+            <pc:docMk/>
+            <pc:sldMk cId="0" sldId="289"/>
+            <ac:spMk id="3" creationId="{00000000-0000-0000-0000-000000000000}"/>
+          </ac:spMkLst>
+        </pc:spChg>
+      </pc:sldChg>
+      <pc:sldChg chg="modSp del mod">
+        <pc:chgData name="Abir GHARBI" userId="ef92528f-00ab-4d87-966c-386bca485bd0" providerId="ADAL" clId="{F3D16DED-CAA7-4BF5-81E4-89DEDE7057F7}" dt="2026-06-26T08:31:16.831" v="93" actId="47"/>
+        <pc:sldMkLst>
+          <pc:docMk/>
+          <pc:sldMk cId="0" sldId="290"/>
+        </pc:sldMkLst>
+        <pc:spChg chg="mod">
+          <ac:chgData name="Abir GHARBI" userId="ef92528f-00ab-4d87-966c-386bca485bd0" providerId="ADAL" clId="{F3D16DED-CAA7-4BF5-81E4-89DEDE7057F7}" dt="2026-06-26T08:26:09.370" v="78" actId="27636"/>
+          <ac:spMkLst>
+            <pc:docMk/>
+            <pc:sldMk cId="0" sldId="290"/>
+            <ac:spMk id="2" creationId="{00000000-0000-0000-0000-000000000000}"/>
+          </ac:spMkLst>
+        </pc:spChg>
+        <pc:spChg chg="mod">
+          <ac:chgData name="Abir GHARBI" userId="ef92528f-00ab-4d87-966c-386bca485bd0" providerId="ADAL" clId="{F3D16DED-CAA7-4BF5-81E4-89DEDE7057F7}" dt="2026-06-26T08:28:33.048" v="92" actId="20577"/>
+          <ac:spMkLst>
+            <pc:docMk/>
+            <pc:sldMk cId="0" sldId="290"/>
+            <ac:spMk id="3" creationId="{00000000-0000-0000-0000-000000000000}"/>
+          </ac:spMkLst>
+        </pc:spChg>
+      </pc:sldChg>
     </pc:docChg>
   </pc:docChgLst>
 </pc:chgInfo>
+</file>
+
+<file path=ppt/notesMasters/notesMaster1.xml><?xml version="1.0" encoding="utf-8"?>
+<p:notesMaster xmlns:a="http://schemas.openxmlformats.org/drawingml/2006/main" xmlns:r="http://schemas.openxmlformats.org/officeDocument/2006/relationships" xmlns:p="http://schemas.openxmlformats.org/presentationml/2006/main">
+  <p:cSld>
+    <p:bg>
+      <p:bgRef idx="1001">
+        <a:schemeClr val="bg1"/>
+      </p:bgRef>
+    </p:bg>
+    <p:spTree>
+      <p:nvGrpSpPr>
+        <p:cNvPr id="1" name=""/>
+        <p:cNvGrpSpPr/>
+        <p:nvPr/>
+      </p:nvGrpSpPr>
+      <p:grpSpPr>
+        <a:xfrm>
+          <a:off x="0" y="0"/>
+          <a:ext cx="0" cy="0"/>
+          <a:chOff x="0" y="0"/>
+          <a:chExt cx="0" cy="0"/>
+        </a:xfrm>
+      </p:grpSpPr>
+      <p:sp>
+        <p:nvSpPr>
+          <p:cNvPr id="2" name="Header Placeholder 1"/>
+          <p:cNvSpPr>
+            <a:spLocks noGrp="1"/>
+          </p:cNvSpPr>
+          <p:nvPr>
+            <p:ph type="hdr" sz="quarter"/>
+          </p:nvPr>
+        </p:nvSpPr>
+        <p:spPr>
+          <a:xfrm>
+            <a:off x="0" y="0"/>
+            <a:ext cx="2971800" cy="458788"/>
+          </a:xfrm>
+          <a:prstGeom prst="rect">
+            <a:avLst/>
+          </a:prstGeom>
+        </p:spPr>
+        <p:txBody>
+          <a:bodyPr vert="horz" lIns="91440" tIns="45720" rIns="91440" bIns="45720" rtlCol="0"/>
+          <a:lstStyle>
+            <a:lvl1pPr algn="l">
+              <a:defRPr sz="1200"/>
+            </a:lvl1pPr>
+          </a:lstStyle>
+          <a:p>
+            <a:endParaRPr lang="en-US"/>
+          </a:p>
+        </p:txBody>
+      </p:sp>
+      <p:sp>
+        <p:nvSpPr>
+          <p:cNvPr id="3" name="Date Placeholder 2"/>
+          <p:cNvSpPr>
+            <a:spLocks noGrp="1"/>
+          </p:cNvSpPr>
+          <p:nvPr>
+            <p:ph type="dt" idx="1"/>
+          </p:nvPr>
+        </p:nvSpPr>
+        <p:spPr>
+          <a:xfrm>
+            <a:off x="3884613" y="0"/>
+            <a:ext cx="2971800" cy="458788"/>
+          </a:xfrm>
+          <a:prstGeom prst="rect">
+            <a:avLst/>
+          </a:prstGeom>
+        </p:spPr>
+        <p:txBody>
+          <a:bodyPr vert="horz" lIns="91440" tIns="45720" rIns="91440" bIns="45720" rtlCol="0"/>
+          <a:lstStyle>
+            <a:lvl1pPr algn="r">
+              <a:defRPr sz="1200"/>
+            </a:lvl1pPr>
+          </a:lstStyle>
+          <a:p>
+            <a:fld id="{C1CB68D9-53B7-4E6D-B3E5-7C1855B8A422}" type="datetimeFigureOut">
+              <a:rPr lang="en-US" smtClean="0"/>
+              <a:t>6/26/2026</a:t>
+            </a:fld>
+            <a:endParaRPr lang="en-US"/>
+          </a:p>
+        </p:txBody>
+      </p:sp>
+      <p:sp>
+        <p:nvSpPr>
+          <p:cNvPr id="4" name="Slide Image Placeholder 3"/>
+          <p:cNvSpPr>
+            <a:spLocks noGrp="1" noRot="1" noChangeAspect="1"/>
+          </p:cNvSpPr>
+          <p:nvPr>
+            <p:ph type="sldImg" idx="2"/>
+          </p:nvPr>
+        </p:nvSpPr>
+        <p:spPr>
+          <a:xfrm>
+            <a:off x="1371600" y="1143000"/>
+            <a:ext cx="4114800" cy="3086100"/>
+          </a:xfrm>
+          <a:prstGeom prst="rect">
+            <a:avLst/>
+          </a:prstGeom>
+          <a:noFill/>
+          <a:ln w="12700">
+            <a:solidFill>
+              <a:prstClr val="black"/>
+            </a:solidFill>
+          </a:ln>
+        </p:spPr>
+        <p:txBody>
+          <a:bodyPr vert="horz" lIns="91440" tIns="45720" rIns="91440" bIns="45720" rtlCol="0" anchor="ctr"/>
+          <a:lstStyle/>
+          <a:p>
+            <a:endParaRPr lang="en-US"/>
+          </a:p>
+        </p:txBody>
+      </p:sp>
+      <p:sp>
+        <p:nvSpPr>
+          <p:cNvPr id="5" name="Notes Placeholder 4"/>
+          <p:cNvSpPr>
+            <a:spLocks noGrp="1"/>
+          </p:cNvSpPr>
+          <p:nvPr>
+            <p:ph type="body" sz="quarter" idx="3"/>
+          </p:nvPr>
+        </p:nvSpPr>
+        <p:spPr>
+          <a:xfrm>
+            <a:off x="685800" y="4400550"/>
+            <a:ext cx="5486400" cy="3600450"/>
+          </a:xfrm>
+          <a:prstGeom prst="rect">
+            <a:avLst/>
+          </a:prstGeom>
+        </p:spPr>
+        <p:txBody>
+          <a:bodyPr vert="horz" lIns="91440" tIns="45720" rIns="91440" bIns="45720" rtlCol="0"/>
+          <a:lstStyle/>
+          <a:p>
+            <a:pPr lvl="0"/>
+            <a:r>
+              <a:rPr lang="en-US"/>
+              <a:t>Click to edit Master text styles</a:t>
+            </a:r>
+          </a:p>
+          <a:p>
+            <a:pPr lvl="1"/>
+            <a:r>
+              <a:rPr lang="en-US"/>
+              <a:t>Second level</a:t>
+            </a:r>
+          </a:p>
+          <a:p>
+            <a:pPr lvl="2"/>
+            <a:r>
+              <a:rPr lang="en-US"/>
+              <a:t>Third level</a:t>
+            </a:r>
+          </a:p>
+          <a:p>
+            <a:pPr lvl="3"/>
+            <a:r>
+              <a:rPr lang="en-US"/>
+              <a:t>Fourth level</a:t>
+            </a:r>
+          </a:p>
+          <a:p>
+            <a:pPr lvl="4"/>
+            <a:r>
+              <a:rPr lang="en-US"/>
+              <a:t>Fifth level</a:t>
+            </a:r>
+          </a:p>
+        </p:txBody>
+      </p:sp>
+      <p:sp>
+        <p:nvSpPr>
+          <p:cNvPr id="6" name="Footer Placeholder 5"/>
+          <p:cNvSpPr>
+            <a:spLocks noGrp="1"/>
+          </p:cNvSpPr>
+          <p:nvPr>
+            <p:ph type="ftr" sz="quarter" idx="4"/>
+          </p:nvPr>
+        </p:nvSpPr>
+        <p:spPr>
+          <a:xfrm>
+            <a:off x="0" y="8685213"/>
+            <a:ext cx="2971800" cy="458787"/>
+          </a:xfrm>
+          <a:prstGeom prst="rect">
+            <a:avLst/>
+          </a:prstGeom>
+        </p:spPr>
+        <p:txBody>
+          <a:bodyPr vert="horz" lIns="91440" tIns="45720" rIns="91440" bIns="45720" rtlCol="0" anchor="b"/>
+          <a:lstStyle>
+            <a:lvl1pPr algn="l">
+              <a:defRPr sz="1200"/>
+            </a:lvl1pPr>
+          </a:lstStyle>
+          <a:p>
+            <a:endParaRPr lang="en-US"/>
+          </a:p>
+        </p:txBody>
+      </p:sp>
+      <p:sp>
+        <p:nvSpPr>
+          <p:cNvPr id="7" name="Slide Number Placeholder 6"/>
+          <p:cNvSpPr>
+            <a:spLocks noGrp="1"/>
+          </p:cNvSpPr>
+          <p:nvPr>
+            <p:ph type="sldNum" sz="quarter" idx="5"/>
+          </p:nvPr>
+        </p:nvSpPr>
+        <p:spPr>
+          <a:xfrm>
+            <a:off x="3884613" y="8685213"/>
+            <a:ext cx="2971800" cy="458787"/>
+          </a:xfrm>
+          <a:prstGeom prst="rect">
+            <a:avLst/>
+          </a:prstGeom>
+        </p:spPr>
+        <p:txBody>
+          <a:bodyPr vert="horz" lIns="91440" tIns="45720" rIns="91440" bIns="45720" rtlCol="0" anchor="b"/>
+          <a:lstStyle>
+            <a:lvl1pPr algn="r">
+              <a:defRPr sz="1200"/>
+            </a:lvl1pPr>
+          </a:lstStyle>
+          <a:p>
+            <a:fld id="{D5679A62-C517-4E87-AAEF-00359559152F}" type="slidenum">
+              <a:rPr lang="en-US" smtClean="0"/>
+              <a:t>‹#›</a:t>
+            </a:fld>
+            <a:endParaRPr lang="en-US"/>
+          </a:p>
+        </p:txBody>
+      </p:sp>
+    </p:spTree>
+    <p:extLst>
+      <p:ext uri="{BB962C8B-B14F-4D97-AF65-F5344CB8AC3E}">
+        <p14:creationId xmlns:p14="http://schemas.microsoft.com/office/powerpoint/2010/main" val="1433206895"/>
+      </p:ext>
+    </p:extLst>
+  </p:cSld>
+  <p:clrMap bg1="lt1" tx1="dk1" bg2="lt2" tx2="dk2" accent1="accent1" accent2="accent2" accent3="accent3" accent4="accent4" accent5="accent5" accent6="accent6" hlink="hlink" folHlink="folHlink"/>
+  <p:notesStyle>
+    <a:lvl1pPr marL="0" algn="l" defTabSz="914400" rtl="0" eaLnBrk="1" latinLnBrk="0" hangingPunct="1">
+      <a:defRPr sz="1200" kern="1200">
+        <a:solidFill>
+          <a:schemeClr val="tx1"/>
+        </a:solidFill>
+        <a:latin typeface="+mn-lt"/>
+        <a:ea typeface="+mn-ea"/>
+        <a:cs typeface="+mn-cs"/>
+      </a:defRPr>
+    </a:lvl1pPr>
+    <a:lvl2pPr marL="457200" algn="l" defTabSz="914400" rtl="0" eaLnBrk="1" latinLnBrk="0" hangingPunct="1">
+      <a:defRPr sz="1200" kern="1200">
+        <a:solidFill>
+          <a:schemeClr val="tx1"/>
+        </a:solidFill>
+        <a:latin typeface="+mn-lt"/>
+        <a:ea typeface="+mn-ea"/>
+        <a:cs typeface="+mn-cs"/>
+      </a:defRPr>
+    </a:lvl2pPr>
+    <a:lvl3pPr marL="914400" algn="l" defTabSz="914400" rtl="0" eaLnBrk="1" latinLnBrk="0" hangingPunct="1">
+      <a:defRPr sz="1200" kern="1200">
+        <a:solidFill>
+          <a:schemeClr val="tx1"/>
+        </a:solidFill>
+        <a:latin typeface="+mn-lt"/>
+        <a:ea typeface="+mn-ea"/>
+        <a:cs typeface="+mn-cs"/>
+      </a:defRPr>
+    </a:lvl3pPr>
+    <a:lvl4pPr marL="1371600" algn="l" defTabSz="914400" rtl="0" eaLnBrk="1" latinLnBrk="0" hangingPunct="1">
+      <a:defRPr sz="1200" kern="1200">
+        <a:solidFill>
+          <a:schemeClr val="tx1"/>
+        </a:solidFill>
+        <a:latin typeface="+mn-lt"/>
+        <a:ea typeface="+mn-ea"/>
+        <a:cs typeface="+mn-cs"/>
+      </a:defRPr>
+    </a:lvl4pPr>
+    <a:lvl5pPr marL="1828800" algn="l" defTabSz="914400" rtl="0" eaLnBrk="1" latinLnBrk="0" hangingPunct="1">
+      <a:defRPr sz="1200" kern="1200">
+        <a:solidFill>
+          <a:schemeClr val="tx1"/>
+        </a:solidFill>
+        <a:latin typeface="+mn-lt"/>
+        <a:ea typeface="+mn-ea"/>
+        <a:cs typeface="+mn-cs"/>
+      </a:defRPr>
+    </a:lvl5pPr>
+    <a:lvl6pPr marL="2286000" algn="l" defTabSz="914400" rtl="0" eaLnBrk="1" latinLnBrk="0" hangingPunct="1">
+      <a:defRPr sz="1200" kern="1200">
+        <a:solidFill>
+          <a:schemeClr val="tx1"/>
+        </a:solidFill>
+        <a:latin typeface="+mn-lt"/>
+        <a:ea typeface="+mn-ea"/>
+        <a:cs typeface="+mn-cs"/>
+      </a:defRPr>
+    </a:lvl6pPr>
+    <a:lvl7pPr marL="2743200" algn="l" defTabSz="914400" rtl="0" eaLnBrk="1" latinLnBrk="0" hangingPunct="1">
+      <a:defRPr sz="1200" kern="1200">
+        <a:solidFill>
+          <a:schemeClr val="tx1"/>
+        </a:solidFill>
+        <a:latin typeface="+mn-lt"/>
+        <a:ea typeface="+mn-ea"/>
+        <a:cs typeface="+mn-cs"/>
+      </a:defRPr>
+    </a:lvl7pPr>
+    <a:lvl8pPr marL="3200400" algn="l" defTabSz="914400" rtl="0" eaLnBrk="1" latinLnBrk="0" hangingPunct="1">
+      <a:defRPr sz="1200" kern="1200">
+        <a:solidFill>
+          <a:schemeClr val="tx1"/>
+        </a:solidFill>
+        <a:latin typeface="+mn-lt"/>
+        <a:ea typeface="+mn-ea"/>
+        <a:cs typeface="+mn-cs"/>
+      </a:defRPr>
+    </a:lvl8pPr>
+    <a:lvl9pPr marL="3657600" algn="l" defTabSz="914400" rtl="0" eaLnBrk="1" latinLnBrk="0" hangingPunct="1">
+      <a:defRPr sz="1200" kern="1200">
+        <a:solidFill>
+          <a:schemeClr val="tx1"/>
+        </a:solidFill>
+        <a:latin typeface="+mn-lt"/>
+        <a:ea typeface="+mn-ea"/>
+        <a:cs typeface="+mn-cs"/>
+      </a:defRPr>
+    </a:lvl9pPr>
+  </p:notesStyle>
+</p:notesMaster>
+</file>
+
+<file path=ppt/notesSlides/notesSlide1.xml><?xml version="1.0" encoding="utf-8"?>
+<p:notes xmlns:a="http://schemas.openxmlformats.org/drawingml/2006/main" xmlns:r="http://schemas.openxmlformats.org/officeDocument/2006/relationships" xmlns:p="http://schemas.openxmlformats.org/presentationml/2006/main">
+  <p:cSld>
+    <p:spTree>
+      <p:nvGrpSpPr>
+        <p:cNvPr id="1" name=""/>
+        <p:cNvGrpSpPr/>
+        <p:nvPr/>
+      </p:nvGrpSpPr>
+      <p:grpSpPr>
+        <a:xfrm>
+          <a:off x="0" y="0"/>
+          <a:ext cx="0" cy="0"/>
+          <a:chOff x="0" y="0"/>
+          <a:chExt cx="0" cy="0"/>
+        </a:xfrm>
+      </p:grpSpPr>
+      <p:sp>
+        <p:nvSpPr>
+          <p:cNvPr id="2" name="Slide Image Placeholder 1"/>
+          <p:cNvSpPr>
+            <a:spLocks noGrp="1" noRot="1" noChangeAspect="1"/>
+          </p:cNvSpPr>
+          <p:nvPr>
+            <p:ph type="sldImg"/>
+          </p:nvPr>
+        </p:nvSpPr>
+        <p:spPr/>
+      </p:sp>
+      <p:sp>
+        <p:nvSpPr>
+          <p:cNvPr id="3" name="Notes Placeholder 2"/>
+          <p:cNvSpPr>
+            <a:spLocks noGrp="1"/>
+          </p:cNvSpPr>
+          <p:nvPr>
+            <p:ph type="body" idx="1"/>
+          </p:nvPr>
+        </p:nvSpPr>
+        <p:spPr/>
+        <p:txBody>
+          <a:bodyPr/>
+          <a:lstStyle/>
+          <a:p>
+            <a:endParaRPr lang="en-US" dirty="0"/>
+          </a:p>
+        </p:txBody>
+      </p:sp>
+      <p:sp>
+        <p:nvSpPr>
+          <p:cNvPr id="4" name="Slide Number Placeholder 3"/>
+          <p:cNvSpPr>
+            <a:spLocks noGrp="1"/>
+          </p:cNvSpPr>
+          <p:nvPr>
+            <p:ph type="sldNum" sz="quarter" idx="5"/>
+          </p:nvPr>
+        </p:nvSpPr>
+        <p:spPr/>
+        <p:txBody>
+          <a:bodyPr/>
+          <a:lstStyle/>
+          <a:p>
+            <a:fld id="{D5679A62-C517-4E87-AAEF-00359559152F}" type="slidenum">
+              <a:rPr lang="en-US" smtClean="0"/>
+              <a:t>31</a:t>
+            </a:fld>
+            <a:endParaRPr lang="en-US"/>
+          </a:p>
+        </p:txBody>
+      </p:sp>
+    </p:spTree>
+    <p:extLst>
+      <p:ext uri="{BB962C8B-B14F-4D97-AF65-F5344CB8AC3E}">
+        <p14:creationId xmlns:p14="http://schemas.microsoft.com/office/powerpoint/2010/main" val="1326835225"/>
+      </p:ext>
+    </p:extLst>
+  </p:cSld>
+  <p:clrMapOvr>
+    <a:masterClrMapping/>
+  </p:clrMapOvr>
+</p:notes>
 </file>
 
 <file path=ppt/slideLayouts/slideLayout1.xml><?xml version="1.0" encoding="utf-8"?>
@@ -569,7 +1044,7 @@
           <a:p>
             <a:fld id="{5BCAD085-E8A6-8845-BD4E-CB4CCA059FC4}" type="datetimeFigureOut">
               <a:rPr lang="en-US" smtClean="0"/>
-              <a:t>6/25/2026</a:t>
+              <a:t>6/26/2026</a:t>
             </a:fld>
             <a:endParaRPr lang="en-US"/>
           </a:p>
@@ -737,7 +1212,7 @@
           <a:p>
             <a:fld id="{5BCAD085-E8A6-8845-BD4E-CB4CCA059FC4}" type="datetimeFigureOut">
               <a:rPr lang="en-US" smtClean="0"/>
-              <a:t>6/25/2026</a:t>
+              <a:t>6/26/2026</a:t>
             </a:fld>
             <a:endParaRPr lang="en-US"/>
           </a:p>
@@ -915,7 +1390,7 @@
           <a:p>
             <a:fld id="{5BCAD085-E8A6-8845-BD4E-CB4CCA059FC4}" type="datetimeFigureOut">
               <a:rPr lang="en-US" smtClean="0"/>
-              <a:t>6/25/2026</a:t>
+              <a:t>6/26/2026</a:t>
             </a:fld>
             <a:endParaRPr lang="en-US"/>
           </a:p>
@@ -1083,7 +1558,7 @@
           <a:p>
             <a:fld id="{5BCAD085-E8A6-8845-BD4E-CB4CCA059FC4}" type="datetimeFigureOut">
               <a:rPr lang="en-US" smtClean="0"/>
-              <a:t>6/25/2026</a:t>
+              <a:t>6/26/2026</a:t>
             </a:fld>
             <a:endParaRPr lang="en-US"/>
           </a:p>
@@ -1328,7 +1803,7 @@
           <a:p>
             <a:fld id="{5BCAD085-E8A6-8845-BD4E-CB4CCA059FC4}" type="datetimeFigureOut">
               <a:rPr lang="en-US" smtClean="0"/>
-              <a:t>6/25/2026</a:t>
+              <a:t>6/26/2026</a:t>
             </a:fld>
             <a:endParaRPr lang="en-US"/>
           </a:p>
@@ -1613,7 +2088,7 @@
           <a:p>
             <a:fld id="{5BCAD085-E8A6-8845-BD4E-CB4CCA059FC4}" type="datetimeFigureOut">
               <a:rPr lang="en-US" smtClean="0"/>
-              <a:t>6/25/2026</a:t>
+              <a:t>6/26/2026</a:t>
             </a:fld>
             <a:endParaRPr lang="en-US"/>
           </a:p>
@@ -2032,7 +2507,7 @@
           <a:p>
             <a:fld id="{5BCAD085-E8A6-8845-BD4E-CB4CCA059FC4}" type="datetimeFigureOut">
               <a:rPr lang="en-US" smtClean="0"/>
-              <a:t>6/25/2026</a:t>
+              <a:t>6/26/2026</a:t>
             </a:fld>
             <a:endParaRPr lang="en-US"/>
           </a:p>
@@ -2149,7 +2624,7 @@
           <a:p>
             <a:fld id="{5BCAD085-E8A6-8845-BD4E-CB4CCA059FC4}" type="datetimeFigureOut">
               <a:rPr lang="en-US" smtClean="0"/>
-              <a:t>6/25/2026</a:t>
+              <a:t>6/26/2026</a:t>
             </a:fld>
             <a:endParaRPr lang="en-US"/>
           </a:p>
@@ -2244,7 +2719,7 @@
           <a:p>
             <a:fld id="{5BCAD085-E8A6-8845-BD4E-CB4CCA059FC4}" type="datetimeFigureOut">
               <a:rPr lang="en-US" smtClean="0"/>
-              <a:t>6/25/2026</a:t>
+              <a:t>6/26/2026</a:t>
             </a:fld>
             <a:endParaRPr lang="en-US"/>
           </a:p>
@@ -2519,7 +2994,7 @@
           <a:p>
             <a:fld id="{5BCAD085-E8A6-8845-BD4E-CB4CCA059FC4}" type="datetimeFigureOut">
               <a:rPr lang="en-US" smtClean="0"/>
-              <a:t>6/25/2026</a:t>
+              <a:t>6/26/2026</a:t>
             </a:fld>
             <a:endParaRPr lang="en-US"/>
           </a:p>
@@ -2771,7 +3246,7 @@
           <a:p>
             <a:fld id="{5BCAD085-E8A6-8845-BD4E-CB4CCA059FC4}" type="datetimeFigureOut">
               <a:rPr lang="en-US" smtClean="0"/>
-              <a:t>6/25/2026</a:t>
+              <a:t>6/26/2026</a:t>
             </a:fld>
             <a:endParaRPr lang="en-US"/>
           </a:p>
@@ -2982,7 +3457,7 @@
           <a:p>
             <a:fld id="{5BCAD085-E8A6-8845-BD4E-CB4CCA059FC4}" type="datetimeFigureOut">
               <a:rPr lang="en-US" smtClean="0"/>
-              <a:t>6/25/2026</a:t>
+              <a:t>6/26/2026</a:t>
             </a:fld>
             <a:endParaRPr lang="en-US"/>
           </a:p>
@@ -11076,7 +11551,24 @@
               </a:defRPr>
             </a:pPr>
             <a:r>
-              <a:t>Checklist — Ajouter une Nouvelle Série</a:t>
+              <a:rPr dirty="0"/>
+              <a:t>Checklist — </a:t>
+            </a:r>
+            <a:r>
+              <a:rPr dirty="0" err="1"/>
+              <a:t>Ajouter</a:t>
+            </a:r>
+            <a:r>
+              <a:rPr dirty="0"/>
+              <a:t> </a:t>
+            </a:r>
+            <a:r>
+              <a:rPr dirty="0" err="1"/>
+              <a:t>une</a:t>
+            </a:r>
+            <a:r>
+              <a:rPr dirty="0"/>
+              <a:t> Nouvelle Série</a:t>
             </a:r>
           </a:p>
         </p:txBody>
@@ -11103,491 +11595,133 @@
           </a:bodyPr>
           <a:lstStyle/>
           <a:p>
-            <a:pPr>
-              <a:spcBef>
-                <a:spcPts val="600"/>
-              </a:spcBef>
-              <a:defRPr sz="1400">
-                <a:solidFill>
-                  <a:srgbClr val="333333"/>
-                </a:solidFill>
-              </a:defRPr>
-            </a:pPr>
-            <a:r>
-              <a:rPr dirty="0"/>
-              <a:t> 1. </a:t>
-            </a:r>
-            <a:r>
-              <a:rPr dirty="0" err="1"/>
-              <a:t>Créer</a:t>
-            </a:r>
-            <a:r>
-              <a:rPr dirty="0"/>
-              <a:t> shared/config/config_&lt;</a:t>
-            </a:r>
-            <a:r>
-              <a:rPr dirty="0" err="1"/>
-              <a:t>serie</a:t>
-            </a:r>
-            <a:r>
-              <a:rPr dirty="0"/>
-              <a:t>&gt;.</a:t>
-            </a:r>
-            <a:r>
-              <a:rPr dirty="0" err="1"/>
-              <a:t>json</a:t>
-            </a:r>
-            <a:r>
-              <a:rPr dirty="0"/>
-              <a:t> (repos + </a:t>
-            </a:r>
-            <a:r>
-              <a:rPr dirty="0" err="1"/>
-              <a:t>clone_urls</a:t>
-            </a:r>
-            <a:r>
-              <a:rPr dirty="0"/>
-              <a:t>)</a:t>
-            </a:r>
-          </a:p>
-          <a:p>
-            <a:pPr>
-              <a:spcBef>
-                <a:spcPts val="600"/>
-              </a:spcBef>
-              <a:defRPr sz="1400">
-                <a:solidFill>
-                  <a:srgbClr val="333333"/>
-                </a:solidFill>
-              </a:defRPr>
-            </a:pPr>
-            <a:r>
-              <a:rPr dirty="0"/>
-              <a:t> 2. </a:t>
-            </a:r>
-            <a:r>
-              <a:rPr dirty="0" err="1"/>
-              <a:t>Ajouter</a:t>
-            </a:r>
-            <a:r>
-              <a:rPr dirty="0"/>
-              <a:t> mapping dans pipeline/delivery/delivery_paths.py</a:t>
-            </a:r>
-          </a:p>
-          <a:p>
-            <a:pPr>
-              <a:spcBef>
-                <a:spcPts val="600"/>
-              </a:spcBef>
-              <a:defRPr sz="1400">
-                <a:solidFill>
-                  <a:srgbClr val="333333"/>
-                </a:solidFill>
-              </a:defRPr>
-            </a:pPr>
-            <a:r>
-              <a:rPr dirty="0"/>
-              <a:t> 3. Lancer le pipeline </a:t>
-            </a:r>
-            <a:r>
-              <a:rPr dirty="0" err="1"/>
-              <a:t>complet</a:t>
-            </a:r>
-            <a:r>
-              <a:rPr dirty="0"/>
-              <a:t> :</a:t>
-            </a:r>
-          </a:p>
-          <a:p>
-            <a:pPr>
-              <a:spcBef>
-                <a:spcPts val="400"/>
-              </a:spcBef>
-              <a:defRPr sz="1200">
-                <a:solidFill>
-                  <a:srgbClr val="333333"/>
-                </a:solidFill>
-                <a:latin typeface="Consolas"/>
-              </a:defRPr>
-            </a:pPr>
-            <a:r>
-              <a:rPr dirty="0"/>
-              <a:t>$env:STM32CUBE_CONFIG = "shared/config/</a:t>
-            </a:r>
-            <a:r>
-              <a:rPr dirty="0" err="1"/>
-              <a:t>config_xx.json</a:t>
-            </a:r>
-            <a:r>
-              <a:rPr dirty="0"/>
-              <a:t>"</a:t>
-            </a:r>
-          </a:p>
-          <a:p>
-            <a:pPr>
-              <a:spcBef>
-                <a:spcPts val="400"/>
-              </a:spcBef>
-              <a:defRPr sz="1200">
-                <a:solidFill>
-                  <a:srgbClr val="333333"/>
-                </a:solidFill>
-                <a:latin typeface="Consolas"/>
-              </a:defRPr>
-            </a:pPr>
-            <a:r>
-              <a:rPr dirty="0"/>
-              <a:t>python -m </a:t>
-            </a:r>
-            <a:r>
-              <a:rPr dirty="0" err="1"/>
-              <a:t>pipeline.run_full_workflow</a:t>
-            </a:r>
-            <a:r>
-              <a:rPr dirty="0"/>
-              <a:t> --export-st-ready --continue-on-error</a:t>
-            </a:r>
-          </a:p>
-          <a:p>
-            <a:pPr>
-              <a:spcBef>
-                <a:spcPts val="600"/>
-              </a:spcBef>
-              <a:defRPr sz="1400">
-                <a:solidFill>
-                  <a:srgbClr val="333333"/>
-                </a:solidFill>
-              </a:defRPr>
-            </a:pPr>
-            <a:r>
-              <a:rPr dirty="0"/>
-              <a:t>  → </a:t>
-            </a:r>
-            <a:r>
-              <a:rPr dirty="0" err="1"/>
-              <a:t>Inclut</a:t>
-            </a:r>
-            <a:r>
-              <a:rPr dirty="0"/>
-              <a:t> </a:t>
-            </a:r>
-            <a:r>
-              <a:rPr dirty="0" err="1"/>
-              <a:t>automatiquement</a:t>
-            </a:r>
-            <a:r>
-              <a:rPr dirty="0"/>
-              <a:t>: delivery + export </a:t>
-            </a:r>
-            <a:r>
-              <a:rPr dirty="0" err="1"/>
-              <a:t>with_images</a:t>
-            </a:r>
-            <a:r>
-              <a:rPr dirty="0"/>
-              <a:t> + Alfred images</a:t>
-            </a:r>
-          </a:p>
-          <a:p>
-            <a:pPr>
-              <a:spcBef>
-                <a:spcPts val="600"/>
-              </a:spcBef>
-              <a:defRPr sz="1400">
-                <a:solidFill>
-                  <a:srgbClr val="333333"/>
-                </a:solidFill>
-              </a:defRPr>
-            </a:pPr>
-            <a:r>
-              <a:rPr dirty="0"/>
-              <a:t> 4. </a:t>
-            </a:r>
-            <a:r>
-              <a:rPr dirty="0" err="1"/>
-              <a:t>Vérifier</a:t>
-            </a:r>
-            <a:r>
-              <a:rPr dirty="0"/>
-              <a:t> </a:t>
-            </a:r>
-            <a:r>
-              <a:rPr dirty="0" err="1"/>
-              <a:t>by_series</a:t>
-            </a:r>
-            <a:r>
-              <a:rPr dirty="0"/>
-              <a:t>/&lt;</a:t>
-            </a:r>
-            <a:r>
-              <a:rPr dirty="0" err="1"/>
-              <a:t>serie</a:t>
-            </a:r>
-            <a:r>
-              <a:rPr dirty="0"/>
-              <a:t>&gt;/ : issues, files, </a:t>
-            </a:r>
-            <a:r>
-              <a:rPr dirty="0" err="1"/>
-              <a:t>diag</a:t>
-            </a:r>
-            <a:r>
-              <a:rPr dirty="0"/>
-              <a:t>, resolver, drivers/</a:t>
-            </a:r>
-          </a:p>
-          <a:p>
-            <a:pPr>
-              <a:spcBef>
-                <a:spcPts val="600"/>
-              </a:spcBef>
-              <a:defRPr sz="1400">
-                <a:solidFill>
-                  <a:srgbClr val="333333"/>
-                </a:solidFill>
-              </a:defRPr>
-            </a:pPr>
-            <a:r>
-              <a:rPr dirty="0"/>
-              <a:t> 5. Alfred PDF figures (</a:t>
-            </a:r>
-            <a:r>
-              <a:rPr dirty="0" err="1"/>
-              <a:t>si</a:t>
-            </a:r>
-            <a:r>
-              <a:rPr dirty="0"/>
-              <a:t> </a:t>
-            </a:r>
-            <a:r>
-              <a:rPr dirty="0" err="1"/>
-              <a:t>pdf_image_tasks</a:t>
-            </a:r>
-            <a:r>
-              <a:rPr dirty="0"/>
-              <a:t> non vide) :</a:t>
-            </a:r>
-          </a:p>
-          <a:p>
-            <a:pPr>
-              <a:spcBef>
-                <a:spcPts val="400"/>
-              </a:spcBef>
-              <a:defRPr sz="1200">
-                <a:solidFill>
-                  <a:srgbClr val="333333"/>
-                </a:solidFill>
-                <a:latin typeface="Consolas"/>
-              </a:defRPr>
-            </a:pPr>
-            <a:r>
-              <a:rPr dirty="0"/>
-              <a:t>python pipeline_Automation/alfred/enrich_pdf_figures_with_alfred.py --repo &lt;Repo&gt;</a:t>
-            </a:r>
-          </a:p>
-          <a:p>
-            <a:pPr>
-              <a:spcBef>
-                <a:spcPts val="600"/>
-              </a:spcBef>
-              <a:defRPr sz="1400">
-                <a:solidFill>
-                  <a:srgbClr val="333333"/>
-                </a:solidFill>
-              </a:defRPr>
-            </a:pPr>
-            <a:r>
-              <a:rPr dirty="0"/>
-              <a:t>  → </a:t>
-            </a:r>
-            <a:r>
-              <a:rPr dirty="0" err="1"/>
-              <a:t>Puis</a:t>
-            </a:r>
-            <a:r>
-              <a:rPr dirty="0"/>
-              <a:t> re-run: files_to_docs_v2 + </a:t>
-            </a:r>
-            <a:r>
-              <a:rPr dirty="0" err="1"/>
-              <a:t>export_st_ready_files</a:t>
-            </a:r>
-            <a:endParaRPr dirty="0"/>
-          </a:p>
-          <a:p>
-            <a:pPr>
-              <a:spcBef>
-                <a:spcPts val="600"/>
-              </a:spcBef>
-              <a:defRPr sz="1400">
-                <a:solidFill>
-                  <a:srgbClr val="333333"/>
-                </a:solidFill>
-              </a:defRPr>
-            </a:pPr>
-            <a:r>
-              <a:rPr dirty="0"/>
-              <a:t> 6. Upload repo principal (new </a:t>
-            </a:r>
-            <a:r>
-              <a:rPr dirty="0" err="1"/>
-              <a:t>datasource</a:t>
-            </a:r>
-            <a:r>
-              <a:rPr dirty="0"/>
-              <a:t> × 4 types)</a:t>
-            </a:r>
-          </a:p>
-          <a:p>
-            <a:pPr>
-              <a:spcBef>
-                <a:spcPts val="600"/>
-              </a:spcBef>
-              <a:defRPr sz="1400">
-                <a:solidFill>
-                  <a:srgbClr val="333333"/>
-                </a:solidFill>
-              </a:defRPr>
-            </a:pPr>
-            <a:r>
-              <a:rPr dirty="0"/>
-              <a:t> 7. Upload issues </a:t>
-            </a:r>
-            <a:r>
-              <a:rPr dirty="0" err="1"/>
-              <a:t>with_images</a:t>
-            </a:r>
-            <a:r>
-              <a:rPr dirty="0"/>
-              <a:t> </a:t>
-            </a:r>
-            <a:r>
-              <a:rPr dirty="0" err="1"/>
-              <a:t>enrichies</a:t>
-            </a:r>
-            <a:r>
-              <a:rPr dirty="0"/>
-              <a:t> Alfred</a:t>
-            </a:r>
-          </a:p>
-          <a:p>
-            <a:pPr>
-              <a:spcBef>
-                <a:spcPts val="600"/>
-              </a:spcBef>
-              <a:defRPr sz="1400">
-                <a:solidFill>
-                  <a:srgbClr val="333333"/>
-                </a:solidFill>
-              </a:defRPr>
-            </a:pPr>
-            <a:r>
-              <a:rPr dirty="0"/>
-              <a:t> 8. Upload files PDF-</a:t>
-            </a:r>
-            <a:r>
-              <a:rPr dirty="0" err="1"/>
-              <a:t>enrichies</a:t>
-            </a:r>
-            <a:r>
-              <a:rPr dirty="0"/>
-              <a:t> (</a:t>
-            </a:r>
-            <a:r>
-              <a:rPr dirty="0" err="1"/>
-              <a:t>suffixe</a:t>
-            </a:r>
-            <a:r>
-              <a:rPr dirty="0"/>
-              <a:t> _</a:t>
-            </a:r>
-            <a:r>
-              <a:rPr dirty="0" err="1"/>
-              <a:t>pdf_enriched</a:t>
-            </a:r>
-            <a:r>
-              <a:rPr dirty="0"/>
-              <a:t> </a:t>
-            </a:r>
-            <a:r>
-              <a:rPr dirty="0" err="1"/>
-              <a:t>si</a:t>
-            </a:r>
-            <a:r>
-              <a:rPr dirty="0"/>
-              <a:t> déjà </a:t>
-            </a:r>
-            <a:r>
-              <a:rPr dirty="0" err="1"/>
-              <a:t>uploadé</a:t>
-            </a:r>
-            <a:r>
-              <a:rPr dirty="0"/>
-              <a:t>)</a:t>
-            </a:r>
-          </a:p>
-          <a:p>
-            <a:pPr>
-              <a:spcBef>
-                <a:spcPts val="600"/>
-              </a:spcBef>
-              <a:defRPr sz="1400">
-                <a:solidFill>
-                  <a:srgbClr val="333333"/>
-                </a:solidFill>
-              </a:defRPr>
-            </a:pPr>
-            <a:r>
-              <a:rPr dirty="0"/>
-              <a:t> 9. </a:t>
-            </a:r>
-            <a:r>
-              <a:rPr dirty="0" err="1"/>
-              <a:t>Mettre</a:t>
-            </a:r>
-            <a:r>
-              <a:rPr dirty="0"/>
-              <a:t> à jour Upload_All_Drivers.ps1 + upload_alfred_issues_all_series.py</a:t>
-            </a:r>
-          </a:p>
-          <a:p>
-            <a:pPr>
-              <a:spcBef>
-                <a:spcPts val="600"/>
-              </a:spcBef>
-              <a:defRPr sz="1400">
-                <a:solidFill>
-                  <a:srgbClr val="333333"/>
-                </a:solidFill>
-              </a:defRPr>
-            </a:pPr>
-            <a:r>
-              <a:rPr dirty="0"/>
-              <a:t> 10. Lancer Upload_All_Drivers.ps1</a:t>
-            </a:r>
-          </a:p>
-          <a:p>
-            <a:pPr>
-              <a:spcBef>
-                <a:spcPts val="600"/>
-              </a:spcBef>
-              <a:defRPr sz="1400">
-                <a:solidFill>
-                  <a:srgbClr val="333333"/>
-                </a:solidFill>
-              </a:defRPr>
-            </a:pPr>
-            <a:r>
-              <a:rPr dirty="0"/>
-              <a:t> 11. </a:t>
-            </a:r>
-            <a:r>
-              <a:rPr dirty="0" err="1"/>
-              <a:t>Vérifier</a:t>
-            </a:r>
-            <a:r>
-              <a:rPr dirty="0"/>
-              <a:t>: Get_Persona_KBs.py</a:t>
+            <a:r>
+              <a:t>1. Créer config serie</a:t>
+            </a:r>
+          </a:p>
+          <a:p>
+            <a:r>
+              <a:t>Commande: New-Item "shared/config/config_&lt;serie&gt;.json" -ItemType File</a:t>
+            </a:r>
+          </a:p>
+          <a:p/>
+          <a:p>
+            <a:r>
+              <a:t>2. Ajouter mapping delivery_paths</a:t>
+            </a:r>
+          </a:p>
+          <a:p>
+            <a:r>
+              <a:t>Commande: code pipeline/delivery/delivery_paths.py</a:t>
+            </a:r>
+          </a:p>
+          <a:p/>
+          <a:p>
+            <a:r>
+              <a:t>3. Lancer pipeline complet</a:t>
+            </a:r>
+          </a:p>
+          <a:p>
+            <a:r>
+              <a:t>Commande: $env:STM32CUBE_CONFIG="shared/config/config_&lt;serie&gt;.json"</a:t>
+            </a:r>
+          </a:p>
+          <a:p>
+            <a:r>
+              <a:t>python -m pipeline.run_full_workflow --export-st-ready --continue-on-error</a:t>
+            </a:r>
+          </a:p>
+          <a:p/>
+          <a:p>
+            <a:r>
+              <a:t>4. Verifier outputs by_series</a:t>
+            </a:r>
+          </a:p>
+          <a:p>
+            <a:r>
+              <a:t>Commande: Get-ChildItem "datasets/07_delivery/st_ready/by_series/stm32cube&lt;serie&gt;" -Recurse</a:t>
+            </a:r>
+          </a:p>
+          <a:p/>
+          <a:p>
+            <a:r>
+              <a:t>5. Alfred PDF (si necessaire)</a:t>
+            </a:r>
+          </a:p>
+          <a:p>
+            <a:r>
+              <a:t>Commande: python pipeline_Automation/alfred/enrich_pdf_figures_with_alfred.py --repo STM32Cube&lt;SERIE&gt; --use-proxy</a:t>
+            </a:r>
+          </a:p>
+          <a:p/>
+          <a:p>
+            <a:r>
+              <a:t>6. Upload principal (workflow recommande)</a:t>
+            </a:r>
+          </a:p>
+          <a:p>
+            <a:r>
+              <a:t>Commande: .\pipeline_Automation\workflow\Run_Single_Series_Full_Pipeline_And_Upload.ps1 -Series &lt;SERIE&gt; -Mode Upload</a:t>
+            </a:r>
+          </a:p>
+          <a:p/>
+          <a:p>
+            <a:r>
+              <a:t>7. Upload issues with_images Alfred</a:t>
+            </a:r>
+          </a:p>
+          <a:p>
+            <a:r>
+              <a:t>Commande: python pipeline_Automation/upload/upload_alfred_issues_all_series.py</a:t>
+            </a:r>
+          </a:p>
+          <a:p/>
+          <a:p>
+            <a:r>
+              <a:t>8. Upload files PDF enrichis</a:t>
+            </a:r>
+          </a:p>
+          <a:p>
+            <a:r>
+              <a:t>Commande: python pipeline_Automation/patch_pdf_descriptions_in_delivery.py</a:t>
+            </a:r>
+          </a:p>
+          <a:p/>
+          <a:p>
+            <a:r>
+              <a:t>9. Mettre a jour scripts upload (si nouvelle serie)</a:t>
+            </a:r>
+          </a:p>
+          <a:p>
+            <a:r>
+              <a:t>Commandes: code pipeline_Automation/upload/Upload_All_Drivers.ps1</a:t>
+            </a:r>
+          </a:p>
+          <a:p>
+            <a:r>
+              <a:t>           code pipeline_Automation/upload/upload_alfred_issues_all_series.py</a:t>
+            </a:r>
+          </a:p>
+          <a:p/>
+          <a:p>
+            <a:r>
+              <a:t>10. Upload drivers</a:t>
+            </a:r>
+          </a:p>
+          <a:p>
+            <a:r>
+              <a:t>Commande: .\pipeline_Automation\upload\Upload_All_Drivers.ps1</a:t>
+            </a:r>
+          </a:p>
+          <a:p/>
+          <a:p>
+            <a:r>
+              <a:t>11. Verification KB</a:t>
+            </a:r>
+          </a:p>
+          <a:p>
+            <a:r>
+              <a:t>Commande: python pipeline_Automation/upload/Get_Persona_KBs.py</a:t>
             </a:r>
           </a:p>
         </p:txBody>
@@ -15135,7 +15269,7 @@
 </file>
 
 <file path=ppt/slides/slide32.xml><?xml version="1.0" encoding="utf-8"?>
-<p:sld xmlns:a="http://schemas.openxmlformats.org/drawingml/2006/main" xmlns:r="http://schemas.openxmlformats.org/officeDocument/2006/relationships" xmlns:p="http://schemas.openxmlformats.org/presentationml/2006/main">
+<p:sld xmlns:a="http://schemas.openxmlformats.org/drawingml/2006/main" xmlns:p="http://schemas.openxmlformats.org/presentationml/2006/main" xmlns:r="http://schemas.openxmlformats.org/officeDocument/2006/relationships">
   <p:cSld>
     <p:spTree>
       <p:nvGrpSpPr>
@@ -15143,120 +15277,367 @@
         <p:cNvGrpSpPr/>
         <p:nvPr/>
       </p:nvGrpSpPr>
-      <p:grpSpPr>
-        <a:xfrm>
-          <a:off x="0" y="0"/>
-          <a:ext cx="0" cy="0"/>
-          <a:chOff x="0" y="0"/>
-          <a:chExt cx="0" cy="0"/>
-        </a:xfrm>
-      </p:grpSpPr>
+      <p:grpSpPr/>
       <p:sp>
         <p:nvSpPr>
-          <p:cNvPr id="2" name="Title 1"/>
-          <p:cNvSpPr>
-            <a:spLocks noGrp="1"/>
-          </p:cNvSpPr>
-          <p:nvPr>
-            <p:ph type="title"/>
-          </p:nvPr>
+          <p:cNvPr id="2" name="Rectangle 1"/>
+          <p:cNvSpPr/>
+          <p:nvPr/>
         </p:nvSpPr>
-        <p:spPr/>
+        <p:spPr>
+          <a:xfrm>
+            <a:off x="0" y="0"/>
+            <a:ext cx="9144000" cy="822960"/>
+          </a:xfrm>
+          <a:prstGeom prst="rect">
+            <a:avLst/>
+          </a:prstGeom>
+          <a:solidFill>
+            <a:srgbClr val="034EA2"/>
+          </a:solidFill>
+          <a:ln>
+            <a:noFill/>
+          </a:ln>
+        </p:spPr>
+        <p:style>
+          <a:lnRef idx="1">
+            <a:schemeClr val="accent1"/>
+          </a:lnRef>
+          <a:fillRef idx="3">
+            <a:schemeClr val="accent1"/>
+          </a:fillRef>
+          <a:effectRef idx="2">
+            <a:schemeClr val="accent1"/>
+          </a:effectRef>
+          <a:fontRef idx="minor">
+            <a:schemeClr val="lt1"/>
+          </a:fontRef>
+        </p:style>
         <p:txBody>
-          <a:bodyPr>
-            <a:normAutofit fontScale="90000"/>
-          </a:bodyPr>
+          <a:bodyPr rtlCol="0" anchor="ctr"/>
           <a:lstStyle/>
           <a:p>
-            <a:r>
-              <a:t>Demo Alfred - Exemple 1 (Issue #335)</a:t>
+            <a:pPr algn="ctr">
+              <a:defRPr sz="2800" b="1">
+                <a:solidFill>
+                  <a:srgbClr val="FFFFFF"/>
+                </a:solidFill>
+              </a:defRPr>
+            </a:pPr>
+            <a:r>
+              <a:t>Differences entre les modes et les scripts</a:t>
             </a:r>
           </a:p>
         </p:txBody>
       </p:sp>
       <p:sp>
         <p:nvSpPr>
-          <p:cNvPr id="3" name="Content Placeholder 2"/>
-          <p:cNvSpPr>
-            <a:spLocks noGrp="1"/>
-          </p:cNvSpPr>
-          <p:nvPr>
-            <p:ph idx="1"/>
-          </p:nvPr>
+          <p:cNvPr id="3" name="TextBox 2"/>
+          <p:cNvSpPr txBox="1"/>
+          <p:nvPr/>
         </p:nvSpPr>
-        <p:spPr/>
+        <p:spPr>
+          <a:xfrm>
+            <a:off x="457200" y="1097280"/>
+            <a:ext cx="4206240" cy="5303520"/>
+          </a:xfrm>
+          <a:prstGeom prst="rect">
+            <a:avLst/>
+          </a:prstGeom>
+          <a:noFill/>
+        </p:spPr>
         <p:txBody>
-          <a:bodyPr>
-            <a:normAutofit/>
+          <a:bodyPr wrap="square">
+            <a:spAutoFit/>
           </a:bodyPr>
           <a:lstStyle/>
           <a:p>
-            <a:r>
-              <a:rPr sz="2000" dirty="0"/>
-              <a:t>Issue: warning -</a:t>
-            </a:r>
-            <a:r>
-              <a:rPr sz="2000" dirty="0" err="1"/>
-              <a:t>Wcast</a:t>
-            </a:r>
-            <a:r>
-              <a:rPr sz="2000" dirty="0"/>
-              <a:t>-align sur STM32CubeH7</a:t>
-            </a:r>
-          </a:p>
-          <a:p>
-            <a:r>
-              <a:rPr sz="2000" dirty="0"/>
-              <a:t>Integration dans </a:t>
-            </a:r>
-            <a:r>
-              <a:rPr sz="2000" dirty="0" err="1"/>
-              <a:t>st_ready_text</a:t>
-            </a:r>
-            <a:r>
-              <a:rPr sz="2000" dirty="0"/>
-              <a:t>: [IMAGE DESCRIPTION] Screenshot of an Eclipse/STM32CubeIDE project properties...</a:t>
-            </a:r>
-          </a:p>
-          <a:p>
-            <a:r>
-              <a:rPr sz="2000" dirty="0"/>
-              <a:t>Description Alfred (</a:t>
-            </a:r>
-            <a:r>
-              <a:rPr sz="2000" dirty="0" err="1"/>
-              <a:t>image_analyses</a:t>
-            </a:r>
-            <a:r>
-              <a:rPr sz="2000" dirty="0"/>
-              <a:t>): MCU/MPU GCC Linker &gt; Miscellaneous, flags linker </a:t>
-            </a:r>
-            <a:r>
-              <a:rPr sz="2000" dirty="0" err="1"/>
-              <a:t>detectes</a:t>
-            </a:r>
-            <a:endParaRPr sz="2000" dirty="0"/>
-          </a:p>
-          <a:p>
-            <a:r>
-              <a:rPr sz="2000" dirty="0"/>
-              <a:t>Impact retrieval: les captures IDE </a:t>
-            </a:r>
-            <a:r>
-              <a:rPr sz="2000" dirty="0" err="1"/>
-              <a:t>deviennent</a:t>
-            </a:r>
-            <a:r>
-              <a:rPr sz="2000" dirty="0"/>
-              <a:t> </a:t>
-            </a:r>
-            <a:r>
-              <a:rPr sz="2000" dirty="0" err="1"/>
-              <a:t>recherchables</a:t>
-            </a:r>
-            <a:r>
-              <a:rPr sz="2000" dirty="0"/>
-              <a:t> dans la KB</a:t>
+            <a:pPr>
+              <a:defRPr sz="1500" b="1"/>
+            </a:pPr>
+            <a:r>
+              <a:t>Modes de Run_Single_Series_Full_Pipeline_And_Upload.ps1</a:t>
+            </a:r>
+          </a:p>
+          <a:p>
+            <a:pPr>
+              <a:defRPr sz="1300" b="1"/>
+            </a:pPr>
+            <a:r>
+              <a:t>Mode Prepare :</a:t>
+            </a:r>
+          </a:p>
+          <a:p>
+            <a:pPr>
+              <a:defRPr sz="1300" b="0"/>
+            </a:pPr>
+            <a:r>
+              <a:t>- Définit STM32CUBE_CONFIG pour une seule série</a:t>
+            </a:r>
+          </a:p>
+          <a:p>
+            <a:pPr>
+              <a:defRPr sz="1300" b="0"/>
+            </a:pPr>
+            <a:r>
+              <a:t>- Exécute la synchronisation des repos + audit des sous-modules</a:t>
+            </a:r>
+          </a:p>
+          <a:p>
+            <a:pPr>
+              <a:defRPr sz="1300" b="0"/>
+            </a:pPr>
+            <a:r>
+              <a:t>- Lance pipeline.run_full_workflow --skip-chunking</a:t>
+            </a:r>
+          </a:p>
+          <a:p>
+            <a:pPr>
+              <a:defRPr sz="1300" b="0"/>
+            </a:pPr>
+            <a:r>
+              <a:t>- Exporte les JSON ST-ready (issues, files, resolver, diagnostic)</a:t>
+            </a:r>
+          </a:p>
+          <a:p>
+            <a:pPr>
+              <a:defRPr sz="1300" b="0"/>
+            </a:pPr>
+            <a:r>
+              <a:t>- Exécute l’enrichissement images Alfred + patch PDF + validation schéma + contrôles placeholders</a:t>
+            </a:r>
+          </a:p>
+          <a:p>
+            <a:pPr>
+              <a:defRPr sz="1300" b="0"/>
+            </a:pPr>
+          </a:p>
+          <a:p>
+            <a:pPr>
+              <a:defRPr sz="1300" b="1"/>
+            </a:pPr>
+            <a:r>
+              <a:t>Mode Upload :</a:t>
+            </a:r>
+          </a:p>
+          <a:p>
+            <a:pPr>
+              <a:defRPr sz="1300" b="0"/>
+            </a:pPr>
+            <a:r>
+              <a:t>- N’exécute PAS le pipeline ingestion/cleaning/enrichment</a:t>
+            </a:r>
+          </a:p>
+          <a:p>
+            <a:pPr>
+              <a:defRPr sz="1300" b="0"/>
+            </a:pPr>
+            <a:r>
+              <a:t>- Utilise les JSON de delivery existants sous datasets/07_delivery/st_ready/by_series/&lt;serie&gt;</a:t>
+            </a:r>
+          </a:p>
+          <a:p>
+            <a:pPr>
+              <a:defRPr sz="1300" b="0"/>
+            </a:pPr>
+            <a:r>
+              <a:t>- Crée ou alimente les datasources KB (issues/files/diagnostic/resolver)</a:t>
+            </a:r>
+          </a:p>
+          <a:p>
+            <a:pPr>
+              <a:defRPr sz="1300" b="0"/>
+            </a:pPr>
+            <a:r>
+              <a:t>- Uploade les datasets du repo parent et des drivers/sous-repos</a:t>
+            </a:r>
+          </a:p>
+          <a:p>
+            <a:pPr>
+              <a:defRPr sz="1300" b="0"/>
+            </a:pPr>
+          </a:p>
+          <a:p>
+            <a:pPr>
+              <a:defRPr sz="1300" b="1"/>
+            </a:pPr>
+            <a:r>
+              <a:t>Mode Full :</a:t>
+            </a:r>
+          </a:p>
+          <a:p>
+            <a:pPr>
+              <a:defRPr sz="1300" b="0"/>
+            </a:pPr>
+            <a:r>
+              <a:t>- Équivalent à Prepare + Upload en une seule commande</a:t>
+            </a:r>
+          </a:p>
+        </p:txBody>
+      </p:sp>
+      <p:sp>
+        <p:nvSpPr>
+          <p:cNvPr id="4" name="TextBox 3"/>
+          <p:cNvSpPr txBox="1"/>
+          <p:nvPr/>
+        </p:nvSpPr>
+        <p:spPr>
+          <a:xfrm>
+            <a:off x="4663440" y="1097280"/>
+            <a:ext cx="4023360" cy="5303520"/>
+          </a:xfrm>
+          <a:prstGeom prst="rect">
+            <a:avLst/>
+          </a:prstGeom>
+          <a:noFill/>
+        </p:spPr>
+        <p:txBody>
+          <a:bodyPr wrap="square">
+            <a:spAutoFit/>
+          </a:bodyPr>
+          <a:lstStyle/>
+          <a:p>
+            <a:pPr>
+              <a:defRPr sz="1500" b="1"/>
+            </a:pPr>
+            <a:r>
+              <a:t>run_full_workflow.py vs Run_Single_Series_Full_Pipeline_And_Upload.ps1</a:t>
+            </a:r>
+          </a:p>
+          <a:p>
+            <a:pPr>
+              <a:defRPr sz="1300" b="1"/>
+            </a:pPr>
+            <a:r>
+              <a:t>run_full_workflow.py :</a:t>
+            </a:r>
+          </a:p>
+          <a:p>
+            <a:pPr>
+              <a:defRPr sz="1300" b="0"/>
+            </a:pPr>
+            <a:r>
+              <a:t>- Orchestrateur Python du pipeline uniquement</a:t>
+            </a:r>
+          </a:p>
+          <a:p>
+            <a:pPr>
+              <a:defRPr sz="1300" b="0"/>
+            </a:pPr>
+            <a:r>
+              <a:t>- Exécute ingestion -&gt; cleaning -&gt; enrichment -&gt; similarité -&gt; chunking/stats/schéma</a:t>
+            </a:r>
+          </a:p>
+          <a:p>
+            <a:pPr>
+              <a:defRPr sz="1300" b="0"/>
+            </a:pPr>
+            <a:r>
+              <a:t>- Options : --skip-ingestion, --skip-chunking, --continue-on-error</a:t>
+            </a:r>
+          </a:p>
+          <a:p>
+            <a:pPr>
+              <a:defRPr sz="1300" b="0"/>
+            </a:pPr>
+            <a:r>
+              <a:t>- Helpers de delivery optionnels avec --export-st-ready</a:t>
+            </a:r>
+          </a:p>
+          <a:p>
+            <a:pPr>
+              <a:defRPr sz="1300" b="0"/>
+            </a:pPr>
+            <a:r>
+              <a:t>- Ne gère pas la création/l’upload des datasources KB</a:t>
+            </a:r>
+          </a:p>
+          <a:p>
+            <a:pPr>
+              <a:defRPr sz="1300" b="0"/>
+            </a:pPr>
+          </a:p>
+          <a:p>
+            <a:pPr>
+              <a:defRPr sz="1300" b="1"/>
+            </a:pPr>
+            <a:r>
+              <a:t>Run_Single_Series_Full_Pipeline_And_Upload.ps1 :</a:t>
+            </a:r>
+          </a:p>
+          <a:p>
+            <a:pPr>
+              <a:defRPr sz="1300" b="0"/>
+            </a:pPr>
+            <a:r>
+              <a:t>- Wrapper opérationnel de bout en bout pour une série STM32</a:t>
+            </a:r>
+          </a:p>
+          <a:p>
+            <a:pPr>
+              <a:defRPr sz="1300" b="0"/>
+            </a:pPr>
+            <a:r>
+              <a:t>- Sélectionne la config série + appelle run_full_workflow.py</a:t>
+            </a:r>
+          </a:p>
+          <a:p>
+            <a:pPr>
+              <a:defRPr sz="1300" b="0"/>
+            </a:pPr>
+            <a:r>
+              <a:t>- Ajoute les contrôles de gate delivery et placeholders</a:t>
+            </a:r>
+          </a:p>
+          <a:p>
+            <a:pPr>
+              <a:defRPr sz="1300" b="0"/>
+            </a:pPr>
+            <a:r>
+              <a:t>- Gère create/add des datasources et l’upload JSON vers la KB</a:t>
+            </a:r>
+          </a:p>
+          <a:p>
+            <a:pPr>
+              <a:defRPr sz="1300" b="0"/>
+            </a:pPr>
+            <a:r>
+              <a:t>- Supporte les modes opérationnels Prepare / Upload / Full</a:t>
+            </a:r>
+          </a:p>
+        </p:txBody>
+      </p:sp>
+      <p:sp>
+        <p:nvSpPr>
+          <p:cNvPr id="5" name="TextBox 4"/>
+          <p:cNvSpPr txBox="1"/>
+          <p:nvPr/>
+        </p:nvSpPr>
+        <p:spPr>
+          <a:xfrm>
+            <a:off x="548640" y="6400800"/>
+            <a:ext cx="8046720" cy="320040"/>
+          </a:xfrm>
+          <a:prstGeom prst="rect">
+            <a:avLst/>
+          </a:prstGeom>
+          <a:noFill/>
+        </p:spPr>
+        <p:txBody>
+          <a:bodyPr wrap="none">
+            <a:spAutoFit/>
+          </a:bodyPr>
+          <a:lstStyle/>
+          <a:p>
+            <a:pPr>
+              <a:defRPr sz="1100" i="1">
+                <a:solidFill>
+                  <a:srgbClr val="464646"/>
+                </a:solidFill>
+              </a:defRPr>
+            </a:pPr>
+            <a:r>
+              <a:t>Conseil : utiliser Prepare pour générer/valider les données, Upload pour pousser des JSON existants, Full pour l’automatisation complète.</a:t>
             </a:r>
           </a:p>
         </p:txBody>
@@ -15270,7 +15651,7 @@
 </file>
 
 <file path=ppt/slides/slide33.xml><?xml version="1.0" encoding="utf-8"?>
-<p:sld xmlns:a="http://schemas.openxmlformats.org/drawingml/2006/main" xmlns:r="http://schemas.openxmlformats.org/officeDocument/2006/relationships" xmlns:p="http://schemas.openxmlformats.org/presentationml/2006/main">
+<p:sld xmlns:a="http://schemas.openxmlformats.org/drawingml/2006/main" xmlns:p="http://schemas.openxmlformats.org/presentationml/2006/main" xmlns:r="http://schemas.openxmlformats.org/officeDocument/2006/relationships">
   <p:cSld>
     <p:spTree>
       <p:nvGrpSpPr>
@@ -15278,115 +15659,764 @@
         <p:cNvGrpSpPr/>
         <p:nvPr/>
       </p:nvGrpSpPr>
-      <p:grpSpPr>
-        <a:xfrm>
-          <a:off x="0" y="0"/>
-          <a:ext cx="0" cy="0"/>
-          <a:chOff x="0" y="0"/>
-          <a:chExt cx="0" cy="0"/>
-        </a:xfrm>
-      </p:grpSpPr>
+      <p:grpSpPr/>
       <p:sp>
         <p:nvSpPr>
-          <p:cNvPr id="2" name="Title 1"/>
-          <p:cNvSpPr>
-            <a:spLocks noGrp="1"/>
-          </p:cNvSpPr>
-          <p:nvPr>
-            <p:ph type="title"/>
-          </p:nvPr>
+          <p:cNvPr id="2" name="Rectangle 1"/>
+          <p:cNvSpPr/>
+          <p:nvPr/>
         </p:nvSpPr>
-        <p:spPr/>
+        <p:spPr>
+          <a:xfrm>
+            <a:off x="0" y="0"/>
+            <a:ext cx="9144000" cy="822960"/>
+          </a:xfrm>
+          <a:prstGeom prst="rect">
+            <a:avLst/>
+          </a:prstGeom>
+          <a:solidFill>
+            <a:srgbClr val="034EA2"/>
+          </a:solidFill>
+          <a:ln>
+            <a:noFill/>
+          </a:ln>
+        </p:spPr>
+        <p:style>
+          <a:lnRef idx="1">
+            <a:schemeClr val="accent1"/>
+          </a:lnRef>
+          <a:fillRef idx="3">
+            <a:schemeClr val="accent1"/>
+          </a:fillRef>
+          <a:effectRef idx="2">
+            <a:schemeClr val="accent1"/>
+          </a:effectRef>
+          <a:fontRef idx="minor">
+            <a:schemeClr val="lt1"/>
+          </a:fontRef>
+        </p:style>
         <p:txBody>
-          <a:bodyPr>
-            <a:normAutofit fontScale="90000"/>
-          </a:bodyPr>
+          <a:bodyPr rtlCol="0" anchor="ctr"/>
           <a:lstStyle/>
           <a:p>
-            <a:r>
-              <a:t>Demo Alfred - Exemple 2 (Issue #333)</a:t>
+            <a:pPr algn="l">
+              <a:defRPr sz="2700" b="1">
+                <a:solidFill>
+                  <a:srgbClr val="FFFFFF"/>
+                </a:solidFill>
+              </a:defRPr>
+            </a:pPr>
+            <a:r>
+              <a:t>Quand lancer Prepare / Upload / Full</a:t>
             </a:r>
           </a:p>
         </p:txBody>
       </p:sp>
       <p:sp>
         <p:nvSpPr>
-          <p:cNvPr id="3" name="Content Placeholder 2"/>
-          <p:cNvSpPr>
-            <a:spLocks noGrp="1"/>
-          </p:cNvSpPr>
-          <p:nvPr>
-            <p:ph idx="1"/>
-          </p:nvPr>
+          <p:cNvPr id="3" name="TextBox 2"/>
+          <p:cNvSpPr txBox="1"/>
+          <p:nvPr/>
         </p:nvSpPr>
-        <p:spPr/>
+        <p:spPr>
+          <a:xfrm>
+            <a:off x="457200" y="1051560"/>
+            <a:ext cx="2697480" cy="5440680"/>
+          </a:xfrm>
+          <a:prstGeom prst="rect">
+            <a:avLst/>
+          </a:prstGeom>
+          <a:noFill/>
+        </p:spPr>
         <p:txBody>
-          <a:bodyPr>
-            <a:normAutofit/>
+          <a:bodyPr wrap="square">
+            <a:spAutoFit/>
           </a:bodyPr>
           <a:lstStyle/>
           <a:p>
-            <a:r>
-              <a:rPr sz="2000" dirty="0"/>
-              <a:t>Issue: compile warnings avec flags GCC</a:t>
-            </a:r>
-          </a:p>
-          <a:p>
-            <a:r>
-              <a:rPr sz="2000" dirty="0"/>
-              <a:t>Integration dans </a:t>
-            </a:r>
-            <a:r>
-              <a:rPr sz="2000" dirty="0" err="1"/>
-              <a:t>st_ready_text</a:t>
-            </a:r>
-            <a:r>
-              <a:rPr sz="2000" dirty="0"/>
-              <a:t>: [IMAGE DESCRIPTION] Screenshot of the STM32CubeIDE 'About' dialog...</a:t>
-            </a:r>
-          </a:p>
-          <a:p>
-            <a:r>
-              <a:rPr sz="2000" dirty="0"/>
-              <a:t>Description Alfred (</a:t>
-            </a:r>
-            <a:r>
-              <a:rPr sz="2000" dirty="0" err="1"/>
-              <a:t>image_analyses</a:t>
-            </a:r>
-            <a:r>
-              <a:rPr sz="2000" dirty="0"/>
-              <a:t>): Version STM32CubeIDE 2.0.0 + Build 26820...</a:t>
-            </a:r>
-          </a:p>
-          <a:p>
-            <a:r>
-              <a:rPr sz="2000" dirty="0"/>
-              <a:t>Impact retrieval: le </a:t>
-            </a:r>
-            <a:r>
-              <a:rPr sz="2000" dirty="0" err="1"/>
-              <a:t>contexte</a:t>
-            </a:r>
-            <a:r>
-              <a:rPr sz="2000" dirty="0"/>
-              <a:t> de version </a:t>
-            </a:r>
-            <a:r>
-              <a:rPr sz="2000" dirty="0" err="1"/>
-              <a:t>outil</a:t>
-            </a:r>
-            <a:r>
-              <a:rPr sz="2000" dirty="0"/>
-              <a:t> est </a:t>
-            </a:r>
-            <a:r>
-              <a:rPr sz="2000" dirty="0" err="1"/>
-              <a:t>indexe</a:t>
-            </a:r>
-            <a:r>
-              <a:rPr sz="2000" dirty="0"/>
-              <a:t> et exploitable</a:t>
+            <a:pPr>
+              <a:defRPr sz="1500" b="1">
+                <a:solidFill>
+                  <a:srgbClr val="0A0A0A"/>
+                </a:solidFill>
+              </a:defRPr>
+            </a:pPr>
+            <a:r>
+              <a:t>Mode Prepare</a:t>
+            </a:r>
+          </a:p>
+          <a:p>
+            <a:pPr>
+              <a:defRPr sz="1250">
+                <a:solidFill>
+                  <a:srgbClr val="232323"/>
+                </a:solidFill>
+              </a:defRPr>
+            </a:pPr>
+            <a:r>
+              <a:t>À utiliser quand vous avez besoin d’un retraitement complet des données d’une série.</a:t>
+            </a:r>
+          </a:p>
+          <a:p>
+            <a:pPr>
+              <a:defRPr sz="1250">
+                <a:solidFill>
+                  <a:srgbClr val="232323"/>
+                </a:solidFill>
+              </a:defRPr>
+            </a:pPr>
+            <a:r>
+              <a:t>Exécute sync, audit, run_full_workflow, export delivery, enrichissement Alfred, puis gates.</a:t>
+            </a:r>
+          </a:p>
+          <a:p>
+            <a:pPr>
+              <a:defRPr sz="1250">
+                <a:solidFill>
+                  <a:srgbClr val="232323"/>
+                </a:solidFill>
+              </a:defRPr>
+            </a:pPr>
+            <a:r>
+              <a:t>À lancer avant Upload si les données source ont changé.</a:t>
+            </a:r>
+          </a:p>
+          <a:p>
+            <a:pPr>
+              <a:defRPr sz="1250">
+                <a:solidFill>
+                  <a:srgbClr val="232323"/>
+                </a:solidFill>
+              </a:defRPr>
+            </a:pPr>
+            <a:r>
+              <a:t>Cas typique : onboarding d’une nouvelle série ou repos mis à jour.</a:t>
+            </a:r>
+          </a:p>
+        </p:txBody>
+      </p:sp>
+      <p:sp>
+        <p:nvSpPr>
+          <p:cNvPr id="4" name="TextBox 3"/>
+          <p:cNvSpPr txBox="1"/>
+          <p:nvPr/>
+        </p:nvSpPr>
+        <p:spPr>
+          <a:xfrm>
+            <a:off x="3200400" y="1051560"/>
+            <a:ext cx="2697480" cy="5440680"/>
+          </a:xfrm>
+          <a:prstGeom prst="rect">
+            <a:avLst/>
+          </a:prstGeom>
+          <a:noFill/>
+        </p:spPr>
+        <p:txBody>
+          <a:bodyPr wrap="square">
+            <a:spAutoFit/>
+          </a:bodyPr>
+          <a:lstStyle/>
+          <a:p>
+            <a:pPr>
+              <a:defRPr sz="1500" b="1">
+                <a:solidFill>
+                  <a:srgbClr val="0A0A0A"/>
+                </a:solidFill>
+              </a:defRPr>
+            </a:pPr>
+            <a:r>
+              <a:t>Mode Upload</a:t>
+            </a:r>
+          </a:p>
+          <a:p>
+            <a:pPr>
+              <a:defRPr sz="1250">
+                <a:solidFill>
+                  <a:srgbClr val="232323"/>
+                </a:solidFill>
+              </a:defRPr>
+            </a:pPr>
+            <a:r>
+              <a:t>À utiliser quand les JSON ST-ready existent déjà et sont validés.</a:t>
+            </a:r>
+          </a:p>
+          <a:p>
+            <a:pPr>
+              <a:defRPr sz="1250">
+                <a:solidFill>
+                  <a:srgbClr val="232323"/>
+                </a:solidFill>
+              </a:defRPr>
+            </a:pPr>
+            <a:r>
+              <a:t>Ignore ingestion/cleaning/enrichment et pousse uniquement vers les datasources KB.</a:t>
+            </a:r>
+          </a:p>
+          <a:p>
+            <a:pPr>
+              <a:defRPr sz="1250">
+                <a:solidFill>
+                  <a:srgbClr val="232323"/>
+                </a:solidFill>
+              </a:defRPr>
+            </a:pPr>
+            <a:r>
+              <a:t>Idéal pour relancer après timeout API ou changement de datasource.</a:t>
+            </a:r>
+          </a:p>
+          <a:p>
+            <a:pPr>
+              <a:defRPr sz="1250">
+                <a:solidFill>
+                  <a:srgbClr val="232323"/>
+                </a:solidFill>
+              </a:defRPr>
+            </a:pPr>
+            <a:r>
+              <a:t>Le mode le plus rapide quand aucune régénération n’est nécessaire.</a:t>
+            </a:r>
+          </a:p>
+        </p:txBody>
+      </p:sp>
+      <p:sp>
+        <p:nvSpPr>
+          <p:cNvPr id="5" name="TextBox 4"/>
+          <p:cNvSpPr txBox="1"/>
+          <p:nvPr/>
+        </p:nvSpPr>
+        <p:spPr>
+          <a:xfrm>
+            <a:off x="5943600" y="1051560"/>
+            <a:ext cx="2743200" cy="5440680"/>
+          </a:xfrm>
+          <a:prstGeom prst="rect">
+            <a:avLst/>
+          </a:prstGeom>
+          <a:noFill/>
+        </p:spPr>
+        <p:txBody>
+          <a:bodyPr wrap="square">
+            <a:spAutoFit/>
+          </a:bodyPr>
+          <a:lstStyle/>
+          <a:p>
+            <a:pPr>
+              <a:defRPr sz="1500" b="1">
+                <a:solidFill>
+                  <a:srgbClr val="0A0A0A"/>
+                </a:solidFill>
+              </a:defRPr>
+            </a:pPr>
+            <a:r>
+              <a:t>Mode Full</a:t>
+            </a:r>
+          </a:p>
+          <a:p>
+            <a:pPr>
+              <a:defRPr sz="1250">
+                <a:solidFill>
+                  <a:srgbClr val="232323"/>
+                </a:solidFill>
+              </a:defRPr>
+            </a:pPr>
+            <a:r>
+              <a:t>À utiliser pour une automatisation complète de bout en bout en une commande.</a:t>
+            </a:r>
+          </a:p>
+          <a:p>
+            <a:pPr>
+              <a:defRPr sz="1250">
+                <a:solidFill>
+                  <a:srgbClr val="232323"/>
+                </a:solidFill>
+              </a:defRPr>
+            </a:pPr>
+            <a:r>
+              <a:t>Équivalent à Prepare puis Upload.</a:t>
+            </a:r>
+          </a:p>
+          <a:p>
+            <a:pPr>
+              <a:defRPr sz="1250">
+                <a:solidFill>
+                  <a:srgbClr val="232323"/>
+                </a:solidFill>
+              </a:defRPr>
+            </a:pPr>
+            <a:r>
+              <a:t>Adapté aux exécutions batch quand l’environnement est stable.</a:t>
+            </a:r>
+          </a:p>
+          <a:p>
+            <a:pPr>
+              <a:defRPr sz="1250">
+                <a:solidFill>
+                  <a:srgbClr val="232323"/>
+                </a:solidFill>
+              </a:defRPr>
+            </a:pPr>
+            <a:r>
+              <a:t>À éviter si vous avez seulement besoin de relancer un upload (utiliser Upload).</a:t>
+            </a:r>
+          </a:p>
+        </p:txBody>
+      </p:sp>
+      <p:sp>
+        <p:nvSpPr>
+          <p:cNvPr id="6" name="TextBox 5"/>
+          <p:cNvSpPr txBox="1"/>
+          <p:nvPr/>
+        </p:nvSpPr>
+        <p:spPr>
+          <a:xfrm>
+            <a:off x="548640" y="6355080"/>
+            <a:ext cx="8138160" cy="320040"/>
+          </a:xfrm>
+          <a:prstGeom prst="rect">
+            <a:avLst/>
+          </a:prstGeom>
+          <a:noFill/>
+        </p:spPr>
+        <p:txBody>
+          <a:bodyPr wrap="none">
+            <a:spAutoFit/>
+          </a:bodyPr>
+          <a:lstStyle/>
+          <a:p>
+            <a:pPr>
+              <a:defRPr sz="1100" i="1">
+                <a:solidFill>
+                  <a:srgbClr val="464646"/>
+                </a:solidFill>
+              </a:defRPr>
+            </a:pPr>
+            <a:r>
+              <a:t>Règle simple : données changées -&gt; Prepare ; données prêtes -&gt; Upload ; premier run complet -&gt; Full.</a:t>
+            </a:r>
+          </a:p>
+        </p:txBody>
+      </p:sp>
+    </p:spTree>
+  </p:cSld>
+  <p:clrMapOvr>
+    <a:masterClrMapping/>
+  </p:clrMapOvr>
+</p:sld>
+</file>
+
+<file path=ppt/slides/slide34.xml><?xml version="1.0" encoding="utf-8"?>
+<p:sld xmlns:a="http://schemas.openxmlformats.org/drawingml/2006/main" xmlns:p="http://schemas.openxmlformats.org/presentationml/2006/main" xmlns:r="http://schemas.openxmlformats.org/officeDocument/2006/relationships">
+  <p:cSld>
+    <p:spTree>
+      <p:nvGrpSpPr>
+        <p:cNvPr id="1" name=""/>
+        <p:cNvGrpSpPr/>
+        <p:nvPr/>
+      </p:nvGrpSpPr>
+      <p:grpSpPr/>
+      <p:sp>
+        <p:nvSpPr>
+          <p:cNvPr id="2" name="Rectangle 1"/>
+          <p:cNvSpPr/>
+          <p:nvPr/>
+        </p:nvSpPr>
+        <p:spPr>
+          <a:xfrm>
+            <a:off x="0" y="0"/>
+            <a:ext cx="9144000" cy="822960"/>
+          </a:xfrm>
+          <a:prstGeom prst="rect">
+            <a:avLst/>
+          </a:prstGeom>
+          <a:solidFill>
+            <a:srgbClr val="034EA2"/>
+          </a:solidFill>
+          <a:ln>
+            <a:noFill/>
+          </a:ln>
+        </p:spPr>
+        <p:style>
+          <a:lnRef idx="1">
+            <a:schemeClr val="accent1"/>
+          </a:lnRef>
+          <a:fillRef idx="3">
+            <a:schemeClr val="accent1"/>
+          </a:fillRef>
+          <a:effectRef idx="2">
+            <a:schemeClr val="accent1"/>
+          </a:effectRef>
+          <a:fontRef idx="minor">
+            <a:schemeClr val="lt1"/>
+          </a:fontRef>
+        </p:style>
+        <p:txBody>
+          <a:bodyPr rtlCol="0" anchor="ctr"/>
+          <a:lstStyle/>
+          <a:p>
+            <a:pPr algn="l">
+              <a:defRPr sz="2700" b="1">
+                <a:solidFill>
+                  <a:srgbClr val="FFFFFF"/>
+                </a:solidFill>
+              </a:defRPr>
+            </a:pPr>
+            <a:r>
+              <a:t>Créer config_&lt;serie&gt;.json : quoi remplir et d’où viennent les informations</a:t>
+            </a:r>
+          </a:p>
+        </p:txBody>
+      </p:sp>
+      <p:sp>
+        <p:nvSpPr>
+          <p:cNvPr id="3" name="TextBox 2"/>
+          <p:cNvSpPr txBox="1"/>
+          <p:nvPr/>
+        </p:nvSpPr>
+        <p:spPr>
+          <a:xfrm>
+            <a:off x="457200" y="1051560"/>
+            <a:ext cx="4160520" cy="2514600"/>
+          </a:xfrm>
+          <a:prstGeom prst="rect">
+            <a:avLst/>
+          </a:prstGeom>
+          <a:noFill/>
+        </p:spPr>
+        <p:txBody>
+          <a:bodyPr wrap="square">
+            <a:spAutoFit/>
+          </a:bodyPr>
+          <a:lstStyle/>
+          <a:p>
+            <a:pPr>
+              <a:defRPr sz="1500" b="1">
+                <a:solidFill>
+                  <a:srgbClr val="0A0A0A"/>
+                </a:solidFill>
+              </a:defRPr>
+            </a:pPr>
+            <a:r>
+              <a:t>Étape 1 : créer le fichier</a:t>
+            </a:r>
+          </a:p>
+          <a:p>
+            <a:pPr>
+              <a:defRPr sz="1250">
+                <a:solidFill>
+                  <a:srgbClr val="232323"/>
+                </a:solidFill>
+              </a:defRPr>
+            </a:pPr>
+            <a:r>
+              <a:t>Cette commande crée seulement un fichier vide :</a:t>
+            </a:r>
+          </a:p>
+          <a:p>
+            <a:pPr>
+              <a:defRPr sz="1250">
+                <a:solidFill>
+                  <a:srgbClr val="232323"/>
+                </a:solidFill>
+              </a:defRPr>
+            </a:pPr>
+            <a:r>
+              <a:t>New-Item "shared/config/config_&lt;serie&gt;.json" -ItemType File</a:t>
+            </a:r>
+          </a:p>
+          <a:p>
+            <a:pPr>
+              <a:defRPr sz="1250">
+                <a:solidFill>
+                  <a:srgbClr val="232323"/>
+                </a:solidFill>
+              </a:defRPr>
+            </a:pPr>
+            <a:r>
+              <a:t>Ensuite, coller un modèle JSON (owner, repos, refs, rate limits).</a:t>
+            </a:r>
+          </a:p>
+        </p:txBody>
+      </p:sp>
+      <p:sp>
+        <p:nvSpPr>
+          <p:cNvPr id="4" name="TextBox 3"/>
+          <p:cNvSpPr txBox="1"/>
+          <p:nvPr/>
+        </p:nvSpPr>
+        <p:spPr>
+          <a:xfrm>
+            <a:off x="4663440" y="1051560"/>
+            <a:ext cx="3977639" cy="2514600"/>
+          </a:xfrm>
+          <a:prstGeom prst="rect">
+            <a:avLst/>
+          </a:prstGeom>
+          <a:noFill/>
+        </p:spPr>
+        <p:txBody>
+          <a:bodyPr wrap="square">
+            <a:spAutoFit/>
+          </a:bodyPr>
+          <a:lstStyle/>
+          <a:p>
+            <a:pPr>
+              <a:defRPr sz="1500" b="1">
+                <a:solidFill>
+                  <a:srgbClr val="0A0A0A"/>
+                </a:solidFill>
+              </a:defRPr>
+            </a:pPr>
+            <a:r>
+              <a:t>Étape 2 : remplir les champs requis</a:t>
+            </a:r>
+          </a:p>
+          <a:p>
+            <a:pPr>
+              <a:defRPr sz="1250">
+                <a:solidFill>
+                  <a:srgbClr val="232323"/>
+                </a:solidFill>
+              </a:defRPr>
+            </a:pPr>
+            <a:r>
+              <a:t>owner : en général STMicroelectronics</a:t>
+            </a:r>
+          </a:p>
+          <a:p>
+            <a:pPr>
+              <a:defRPr sz="1250">
+                <a:solidFill>
+                  <a:srgbClr val="232323"/>
+                </a:solidFill>
+              </a:defRPr>
+            </a:pPr>
+            <a:r>
+              <a:t>repos : repo parent + repos driver/CMSIS/BSP</a:t>
+            </a:r>
+          </a:p>
+          <a:p>
+            <a:pPr>
+              <a:defRPr sz="1250">
+                <a:solidFill>
+                  <a:srgbClr val="232323"/>
+                </a:solidFill>
+              </a:defRPr>
+            </a:pPr>
+            <a:r>
+              <a:t>repos_dir : racine locale des clones (par défaut GitHub_repos)</a:t>
+            </a:r>
+          </a:p>
+          <a:p>
+            <a:pPr>
+              <a:defRPr sz="1250">
+                <a:solidFill>
+                  <a:srgbClr val="232323"/>
+                </a:solidFill>
+              </a:defRPr>
+            </a:pPr>
+            <a:r>
+              <a:t>auto_clone_missing_repos : true pour clone/sync automatique</a:t>
+            </a:r>
+          </a:p>
+        </p:txBody>
+      </p:sp>
+      <p:sp>
+        <p:nvSpPr>
+          <p:cNvPr id="5" name="TextBox 4"/>
+          <p:cNvSpPr txBox="1"/>
+          <p:nvPr/>
+        </p:nvSpPr>
+        <p:spPr>
+          <a:xfrm>
+            <a:off x="457200" y="3611880"/>
+            <a:ext cx="4160520" cy="2743200"/>
+          </a:xfrm>
+          <a:prstGeom prst="rect">
+            <a:avLst/>
+          </a:prstGeom>
+          <a:noFill/>
+        </p:spPr>
+        <p:txBody>
+          <a:bodyPr wrap="square">
+            <a:spAutoFit/>
+          </a:bodyPr>
+          <a:lstStyle/>
+          <a:p>
+            <a:pPr>
+              <a:defRPr sz="1500" b="1">
+                <a:solidFill>
+                  <a:srgbClr val="0A0A0A"/>
+                </a:solidFill>
+              </a:defRPr>
+            </a:pPr>
+            <a:r>
+              <a:t>Source des informations</a:t>
+            </a:r>
+          </a:p>
+          <a:p>
+            <a:pPr>
+              <a:defRPr sz="1250">
+                <a:solidFill>
+                  <a:srgbClr val="232323"/>
+                </a:solidFill>
+              </a:defRPr>
+            </a:pPr>
+            <a:r>
+              <a:t>Nom du repo principal depuis la map des séries du workflow (STM32Cube&lt;Serie&gt;).</a:t>
+            </a:r>
+          </a:p>
+          <a:p>
+            <a:pPr>
+              <a:defRPr sz="1250">
+                <a:solidFill>
+                  <a:srgbClr val="232323"/>
+                </a:solidFill>
+              </a:defRPr>
+            </a:pPr>
+            <a:r>
+              <a:t>Sous-repos récupérés depuis le .gitmodules du repo parent.</a:t>
+            </a:r>
+          </a:p>
+          <a:p>
+            <a:pPr>
+              <a:defRPr sz="1250">
+                <a:solidFill>
+                  <a:srgbClr val="232323"/>
+                </a:solidFill>
+              </a:defRPr>
+            </a:pPr>
+            <a:r>
+              <a:t>Commande : python -m pipeline.evaluation.audit_config_submodules --fix</a:t>
+            </a:r>
+          </a:p>
+          <a:p>
+            <a:pPr>
+              <a:defRPr sz="1250">
+                <a:solidFill>
+                  <a:srgbClr val="232323"/>
+                </a:solidFill>
+              </a:defRPr>
+            </a:pPr>
+            <a:r>
+              <a:t>Cette commande auto-remplit les repos manquants + repo_clone_urls + linked_repo_refs.</a:t>
+            </a:r>
+          </a:p>
+        </p:txBody>
+      </p:sp>
+      <p:sp>
+        <p:nvSpPr>
+          <p:cNvPr id="6" name="TextBox 5"/>
+          <p:cNvSpPr txBox="1"/>
+          <p:nvPr/>
+        </p:nvSpPr>
+        <p:spPr>
+          <a:xfrm>
+            <a:off x="4663440" y="3611880"/>
+            <a:ext cx="3977639" cy="2743200"/>
+          </a:xfrm>
+          <a:prstGeom prst="rect">
+            <a:avLst/>
+          </a:prstGeom>
+          <a:noFill/>
+        </p:spPr>
+        <p:txBody>
+          <a:bodyPr wrap="square">
+            <a:spAutoFit/>
+          </a:bodyPr>
+          <a:lstStyle/>
+          <a:p>
+            <a:pPr>
+              <a:defRPr sz="1500" b="1">
+                <a:solidFill>
+                  <a:srgbClr val="0A0A0A"/>
+                </a:solidFill>
+              </a:defRPr>
+            </a:pPr>
+            <a:r>
+              <a:t>Comment le pipeline utilise la config</a:t>
+            </a:r>
+          </a:p>
+          <a:p>
+            <a:pPr>
+              <a:defRPr sz="1250">
+                <a:solidFill>
+                  <a:srgbClr val="232323"/>
+                </a:solidFill>
+              </a:defRPr>
+            </a:pPr>
+            <a:r>
+              <a:t>La config active est sélectionnée via STM32CUBE_CONFIG (shared/utils/paths.py).</a:t>
+            </a:r>
+          </a:p>
+          <a:p>
+            <a:pPr>
+              <a:defRPr sz="1250">
+                <a:solidFill>
+                  <a:srgbClr val="232323"/>
+                </a:solidFill>
+              </a:defRPr>
+            </a:pPr>
+            <a:r>
+              <a:t>L’ingestion utilise owner/repos et les paramètres de clone.</a:t>
+            </a:r>
+          </a:p>
+          <a:p>
+            <a:pPr>
+              <a:defRPr sz="1250">
+                <a:solidFill>
+                  <a:srgbClr val="232323"/>
+                </a:solidFill>
+              </a:defRPr>
+            </a:pPr>
+            <a:r>
+              <a:t>repo_clone_urls surcharge l’URL de clone quand le nom de repo diffère.</a:t>
+            </a:r>
+          </a:p>
+          <a:p>
+            <a:pPr>
+              <a:defRPr sz="1250">
+                <a:solidFill>
+                  <a:srgbClr val="232323"/>
+                </a:solidFill>
+              </a:defRPr>
+            </a:pPr>
+            <a:r>
+              <a:t>linked_repo_refs fixe les sous-repos sur des commits précis (reproductibilité).</a:t>
+            </a:r>
+          </a:p>
+        </p:txBody>
+      </p:sp>
+      <p:sp>
+        <p:nvSpPr>
+          <p:cNvPr id="7" name="TextBox 6"/>
+          <p:cNvSpPr txBox="1"/>
+          <p:nvPr/>
+        </p:nvSpPr>
+        <p:spPr>
+          <a:xfrm>
+            <a:off x="502920" y="6373368"/>
+            <a:ext cx="8183879" cy="274320"/>
+          </a:xfrm>
+          <a:prstGeom prst="rect">
+            <a:avLst/>
+          </a:prstGeom>
+          <a:noFill/>
+        </p:spPr>
+        <p:txBody>
+          <a:bodyPr wrap="none">
+            <a:spAutoFit/>
+          </a:bodyPr>
+          <a:lstStyle/>
+          <a:p>
+            <a:pPr>
+              <a:defRPr sz="1100" i="1">
+                <a:solidFill>
+                  <a:srgbClr val="464646"/>
+                </a:solidFill>
+              </a:defRPr>
+            </a:pPr>
+            <a:r>
+              <a:t>Flux recommandé : créer la config -&gt; lancer audit submodules --fix -&gt; vérifier les refs -&gt; lancer le mode Prepare.</a:t>
             </a:r>
           </a:p>
         </p:txBody>
@@ -18359,6 +19389,321 @@
 </a:theme>
 </file>
 
+<file path=ppt/theme/theme2.xml><?xml version="1.0" encoding="utf-8"?>
+<a:theme xmlns:a="http://schemas.openxmlformats.org/drawingml/2006/main" name="Office Theme">
+  <a:themeElements>
+    <a:clrScheme name="Office">
+      <a:dk1>
+        <a:sysClr val="windowText" lastClr="000000"/>
+      </a:dk1>
+      <a:lt1>
+        <a:sysClr val="window" lastClr="FFFFFF"/>
+      </a:lt1>
+      <a:dk2>
+        <a:srgbClr val="0E2841"/>
+      </a:dk2>
+      <a:lt2>
+        <a:srgbClr val="E8E8E8"/>
+      </a:lt2>
+      <a:accent1>
+        <a:srgbClr val="156082"/>
+      </a:accent1>
+      <a:accent2>
+        <a:srgbClr val="E97132"/>
+      </a:accent2>
+      <a:accent3>
+        <a:srgbClr val="196B24"/>
+      </a:accent3>
+      <a:accent4>
+        <a:srgbClr val="0F9ED5"/>
+      </a:accent4>
+      <a:accent5>
+        <a:srgbClr val="A02B93"/>
+      </a:accent5>
+      <a:accent6>
+        <a:srgbClr val="4EA72E"/>
+      </a:accent6>
+      <a:hlink>
+        <a:srgbClr val="467886"/>
+      </a:hlink>
+      <a:folHlink>
+        <a:srgbClr val="96607D"/>
+      </a:folHlink>
+    </a:clrScheme>
+    <a:fontScheme name="Office">
+      <a:majorFont>
+        <a:latin typeface="Aptos Display" panose="02110004020202020204"/>
+        <a:ea typeface=""/>
+        <a:cs typeface=""/>
+        <a:font script="Jpan" typeface="游ゴシック Light"/>
+        <a:font script="Hang" typeface="맑은 고딕"/>
+        <a:font script="Hans" typeface="等线 Light"/>
+        <a:font script="Hant" typeface="新細明體"/>
+        <a:font script="Arab" typeface="Times New Roman"/>
+        <a:font script="Hebr" typeface="Times New Roman"/>
+        <a:font script="Thai" typeface="Angsana New"/>
+        <a:font script="Ethi" typeface="Nyala"/>
+        <a:font script="Beng" typeface="Vrinda"/>
+        <a:font script="Gujr" typeface="Shruti"/>
+        <a:font script="Khmr" typeface="MoolBoran"/>
+        <a:font script="Knda" typeface="Tunga"/>
+        <a:font script="Guru" typeface="Raavi"/>
+        <a:font script="Cans" typeface="Euphemia"/>
+        <a:font script="Cher" typeface="Plantagenet Cherokee"/>
+        <a:font script="Yiii" typeface="Microsoft Yi Baiti"/>
+        <a:font script="Tibt" typeface="Microsoft Himalaya"/>
+        <a:font script="Thaa" typeface="MV Boli"/>
+        <a:font script="Deva" typeface="Mangal"/>
+        <a:font script="Telu" typeface="Gautami"/>
+        <a:font script="Taml" typeface="Latha"/>
+        <a:font script="Syrc" typeface="Estrangelo Edessa"/>
+        <a:font script="Orya" typeface="Kalinga"/>
+        <a:font script="Mlym" typeface="Kartika"/>
+        <a:font script="Laoo" typeface="DokChampa"/>
+        <a:font script="Sinh" typeface="Iskoola Pota"/>
+        <a:font script="Mong" typeface="Mongolian Baiti"/>
+        <a:font script="Viet" typeface="Times New Roman"/>
+        <a:font script="Uigh" typeface="Microsoft Uighur"/>
+        <a:font script="Geor" typeface="Sylfaen"/>
+        <a:font script="Armn" typeface="Arial"/>
+        <a:font script="Bugi" typeface="Leelawadee UI"/>
+        <a:font script="Bopo" typeface="Microsoft JhengHei"/>
+        <a:font script="Java" typeface="Javanese Text"/>
+        <a:font script="Lisu" typeface="Segoe UI"/>
+        <a:font script="Mymr" typeface="Myanmar Text"/>
+        <a:font script="Nkoo" typeface="Ebrima"/>
+        <a:font script="Olck" typeface="Nirmala UI"/>
+        <a:font script="Osma" typeface="Ebrima"/>
+        <a:font script="Phag" typeface="Phagspa"/>
+        <a:font script="Syrn" typeface="Estrangelo Edessa"/>
+        <a:font script="Syrj" typeface="Estrangelo Edessa"/>
+        <a:font script="Syre" typeface="Estrangelo Edessa"/>
+        <a:font script="Sora" typeface="Nirmala UI"/>
+        <a:font script="Tale" typeface="Microsoft Tai Le"/>
+        <a:font script="Talu" typeface="Microsoft New Tai Lue"/>
+        <a:font script="Tfng" typeface="Ebrima"/>
+      </a:majorFont>
+      <a:minorFont>
+        <a:latin typeface="Aptos" panose="02110004020202020204"/>
+        <a:ea typeface=""/>
+        <a:cs typeface=""/>
+        <a:font script="Jpan" typeface="游ゴシック"/>
+        <a:font script="Hang" typeface="맑은 고딕"/>
+        <a:font script="Hans" typeface="等线"/>
+        <a:font script="Hant" typeface="新細明體"/>
+        <a:font script="Arab" typeface="Arial"/>
+        <a:font script="Hebr" typeface="Arial"/>
+        <a:font script="Thai" typeface="Cordia New"/>
+        <a:font script="Ethi" typeface="Nyala"/>
+        <a:font script="Beng" typeface="Vrinda"/>
+        <a:font script="Gujr" typeface="Shruti"/>
+        <a:font script="Khmr" typeface="DaunPenh"/>
+        <a:font script="Knda" typeface="Tunga"/>
+        <a:font script="Guru" typeface="Raavi"/>
+        <a:font script="Cans" typeface="Euphemia"/>
+        <a:font script="Cher" typeface="Plantagenet Cherokee"/>
+        <a:font script="Yiii" typeface="Microsoft Yi Baiti"/>
+        <a:font script="Tibt" typeface="Microsoft Himalaya"/>
+        <a:font script="Thaa" typeface="MV Boli"/>
+        <a:font script="Deva" typeface="Mangal"/>
+        <a:font script="Telu" typeface="Gautami"/>
+        <a:font script="Taml" typeface="Latha"/>
+        <a:font script="Syrc" typeface="Estrangelo Edessa"/>
+        <a:font script="Orya" typeface="Kalinga"/>
+        <a:font script="Mlym" typeface="Kartika"/>
+        <a:font script="Laoo" typeface="DokChampa"/>
+        <a:font script="Sinh" typeface="Iskoola Pota"/>
+        <a:font script="Mong" typeface="Mongolian Baiti"/>
+        <a:font script="Viet" typeface="Arial"/>
+        <a:font script="Uigh" typeface="Microsoft Uighur"/>
+        <a:font script="Geor" typeface="Sylfaen"/>
+        <a:font script="Armn" typeface="Arial"/>
+        <a:font script="Bugi" typeface="Leelawadee UI"/>
+        <a:font script="Bopo" typeface="Microsoft JhengHei"/>
+        <a:font script="Java" typeface="Javanese Text"/>
+        <a:font script="Lisu" typeface="Segoe UI"/>
+        <a:font script="Mymr" typeface="Myanmar Text"/>
+        <a:font script="Nkoo" typeface="Ebrima"/>
+        <a:font script="Olck" typeface="Nirmala UI"/>
+        <a:font script="Osma" typeface="Ebrima"/>
+        <a:font script="Phag" typeface="Phagspa"/>
+        <a:font script="Syrn" typeface="Estrangelo Edessa"/>
+        <a:font script="Syrj" typeface="Estrangelo Edessa"/>
+        <a:font script="Syre" typeface="Estrangelo Edessa"/>
+        <a:font script="Sora" typeface="Nirmala UI"/>
+        <a:font script="Tale" typeface="Microsoft Tai Le"/>
+        <a:font script="Talu" typeface="Microsoft New Tai Lue"/>
+        <a:font script="Tfng" typeface="Ebrima"/>
+      </a:minorFont>
+    </a:fontScheme>
+    <a:fmtScheme name="Office">
+      <a:fillStyleLst>
+        <a:solidFill>
+          <a:schemeClr val="phClr"/>
+        </a:solidFill>
+        <a:gradFill rotWithShape="1">
+          <a:gsLst>
+            <a:gs pos="0">
+              <a:schemeClr val="phClr">
+                <a:lumMod val="110000"/>
+                <a:satMod val="105000"/>
+                <a:tint val="67000"/>
+              </a:schemeClr>
+            </a:gs>
+            <a:gs pos="50000">
+              <a:schemeClr val="phClr">
+                <a:lumMod val="105000"/>
+                <a:satMod val="103000"/>
+                <a:tint val="73000"/>
+              </a:schemeClr>
+            </a:gs>
+            <a:gs pos="100000">
+              <a:schemeClr val="phClr">
+                <a:lumMod val="105000"/>
+                <a:satMod val="109000"/>
+                <a:tint val="81000"/>
+              </a:schemeClr>
+            </a:gs>
+          </a:gsLst>
+          <a:lin ang="5400000" scaled="0"/>
+        </a:gradFill>
+        <a:gradFill rotWithShape="1">
+          <a:gsLst>
+            <a:gs pos="0">
+              <a:schemeClr val="phClr">
+                <a:satMod val="103000"/>
+                <a:lumMod val="102000"/>
+                <a:tint val="94000"/>
+              </a:schemeClr>
+            </a:gs>
+            <a:gs pos="50000">
+              <a:schemeClr val="phClr">
+                <a:satMod val="110000"/>
+                <a:lumMod val="100000"/>
+                <a:shade val="100000"/>
+              </a:schemeClr>
+            </a:gs>
+            <a:gs pos="100000">
+              <a:schemeClr val="phClr">
+                <a:lumMod val="99000"/>
+                <a:satMod val="120000"/>
+                <a:shade val="78000"/>
+              </a:schemeClr>
+            </a:gs>
+          </a:gsLst>
+          <a:lin ang="5400000" scaled="0"/>
+        </a:gradFill>
+      </a:fillStyleLst>
+      <a:lnStyleLst>
+        <a:ln w="12700" cap="flat" cmpd="sng" algn="ctr">
+          <a:solidFill>
+            <a:schemeClr val="phClr"/>
+          </a:solidFill>
+          <a:prstDash val="solid"/>
+          <a:miter lim="800000"/>
+        </a:ln>
+        <a:ln w="19050" cap="flat" cmpd="sng" algn="ctr">
+          <a:solidFill>
+            <a:schemeClr val="phClr"/>
+          </a:solidFill>
+          <a:prstDash val="solid"/>
+          <a:miter lim="800000"/>
+        </a:ln>
+        <a:ln w="25400" cap="flat" cmpd="sng" algn="ctr">
+          <a:solidFill>
+            <a:schemeClr val="phClr"/>
+          </a:solidFill>
+          <a:prstDash val="solid"/>
+          <a:miter lim="800000"/>
+        </a:ln>
+      </a:lnStyleLst>
+      <a:effectStyleLst>
+        <a:effectStyle>
+          <a:effectLst/>
+        </a:effectStyle>
+        <a:effectStyle>
+          <a:effectLst/>
+        </a:effectStyle>
+        <a:effectStyle>
+          <a:effectLst>
+            <a:outerShdw blurRad="57150" dist="19050" dir="5400000" algn="ctr" rotWithShape="0">
+              <a:srgbClr val="000000">
+                <a:alpha val="63000"/>
+              </a:srgbClr>
+            </a:outerShdw>
+          </a:effectLst>
+        </a:effectStyle>
+      </a:effectStyleLst>
+      <a:bgFillStyleLst>
+        <a:solidFill>
+          <a:schemeClr val="phClr"/>
+        </a:solidFill>
+        <a:solidFill>
+          <a:schemeClr val="phClr">
+            <a:tint val="95000"/>
+            <a:satMod val="170000"/>
+          </a:schemeClr>
+        </a:solidFill>
+        <a:gradFill rotWithShape="1">
+          <a:gsLst>
+            <a:gs pos="0">
+              <a:schemeClr val="phClr">
+                <a:tint val="93000"/>
+                <a:satMod val="150000"/>
+                <a:shade val="98000"/>
+                <a:lumMod val="102000"/>
+              </a:schemeClr>
+            </a:gs>
+            <a:gs pos="50000">
+              <a:schemeClr val="phClr">
+                <a:tint val="98000"/>
+                <a:satMod val="130000"/>
+                <a:shade val="90000"/>
+                <a:lumMod val="103000"/>
+              </a:schemeClr>
+            </a:gs>
+            <a:gs pos="100000">
+              <a:schemeClr val="phClr">
+                <a:shade val="63000"/>
+                <a:satMod val="120000"/>
+              </a:schemeClr>
+            </a:gs>
+          </a:gsLst>
+          <a:lin ang="5400000" scaled="0"/>
+        </a:gradFill>
+      </a:bgFillStyleLst>
+    </a:fmtScheme>
+  </a:themeElements>
+  <a:objectDefaults>
+    <a:lnDef>
+      <a:spPr/>
+      <a:bodyPr/>
+      <a:lstStyle/>
+      <a:style>
+        <a:lnRef idx="2">
+          <a:schemeClr val="accent1"/>
+        </a:lnRef>
+        <a:fillRef idx="0">
+          <a:schemeClr val="accent1"/>
+        </a:fillRef>
+        <a:effectRef idx="1">
+          <a:schemeClr val="accent1"/>
+        </a:effectRef>
+        <a:fontRef idx="minor">
+          <a:schemeClr val="tx1"/>
+        </a:fontRef>
+      </a:style>
+    </a:lnDef>
+  </a:objectDefaults>
+  <a:extraClrSchemeLst/>
+  <a:extLst>
+    <a:ext uri="{05A4C25C-085E-4340-85A3-A5531E510DB2}">
+      <thm15:themeFamily xmlns:thm15="http://schemas.microsoft.com/office/thememl/2012/main" name="Office Theme" id="{2E142A2C-CD16-42D6-873A-C26D2A0506FA}" vid="{1BDDFF52-6CD6-40A5-AB3C-68EB2F1E4D0A}"/>
+    </a:ext>
+  </a:extLst>
+</a:theme>
+</file>
+
 <file path=docMetadata/LabelInfo.xml><?xml version="1.0" encoding="utf-8"?>
 <clbl:labelList xmlns:clbl="http://schemas.microsoft.com/office/2020/mipLabelMetadata">
   <clbl:label id="{cf8c7287-838c-46dd-b281-b1140229e67a}" enabled="1" method="Privileged" siteId="{75e027c9-20d5-47d5-b82f-77d7cd041e8f}" removed="0"/>

--- a/docs/Atelier_Pratique_Pipeline_STM32Cube.pptx
+++ b/docs/Atelier_Pratique_Pipeline_STM32Cube.pptx
@@ -201,6 +201,65 @@
 </p:presentation>
 </file>
 
+<file path=ppt/changesInfos/changesInfo1.xml><?xml version="1.0" encoding="utf-8"?>
+<pc:chgInfo xmlns:a="http://schemas.openxmlformats.org/drawingml/2006/main" xmlns:r="http://schemas.openxmlformats.org/officeDocument/2006/relationships" xmlns:ac="http://schemas.microsoft.com/office/drawing/2013/main/command" xmlns:pc="http://schemas.microsoft.com/office/powerpoint/2013/main/command">
+  <pc:docChgLst>
+    <pc:chgData name="Abir GHARBI" userId="ef92528f-00ab-4d87-966c-386bca485bd0" providerId="ADAL" clId="{F3D16DED-CAA7-4BF5-81E4-89DEDE7057F7}"/>
+    <pc:docChg chg="modSld">
+      <pc:chgData name="Abir GHARBI" userId="ef92528f-00ab-4d87-966c-386bca485bd0" providerId="ADAL" clId="{F3D16DED-CAA7-4BF5-81E4-89DEDE7057F7}" dt="2026-07-01T13:30:15.331" v="8" actId="20577"/>
+      <pc:docMkLst>
+        <pc:docMk/>
+      </pc:docMkLst>
+      <pc:sldChg chg="modSp mod">
+        <pc:chgData name="Abir GHARBI" userId="ef92528f-00ab-4d87-966c-386bca485bd0" providerId="ADAL" clId="{F3D16DED-CAA7-4BF5-81E4-89DEDE7057F7}" dt="2026-07-01T13:21:58.761" v="1" actId="20577"/>
+        <pc:sldMkLst>
+          <pc:docMk/>
+          <pc:sldMk cId="0" sldId="260"/>
+        </pc:sldMkLst>
+        <pc:spChg chg="mod">
+          <ac:chgData name="Abir GHARBI" userId="ef92528f-00ab-4d87-966c-386bca485bd0" providerId="ADAL" clId="{F3D16DED-CAA7-4BF5-81E4-89DEDE7057F7}" dt="2026-07-01T13:21:58.761" v="1" actId="20577"/>
+          <ac:spMkLst>
+            <pc:docMk/>
+            <pc:sldMk cId="0" sldId="260"/>
+            <ac:spMk id="3" creationId="{00000000-0000-0000-0000-000000000000}"/>
+          </ac:spMkLst>
+        </pc:spChg>
+      </pc:sldChg>
+      <pc:sldChg chg="modSp mod">
+        <pc:chgData name="Abir GHARBI" userId="ef92528f-00ab-4d87-966c-386bca485bd0" providerId="ADAL" clId="{F3D16DED-CAA7-4BF5-81E4-89DEDE7057F7}" dt="2026-07-01T13:28:39.059" v="6" actId="20577"/>
+        <pc:sldMkLst>
+          <pc:docMk/>
+          <pc:sldMk cId="0" sldId="265"/>
+        </pc:sldMkLst>
+        <pc:spChg chg="mod">
+          <ac:chgData name="Abir GHARBI" userId="ef92528f-00ab-4d87-966c-386bca485bd0" providerId="ADAL" clId="{F3D16DED-CAA7-4BF5-81E4-89DEDE7057F7}" dt="2026-07-01T13:28:39.059" v="6" actId="20577"/>
+          <ac:spMkLst>
+            <pc:docMk/>
+            <pc:sldMk cId="0" sldId="265"/>
+            <ac:spMk id="3" creationId="{00000000-0000-0000-0000-000000000000}"/>
+          </ac:spMkLst>
+        </pc:spChg>
+      </pc:sldChg>
+      <pc:sldChg chg="modSp mod">
+        <pc:chgData name="Abir GHARBI" userId="ef92528f-00ab-4d87-966c-386bca485bd0" providerId="ADAL" clId="{F3D16DED-CAA7-4BF5-81E4-89DEDE7057F7}" dt="2026-07-01T13:30:15.331" v="8" actId="20577"/>
+        <pc:sldMkLst>
+          <pc:docMk/>
+          <pc:sldMk cId="0" sldId="266"/>
+        </pc:sldMkLst>
+        <pc:spChg chg="mod">
+          <ac:chgData name="Abir GHARBI" userId="ef92528f-00ab-4d87-966c-386bca485bd0" providerId="ADAL" clId="{F3D16DED-CAA7-4BF5-81E4-89DEDE7057F7}" dt="2026-07-01T13:30:15.331" v="8" actId="20577"/>
+          <ac:spMkLst>
+            <pc:docMk/>
+            <pc:sldMk cId="0" sldId="266"/>
+            <ac:spMk id="3" creationId="{00000000-0000-0000-0000-000000000000}"/>
+          </ac:spMkLst>
+        </pc:spChg>
+      </pc:sldChg>
+    </pc:docChg>
+  </pc:docChgLst>
+</pc:chgInfo>
+</file>
+
 <file path=ppt/slideLayouts/slideLayout1.xml><?xml version="1.0" encoding="utf-8"?>
 <p:sldLayout xmlns:a="http://schemas.openxmlformats.org/drawingml/2006/main" xmlns:r="http://schemas.openxmlformats.org/officeDocument/2006/relationships" xmlns:p="http://schemas.openxmlformats.org/presentationml/2006/main" type="title" preserve="1">
   <p:cSld name="Title Slide">
@@ -380,7 +439,7 @@
           <a:p>
             <a:fld id="{5BCAD085-E8A6-8845-BD4E-CB4CCA059FC4}" type="datetimeFigureOut">
               <a:rPr lang="en-US" smtClean="0"/>
-              <a:t>6/30/2026</a:t>
+              <a:t>7/1/2026</a:t>
             </a:fld>
             <a:endParaRPr lang="en-US"/>
           </a:p>
@@ -548,7 +607,7 @@
           <a:p>
             <a:fld id="{5BCAD085-E8A6-8845-BD4E-CB4CCA059FC4}" type="datetimeFigureOut">
               <a:rPr lang="en-US" smtClean="0"/>
-              <a:t>6/30/2026</a:t>
+              <a:t>7/1/2026</a:t>
             </a:fld>
             <a:endParaRPr lang="en-US"/>
           </a:p>
@@ -726,7 +785,7 @@
           <a:p>
             <a:fld id="{5BCAD085-E8A6-8845-BD4E-CB4CCA059FC4}" type="datetimeFigureOut">
               <a:rPr lang="en-US" smtClean="0"/>
-              <a:t>6/30/2026</a:t>
+              <a:t>7/1/2026</a:t>
             </a:fld>
             <a:endParaRPr lang="en-US"/>
           </a:p>
@@ -894,7 +953,7 @@
           <a:p>
             <a:fld id="{5BCAD085-E8A6-8845-BD4E-CB4CCA059FC4}" type="datetimeFigureOut">
               <a:rPr lang="en-US" smtClean="0"/>
-              <a:t>6/30/2026</a:t>
+              <a:t>7/1/2026</a:t>
             </a:fld>
             <a:endParaRPr lang="en-US"/>
           </a:p>
@@ -1139,7 +1198,7 @@
           <a:p>
             <a:fld id="{5BCAD085-E8A6-8845-BD4E-CB4CCA059FC4}" type="datetimeFigureOut">
               <a:rPr lang="en-US" smtClean="0"/>
-              <a:t>6/30/2026</a:t>
+              <a:t>7/1/2026</a:t>
             </a:fld>
             <a:endParaRPr lang="en-US"/>
           </a:p>
@@ -1424,7 +1483,7 @@
           <a:p>
             <a:fld id="{5BCAD085-E8A6-8845-BD4E-CB4CCA059FC4}" type="datetimeFigureOut">
               <a:rPr lang="en-US" smtClean="0"/>
-              <a:t>6/30/2026</a:t>
+              <a:t>7/1/2026</a:t>
             </a:fld>
             <a:endParaRPr lang="en-US"/>
           </a:p>
@@ -1843,7 +1902,7 @@
           <a:p>
             <a:fld id="{5BCAD085-E8A6-8845-BD4E-CB4CCA059FC4}" type="datetimeFigureOut">
               <a:rPr lang="en-US" smtClean="0"/>
-              <a:t>6/30/2026</a:t>
+              <a:t>7/1/2026</a:t>
             </a:fld>
             <a:endParaRPr lang="en-US"/>
           </a:p>
@@ -1960,7 +2019,7 @@
           <a:p>
             <a:fld id="{5BCAD085-E8A6-8845-BD4E-CB4CCA059FC4}" type="datetimeFigureOut">
               <a:rPr lang="en-US" smtClean="0"/>
-              <a:t>6/30/2026</a:t>
+              <a:t>7/1/2026</a:t>
             </a:fld>
             <a:endParaRPr lang="en-US"/>
           </a:p>
@@ -2055,7 +2114,7 @@
           <a:p>
             <a:fld id="{5BCAD085-E8A6-8845-BD4E-CB4CCA059FC4}" type="datetimeFigureOut">
               <a:rPr lang="en-US" smtClean="0"/>
-              <a:t>6/30/2026</a:t>
+              <a:t>7/1/2026</a:t>
             </a:fld>
             <a:endParaRPr lang="en-US"/>
           </a:p>
@@ -2330,7 +2389,7 @@
           <a:p>
             <a:fld id="{5BCAD085-E8A6-8845-BD4E-CB4CCA059FC4}" type="datetimeFigureOut">
               <a:rPr lang="en-US" smtClean="0"/>
-              <a:t>6/30/2026</a:t>
+              <a:t>7/1/2026</a:t>
             </a:fld>
             <a:endParaRPr lang="en-US"/>
           </a:p>
@@ -2582,7 +2641,7 @@
           <a:p>
             <a:fld id="{5BCAD085-E8A6-8845-BD4E-CB4CCA059FC4}" type="datetimeFigureOut">
               <a:rPr lang="en-US" smtClean="0"/>
-              <a:t>6/30/2026</a:t>
+              <a:t>7/1/2026</a:t>
             </a:fld>
             <a:endParaRPr lang="en-US"/>
           </a:p>
@@ -2793,7 +2852,7 @@
           <a:p>
             <a:fld id="{5BCAD085-E8A6-8845-BD4E-CB4CCA059FC4}" type="datetimeFigureOut">
               <a:rPr lang="en-US" smtClean="0"/>
-              <a:t>6/30/2026</a:t>
+              <a:t>7/1/2026</a:t>
             </a:fld>
             <a:endParaRPr lang="en-US"/>
           </a:p>
@@ -3321,7 +3380,7 @@
         <p:spPr>
           <a:xfrm>
             <a:off x="548640" y="1188720"/>
-            <a:ext cx="8046720" cy="5029200"/>
+            <a:ext cx="8046720" cy="4062651"/>
           </a:xfrm>
           <a:prstGeom prst="rect">
             <a:avLst/>
@@ -3345,6 +3404,7 @@
               </a:defRPr>
             </a:pPr>
             <a:r>
+              <a:rPr dirty="0"/>
               <a:t>Layer 1: DATA SOURCES</a:t>
             </a:r>
           </a:p>
@@ -3360,6 +3420,7 @@
               </a:defRPr>
             </a:pPr>
             <a:r>
+              <a:rPr dirty="0"/>
               <a:t>• GitHub API (issues, PRs, commits, files), local repo clones, PDF documents.</a:t>
             </a:r>
           </a:p>
@@ -3375,21 +3436,38 @@
               </a:defRPr>
             </a:pPr>
             <a:r>
-              <a:t>• 25 series configured via shared/config/config_&lt;serie&gt;.json.</a:t>
-            </a:r>
-          </a:p>
-          <a:p>
-            <a:pPr>
-              <a:spcBef>
-                <a:spcPts val="600"/>
-              </a:spcBef>
-              <a:defRPr sz="1400">
-                <a:solidFill>
-                  <a:srgbClr val="333333"/>
-                </a:solidFill>
-              </a:defRPr>
-            </a:pPr>
-            <a:endParaRPr/>
+              <a:rPr dirty="0"/>
+              <a:t>• 25 series configured via shared/config/config_&lt;</a:t>
+            </a:r>
+            <a:r>
+              <a:rPr dirty="0" err="1"/>
+              <a:t>serie</a:t>
+            </a:r>
+            <a:r>
+              <a:rPr dirty="0"/>
+              <a:t>&gt;.</a:t>
+            </a:r>
+            <a:r>
+              <a:rPr dirty="0" err="1"/>
+              <a:t>json</a:t>
+            </a:r>
+            <a:r>
+              <a:rPr dirty="0"/>
+              <a:t>.</a:t>
+            </a:r>
+          </a:p>
+          <a:p>
+            <a:pPr>
+              <a:spcBef>
+                <a:spcPts val="600"/>
+              </a:spcBef>
+              <a:defRPr sz="1400">
+                <a:solidFill>
+                  <a:srgbClr val="333333"/>
+                </a:solidFill>
+              </a:defRPr>
+            </a:pPr>
+            <a:endParaRPr dirty="0"/>
           </a:p>
           <a:p>
             <a:pPr>
@@ -3403,6 +3481,7 @@
               </a:defRPr>
             </a:pPr>
             <a:r>
+              <a:rPr dirty="0"/>
               <a:t>Layer 2: PROCESSING ENGINE</a:t>
             </a:r>
           </a:p>
@@ -3418,6 +3497,7 @@
               </a:defRPr>
             </a:pPr>
             <a:r>
+              <a:rPr dirty="0"/>
               <a:t>• Python pipeline: Ingestion → Cleaning → Enrichment → Similarity → Evaluation → Delivery.</a:t>
             </a:r>
           </a:p>
@@ -3433,6 +3513,7 @@
               </a:defRPr>
             </a:pPr>
             <a:r>
+              <a:rPr dirty="0"/>
               <a:t>• ALFRED Vision API: PDF figure descriptions + issue image descriptions.</a:t>
             </a:r>
           </a:p>
@@ -3448,6 +3529,7 @@
               </a:defRPr>
             </a:pPr>
             <a:r>
+              <a:rPr dirty="0"/>
               <a:t>• PowerShell orchestration scripts for batch multi-series workflows.</a:t>
             </a:r>
           </a:p>
@@ -3462,7 +3544,7 @@
                 </a:solidFill>
               </a:defRPr>
             </a:pPr>
-            <a:endParaRPr/>
+            <a:endParaRPr dirty="0"/>
           </a:p>
           <a:p>
             <a:pPr>
@@ -3476,6 +3558,7 @@
               </a:defRPr>
             </a:pPr>
             <a:r>
+              <a:rPr dirty="0"/>
               <a:t>Layer 3: CONSUMPTION</a:t>
             </a:r>
           </a:p>
@@ -3491,6 +3574,7 @@
               </a:defRPr>
             </a:pPr>
             <a:r>
+              <a:rPr dirty="0"/>
               <a:t>• KB #793: ST ChatGPT Knowledge Base with Hybrid search (semantic + full-text).</a:t>
             </a:r>
           </a:p>
@@ -3506,21 +3590,31 @@
               </a:defRPr>
             </a:pPr>
             <a:r>
-              <a:t>• Persona: “ST GitHub Analyzer” — KB-first, ALFRED fallback only when KB has no match.</a:t>
-            </a:r>
-          </a:p>
-          <a:p>
-            <a:pPr>
-              <a:spcBef>
-                <a:spcPts val="600"/>
-              </a:spcBef>
-              <a:defRPr sz="1400">
-                <a:solidFill>
-                  <a:srgbClr val="333333"/>
-                </a:solidFill>
-              </a:defRPr>
-            </a:pPr>
-            <a:r>
+              <a:rPr dirty="0"/>
+              <a:t>• Persona: “ST GitHub Analyzer” — KB-first, </a:t>
+            </a:r>
+            <a:r>
+              <a:rPr lang="fr-FR" dirty="0" err="1"/>
+              <a:t>NovaX</a:t>
+            </a:r>
+            <a:r>
+              <a:rPr dirty="0"/>
+              <a:t> fallback only when KB has no match.</a:t>
+            </a:r>
+          </a:p>
+          <a:p>
+            <a:pPr>
+              <a:spcBef>
+                <a:spcPts val="600"/>
+              </a:spcBef>
+              <a:defRPr sz="1400">
+                <a:solidFill>
+                  <a:srgbClr val="333333"/>
+                </a:solidFill>
+              </a:defRPr>
+            </a:pPr>
+            <a:r>
+              <a:rPr dirty="0"/>
               <a:t>• End user: support engineer or developer asking STM32 technical questions.</a:t>
             </a:r>
           </a:p>
@@ -3620,7 +3714,7 @@
         <p:spPr>
           <a:xfrm>
             <a:off x="548640" y="1188720"/>
-            <a:ext cx="8046720" cy="5029200"/>
+            <a:ext cx="8046720" cy="1031051"/>
           </a:xfrm>
           <a:prstGeom prst="rect">
             <a:avLst/>
@@ -3644,6 +3738,7 @@
               </a:defRPr>
             </a:pPr>
             <a:r>
+              <a:rPr dirty="0"/>
               <a:t>Single-page view of the entire system:</a:t>
             </a:r>
           </a:p>
@@ -3658,228 +3753,7 @@
                 </a:solidFill>
               </a:defRPr>
             </a:pPr>
-            <a:endParaRPr/>
-          </a:p>
-          <a:p>
-            <a:pPr>
-              <a:spcBef>
-                <a:spcPts val="400"/>
-              </a:spcBef>
-              <a:defRPr sz="1200">
-                <a:solidFill>
-                  <a:srgbClr val="333333"/>
-                </a:solidFill>
-                <a:latin typeface="Consolas"/>
-              </a:defRPr>
-            </a:pPr>
-            <a:r>
-              <a:t>┌─────────────────┐    ┌────────────────────────────────────┐    ┌───────────────┐</a:t>
-            </a:r>
-          </a:p>
-          <a:p>
-            <a:pPr>
-              <a:spcBef>
-                <a:spcPts val="400"/>
-              </a:spcBef>
-              <a:defRPr sz="1200">
-                <a:solidFill>
-                  <a:srgbClr val="333333"/>
-                </a:solidFill>
-                <a:latin typeface="Consolas"/>
-              </a:defRPr>
-            </a:pPr>
-            <a:r>
-              <a:t>│ DATA SOURCES    │    │ PROCESSING ENGINE (Python)        │    │ CONSUMPTION   │</a:t>
-            </a:r>
-          </a:p>
-          <a:p>
-            <a:pPr>
-              <a:spcBef>
-                <a:spcPts val="400"/>
-              </a:spcBef>
-              <a:defRPr sz="1200">
-                <a:solidFill>
-                  <a:srgbClr val="333333"/>
-                </a:solidFill>
-                <a:latin typeface="Consolas"/>
-              </a:defRPr>
-            </a:pPr>
-            <a:r>
-              <a:t>│                 │    │                                    │    │               │</a:t>
-            </a:r>
-          </a:p>
-          <a:p>
-            <a:pPr>
-              <a:spcBef>
-                <a:spcPts val="400"/>
-              </a:spcBef>
-              <a:defRPr sz="1200">
-                <a:solidFill>
-                  <a:srgbClr val="333333"/>
-                </a:solidFill>
-                <a:latin typeface="Consolas"/>
-              </a:defRPr>
-            </a:pPr>
-            <a:r>
-              <a:t>│ GitHub API      │───▶│ 1.Ingest → 2.Clean → 3.Enrich    │    │ KB #793       │</a:t>
-            </a:r>
-          </a:p>
-          <a:p>
-            <a:pPr>
-              <a:spcBef>
-                <a:spcPts val="400"/>
-              </a:spcBef>
-              <a:defRPr sz="1200">
-                <a:solidFill>
-                  <a:srgbClr val="333333"/>
-                </a:solidFill>
-                <a:latin typeface="Consolas"/>
-              </a:defRPr>
-            </a:pPr>
-            <a:r>
-              <a:t>│ Local Clones    │───▶│ 4.Similarity → 5.Eval → 6.Deliver│───▶│ (Hybrid)      │</a:t>
-            </a:r>
-          </a:p>
-          <a:p>
-            <a:pPr>
-              <a:spcBef>
-                <a:spcPts val="400"/>
-              </a:spcBef>
-              <a:defRPr sz="1200">
-                <a:solidFill>
-                  <a:srgbClr val="333333"/>
-                </a:solidFill>
-                <a:latin typeface="Consolas"/>
-              </a:defRPr>
-            </a:pPr>
-            <a:r>
-              <a:t>│ PDF Documents   │───▶│ 7.Upload                          │    │       │       │</a:t>
-            </a:r>
-          </a:p>
-          <a:p>
-            <a:pPr>
-              <a:spcBef>
-                <a:spcPts val="400"/>
-              </a:spcBef>
-              <a:defRPr sz="1200">
-                <a:solidFill>
-                  <a:srgbClr val="333333"/>
-                </a:solidFill>
-                <a:latin typeface="Consolas"/>
-              </a:defRPr>
-            </a:pPr>
-            <a:r>
-              <a:t>│ Config JSON     │    │                                    │    │       ▼       │</a:t>
-            </a:r>
-          </a:p>
-          <a:p>
-            <a:pPr>
-              <a:spcBef>
-                <a:spcPts val="400"/>
-              </a:spcBef>
-              <a:defRPr sz="1200">
-                <a:solidFill>
-                  <a:srgbClr val="333333"/>
-                </a:solidFill>
-                <a:latin typeface="Consolas"/>
-              </a:defRPr>
-            </a:pPr>
-            <a:r>
-              <a:t>└─────────────────┘    │ ┌───── ALFRED VISION ─────┐    │    │ ST ChatGPT    │</a:t>
-            </a:r>
-          </a:p>
-          <a:p>
-            <a:pPr>
-              <a:spcBef>
-                <a:spcPts val="400"/>
-              </a:spcBef>
-              <a:defRPr sz="1200">
-                <a:solidFill>
-                  <a:srgbClr val="333333"/>
-                </a:solidFill>
-                <a:latin typeface="Consolas"/>
-              </a:defRPr>
-            </a:pPr>
-            <a:r>
-              <a:t>│ │ Path A: PDF (step 7)     │    │    │ Persona       │</a:t>
-            </a:r>
-          </a:p>
-          <a:p>
-            <a:pPr>
-              <a:spcBef>
-                <a:spcPts val="400"/>
-              </a:spcBef>
-              <a:defRPr sz="1200">
-                <a:solidFill>
-                  <a:srgbClr val="333333"/>
-                </a:solidFill>
-                <a:latin typeface="Consolas"/>
-              </a:defRPr>
-            </a:pPr>
-            <a:r>
-              <a:t>│ │ Path B: Images (step 23) │    │    │       │       │</a:t>
-            </a:r>
-          </a:p>
-          <a:p>
-            <a:pPr>
-              <a:spcBef>
-                <a:spcPts val="400"/>
-              </a:spcBef>
-              <a:defRPr sz="1200">
-                <a:solidFill>
-                  <a:srgbClr val="333333"/>
-                </a:solidFill>
-                <a:latin typeface="Consolas"/>
-              </a:defRPr>
-            </a:pPr>
-            <a:r>
-              <a:t>│ └─────────────────────────┘    │    │       ▼       │</a:t>
-            </a:r>
-          </a:p>
-          <a:p>
-            <a:pPr>
-              <a:spcBef>
-                <a:spcPts val="400"/>
-              </a:spcBef>
-              <a:defRPr sz="1200">
-                <a:solidFill>
-                  <a:srgbClr val="333333"/>
-                </a:solidFill>
-                <a:latin typeface="Consolas"/>
-              </a:defRPr>
-            </a:pPr>
-            <a:r>
-              <a:t>└────────────────────────────────────┘    │ End User      │</a:t>
-            </a:r>
-          </a:p>
-          <a:p>
-            <a:pPr>
-              <a:spcBef>
-                <a:spcPts val="400"/>
-              </a:spcBef>
-              <a:defRPr sz="1200">
-                <a:solidFill>
-                  <a:srgbClr val="333333"/>
-                </a:solidFill>
-                <a:latin typeface="Consolas"/>
-              </a:defRPr>
-            </a:pPr>
-            <a:r>
-              <a:t>└───────────────┘</a:t>
-            </a:r>
-          </a:p>
-          <a:p>
-            <a:pPr>
-              <a:spcBef>
-                <a:spcPts val="600"/>
-              </a:spcBef>
-              <a:defRPr sz="1400">
-                <a:solidFill>
-                  <a:srgbClr val="333333"/>
-                </a:solidFill>
-              </a:defRPr>
-            </a:pPr>
-            <a:endParaRPr/>
+            <a:endParaRPr dirty="0"/>
           </a:p>
           <a:p>
             <a:pPr>
@@ -3893,6 +3767,7 @@
               </a:defRPr>
             </a:pPr>
             <a:r>
+              <a:rPr dirty="0"/>
               <a:t>Also available as editable draw.io: docs/diagrams/01_project_architecture.drawio</a:t>
             </a:r>
           </a:p>
@@ -8312,6 +8187,7 @@
               </a:defRPr>
             </a:pPr>
             <a:r>
+              <a:rPr dirty="0"/>
               <a:t>STEPS list (executed in order):</a:t>
             </a:r>
           </a:p>
@@ -8328,7 +8204,16 @@
               </a:defRPr>
             </a:pPr>
             <a:r>
-              <a:t>("Ingestion issues",     fetch_issues_main)      # 1</a:t>
+              <a:rPr dirty="0"/>
+              <a:t>("Ingestion issues",     </a:t>
+            </a:r>
+            <a:r>
+              <a:rPr dirty="0" err="1"/>
+              <a:t>fetch_issues_main</a:t>
+            </a:r>
+            <a:r>
+              <a:rPr dirty="0"/>
+              <a:t>)      # 1</a:t>
             </a:r>
           </a:p>
           <a:p>
@@ -8344,7 +8229,16 @@
               </a:defRPr>
             </a:pPr>
             <a:r>
-              <a:t>("Ingestion PRs",        fetch_prs_main)         # 2</a:t>
+              <a:rPr dirty="0"/>
+              <a:t>("Ingestion PRs",        </a:t>
+            </a:r>
+            <a:r>
+              <a:rPr dirty="0" err="1"/>
+              <a:t>fetch_prs_main</a:t>
+            </a:r>
+            <a:r>
+              <a:rPr dirty="0"/>
+              <a:t>)         # 2</a:t>
             </a:r>
           </a:p>
           <a:p>
@@ -8360,7 +8254,16 @@
               </a:defRPr>
             </a:pPr>
             <a:r>
-              <a:t>("Ingestion commits",    fetch_commits_main)     # 3</a:t>
+              <a:rPr dirty="0"/>
+              <a:t>("Ingestion commits",    </a:t>
+            </a:r>
+            <a:r>
+              <a:rPr dirty="0" err="1"/>
+              <a:t>fetch_commits_main</a:t>
+            </a:r>
+            <a:r>
+              <a:rPr dirty="0"/>
+              <a:t>)     # 3</a:t>
             </a:r>
           </a:p>
           <a:p>
@@ -8376,7 +8279,16 @@
               </a:defRPr>
             </a:pPr>
             <a:r>
-              <a:t>("Ingestion links",      fetch_links_main)       # 4</a:t>
+              <a:rPr dirty="0"/>
+              <a:t>("Ingestion links",      </a:t>
+            </a:r>
+            <a:r>
+              <a:rPr dirty="0" err="1"/>
+              <a:t>fetch_links_main</a:t>
+            </a:r>
+            <a:r>
+              <a:rPr dirty="0"/>
+              <a:t>)       # 4</a:t>
             </a:r>
           </a:p>
           <a:p>
@@ -8392,7 +8304,16 @@
               </a:defRPr>
             </a:pPr>
             <a:r>
-              <a:t>("Ingestion sync repos", sync_local_repos_main)  # 5</a:t>
+              <a:rPr dirty="0"/>
+              <a:t>("Ingestion sync repos", </a:t>
+            </a:r>
+            <a:r>
+              <a:rPr dirty="0" err="1"/>
+              <a:t>sync_local_repos_main</a:t>
+            </a:r>
+            <a:r>
+              <a:rPr dirty="0"/>
+              <a:t>)  # 5</a:t>
             </a:r>
           </a:p>
           <a:p>
@@ -8408,7 +8329,16 @@
               </a:defRPr>
             </a:pPr>
             <a:r>
-              <a:t>("Ingestion files",      fetch_files_main)       # 6</a:t>
+              <a:rPr dirty="0"/>
+              <a:t>("Ingestion files",      </a:t>
+            </a:r>
+            <a:r>
+              <a:rPr dirty="0" err="1"/>
+              <a:t>fetch_files_main</a:t>
+            </a:r>
+            <a:r>
+              <a:rPr dirty="0"/>
+              <a:t>)       # 6</a:t>
             </a:r>
           </a:p>
           <a:p>
@@ -8424,7 +8354,16 @@
               </a:defRPr>
             </a:pPr>
             <a:r>
-              <a:t>("Alfred PDF figures",   _enrich_pdf_main)       # 7</a:t>
+              <a:rPr dirty="0"/>
+              <a:t>("Alfred PDF figures",   _</a:t>
+            </a:r>
+            <a:r>
+              <a:rPr dirty="0" err="1"/>
+              <a:t>enrich_pdf_main</a:t>
+            </a:r>
+            <a:r>
+              <a:rPr dirty="0"/>
+              <a:t>)       # 7</a:t>
             </a:r>
           </a:p>
           <a:p>
@@ -8440,7 +8379,16 @@
               </a:defRPr>
             </a:pPr>
             <a:r>
-              <a:t>("Cleaning issues",      clean_issues_main)      # 8</a:t>
+              <a:rPr dirty="0"/>
+              <a:t>("Cleaning issues",      </a:t>
+            </a:r>
+            <a:r>
+              <a:rPr dirty="0" err="1"/>
+              <a:t>clean_issues_main</a:t>
+            </a:r>
+            <a:r>
+              <a:rPr dirty="0"/>
+              <a:t>)      # 8</a:t>
             </a:r>
           </a:p>
           <a:p>
@@ -8456,7 +8404,16 @@
               </a:defRPr>
             </a:pPr>
             <a:r>
-              <a:t>("Cleaning files",       clean_files_main)       # 9</a:t>
+              <a:rPr dirty="0"/>
+              <a:t>("Cleaning files",       </a:t>
+            </a:r>
+            <a:r>
+              <a:rPr dirty="0" err="1"/>
+              <a:t>clean_files_main</a:t>
+            </a:r>
+            <a:r>
+              <a:rPr dirty="0"/>
+              <a:t>)       # 9</a:t>
             </a:r>
           </a:p>
           <a:p>
@@ -8472,6 +8429,7 @@
               </a:defRPr>
             </a:pPr>
             <a:r>
+              <a:rPr dirty="0"/>
               <a:t>("Enrichment issues V2", issues_to_docs_v2_main) # 10</a:t>
             </a:r>
           </a:p>
@@ -8488,6 +8446,7 @@
               </a:defRPr>
             </a:pPr>
             <a:r>
+              <a:rPr dirty="0"/>
               <a:t>("Enrichment files V2",  files_to_docs_v2_main)  # 11</a:t>
             </a:r>
           </a:p>
@@ -8504,7 +8463,16 @@
               </a:defRPr>
             </a:pPr>
             <a:r>
-              <a:t>("Similarity issues V2", similarity_main)        # 12</a:t>
+              <a:rPr dirty="0"/>
+              <a:t>("Similarity issues V2", </a:t>
+            </a:r>
+            <a:r>
+              <a:rPr dirty="0" err="1"/>
+              <a:t>similarity_main</a:t>
+            </a:r>
+            <a:r>
+              <a:rPr dirty="0"/>
+              <a:t>)        # 12</a:t>
             </a:r>
           </a:p>
           <a:p>
@@ -8520,7 +8488,16 @@
               </a:defRPr>
             </a:pPr>
             <a:r>
-              <a:t>("Chunking issues V2",   chunks_issues_main)     # 13</a:t>
+              <a:rPr dirty="0"/>
+              <a:t>("Chunking issues V2",   </a:t>
+            </a:r>
+            <a:r>
+              <a:rPr dirty="0" err="1"/>
+              <a:t>chunks_issues_main</a:t>
+            </a:r>
+            <a:r>
+              <a:rPr dirty="0"/>
+              <a:t>)     # 13</a:t>
             </a:r>
           </a:p>
           <a:p>
@@ -8536,7 +8513,16 @@
               </a:defRPr>
             </a:pPr>
             <a:r>
-              <a:t>("Chunking files V2",    chunks_files_main)      # 14</a:t>
+              <a:rPr dirty="0"/>
+              <a:t>("Chunking files V2",    </a:t>
+            </a:r>
+            <a:r>
+              <a:rPr dirty="0" err="1"/>
+              <a:t>chunks_files_main</a:t>
+            </a:r>
+            <a:r>
+              <a:rPr dirty="0"/>
+              <a:t>)      # 14</a:t>
             </a:r>
           </a:p>
           <a:p>
@@ -8552,7 +8538,16 @@
               </a:defRPr>
             </a:pPr>
             <a:r>
-              <a:t>("Stats issues V2",      stats_issues_main)      # 15</a:t>
+              <a:rPr dirty="0"/>
+              <a:t>("Stats issues V2",      </a:t>
+            </a:r>
+            <a:r>
+              <a:rPr dirty="0" err="1"/>
+              <a:t>stats_issues_main</a:t>
+            </a:r>
+            <a:r>
+              <a:rPr dirty="0"/>
+              <a:t>)      # 15</a:t>
             </a:r>
           </a:p>
           <a:p>
@@ -8568,7 +8563,16 @@
               </a:defRPr>
             </a:pPr>
             <a:r>
-              <a:t>("Stats files V2",       stats_files_main)       # 16</a:t>
+              <a:rPr dirty="0"/>
+              <a:t>("Stats files V2",       </a:t>
+            </a:r>
+            <a:r>
+              <a:rPr dirty="0" err="1"/>
+              <a:t>stats_files_main</a:t>
+            </a:r>
+            <a:r>
+              <a:rPr dirty="0"/>
+              <a:t>)       # 16</a:t>
             </a:r>
           </a:p>
           <a:p>
@@ -8584,7 +8588,16 @@
               </a:defRPr>
             </a:pPr>
             <a:r>
-              <a:t>("Schema validation",    validate_schemas_main)  # 17</a:t>
+              <a:rPr dirty="0"/>
+              <a:t>("Schema validation",    </a:t>
+            </a:r>
+            <a:r>
+              <a:rPr dirty="0" err="1"/>
+              <a:t>validate_schemas_main</a:t>
+            </a:r>
+            <a:r>
+              <a:rPr dirty="0"/>
+              <a:t>)  # 17</a:t>
             </a:r>
           </a:p>
         </p:txBody>
@@ -18378,6 +18391,7 @@
               </a:defRPr>
             </a:pPr>
             <a:r>
+              <a:rPr dirty="0"/>
               <a:t>Problem</a:t>
             </a:r>
           </a:p>
@@ -18393,6 +18407,7 @@
               </a:defRPr>
             </a:pPr>
             <a:r>
+              <a:rPr dirty="0"/>
               <a:t>• STM32 technical knowledge is fragmented across 25+ GitHub repos, 10k+ issues, PDFs, and images.</a:t>
             </a:r>
           </a:p>
@@ -18408,6 +18423,7 @@
               </a:defRPr>
             </a:pPr>
             <a:r>
+              <a:rPr dirty="0"/>
               <a:t>• Without structured preprocessing, AI assistants produce generic, unsourced, or inaccurate answers.</a:t>
             </a:r>
           </a:p>
@@ -18422,7 +18438,7 @@
                 </a:solidFill>
               </a:defRPr>
             </a:pPr>
-            <a:endParaRPr/>
+            <a:endParaRPr dirty="0"/>
           </a:p>
           <a:p>
             <a:pPr>
@@ -18436,6 +18452,7 @@
               </a:defRPr>
             </a:pPr>
             <a:r>
+              <a:rPr dirty="0"/>
               <a:t>Solution</a:t>
             </a:r>
           </a:p>
@@ -18451,6 +18468,7 @@
               </a:defRPr>
             </a:pPr>
             <a:r>
+              <a:rPr dirty="0"/>
               <a:t>• A 7-stage automated pipeline that transforms raw GitHub signals into structured,</a:t>
             </a:r>
           </a:p>
@@ -18466,6 +18484,7 @@
               </a:defRPr>
             </a:pPr>
             <a:r>
+              <a:rPr dirty="0"/>
               <a:t>  traceable, upload-ready Knowledge Base artifacts for ST ChatGPT.</a:t>
             </a:r>
           </a:p>
@@ -18480,7 +18499,7 @@
                 </a:solidFill>
               </a:defRPr>
             </a:pPr>
-            <a:endParaRPr/>
+            <a:endParaRPr dirty="0"/>
           </a:p>
           <a:p>
             <a:pPr>
@@ -18494,6 +18513,7 @@
               </a:defRPr>
             </a:pPr>
             <a:r>
+              <a:rPr dirty="0"/>
               <a:t>What You Will Learn</a:t>
             </a:r>
           </a:p>
@@ -18509,6 +18529,7 @@
               </a:defRPr>
             </a:pPr>
             <a:r>
+              <a:rPr dirty="0"/>
               <a:t>• How to configure, run, validate, and deploy the full pipeline for any STM32 series.</a:t>
             </a:r>
           </a:p>
@@ -18524,6 +18545,7 @@
               </a:defRPr>
             </a:pPr>
             <a:r>
+              <a:rPr dirty="0"/>
               <a:t>• How ALFRED Vision enriches images and PDF figures into searchable descriptions.</a:t>
             </a:r>
           </a:p>
@@ -18539,6 +18561,7 @@
               </a:defRPr>
             </a:pPr>
             <a:r>
+              <a:rPr dirty="0"/>
               <a:t>• How quality gates ensure production-grade reliability before each KB upload.</a:t>
             </a:r>
           </a:p>
@@ -26619,7 +26642,7 @@
         <p:spPr>
           <a:xfrm>
             <a:off x="548640" y="1188720"/>
-            <a:ext cx="8046720" cy="5029200"/>
+            <a:ext cx="8046720" cy="4062651"/>
           </a:xfrm>
           <a:prstGeom prst="rect">
             <a:avLst/>
@@ -26643,6 +26666,7 @@
               </a:defRPr>
             </a:pPr>
             <a:r>
+              <a:rPr dirty="0"/>
               <a:t>One sentence</a:t>
             </a:r>
           </a:p>
@@ -26658,6 +26682,7 @@
               </a:defRPr>
             </a:pPr>
             <a:r>
+              <a:rPr dirty="0"/>
               <a:t>• This pipeline turns scattered, heterogeneous GitHub data into AI-ready knowledge</a:t>
             </a:r>
           </a:p>
@@ -26673,6 +26698,7 @@
               </a:defRPr>
             </a:pPr>
             <a:r>
+              <a:rPr dirty="0"/>
               <a:t>  that makes STM32 support answers more relevant, traceable, and actionable.</a:t>
             </a:r>
           </a:p>
@@ -26687,7 +26713,7 @@
                 </a:solidFill>
               </a:defRPr>
             </a:pPr>
-            <a:endParaRPr/>
+            <a:endParaRPr dirty="0"/>
           </a:p>
           <a:p>
             <a:pPr>
@@ -26701,6 +26727,7 @@
               </a:defRPr>
             </a:pPr>
             <a:r>
+              <a:rPr dirty="0"/>
               <a:t>By the numbers</a:t>
             </a:r>
           </a:p>
@@ -26716,21 +26743,31 @@
               </a:defRPr>
             </a:pPr>
             <a:r>
-              <a:t>• 25 MCU series configured | 19 fully processed with PDF enrichment</a:t>
-            </a:r>
-          </a:p>
-          <a:p>
-            <a:pPr>
-              <a:spcBef>
-                <a:spcPts val="600"/>
-              </a:spcBef>
-              <a:defRPr sz="1400">
-                <a:solidFill>
-                  <a:srgbClr val="333333"/>
-                </a:solidFill>
-              </a:defRPr>
-            </a:pPr>
-            <a:r>
+              <a:rPr dirty="0"/>
+              <a:t>• 25 MCU series configured | </a:t>
+            </a:r>
+            <a:r>
+              <a:rPr lang="fr-FR" dirty="0"/>
+              <a:t>25</a:t>
+            </a:r>
+            <a:r>
+              <a:rPr dirty="0"/>
+              <a:t> fully processed with PDF enrichment</a:t>
+            </a:r>
+          </a:p>
+          <a:p>
+            <a:pPr>
+              <a:spcBef>
+                <a:spcPts val="600"/>
+              </a:spcBef>
+              <a:defRPr sz="1400">
+                <a:solidFill>
+                  <a:srgbClr val="333333"/>
+                </a:solidFill>
+              </a:defRPr>
+            </a:pPr>
+            <a:r>
+              <a:rPr dirty="0"/>
               <a:t>• 242 PDF figure descriptions generated via ALFRED Vision</a:t>
             </a:r>
           </a:p>
@@ -26746,6 +26783,7 @@
               </a:defRPr>
             </a:pPr>
             <a:r>
+              <a:rPr dirty="0"/>
               <a:t>• 4 artifact types per series: Issues, Files, Resolver Cases, Diagnostic Cards</a:t>
             </a:r>
           </a:p>
@@ -26761,6 +26799,7 @@
               </a:defRPr>
             </a:pPr>
             <a:r>
+              <a:rPr dirty="0"/>
               <a:t>• Quality Index: 94/100 on pilot series H7 with Diagnostic Cards</a:t>
             </a:r>
           </a:p>
@@ -26775,7 +26814,7 @@
                 </a:solidFill>
               </a:defRPr>
             </a:pPr>
-            <a:endParaRPr/>
+            <a:endParaRPr dirty="0"/>
           </a:p>
           <a:p>
             <a:pPr>
@@ -26789,6 +26828,7 @@
               </a:defRPr>
             </a:pPr>
             <a:r>
+              <a:rPr dirty="0"/>
               <a:t>Impact</a:t>
             </a:r>
           </a:p>
@@ -26804,6 +26844,7 @@
               </a:defRPr>
             </a:pPr>
             <a:r>
+              <a:rPr dirty="0"/>
               <a:t>• KB-first answers are +39% more relevant than generic LLM on STM32 technical questions.</a:t>
             </a:r>
           </a:p>
@@ -26819,6 +26860,7 @@
               </a:defRPr>
             </a:pPr>
             <a:r>
+              <a:rPr dirty="0"/>
               <a:t>• This is not just an ETL — it’s a quality chain for reliable AI-powered support.</a:t>
             </a:r>
           </a:p>
@@ -37702,6 +37744,7 @@
                         </a:defRPr>
                       </a:pPr>
                       <a:r>
+                        <a:rPr dirty="0"/>
                         <a:t>Invisible to RAG</a:t>
                       </a:r>
                     </a:p>
@@ -37721,6 +37764,7 @@
                         </a:defRPr>
                       </a:pPr>
                       <a:r>
+                        <a:rPr dirty="0"/>
                         <a:t>ALFRED descriptions make them searchable</a:t>
                       </a:r>
                     </a:p>
@@ -37913,6 +37957,7 @@
                         </a:defRPr>
                       </a:pPr>
                       <a:r>
+                        <a:rPr dirty="0"/>
                         <a:t>Schema validation + placeholder gates</a:t>
                       </a:r>
                     </a:p>
